--- a/Beszállítás kezelő program.pptx
+++ b/Beszállítás kezelő program.pptx
@@ -205,7 +205,7 @@
           <a:p>
             <a:fld id="{E90C0E9E-5900-4995-9FCF-287EE8D83D0B}" type="datetimeFigureOut">
               <a:rPr lang="hu-HU" smtClean="0"/>
-              <a:t>2025. 03. 14.</a:t>
+              <a:t>2025. 03. 17.</a:t>
             </a:fld>
             <a:endParaRPr lang="hu-HU"/>
           </a:p>
@@ -785,7 +785,7 @@
           <a:p>
             <a:fld id="{7DA38F49-B3E2-4BF0-BEC7-C30D34ABBB8D}" type="datetime1">
               <a:rPr lang="en-US" smtClean="0"/>
-              <a:t>3/14/2025</a:t>
+              <a:t>3/17/2025</a:t>
             </a:fld>
             <a:endParaRPr lang="en-US"/>
           </a:p>
@@ -1120,7 +1120,7 @@
           <a:p>
             <a:fld id="{7DA38F49-B3E2-4BF0-BEC7-C30D34ABBB8D}" type="datetime1">
               <a:rPr lang="en-US" smtClean="0"/>
-              <a:t>3/14/2025</a:t>
+              <a:t>3/17/2025</a:t>
             </a:fld>
             <a:endParaRPr lang="en-US"/>
           </a:p>
@@ -1399,7 +1399,7 @@
           <a:p>
             <a:fld id="{7DA38F49-B3E2-4BF0-BEC7-C30D34ABBB8D}" type="datetime1">
               <a:rPr lang="en-US" smtClean="0"/>
-              <a:t>3/14/2025</a:t>
+              <a:t>3/17/2025</a:t>
             </a:fld>
             <a:endParaRPr lang="en-US"/>
           </a:p>
@@ -1968,7 +1968,7 @@
           <a:p>
             <a:fld id="{7DA38F49-B3E2-4BF0-BEC7-C30D34ABBB8D}" type="datetime1">
               <a:rPr lang="en-US" smtClean="0"/>
-              <a:t>3/14/2025</a:t>
+              <a:t>3/17/2025</a:t>
             </a:fld>
             <a:endParaRPr lang="en-US"/>
           </a:p>
@@ -2247,7 +2247,7 @@
           <a:p>
             <a:fld id="{7DA38F49-B3E2-4BF0-BEC7-C30D34ABBB8D}" type="datetime1">
               <a:rPr lang="en-US" smtClean="0"/>
-              <a:t>3/14/2025</a:t>
+              <a:t>3/17/2025</a:t>
             </a:fld>
             <a:endParaRPr lang="en-US"/>
           </a:p>
@@ -2810,7 +2810,7 @@
           <a:p>
             <a:fld id="{7DA38F49-B3E2-4BF0-BEC7-C30D34ABBB8D}" type="datetime1">
               <a:rPr lang="en-US" smtClean="0"/>
-              <a:t>3/14/2025</a:t>
+              <a:t>3/17/2025</a:t>
             </a:fld>
             <a:endParaRPr lang="en-US"/>
           </a:p>
@@ -3138,7 +3138,7 @@
           <a:p>
             <a:fld id="{7DA38F49-B3E2-4BF0-BEC7-C30D34ABBB8D}" type="datetime1">
               <a:rPr lang="en-US" smtClean="0"/>
-              <a:t>3/14/2025</a:t>
+              <a:t>3/17/2025</a:t>
             </a:fld>
             <a:endParaRPr lang="en-US"/>
           </a:p>
@@ -3344,7 +3344,7 @@
           <a:p>
             <a:fld id="{7DA38F49-B3E2-4BF0-BEC7-C30D34ABBB8D}" type="datetime1">
               <a:rPr lang="en-US" smtClean="0"/>
-              <a:t>3/14/2025</a:t>
+              <a:t>3/17/2025</a:t>
             </a:fld>
             <a:endParaRPr lang="en-US"/>
           </a:p>
@@ -3555,7 +3555,7 @@
           <a:p>
             <a:fld id="{7DA38F49-B3E2-4BF0-BEC7-C30D34ABBB8D}" type="datetime1">
               <a:rPr lang="en-US" smtClean="0"/>
-              <a:t>3/14/2025</a:t>
+              <a:t>3/17/2025</a:t>
             </a:fld>
             <a:endParaRPr lang="en-US"/>
           </a:p>
@@ -3756,7 +3756,7 @@
           <a:p>
             <a:fld id="{7DA38F49-B3E2-4BF0-BEC7-C30D34ABBB8D}" type="datetime1">
               <a:rPr lang="en-US" smtClean="0"/>
-              <a:t>3/14/2025</a:t>
+              <a:t>3/17/2025</a:t>
             </a:fld>
             <a:endParaRPr lang="en-US"/>
           </a:p>
@@ -4033,7 +4033,7 @@
           <a:p>
             <a:fld id="{7DA38F49-B3E2-4BF0-BEC7-C30D34ABBB8D}" type="datetime1">
               <a:rPr lang="en-US" smtClean="0"/>
-              <a:t>3/14/2025</a:t>
+              <a:t>3/17/2025</a:t>
             </a:fld>
             <a:endParaRPr lang="en-US"/>
           </a:p>
@@ -4300,7 +4300,7 @@
           <a:p>
             <a:fld id="{7DA38F49-B3E2-4BF0-BEC7-C30D34ABBB8D}" type="datetime1">
               <a:rPr lang="en-US" smtClean="0"/>
-              <a:t>3/14/2025</a:t>
+              <a:t>3/17/2025</a:t>
             </a:fld>
             <a:endParaRPr lang="en-US"/>
           </a:p>
@@ -4675,7 +4675,7 @@
           <a:p>
             <a:fld id="{7DA38F49-B3E2-4BF0-BEC7-C30D34ABBB8D}" type="datetime1">
               <a:rPr lang="en-US" smtClean="0"/>
-              <a:t>3/14/2025</a:t>
+              <a:t>3/17/2025</a:t>
             </a:fld>
             <a:endParaRPr lang="en-US"/>
           </a:p>
@@ -4824,7 +4824,7 @@
           <a:p>
             <a:fld id="{7DA38F49-B3E2-4BF0-BEC7-C30D34ABBB8D}" type="datetime1">
               <a:rPr lang="en-US" smtClean="0"/>
-              <a:t>3/14/2025</a:t>
+              <a:t>3/17/2025</a:t>
             </a:fld>
             <a:endParaRPr lang="en-US"/>
           </a:p>
@@ -4950,7 +4950,7 @@
           <a:p>
             <a:fld id="{7DA38F49-B3E2-4BF0-BEC7-C30D34ABBB8D}" type="datetime1">
               <a:rPr lang="en-US" smtClean="0"/>
-              <a:t>3/14/2025</a:t>
+              <a:t>3/17/2025</a:t>
             </a:fld>
             <a:endParaRPr lang="en-US"/>
           </a:p>
@@ -5236,7 +5236,7 @@
           <a:p>
             <a:fld id="{7DA38F49-B3E2-4BF0-BEC7-C30D34ABBB8D}" type="datetime1">
               <a:rPr lang="en-US" smtClean="0"/>
-              <a:t>3/14/2025</a:t>
+              <a:t>3/17/2025</a:t>
             </a:fld>
             <a:endParaRPr lang="en-US"/>
           </a:p>
@@ -5561,7 +5561,7 @@
           <a:p>
             <a:fld id="{7DA38F49-B3E2-4BF0-BEC7-C30D34ABBB8D}" type="datetime1">
               <a:rPr lang="en-US" smtClean="0"/>
-              <a:t>3/14/2025</a:t>
+              <a:t>3/17/2025</a:t>
             </a:fld>
             <a:endParaRPr lang="en-US"/>
           </a:p>
@@ -5776,7 +5776,7 @@
           <a:p>
             <a:fld id="{7DA38F49-B3E2-4BF0-BEC7-C30D34ABBB8D}" type="datetime1">
               <a:rPr lang="en-US" smtClean="0"/>
-              <a:t>3/14/2025</a:t>
+              <a:t>3/17/2025</a:t>
             </a:fld>
             <a:endParaRPr lang="en-US"/>
           </a:p>
@@ -25920,8 +25920,8 @@
         </p:nvSpPr>
         <p:spPr>
           <a:xfrm>
-            <a:off x="685801" y="609600"/>
-            <a:ext cx="6143423" cy="1456267"/>
+            <a:off x="5266892" y="609600"/>
+            <a:ext cx="5550334" cy="1456267"/>
           </a:xfrm>
         </p:spPr>
         <p:txBody>
@@ -25950,6 +25950,140 @@
           </a:p>
         </p:txBody>
       </p:sp>
+      <p:pic>
+        <p:nvPicPr>
+          <p:cNvPr id="5" name="Kép 4" descr="A képen szöveg, képernyőkép, szoftver látható&#10;&#10;Előfordulhat, hogy a mesterséges intelligencia által létrehozott tartalom helytelen.">
+            <a:extLst>
+              <a:ext uri="{FF2B5EF4-FFF2-40B4-BE49-F238E27FC236}">
+                <a16:creationId xmlns:a16="http://schemas.microsoft.com/office/drawing/2014/main" id="{9C49E223-FDDD-B772-B2D9-C2019AB374EA}"/>
+              </a:ext>
+            </a:extLst>
+          </p:cNvPr>
+          <p:cNvPicPr>
+            <a:picLocks noChangeAspect="1"/>
+          </p:cNvPicPr>
+          <p:nvPr/>
+        </p:nvPicPr>
+        <p:blipFill>
+          <a:blip r:embed="rId3"/>
+          <a:srcRect r="17988" b="1"/>
+          <a:stretch/>
+        </p:blipFill>
+        <p:spPr>
+          <a:xfrm>
+            <a:off x="20" y="10"/>
+            <a:ext cx="4635988" cy="4267821"/>
+          </a:xfrm>
+          <a:prstGeom prst="rect">
+            <a:avLst/>
+          </a:prstGeom>
+        </p:spPr>
+      </p:pic>
+      <p:pic>
+        <p:nvPicPr>
+          <p:cNvPr id="7" name="Kép 6" descr="A képen szöveg, képernyőkép, szoftver, képernyő látható&#10;&#10;Előfordulhat, hogy a mesterséges intelligencia által létrehozott tartalom helytelen.">
+            <a:extLst>
+              <a:ext uri="{FF2B5EF4-FFF2-40B4-BE49-F238E27FC236}">
+                <a16:creationId xmlns:a16="http://schemas.microsoft.com/office/drawing/2014/main" id="{C88BFD4D-1C12-7579-F025-629C6BCA1642}"/>
+              </a:ext>
+            </a:extLst>
+          </p:cNvPr>
+          <p:cNvPicPr>
+            <a:picLocks noChangeAspect="1"/>
+          </p:cNvPicPr>
+          <p:nvPr/>
+        </p:nvPicPr>
+        <p:blipFill>
+          <a:blip r:embed="rId4"/>
+          <a:srcRect t="6457"/>
+          <a:stretch/>
+        </p:blipFill>
+        <p:spPr>
+          <a:xfrm>
+            <a:off x="20" y="4267831"/>
+            <a:ext cx="4635988" cy="2591143"/>
+          </a:xfrm>
+          <a:prstGeom prst="rect">
+            <a:avLst/>
+          </a:prstGeom>
+        </p:spPr>
+      </p:pic>
+      <p:cxnSp>
+        <p:nvCxnSpPr>
+          <p:cNvPr id="183" name="Straight Connector 178">
+            <a:extLst>
+              <a:ext uri="{FF2B5EF4-FFF2-40B4-BE49-F238E27FC236}">
+                <a16:creationId xmlns:a16="http://schemas.microsoft.com/office/drawing/2014/main" id="{138233E2-35F7-4FBD-B3CA-408DE29C70BD}"/>
+              </a:ext>
+              <a:ext uri="{C183D7F6-B498-43B3-948B-1728B52AA6E4}">
+                <adec:decorative xmlns:adec="http://schemas.microsoft.com/office/drawing/2017/decorative" val="1"/>
+              </a:ext>
+            </a:extLst>
+          </p:cNvPr>
+          <p:cNvCxnSpPr>
+            <a:cxnSpLocks noGrp="1" noRot="1" noChangeAspect="1" noMove="1" noResize="1" noEditPoints="1" noAdjustHandles="1" noChangeArrowheads="1" noChangeShapeType="1"/>
+          </p:cNvCxnSpPr>
+          <p:nvPr>
+            <p:extLst>
+              <p:ext uri="{386F3935-93C4-4BCD-93E2-E3B085C9AB24}">
+                <p16:designElem xmlns:p16="http://schemas.microsoft.com/office/powerpoint/2015/main" val="1"/>
+              </p:ext>
+            </p:extLst>
+          </p:nvPr>
+        </p:nvCxnSpPr>
+        <p:spPr>
+          <a:xfrm>
+            <a:off x="-1590" y="4265169"/>
+            <a:ext cx="4637598" cy="0"/>
+          </a:xfrm>
+          <a:prstGeom prst="line">
+            <a:avLst/>
+          </a:prstGeom>
+          <a:noFill/>
+          <a:ln w="50800" cap="sq" cmpd="dbl">
+            <a:gradFill flip="none" rotWithShape="1">
+              <a:gsLst>
+                <a:gs pos="0">
+                  <a:srgbClr val="FFFFFF"/>
+                </a:gs>
+                <a:gs pos="100000">
+                  <a:schemeClr val="tx1">
+                    <a:alpha val="0"/>
+                  </a:schemeClr>
+                </a:gs>
+              </a:gsLst>
+              <a:path path="circle">
+                <a:fillToRect l="50000" t="50000" r="50000" b="50000"/>
+              </a:path>
+              <a:tileRect/>
+            </a:gradFill>
+            <a:miter lim="800000"/>
+          </a:ln>
+          <a:effectLst>
+            <a:outerShdw blurRad="254000" algn="tl" rotWithShape="0">
+              <a:srgbClr val="000000">
+                <a:alpha val="43000"/>
+              </a:srgbClr>
+            </a:outerShdw>
+          </a:effectLst>
+        </p:spPr>
+        <p:style>
+          <a:lnRef idx="2">
+            <a:schemeClr val="accent1">
+              <a:shade val="50000"/>
+            </a:schemeClr>
+          </a:lnRef>
+          <a:fillRef idx="1">
+            <a:schemeClr val="accent1"/>
+          </a:fillRef>
+          <a:effectRef idx="0">
+            <a:schemeClr val="accent1"/>
+          </a:effectRef>
+          <a:fontRef idx="minor">
+            <a:schemeClr val="lt1"/>
+          </a:fontRef>
+        </p:style>
+      </p:cxnSp>
       <p:sp>
         <p:nvSpPr>
           <p:cNvPr id="3" name="Tartalom helye 2">
@@ -25968,8 +26102,8 @@
         </p:nvSpPr>
         <p:spPr>
           <a:xfrm>
-            <a:off x="685801" y="2142067"/>
-            <a:ext cx="6143423" cy="3649133"/>
+            <a:off x="5266892" y="2142067"/>
+            <a:ext cx="5550334" cy="3649133"/>
           </a:xfrm>
         </p:spPr>
         <p:txBody>
@@ -26291,89 +26425,21 @@
           </a:p>
         </p:txBody>
       </p:sp>
-      <p:pic>
-        <p:nvPicPr>
-          <p:cNvPr id="7" name="Kép 6" descr="A képen szöveg, képernyőkép, szoftver, képernyő látható&#10;&#10;Előfordulhat, hogy a mesterséges intelligencia által létrehozott tartalom helytelen.">
+      <p:cxnSp>
+        <p:nvCxnSpPr>
+          <p:cNvPr id="184" name="Straight Connector 180">
             <a:extLst>
               <a:ext uri="{FF2B5EF4-FFF2-40B4-BE49-F238E27FC236}">
-                <a16:creationId xmlns:a16="http://schemas.microsoft.com/office/drawing/2014/main" id="{C88BFD4D-1C12-7579-F025-629C6BCA1642}"/>
-              </a:ext>
-            </a:extLst>
-          </p:cNvPr>
-          <p:cNvPicPr>
-            <a:picLocks noChangeAspect="1"/>
-          </p:cNvPicPr>
-          <p:nvPr/>
-        </p:nvPicPr>
-        <p:blipFill>
-          <a:blip r:embed="rId3"/>
-          <a:srcRect l="5021" r="22348" b="-4"/>
-          <a:stretch/>
-        </p:blipFill>
-        <p:spPr>
-          <a:xfrm>
-            <a:off x="8888133" y="4144246"/>
-            <a:ext cx="3302966" cy="2717299"/>
-          </a:xfrm>
-          <a:custGeom>
-            <a:avLst/>
-            <a:gdLst/>
-            <a:ahLst/>
-            <a:cxnLst/>
-            <a:rect l="l" t="t" r="r" b="b"/>
-            <a:pathLst>
-              <a:path w="3039855" h="2500842">
-                <a:moveTo>
-                  <a:pt x="1663658" y="0"/>
-                </a:moveTo>
-                <a:cubicBezTo>
-                  <a:pt x="2180490" y="0"/>
-                  <a:pt x="2642278" y="235674"/>
-                  <a:pt x="2947417" y="605417"/>
-                </a:cubicBezTo>
-                <a:lnTo>
-                  <a:pt x="3039855" y="729032"/>
-                </a:lnTo>
-                <a:lnTo>
-                  <a:pt x="3039855" y="2500842"/>
-                </a:lnTo>
-                <a:lnTo>
-                  <a:pt x="226952" y="2500842"/>
-                </a:lnTo>
-                <a:lnTo>
-                  <a:pt x="155401" y="2366679"/>
-                </a:lnTo>
-                <a:cubicBezTo>
-                  <a:pt x="55691" y="2153127"/>
-                  <a:pt x="0" y="1914896"/>
-                  <a:pt x="0" y="1663658"/>
-                </a:cubicBezTo>
-                <a:cubicBezTo>
-                  <a:pt x="0" y="744845"/>
-                  <a:pt x="744845" y="0"/>
-                  <a:pt x="1663658" y="0"/>
-                </a:cubicBezTo>
-                <a:close/>
-              </a:path>
-            </a:pathLst>
-          </a:custGeom>
-        </p:spPr>
-      </p:pic>
-      <p:grpSp>
-        <p:nvGrpSpPr>
-          <p:cNvPr id="12" name="Group 11">
-            <a:extLst>
-              <a:ext uri="{FF2B5EF4-FFF2-40B4-BE49-F238E27FC236}">
-                <a16:creationId xmlns:a16="http://schemas.microsoft.com/office/drawing/2014/main" id="{8C07AEC9-9EAB-4BFE-9E8B-0A88819AF0BC}"/>
+                <a16:creationId xmlns:a16="http://schemas.microsoft.com/office/drawing/2014/main" id="{50BD578A-9FF0-4115-967D-E5AE77A1319A}"/>
               </a:ext>
               <a:ext uri="{C183D7F6-B498-43B3-948B-1728B52AA6E4}">
                 <adec:decorative xmlns:adec="http://schemas.microsoft.com/office/drawing/2017/decorative" val="1"/>
               </a:ext>
             </a:extLst>
           </p:cNvPr>
-          <p:cNvGrpSpPr>
-            <a:grpSpLocks noGrp="1" noUngrp="1" noRot="1" noChangeAspect="1" noMove="1" noResize="1"/>
-          </p:cNvGrpSpPr>
+          <p:cNvCxnSpPr>
+            <a:cxnSpLocks noGrp="1" noRot="1" noChangeAspect="1" noMove="1" noResize="1" noEditPoints="1" noAdjustHandles="1" noChangeArrowheads="1" noChangeShapeType="1"/>
+          </p:cNvCxnSpPr>
           <p:nvPr>
             <p:extLst>
               <p:ext uri="{386F3935-93C4-4BCD-93E2-E3B085C9AB24}">
@@ -26381,8665 +26447,60 @@
               </p:ext>
             </p:extLst>
           </p:nvPr>
-        </p:nvGrpSpPr>
-        <p:grpSpPr>
-          <a:xfrm rot="21267604">
-            <a:off x="8565602" y="3905595"/>
-            <a:ext cx="3639934" cy="3163289"/>
-            <a:chOff x="5281603" y="104899"/>
-            <a:chExt cx="6910397" cy="6005491"/>
-          </a:xfrm>
-        </p:grpSpPr>
-        <p:sp>
-          <p:nvSpPr>
-            <p:cNvPr id="13" name="Freeform 98">
-              <a:extLst>
-                <a:ext uri="{FF2B5EF4-FFF2-40B4-BE49-F238E27FC236}">
-                  <a16:creationId xmlns:a16="http://schemas.microsoft.com/office/drawing/2014/main" id="{F1282140-09D2-4C25-B13E-800140960016}"/>
-                </a:ext>
-                <a:ext uri="{C183D7F6-B498-43B3-948B-1728B52AA6E4}">
-                  <adec:decorative xmlns:adec="http://schemas.microsoft.com/office/drawing/2017/decorative" val="1"/>
-                </a:ext>
-              </a:extLst>
-            </p:cNvPr>
-            <p:cNvSpPr/>
-            <p:nvPr>
-              <p:extLst>
-                <p:ext uri="{386F3935-93C4-4BCD-93E2-E3B085C9AB24}">
-                  <p16:designElem xmlns:p16="http://schemas.microsoft.com/office/powerpoint/2015/main" val="1"/>
-                </p:ext>
-              </p:extLst>
-            </p:nvPr>
-          </p:nvSpPr>
-          <p:spPr>
-            <a:xfrm>
-              <a:off x="5281603" y="104899"/>
-              <a:ext cx="6896713" cy="6005491"/>
-            </a:xfrm>
-            <a:custGeom>
-              <a:avLst/>
-              <a:gdLst>
-                <a:gd name="connsiteX0" fmla="*/ 3912717 w 6896713"/>
-                <a:gd name="connsiteY0" fmla="*/ 0 h 6005491"/>
-                <a:gd name="connsiteX1" fmla="*/ 6679426 w 6896713"/>
-                <a:gd name="connsiteY1" fmla="*/ 1146008 h 6005491"/>
-                <a:gd name="connsiteX2" fmla="*/ 6896713 w 6896713"/>
-                <a:gd name="connsiteY2" fmla="*/ 1385085 h 6005491"/>
-                <a:gd name="connsiteX3" fmla="*/ 6896713 w 6896713"/>
-                <a:gd name="connsiteY3" fmla="*/ 1431256 h 6005491"/>
-                <a:gd name="connsiteX4" fmla="*/ 6657442 w 6896713"/>
-                <a:gd name="connsiteY4" fmla="*/ 1167992 h 6005491"/>
-                <a:gd name="connsiteX5" fmla="*/ 3912717 w 6896713"/>
-                <a:gd name="connsiteY5" fmla="*/ 31089 h 6005491"/>
-                <a:gd name="connsiteX6" fmla="*/ 31089 w 6896713"/>
-                <a:gd name="connsiteY6" fmla="*/ 3912717 h 6005491"/>
-                <a:gd name="connsiteX7" fmla="*/ 593046 w 6896713"/>
-                <a:gd name="connsiteY7" fmla="*/ 5925483 h 6005491"/>
-                <a:gd name="connsiteX8" fmla="*/ 633874 w 6896713"/>
-                <a:gd name="connsiteY8" fmla="*/ 5989169 h 6005491"/>
-                <a:gd name="connsiteX9" fmla="*/ 607415 w 6896713"/>
-                <a:gd name="connsiteY9" fmla="*/ 6005491 h 6005491"/>
-                <a:gd name="connsiteX10" fmla="*/ 566458 w 6896713"/>
-                <a:gd name="connsiteY10" fmla="*/ 5941603 h 6005491"/>
-                <a:gd name="connsiteX11" fmla="*/ 0 w 6896713"/>
-                <a:gd name="connsiteY11" fmla="*/ 3912717 h 6005491"/>
-                <a:gd name="connsiteX12" fmla="*/ 3912717 w 6896713"/>
-                <a:gd name="connsiteY12" fmla="*/ 0 h 6005491"/>
-              </a:gdLst>
-              <a:ahLst/>
-              <a:cxnLst>
-                <a:cxn ang="0">
-                  <a:pos x="connsiteX0" y="connsiteY0"/>
-                </a:cxn>
-                <a:cxn ang="0">
-                  <a:pos x="connsiteX1" y="connsiteY1"/>
-                </a:cxn>
-                <a:cxn ang="0">
-                  <a:pos x="connsiteX2" y="connsiteY2"/>
-                </a:cxn>
-                <a:cxn ang="0">
-                  <a:pos x="connsiteX3" y="connsiteY3"/>
-                </a:cxn>
-                <a:cxn ang="0">
-                  <a:pos x="connsiteX4" y="connsiteY4"/>
-                </a:cxn>
-                <a:cxn ang="0">
-                  <a:pos x="connsiteX5" y="connsiteY5"/>
-                </a:cxn>
-                <a:cxn ang="0">
-                  <a:pos x="connsiteX6" y="connsiteY6"/>
-                </a:cxn>
-                <a:cxn ang="0">
-                  <a:pos x="connsiteX7" y="connsiteY7"/>
-                </a:cxn>
-                <a:cxn ang="0">
-                  <a:pos x="connsiteX8" y="connsiteY8"/>
-                </a:cxn>
-                <a:cxn ang="0">
-                  <a:pos x="connsiteX9" y="connsiteY9"/>
-                </a:cxn>
-                <a:cxn ang="0">
-                  <a:pos x="connsiteX10" y="connsiteY10"/>
-                </a:cxn>
-                <a:cxn ang="0">
-                  <a:pos x="connsiteX11" y="connsiteY11"/>
-                </a:cxn>
-                <a:cxn ang="0">
-                  <a:pos x="connsiteX12" y="connsiteY12"/>
-                </a:cxn>
-              </a:cxnLst>
-              <a:rect l="l" t="t" r="r" b="b"/>
-              <a:pathLst>
-                <a:path w="6896713" h="6005491">
-                  <a:moveTo>
-                    <a:pt x="3912717" y="0"/>
-                  </a:moveTo>
-                  <a:cubicBezTo>
-                    <a:pt x="4993184" y="0"/>
-                    <a:pt x="5971363" y="437946"/>
-                    <a:pt x="6679426" y="1146008"/>
-                  </a:cubicBezTo>
-                  <a:lnTo>
-                    <a:pt x="6896713" y="1385085"/>
-                  </a:lnTo>
-                  <a:lnTo>
-                    <a:pt x="6896713" y="1431256"/>
-                  </a:lnTo>
-                  <a:lnTo>
-                    <a:pt x="6657442" y="1167992"/>
-                  </a:lnTo>
-                  <a:cubicBezTo>
-                    <a:pt x="5955006" y="465555"/>
-                    <a:pt x="4984599" y="31089"/>
-                    <a:pt x="3912717" y="31089"/>
-                  </a:cubicBezTo>
-                  <a:cubicBezTo>
-                    <a:pt x="1768953" y="31089"/>
-                    <a:pt x="31089" y="1768953"/>
-                    <a:pt x="31089" y="3912717"/>
-                  </a:cubicBezTo>
-                  <a:cubicBezTo>
-                    <a:pt x="31089" y="4649636"/>
-                    <a:pt x="236442" y="5338592"/>
-                    <a:pt x="593046" y="5925483"/>
-                  </a:cubicBezTo>
-                  <a:lnTo>
-                    <a:pt x="633874" y="5989169"/>
-                  </a:lnTo>
-                  <a:lnTo>
-                    <a:pt x="607415" y="6005491"/>
-                  </a:lnTo>
-                  <a:lnTo>
-                    <a:pt x="566458" y="5941603"/>
-                  </a:lnTo>
-                  <a:cubicBezTo>
-                    <a:pt x="206998" y="5350013"/>
-                    <a:pt x="0" y="4655538"/>
-                    <a:pt x="0" y="3912717"/>
-                  </a:cubicBezTo>
-                  <a:cubicBezTo>
-                    <a:pt x="0" y="1751783"/>
-                    <a:pt x="1751783" y="0"/>
-                    <a:pt x="3912717" y="0"/>
-                  </a:cubicBezTo>
-                  <a:close/>
-                </a:path>
-              </a:pathLst>
-            </a:custGeom>
-            <a:solidFill>
-              <a:srgbClr val="FFFFFF">
-                <a:alpha val="15000"/>
-              </a:srgbClr>
-            </a:solidFill>
-            <a:ln>
-              <a:noFill/>
-            </a:ln>
-          </p:spPr>
-          <p:style>
-            <a:lnRef idx="2">
-              <a:schemeClr val="accent1">
-                <a:shade val="50000"/>
-              </a:schemeClr>
-            </a:lnRef>
-            <a:fillRef idx="1">
-              <a:schemeClr val="accent1"/>
-            </a:fillRef>
-            <a:effectRef idx="0">
-              <a:schemeClr val="accent1"/>
-            </a:effectRef>
-            <a:fontRef idx="minor">
-              <a:schemeClr val="lt1"/>
-            </a:fontRef>
-          </p:style>
-          <p:txBody>
-            <a:bodyPr rtlCol="0" anchor="ctr"/>
-            <a:lstStyle/>
-            <a:p>
-              <a:pPr algn="ctr"/>
-              <a:endParaRPr lang="en-US"/>
-            </a:p>
-          </p:txBody>
-        </p:sp>
-        <p:grpSp>
-          <p:nvGrpSpPr>
-            <p:cNvPr id="14" name="Group 13">
-              <a:extLst>
-                <a:ext uri="{FF2B5EF4-FFF2-40B4-BE49-F238E27FC236}">
-                  <a16:creationId xmlns:a16="http://schemas.microsoft.com/office/drawing/2014/main" id="{01DDE92A-A4E7-4CE8-AE27-5F761E304384}"/>
-                </a:ext>
-                <a:ext uri="{C183D7F6-B498-43B3-948B-1728B52AA6E4}">
-                  <adec:decorative xmlns:adec="http://schemas.microsoft.com/office/drawing/2017/decorative" val="1"/>
-                </a:ext>
-              </a:extLst>
-            </p:cNvPr>
-            <p:cNvGrpSpPr/>
-            <p:nvPr>
-              <p:extLst>
-                <p:ext uri="{386F3935-93C4-4BCD-93E2-E3B085C9AB24}">
-                  <p16:designElem xmlns:p16="http://schemas.microsoft.com/office/powerpoint/2015/main" val="1"/>
-                </p:ext>
-              </p:extLst>
-            </p:nvPr>
-          </p:nvGrpSpPr>
-          <p:grpSpPr>
-            <a:xfrm>
-              <a:off x="5516018" y="331504"/>
-              <a:ext cx="6675982" cy="5235326"/>
-              <a:chOff x="5516018" y="331504"/>
-              <a:chExt cx="6675982" cy="5235326"/>
-            </a:xfrm>
-          </p:grpSpPr>
-          <p:cxnSp>
-            <p:nvCxnSpPr>
-              <p:cNvPr id="15" name="Straight Connector 14">
-                <a:extLst>
-                  <a:ext uri="{FF2B5EF4-FFF2-40B4-BE49-F238E27FC236}">
-                    <a16:creationId xmlns:a16="http://schemas.microsoft.com/office/drawing/2014/main" id="{3320B63E-D7BD-43AC-84C5-440D2577B593}"/>
-                  </a:ext>
-                  <a:ext uri="{C183D7F6-B498-43B3-948B-1728B52AA6E4}">
-                    <adec:decorative xmlns:adec="http://schemas.microsoft.com/office/drawing/2017/decorative" val="1"/>
-                  </a:ext>
-                </a:extLst>
-              </p:cNvPr>
-              <p:cNvCxnSpPr/>
-              <p:nvPr>
-                <p:extLst>
-                  <p:ext uri="{386F3935-93C4-4BCD-93E2-E3B085C9AB24}">
-                    <p16:designElem xmlns:p16="http://schemas.microsoft.com/office/powerpoint/2015/main" val="1"/>
-                  </p:ext>
-                </p:extLst>
-              </p:nvPr>
-            </p:nvCxnSpPr>
-            <p:spPr>
-              <a:xfrm flipH="1">
-                <a:off x="9266830" y="331504"/>
-                <a:ext cx="3394" cy="182880"/>
-              </a:xfrm>
-              <a:prstGeom prst="line">
-                <a:avLst/>
-              </a:prstGeom>
-              <a:ln>
-                <a:solidFill>
-                  <a:srgbClr val="FFFFFF">
-                    <a:alpha val="30196"/>
-                  </a:srgbClr>
-                </a:solidFill>
-              </a:ln>
-            </p:spPr>
-            <p:style>
-              <a:lnRef idx="1">
-                <a:schemeClr val="accent1"/>
-              </a:lnRef>
-              <a:fillRef idx="0">
-                <a:schemeClr val="accent1"/>
-              </a:fillRef>
-              <a:effectRef idx="0">
-                <a:schemeClr val="accent1"/>
-              </a:effectRef>
-              <a:fontRef idx="minor">
-                <a:schemeClr val="tx1"/>
-              </a:fontRef>
-            </p:style>
-          </p:cxnSp>
-          <p:cxnSp>
-            <p:nvCxnSpPr>
-              <p:cNvPr id="16" name="Straight Connector 15">
-                <a:extLst>
-                  <a:ext uri="{FF2B5EF4-FFF2-40B4-BE49-F238E27FC236}">
-                    <a16:creationId xmlns:a16="http://schemas.microsoft.com/office/drawing/2014/main" id="{D1857C07-B4DF-4B6F-B782-859264D7D859}"/>
-                  </a:ext>
-                  <a:ext uri="{C183D7F6-B498-43B3-948B-1728B52AA6E4}">
-                    <adec:decorative xmlns:adec="http://schemas.microsoft.com/office/drawing/2017/decorative" val="1"/>
-                  </a:ext>
-                </a:extLst>
-              </p:cNvPr>
-              <p:cNvCxnSpPr/>
-              <p:nvPr>
-                <p:extLst>
-                  <p:ext uri="{386F3935-93C4-4BCD-93E2-E3B085C9AB24}">
-                    <p16:designElem xmlns:p16="http://schemas.microsoft.com/office/powerpoint/2015/main" val="1"/>
-                  </p:ext>
-                </p:extLst>
-              </p:nvPr>
-            </p:nvCxnSpPr>
-            <p:spPr>
-              <a:xfrm rot="120000" flipH="1">
-                <a:off x="9408861" y="338328"/>
-                <a:ext cx="3394" cy="182880"/>
-              </a:xfrm>
-              <a:prstGeom prst="line">
-                <a:avLst/>
-              </a:prstGeom>
-              <a:ln>
-                <a:solidFill>
-                  <a:srgbClr val="FFFFFF">
-                    <a:alpha val="30196"/>
-                  </a:srgbClr>
-                </a:solidFill>
-              </a:ln>
-            </p:spPr>
-            <p:style>
-              <a:lnRef idx="1">
-                <a:schemeClr val="accent1"/>
-              </a:lnRef>
-              <a:fillRef idx="0">
-                <a:schemeClr val="accent1"/>
-              </a:fillRef>
-              <a:effectRef idx="0">
-                <a:schemeClr val="accent1"/>
-              </a:effectRef>
-              <a:fontRef idx="minor">
-                <a:schemeClr val="tx1"/>
-              </a:fontRef>
-            </p:style>
-          </p:cxnSp>
-          <p:cxnSp>
-            <p:nvCxnSpPr>
-              <p:cNvPr id="17" name="Straight Connector 16">
-                <a:extLst>
-                  <a:ext uri="{FF2B5EF4-FFF2-40B4-BE49-F238E27FC236}">
-                    <a16:creationId xmlns:a16="http://schemas.microsoft.com/office/drawing/2014/main" id="{DEF0D51B-B72F-4918-AAB1-A6BE4B82A79F}"/>
-                  </a:ext>
-                  <a:ext uri="{C183D7F6-B498-43B3-948B-1728B52AA6E4}">
-                    <adec:decorative xmlns:adec="http://schemas.microsoft.com/office/drawing/2017/decorative" val="1"/>
-                  </a:ext>
-                </a:extLst>
-              </p:cNvPr>
-              <p:cNvCxnSpPr/>
-              <p:nvPr>
-                <p:extLst>
-                  <p:ext uri="{386F3935-93C4-4BCD-93E2-E3B085C9AB24}">
-                    <p16:designElem xmlns:p16="http://schemas.microsoft.com/office/powerpoint/2015/main" val="1"/>
-                  </p:ext>
-                </p:extLst>
-              </p:nvPr>
-            </p:nvCxnSpPr>
-            <p:spPr>
-              <a:xfrm rot="240000" flipH="1">
-                <a:off x="9551700" y="347636"/>
-                <a:ext cx="3394" cy="182880"/>
-              </a:xfrm>
-              <a:prstGeom prst="line">
-                <a:avLst/>
-              </a:prstGeom>
-              <a:ln>
-                <a:solidFill>
-                  <a:srgbClr val="FFFFFF">
-                    <a:alpha val="30196"/>
-                  </a:srgbClr>
-                </a:solidFill>
-              </a:ln>
-            </p:spPr>
-            <p:style>
-              <a:lnRef idx="1">
-                <a:schemeClr val="accent1"/>
-              </a:lnRef>
-              <a:fillRef idx="0">
-                <a:schemeClr val="accent1"/>
-              </a:fillRef>
-              <a:effectRef idx="0">
-                <a:schemeClr val="accent1"/>
-              </a:effectRef>
-              <a:fontRef idx="minor">
-                <a:schemeClr val="tx1"/>
-              </a:fontRef>
-            </p:style>
-          </p:cxnSp>
-          <p:cxnSp>
-            <p:nvCxnSpPr>
-              <p:cNvPr id="18" name="Straight Connector 17">
-                <a:extLst>
-                  <a:ext uri="{FF2B5EF4-FFF2-40B4-BE49-F238E27FC236}">
-                    <a16:creationId xmlns:a16="http://schemas.microsoft.com/office/drawing/2014/main" id="{2E229AF8-7F20-4524-8FA2-E3E29BF211F6}"/>
-                  </a:ext>
-                  <a:ext uri="{C183D7F6-B498-43B3-948B-1728B52AA6E4}">
-                    <adec:decorative xmlns:adec="http://schemas.microsoft.com/office/drawing/2017/decorative" val="1"/>
-                  </a:ext>
-                </a:extLst>
-              </p:cNvPr>
-              <p:cNvCxnSpPr/>
-              <p:nvPr>
-                <p:extLst>
-                  <p:ext uri="{386F3935-93C4-4BCD-93E2-E3B085C9AB24}">
-                    <p16:designElem xmlns:p16="http://schemas.microsoft.com/office/powerpoint/2015/main" val="1"/>
-                  </p:ext>
-                </p:extLst>
-              </p:nvPr>
-            </p:nvCxnSpPr>
-            <p:spPr>
-              <a:xfrm rot="360000" flipH="1">
-                <a:off x="9688748" y="368088"/>
-                <a:ext cx="3394" cy="182880"/>
-              </a:xfrm>
-              <a:prstGeom prst="line">
-                <a:avLst/>
-              </a:prstGeom>
-              <a:ln>
-                <a:solidFill>
-                  <a:srgbClr val="FFFFFF">
-                    <a:alpha val="30196"/>
-                  </a:srgbClr>
-                </a:solidFill>
-              </a:ln>
-            </p:spPr>
-            <p:style>
-              <a:lnRef idx="1">
-                <a:schemeClr val="accent1"/>
-              </a:lnRef>
-              <a:fillRef idx="0">
-                <a:schemeClr val="accent1"/>
-              </a:fillRef>
-              <a:effectRef idx="0">
-                <a:schemeClr val="accent1"/>
-              </a:effectRef>
-              <a:fontRef idx="minor">
-                <a:schemeClr val="tx1"/>
-              </a:fontRef>
-            </p:style>
-          </p:cxnSp>
-          <p:cxnSp>
-            <p:nvCxnSpPr>
-              <p:cNvPr id="19" name="Straight Connector 18">
-                <a:extLst>
-                  <a:ext uri="{FF2B5EF4-FFF2-40B4-BE49-F238E27FC236}">
-                    <a16:creationId xmlns:a16="http://schemas.microsoft.com/office/drawing/2014/main" id="{5C87E978-EC26-4EA5-9DFE-B84C4C2B9CDA}"/>
-                  </a:ext>
-                  <a:ext uri="{C183D7F6-B498-43B3-948B-1728B52AA6E4}">
-                    <adec:decorative xmlns:adec="http://schemas.microsoft.com/office/drawing/2017/decorative" val="1"/>
-                  </a:ext>
-                </a:extLst>
-              </p:cNvPr>
-              <p:cNvCxnSpPr/>
-              <p:nvPr>
-                <p:extLst>
-                  <p:ext uri="{386F3935-93C4-4BCD-93E2-E3B085C9AB24}">
-                    <p16:designElem xmlns:p16="http://schemas.microsoft.com/office/powerpoint/2015/main" val="1"/>
-                  </p:ext>
-                </p:extLst>
-              </p:nvPr>
-            </p:nvCxnSpPr>
-            <p:spPr>
-              <a:xfrm rot="540000" flipH="1">
-                <a:off x="9824866" y="389224"/>
-                <a:ext cx="3394" cy="182880"/>
-              </a:xfrm>
-              <a:prstGeom prst="line">
-                <a:avLst/>
-              </a:prstGeom>
-              <a:ln>
-                <a:solidFill>
-                  <a:srgbClr val="FFFFFF">
-                    <a:alpha val="30196"/>
-                  </a:srgbClr>
-                </a:solidFill>
-              </a:ln>
-            </p:spPr>
-            <p:style>
-              <a:lnRef idx="1">
-                <a:schemeClr val="accent1"/>
-              </a:lnRef>
-              <a:fillRef idx="0">
-                <a:schemeClr val="accent1"/>
-              </a:fillRef>
-              <a:effectRef idx="0">
-                <a:schemeClr val="accent1"/>
-              </a:effectRef>
-              <a:fontRef idx="minor">
-                <a:schemeClr val="tx1"/>
-              </a:fontRef>
-            </p:style>
-          </p:cxnSp>
-          <p:cxnSp>
-            <p:nvCxnSpPr>
-              <p:cNvPr id="20" name="Straight Connector 19">
-                <a:extLst>
-                  <a:ext uri="{FF2B5EF4-FFF2-40B4-BE49-F238E27FC236}">
-                    <a16:creationId xmlns:a16="http://schemas.microsoft.com/office/drawing/2014/main" id="{C4115A8A-0175-495F-B7DA-C59F0D599172}"/>
-                  </a:ext>
-                  <a:ext uri="{C183D7F6-B498-43B3-948B-1728B52AA6E4}">
-                    <adec:decorative xmlns:adec="http://schemas.microsoft.com/office/drawing/2017/decorative" val="1"/>
-                  </a:ext>
-                </a:extLst>
-              </p:cNvPr>
-              <p:cNvCxnSpPr/>
-              <p:nvPr>
-                <p:extLst>
-                  <p:ext uri="{386F3935-93C4-4BCD-93E2-E3B085C9AB24}">
-                    <p16:designElem xmlns:p16="http://schemas.microsoft.com/office/powerpoint/2015/main" val="1"/>
-                  </p:ext>
-                </p:extLst>
-              </p:nvPr>
-            </p:nvCxnSpPr>
-            <p:spPr>
-              <a:xfrm rot="660000" flipH="1">
-                <a:off x="9966867" y="417549"/>
-                <a:ext cx="3394" cy="182880"/>
-              </a:xfrm>
-              <a:prstGeom prst="line">
-                <a:avLst/>
-              </a:prstGeom>
-              <a:ln>
-                <a:solidFill>
-                  <a:srgbClr val="FFFFFF">
-                    <a:alpha val="30196"/>
-                  </a:srgbClr>
-                </a:solidFill>
-              </a:ln>
-            </p:spPr>
-            <p:style>
-              <a:lnRef idx="1">
-                <a:schemeClr val="accent1"/>
-              </a:lnRef>
-              <a:fillRef idx="0">
-                <a:schemeClr val="accent1"/>
-              </a:fillRef>
-              <a:effectRef idx="0">
-                <a:schemeClr val="accent1"/>
-              </a:effectRef>
-              <a:fontRef idx="minor">
-                <a:schemeClr val="tx1"/>
-              </a:fontRef>
-            </p:style>
-          </p:cxnSp>
-          <p:cxnSp>
-            <p:nvCxnSpPr>
-              <p:cNvPr id="21" name="Straight Connector 20">
-                <a:extLst>
-                  <a:ext uri="{FF2B5EF4-FFF2-40B4-BE49-F238E27FC236}">
-                    <a16:creationId xmlns:a16="http://schemas.microsoft.com/office/drawing/2014/main" id="{17B44B3D-D148-4FD7-B8CD-5FF3155CFBED}"/>
-                  </a:ext>
-                  <a:ext uri="{C183D7F6-B498-43B3-948B-1728B52AA6E4}">
-                    <adec:decorative xmlns:adec="http://schemas.microsoft.com/office/drawing/2017/decorative" val="1"/>
-                  </a:ext>
-                </a:extLst>
-              </p:cNvPr>
-              <p:cNvCxnSpPr/>
-              <p:nvPr>
-                <p:extLst>
-                  <p:ext uri="{386F3935-93C4-4BCD-93E2-E3B085C9AB24}">
-                    <p16:designElem xmlns:p16="http://schemas.microsoft.com/office/powerpoint/2015/main" val="1"/>
-                  </p:ext>
-                </p:extLst>
-              </p:nvPr>
-            </p:nvCxnSpPr>
-            <p:spPr>
-              <a:xfrm rot="780000" flipH="1">
-                <a:off x="10104425" y="445874"/>
-                <a:ext cx="3394" cy="182880"/>
-              </a:xfrm>
-              <a:prstGeom prst="line">
-                <a:avLst/>
-              </a:prstGeom>
-              <a:ln>
-                <a:solidFill>
-                  <a:srgbClr val="FFFFFF">
-                    <a:alpha val="30196"/>
-                  </a:srgbClr>
-                </a:solidFill>
-              </a:ln>
-            </p:spPr>
-            <p:style>
-              <a:lnRef idx="1">
-                <a:schemeClr val="accent1"/>
-              </a:lnRef>
-              <a:fillRef idx="0">
-                <a:schemeClr val="accent1"/>
-              </a:fillRef>
-              <a:effectRef idx="0">
-                <a:schemeClr val="accent1"/>
-              </a:effectRef>
-              <a:fontRef idx="minor">
-                <a:schemeClr val="tx1"/>
-              </a:fontRef>
-            </p:style>
-          </p:cxnSp>
-          <p:cxnSp>
-            <p:nvCxnSpPr>
-              <p:cNvPr id="22" name="Straight Connector 21">
-                <a:extLst>
-                  <a:ext uri="{FF2B5EF4-FFF2-40B4-BE49-F238E27FC236}">
-                    <a16:creationId xmlns:a16="http://schemas.microsoft.com/office/drawing/2014/main" id="{053928E8-F407-44BF-9A91-041E649AFC63}"/>
-                  </a:ext>
-                  <a:ext uri="{C183D7F6-B498-43B3-948B-1728B52AA6E4}">
-                    <adec:decorative xmlns:adec="http://schemas.microsoft.com/office/drawing/2017/decorative" val="1"/>
-                  </a:ext>
-                </a:extLst>
-              </p:cNvPr>
-              <p:cNvCxnSpPr/>
-              <p:nvPr>
-                <p:extLst>
-                  <p:ext uri="{386F3935-93C4-4BCD-93E2-E3B085C9AB24}">
-                    <p16:designElem xmlns:p16="http://schemas.microsoft.com/office/powerpoint/2015/main" val="1"/>
-                  </p:ext>
-                </p:extLst>
-              </p:nvPr>
-            </p:nvCxnSpPr>
-            <p:spPr>
-              <a:xfrm rot="900000" flipH="1">
-                <a:off x="10240513" y="479483"/>
-                <a:ext cx="3394" cy="182880"/>
-              </a:xfrm>
-              <a:prstGeom prst="line">
-                <a:avLst/>
-              </a:prstGeom>
-              <a:ln>
-                <a:solidFill>
-                  <a:srgbClr val="FFFFFF">
-                    <a:alpha val="30196"/>
-                  </a:srgbClr>
-                </a:solidFill>
-              </a:ln>
-            </p:spPr>
-            <p:style>
-              <a:lnRef idx="1">
-                <a:schemeClr val="accent1"/>
-              </a:lnRef>
-              <a:fillRef idx="0">
-                <a:schemeClr val="accent1"/>
-              </a:fillRef>
-              <a:effectRef idx="0">
-                <a:schemeClr val="accent1"/>
-              </a:effectRef>
-              <a:fontRef idx="minor">
-                <a:schemeClr val="tx1"/>
-              </a:fontRef>
-            </p:style>
-          </p:cxnSp>
-          <p:cxnSp>
-            <p:nvCxnSpPr>
-              <p:cNvPr id="23" name="Straight Connector 22">
-                <a:extLst>
-                  <a:ext uri="{FF2B5EF4-FFF2-40B4-BE49-F238E27FC236}">
-                    <a16:creationId xmlns:a16="http://schemas.microsoft.com/office/drawing/2014/main" id="{C61F5A62-82DB-4B66-BD14-C92BCF8D326E}"/>
-                  </a:ext>
-                  <a:ext uri="{C183D7F6-B498-43B3-948B-1728B52AA6E4}">
-                    <adec:decorative xmlns:adec="http://schemas.microsoft.com/office/drawing/2017/decorative" val="1"/>
-                  </a:ext>
-                </a:extLst>
-              </p:cNvPr>
-              <p:cNvCxnSpPr/>
-              <p:nvPr>
-                <p:extLst>
-                  <p:ext uri="{386F3935-93C4-4BCD-93E2-E3B085C9AB24}">
-                    <p16:designElem xmlns:p16="http://schemas.microsoft.com/office/powerpoint/2015/main" val="1"/>
-                  </p:ext>
-                </p:extLst>
-              </p:nvPr>
-            </p:nvCxnSpPr>
-            <p:spPr>
-              <a:xfrm rot="1080000" flipH="1">
-                <a:off x="10373882" y="524355"/>
-                <a:ext cx="3394" cy="182880"/>
-              </a:xfrm>
-              <a:prstGeom prst="line">
-                <a:avLst/>
-              </a:prstGeom>
-              <a:ln>
-                <a:solidFill>
-                  <a:srgbClr val="FFFFFF">
-                    <a:alpha val="30196"/>
-                  </a:srgbClr>
-                </a:solidFill>
-              </a:ln>
-            </p:spPr>
-            <p:style>
-              <a:lnRef idx="1">
-                <a:schemeClr val="accent1"/>
-              </a:lnRef>
-              <a:fillRef idx="0">
-                <a:schemeClr val="accent1"/>
-              </a:fillRef>
-              <a:effectRef idx="0">
-                <a:schemeClr val="accent1"/>
-              </a:effectRef>
-              <a:fontRef idx="minor">
-                <a:schemeClr val="tx1"/>
-              </a:fontRef>
-            </p:style>
-          </p:cxnSp>
-          <p:cxnSp>
-            <p:nvCxnSpPr>
-              <p:cNvPr id="24" name="Straight Connector 23">
-                <a:extLst>
-                  <a:ext uri="{FF2B5EF4-FFF2-40B4-BE49-F238E27FC236}">
-                    <a16:creationId xmlns:a16="http://schemas.microsoft.com/office/drawing/2014/main" id="{FCBCB962-7F30-4DBF-AB1F-C53DEACDC0EE}"/>
-                  </a:ext>
-                  <a:ext uri="{C183D7F6-B498-43B3-948B-1728B52AA6E4}">
-                    <adec:decorative xmlns:adec="http://schemas.microsoft.com/office/drawing/2017/decorative" val="1"/>
-                  </a:ext>
-                </a:extLst>
-              </p:cNvPr>
-              <p:cNvCxnSpPr/>
-              <p:nvPr>
-                <p:extLst>
-                  <p:ext uri="{386F3935-93C4-4BCD-93E2-E3B085C9AB24}">
-                    <p16:designElem xmlns:p16="http://schemas.microsoft.com/office/powerpoint/2015/main" val="1"/>
-                  </p:ext>
-                </p:extLst>
-              </p:nvPr>
-            </p:nvCxnSpPr>
-            <p:spPr>
-              <a:xfrm rot="1200000" flipH="1">
-                <a:off x="10505632" y="570628"/>
-                <a:ext cx="3394" cy="182880"/>
-              </a:xfrm>
-              <a:prstGeom prst="line">
-                <a:avLst/>
-              </a:prstGeom>
-              <a:ln>
-                <a:solidFill>
-                  <a:srgbClr val="FFFFFF">
-                    <a:alpha val="30196"/>
-                  </a:srgbClr>
-                </a:solidFill>
-              </a:ln>
-            </p:spPr>
-            <p:style>
-              <a:lnRef idx="1">
-                <a:schemeClr val="accent1"/>
-              </a:lnRef>
-              <a:fillRef idx="0">
-                <a:schemeClr val="accent1"/>
-              </a:fillRef>
-              <a:effectRef idx="0">
-                <a:schemeClr val="accent1"/>
-              </a:effectRef>
-              <a:fontRef idx="minor">
-                <a:schemeClr val="tx1"/>
-              </a:fontRef>
-            </p:style>
-          </p:cxnSp>
-          <p:cxnSp>
-            <p:nvCxnSpPr>
-              <p:cNvPr id="25" name="Straight Connector 24">
-                <a:extLst>
-                  <a:ext uri="{FF2B5EF4-FFF2-40B4-BE49-F238E27FC236}">
-                    <a16:creationId xmlns:a16="http://schemas.microsoft.com/office/drawing/2014/main" id="{48497F5B-65FB-4EE8-9FCF-FE0D49F3A191}"/>
-                  </a:ext>
-                  <a:ext uri="{C183D7F6-B498-43B3-948B-1728B52AA6E4}">
-                    <adec:decorative xmlns:adec="http://schemas.microsoft.com/office/drawing/2017/decorative" val="1"/>
-                  </a:ext>
-                </a:extLst>
-              </p:cNvPr>
-              <p:cNvCxnSpPr/>
-              <p:nvPr>
-                <p:extLst>
-                  <p:ext uri="{386F3935-93C4-4BCD-93E2-E3B085C9AB24}">
-                    <p16:designElem xmlns:p16="http://schemas.microsoft.com/office/powerpoint/2015/main" val="1"/>
-                  </p:ext>
-                </p:extLst>
-              </p:nvPr>
-            </p:nvCxnSpPr>
-            <p:spPr>
-              <a:xfrm rot="1320000" flipH="1">
-                <a:off x="10637382" y="621344"/>
-                <a:ext cx="3394" cy="182880"/>
-              </a:xfrm>
-              <a:prstGeom prst="line">
-                <a:avLst/>
-              </a:prstGeom>
-              <a:ln>
-                <a:solidFill>
-                  <a:srgbClr val="FFFFFF">
-                    <a:alpha val="30196"/>
-                  </a:srgbClr>
-                </a:solidFill>
-              </a:ln>
-            </p:spPr>
-            <p:style>
-              <a:lnRef idx="1">
-                <a:schemeClr val="accent1"/>
-              </a:lnRef>
-              <a:fillRef idx="0">
-                <a:schemeClr val="accent1"/>
-              </a:fillRef>
-              <a:effectRef idx="0">
-                <a:schemeClr val="accent1"/>
-              </a:effectRef>
-              <a:fontRef idx="minor">
-                <a:schemeClr val="tx1"/>
-              </a:fontRef>
-            </p:style>
-          </p:cxnSp>
-          <p:cxnSp>
-            <p:nvCxnSpPr>
-              <p:cNvPr id="26" name="Straight Connector 25">
-                <a:extLst>
-                  <a:ext uri="{FF2B5EF4-FFF2-40B4-BE49-F238E27FC236}">
-                    <a16:creationId xmlns:a16="http://schemas.microsoft.com/office/drawing/2014/main" id="{D8C46E6C-774F-4C36-927A-BAA7DEB7D29C}"/>
-                  </a:ext>
-                  <a:ext uri="{C183D7F6-B498-43B3-948B-1728B52AA6E4}">
-                    <adec:decorative xmlns:adec="http://schemas.microsoft.com/office/drawing/2017/decorative" val="1"/>
-                  </a:ext>
-                </a:extLst>
-              </p:cNvPr>
-              <p:cNvCxnSpPr/>
-              <p:nvPr>
-                <p:extLst>
-                  <p:ext uri="{386F3935-93C4-4BCD-93E2-E3B085C9AB24}">
-                    <p16:designElem xmlns:p16="http://schemas.microsoft.com/office/powerpoint/2015/main" val="1"/>
-                  </p:ext>
-                </p:extLst>
-              </p:nvPr>
-            </p:nvCxnSpPr>
-            <p:spPr>
-              <a:xfrm rot="1440000" flipH="1">
-                <a:off x="10760965" y="690439"/>
-                <a:ext cx="3394" cy="182880"/>
-              </a:xfrm>
-              <a:prstGeom prst="line">
-                <a:avLst/>
-              </a:prstGeom>
-              <a:ln>
-                <a:solidFill>
-                  <a:srgbClr val="FFFFFF">
-                    <a:alpha val="30196"/>
-                  </a:srgbClr>
-                </a:solidFill>
-              </a:ln>
-            </p:spPr>
-            <p:style>
-              <a:lnRef idx="1">
-                <a:schemeClr val="accent1"/>
-              </a:lnRef>
-              <a:fillRef idx="0">
-                <a:schemeClr val="accent1"/>
-              </a:fillRef>
-              <a:effectRef idx="0">
-                <a:schemeClr val="accent1"/>
-              </a:effectRef>
-              <a:fontRef idx="minor">
-                <a:schemeClr val="tx1"/>
-              </a:fontRef>
-            </p:style>
-          </p:cxnSp>
-          <p:cxnSp>
-            <p:nvCxnSpPr>
-              <p:cNvPr id="27" name="Straight Connector 26">
-                <a:extLst>
-                  <a:ext uri="{FF2B5EF4-FFF2-40B4-BE49-F238E27FC236}">
-                    <a16:creationId xmlns:a16="http://schemas.microsoft.com/office/drawing/2014/main" id="{2531B587-919E-433D-B327-DB808F716C79}"/>
-                  </a:ext>
-                  <a:ext uri="{C183D7F6-B498-43B3-948B-1728B52AA6E4}">
-                    <adec:decorative xmlns:adec="http://schemas.microsoft.com/office/drawing/2017/decorative" val="1"/>
-                  </a:ext>
-                </a:extLst>
-              </p:cNvPr>
-              <p:cNvCxnSpPr/>
-              <p:nvPr>
-                <p:extLst>
-                  <p:ext uri="{386F3935-93C4-4BCD-93E2-E3B085C9AB24}">
-                    <p16:designElem xmlns:p16="http://schemas.microsoft.com/office/powerpoint/2015/main" val="1"/>
-                  </p:ext>
-                </p:extLst>
-              </p:nvPr>
-            </p:nvCxnSpPr>
-            <p:spPr>
-              <a:xfrm rot="1620000" flipH="1">
-                <a:off x="10888991" y="755091"/>
-                <a:ext cx="3394" cy="182880"/>
-              </a:xfrm>
-              <a:prstGeom prst="line">
-                <a:avLst/>
-              </a:prstGeom>
-              <a:ln>
-                <a:solidFill>
-                  <a:srgbClr val="FFFFFF">
-                    <a:alpha val="30196"/>
-                  </a:srgbClr>
-                </a:solidFill>
-              </a:ln>
-            </p:spPr>
-            <p:style>
-              <a:lnRef idx="1">
-                <a:schemeClr val="accent1"/>
-              </a:lnRef>
-              <a:fillRef idx="0">
-                <a:schemeClr val="accent1"/>
-              </a:fillRef>
-              <a:effectRef idx="0">
-                <a:schemeClr val="accent1"/>
-              </a:effectRef>
-              <a:fontRef idx="minor">
-                <a:schemeClr val="tx1"/>
-              </a:fontRef>
-            </p:style>
-          </p:cxnSp>
-          <p:cxnSp>
-            <p:nvCxnSpPr>
-              <p:cNvPr id="28" name="Straight Connector 27">
-                <a:extLst>
-                  <a:ext uri="{FF2B5EF4-FFF2-40B4-BE49-F238E27FC236}">
-                    <a16:creationId xmlns:a16="http://schemas.microsoft.com/office/drawing/2014/main" id="{DDCE57BD-EC34-4A76-B287-D23AC5FD4F43}"/>
-                  </a:ext>
-                  <a:ext uri="{C183D7F6-B498-43B3-948B-1728B52AA6E4}">
-                    <adec:decorative xmlns:adec="http://schemas.microsoft.com/office/drawing/2017/decorative" val="1"/>
-                  </a:ext>
-                </a:extLst>
-              </p:cNvPr>
-              <p:cNvCxnSpPr/>
-              <p:nvPr>
-                <p:extLst>
-                  <p:ext uri="{386F3935-93C4-4BCD-93E2-E3B085C9AB24}">
-                    <p16:designElem xmlns:p16="http://schemas.microsoft.com/office/powerpoint/2015/main" val="1"/>
-                  </p:ext>
-                </p:extLst>
-              </p:nvPr>
-            </p:nvCxnSpPr>
-            <p:spPr>
-              <a:xfrm rot="1740000" flipH="1">
-                <a:off x="11010193" y="819743"/>
-                <a:ext cx="3394" cy="182880"/>
-              </a:xfrm>
-              <a:prstGeom prst="line">
-                <a:avLst/>
-              </a:prstGeom>
-              <a:ln>
-                <a:solidFill>
-                  <a:srgbClr val="FFFFFF">
-                    <a:alpha val="30196"/>
-                  </a:srgbClr>
-                </a:solidFill>
-              </a:ln>
-            </p:spPr>
-            <p:style>
-              <a:lnRef idx="1">
-                <a:schemeClr val="accent1"/>
-              </a:lnRef>
-              <a:fillRef idx="0">
-                <a:schemeClr val="accent1"/>
-              </a:fillRef>
-              <a:effectRef idx="0">
-                <a:schemeClr val="accent1"/>
-              </a:effectRef>
-              <a:fontRef idx="minor">
-                <a:schemeClr val="tx1"/>
-              </a:fontRef>
-            </p:style>
-          </p:cxnSp>
-          <p:cxnSp>
-            <p:nvCxnSpPr>
-              <p:cNvPr id="29" name="Straight Connector 28">
-                <a:extLst>
-                  <a:ext uri="{FF2B5EF4-FFF2-40B4-BE49-F238E27FC236}">
-                    <a16:creationId xmlns:a16="http://schemas.microsoft.com/office/drawing/2014/main" id="{E9E7C9C6-C39D-4EB5-8AA8-2023FB7EE825}"/>
-                  </a:ext>
-                  <a:ext uri="{C183D7F6-B498-43B3-948B-1728B52AA6E4}">
-                    <adec:decorative xmlns:adec="http://schemas.microsoft.com/office/drawing/2017/decorative" val="1"/>
-                  </a:ext>
-                </a:extLst>
-              </p:cNvPr>
-              <p:cNvCxnSpPr/>
-              <p:nvPr>
-                <p:extLst>
-                  <p:ext uri="{386F3935-93C4-4BCD-93E2-E3B085C9AB24}">
-                    <p16:designElem xmlns:p16="http://schemas.microsoft.com/office/powerpoint/2015/main" val="1"/>
-                  </p:ext>
-                </p:extLst>
-              </p:nvPr>
-            </p:nvCxnSpPr>
-            <p:spPr>
-              <a:xfrm rot="1860000" flipH="1">
-                <a:off x="11129014" y="895662"/>
-                <a:ext cx="3394" cy="182880"/>
-              </a:xfrm>
-              <a:prstGeom prst="line">
-                <a:avLst/>
-              </a:prstGeom>
-              <a:ln>
-                <a:solidFill>
-                  <a:srgbClr val="FFFFFF">
-                    <a:alpha val="30196"/>
-                  </a:srgbClr>
-                </a:solidFill>
-              </a:ln>
-            </p:spPr>
-            <p:style>
-              <a:lnRef idx="1">
-                <a:schemeClr val="accent1"/>
-              </a:lnRef>
-              <a:fillRef idx="0">
-                <a:schemeClr val="accent1"/>
-              </a:fillRef>
-              <a:effectRef idx="0">
-                <a:schemeClr val="accent1"/>
-              </a:effectRef>
-              <a:fontRef idx="minor">
-                <a:schemeClr val="tx1"/>
-              </a:fontRef>
-            </p:style>
-          </p:cxnSp>
-          <p:cxnSp>
-            <p:nvCxnSpPr>
-              <p:cNvPr id="30" name="Straight Connector 29">
-                <a:extLst>
-                  <a:ext uri="{FF2B5EF4-FFF2-40B4-BE49-F238E27FC236}">
-                    <a16:creationId xmlns:a16="http://schemas.microsoft.com/office/drawing/2014/main" id="{A3B78F45-3048-4595-8C48-D646E25E46C5}"/>
-                  </a:ext>
-                  <a:ext uri="{C183D7F6-B498-43B3-948B-1728B52AA6E4}">
-                    <adec:decorative xmlns:adec="http://schemas.microsoft.com/office/drawing/2017/decorative" val="1"/>
-                  </a:ext>
-                </a:extLst>
-              </p:cNvPr>
-              <p:cNvCxnSpPr/>
-              <p:nvPr>
-                <p:extLst>
-                  <p:ext uri="{386F3935-93C4-4BCD-93E2-E3B085C9AB24}">
-                    <p16:designElem xmlns:p16="http://schemas.microsoft.com/office/powerpoint/2015/main" val="1"/>
-                  </p:ext>
-                </p:extLst>
-              </p:nvPr>
-            </p:nvCxnSpPr>
-            <p:spPr>
-              <a:xfrm rot="1980000" flipH="1">
-                <a:off x="11249872" y="968091"/>
-                <a:ext cx="3394" cy="182880"/>
-              </a:xfrm>
-              <a:prstGeom prst="line">
-                <a:avLst/>
-              </a:prstGeom>
-              <a:ln>
-                <a:solidFill>
-                  <a:srgbClr val="FFFFFF">
-                    <a:alpha val="30196"/>
-                  </a:srgbClr>
-                </a:solidFill>
-              </a:ln>
-            </p:spPr>
-            <p:style>
-              <a:lnRef idx="1">
-                <a:schemeClr val="accent1"/>
-              </a:lnRef>
-              <a:fillRef idx="0">
-                <a:schemeClr val="accent1"/>
-              </a:fillRef>
-              <a:effectRef idx="0">
-                <a:schemeClr val="accent1"/>
-              </a:effectRef>
-              <a:fontRef idx="minor">
-                <a:schemeClr val="tx1"/>
-              </a:fontRef>
-            </p:style>
-          </p:cxnSp>
-          <p:cxnSp>
-            <p:nvCxnSpPr>
-              <p:cNvPr id="31" name="Straight Connector 30">
-                <a:extLst>
-                  <a:ext uri="{FF2B5EF4-FFF2-40B4-BE49-F238E27FC236}">
-                    <a16:creationId xmlns:a16="http://schemas.microsoft.com/office/drawing/2014/main" id="{E8DD4AD3-998F-4837-A5CA-F02017A63F57}"/>
-                  </a:ext>
-                  <a:ext uri="{C183D7F6-B498-43B3-948B-1728B52AA6E4}">
-                    <adec:decorative xmlns:adec="http://schemas.microsoft.com/office/drawing/2017/decorative" val="1"/>
-                  </a:ext>
-                </a:extLst>
-              </p:cNvPr>
-              <p:cNvCxnSpPr/>
-              <p:nvPr>
-                <p:extLst>
-                  <p:ext uri="{386F3935-93C4-4BCD-93E2-E3B085C9AB24}">
-                    <p16:designElem xmlns:p16="http://schemas.microsoft.com/office/powerpoint/2015/main" val="1"/>
-                  </p:ext>
-                </p:extLst>
-              </p:nvPr>
-            </p:nvCxnSpPr>
-            <p:spPr>
-              <a:xfrm rot="2160000" flipH="1">
-                <a:off x="11366875" y="1048084"/>
-                <a:ext cx="3394" cy="182880"/>
-              </a:xfrm>
-              <a:prstGeom prst="line">
-                <a:avLst/>
-              </a:prstGeom>
-              <a:ln>
-                <a:solidFill>
-                  <a:srgbClr val="FFFFFF">
-                    <a:alpha val="30196"/>
-                  </a:srgbClr>
-                </a:solidFill>
-              </a:ln>
-            </p:spPr>
-            <p:style>
-              <a:lnRef idx="1">
-                <a:schemeClr val="accent1"/>
-              </a:lnRef>
-              <a:fillRef idx="0">
-                <a:schemeClr val="accent1"/>
-              </a:fillRef>
-              <a:effectRef idx="0">
-                <a:schemeClr val="accent1"/>
-              </a:effectRef>
-              <a:fontRef idx="minor">
-                <a:schemeClr val="tx1"/>
-              </a:fontRef>
-            </p:style>
-          </p:cxnSp>
-          <p:cxnSp>
-            <p:nvCxnSpPr>
-              <p:cNvPr id="32" name="Straight Connector 31">
-                <a:extLst>
-                  <a:ext uri="{FF2B5EF4-FFF2-40B4-BE49-F238E27FC236}">
-                    <a16:creationId xmlns:a16="http://schemas.microsoft.com/office/drawing/2014/main" id="{C90882A5-BB39-4E31-BAF5-97EF47ED8957}"/>
-                  </a:ext>
-                  <a:ext uri="{C183D7F6-B498-43B3-948B-1728B52AA6E4}">
-                    <adec:decorative xmlns:adec="http://schemas.microsoft.com/office/drawing/2017/decorative" val="1"/>
-                  </a:ext>
-                </a:extLst>
-              </p:cNvPr>
-              <p:cNvCxnSpPr/>
-              <p:nvPr>
-                <p:extLst>
-                  <p:ext uri="{386F3935-93C4-4BCD-93E2-E3B085C9AB24}">
-                    <p16:designElem xmlns:p16="http://schemas.microsoft.com/office/powerpoint/2015/main" val="1"/>
-                  </p:ext>
-                </p:extLst>
-              </p:nvPr>
-            </p:nvCxnSpPr>
-            <p:spPr>
-              <a:xfrm rot="2280000" flipH="1">
-                <a:off x="11474058" y="1131525"/>
-                <a:ext cx="3394" cy="182880"/>
-              </a:xfrm>
-              <a:prstGeom prst="line">
-                <a:avLst/>
-              </a:prstGeom>
-              <a:ln>
-                <a:solidFill>
-                  <a:srgbClr val="FFFFFF">
-                    <a:alpha val="30196"/>
-                  </a:srgbClr>
-                </a:solidFill>
-              </a:ln>
-            </p:spPr>
-            <p:style>
-              <a:lnRef idx="1">
-                <a:schemeClr val="accent1"/>
-              </a:lnRef>
-              <a:fillRef idx="0">
-                <a:schemeClr val="accent1"/>
-              </a:fillRef>
-              <a:effectRef idx="0">
-                <a:schemeClr val="accent1"/>
-              </a:effectRef>
-              <a:fontRef idx="minor">
-                <a:schemeClr val="tx1"/>
-              </a:fontRef>
-            </p:style>
-          </p:cxnSp>
-          <p:cxnSp>
-            <p:nvCxnSpPr>
-              <p:cNvPr id="33" name="Straight Connector 32">
-                <a:extLst>
-                  <a:ext uri="{FF2B5EF4-FFF2-40B4-BE49-F238E27FC236}">
-                    <a16:creationId xmlns:a16="http://schemas.microsoft.com/office/drawing/2014/main" id="{26EC88EF-0939-4A86-A45F-BC8C2B26FC0A}"/>
-                  </a:ext>
-                  <a:ext uri="{C183D7F6-B498-43B3-948B-1728B52AA6E4}">
-                    <adec:decorative xmlns:adec="http://schemas.microsoft.com/office/drawing/2017/decorative" val="1"/>
-                  </a:ext>
-                </a:extLst>
-              </p:cNvPr>
-              <p:cNvCxnSpPr/>
-              <p:nvPr>
-                <p:extLst>
-                  <p:ext uri="{386F3935-93C4-4BCD-93E2-E3B085C9AB24}">
-                    <p16:designElem xmlns:p16="http://schemas.microsoft.com/office/powerpoint/2015/main" val="1"/>
-                  </p:ext>
-                </p:extLst>
-              </p:nvPr>
-            </p:nvCxnSpPr>
-            <p:spPr>
-              <a:xfrm rot="2400000" flipH="1">
-                <a:off x="11583303" y="1221790"/>
-                <a:ext cx="3394" cy="182880"/>
-              </a:xfrm>
-              <a:prstGeom prst="line">
-                <a:avLst/>
-              </a:prstGeom>
-              <a:ln>
-                <a:solidFill>
-                  <a:srgbClr val="FFFFFF">
-                    <a:alpha val="30196"/>
-                  </a:srgbClr>
-                </a:solidFill>
-              </a:ln>
-            </p:spPr>
-            <p:style>
-              <a:lnRef idx="1">
-                <a:schemeClr val="accent1"/>
-              </a:lnRef>
-              <a:fillRef idx="0">
-                <a:schemeClr val="accent1"/>
-              </a:fillRef>
-              <a:effectRef idx="0">
-                <a:schemeClr val="accent1"/>
-              </a:effectRef>
-              <a:fontRef idx="minor">
-                <a:schemeClr val="tx1"/>
-              </a:fontRef>
-            </p:style>
-          </p:cxnSp>
-          <p:cxnSp>
-            <p:nvCxnSpPr>
-              <p:cNvPr id="34" name="Straight Connector 33">
-                <a:extLst>
-                  <a:ext uri="{FF2B5EF4-FFF2-40B4-BE49-F238E27FC236}">
-                    <a16:creationId xmlns:a16="http://schemas.microsoft.com/office/drawing/2014/main" id="{849DD588-37E7-4B23-9ED6-F131F03B8A10}"/>
-                  </a:ext>
-                  <a:ext uri="{C183D7F6-B498-43B3-948B-1728B52AA6E4}">
-                    <adec:decorative xmlns:adec="http://schemas.microsoft.com/office/drawing/2017/decorative" val="1"/>
-                  </a:ext>
-                </a:extLst>
-              </p:cNvPr>
-              <p:cNvCxnSpPr/>
-              <p:nvPr>
-                <p:extLst>
-                  <p:ext uri="{386F3935-93C4-4BCD-93E2-E3B085C9AB24}">
-                    <p16:designElem xmlns:p16="http://schemas.microsoft.com/office/powerpoint/2015/main" val="1"/>
-                  </p:ext>
-                </p:extLst>
-              </p:nvPr>
-            </p:nvCxnSpPr>
-            <p:spPr>
-              <a:xfrm rot="2520000" flipH="1">
-                <a:off x="11685344" y="1321772"/>
-                <a:ext cx="3394" cy="182880"/>
-              </a:xfrm>
-              <a:prstGeom prst="line">
-                <a:avLst/>
-              </a:prstGeom>
-              <a:ln>
-                <a:solidFill>
-                  <a:srgbClr val="FFFFFF">
-                    <a:alpha val="30196"/>
-                  </a:srgbClr>
-                </a:solidFill>
-              </a:ln>
-            </p:spPr>
-            <p:style>
-              <a:lnRef idx="1">
-                <a:schemeClr val="accent1"/>
-              </a:lnRef>
-              <a:fillRef idx="0">
-                <a:schemeClr val="accent1"/>
-              </a:fillRef>
-              <a:effectRef idx="0">
-                <a:schemeClr val="accent1"/>
-              </a:effectRef>
-              <a:fontRef idx="minor">
-                <a:schemeClr val="tx1"/>
-              </a:fontRef>
-            </p:style>
-          </p:cxnSp>
-          <p:cxnSp>
-            <p:nvCxnSpPr>
-              <p:cNvPr id="35" name="Straight Connector 34">
-                <a:extLst>
-                  <a:ext uri="{FF2B5EF4-FFF2-40B4-BE49-F238E27FC236}">
-                    <a16:creationId xmlns:a16="http://schemas.microsoft.com/office/drawing/2014/main" id="{14460794-AF86-4574-B424-D631823D3C26}"/>
-                  </a:ext>
-                  <a:ext uri="{C183D7F6-B498-43B3-948B-1728B52AA6E4}">
-                    <adec:decorative xmlns:adec="http://schemas.microsoft.com/office/drawing/2017/decorative" val="1"/>
-                  </a:ext>
-                </a:extLst>
-              </p:cNvPr>
-              <p:cNvCxnSpPr/>
-              <p:nvPr>
-                <p:extLst>
-                  <p:ext uri="{386F3935-93C4-4BCD-93E2-E3B085C9AB24}">
-                    <p16:designElem xmlns:p16="http://schemas.microsoft.com/office/powerpoint/2015/main" val="1"/>
-                  </p:ext>
-                </p:extLst>
-              </p:nvPr>
-            </p:nvCxnSpPr>
-            <p:spPr>
-              <a:xfrm rot="2700000" flipH="1">
-                <a:off x="11787704" y="1417630"/>
-                <a:ext cx="3394" cy="182880"/>
-              </a:xfrm>
-              <a:prstGeom prst="line">
-                <a:avLst/>
-              </a:prstGeom>
-              <a:ln>
-                <a:solidFill>
-                  <a:srgbClr val="FFFFFF">
-                    <a:alpha val="30196"/>
-                  </a:srgbClr>
-                </a:solidFill>
-              </a:ln>
-            </p:spPr>
-            <p:style>
-              <a:lnRef idx="1">
-                <a:schemeClr val="accent1"/>
-              </a:lnRef>
-              <a:fillRef idx="0">
-                <a:schemeClr val="accent1"/>
-              </a:fillRef>
-              <a:effectRef idx="0">
-                <a:schemeClr val="accent1"/>
-              </a:effectRef>
-              <a:fontRef idx="minor">
-                <a:schemeClr val="tx1"/>
-              </a:fontRef>
-            </p:style>
-          </p:cxnSp>
-          <p:cxnSp>
-            <p:nvCxnSpPr>
-              <p:cNvPr id="36" name="Straight Connector 35">
-                <a:extLst>
-                  <a:ext uri="{FF2B5EF4-FFF2-40B4-BE49-F238E27FC236}">
-                    <a16:creationId xmlns:a16="http://schemas.microsoft.com/office/drawing/2014/main" id="{D6690C8A-042E-433D-B253-6F06AA695210}"/>
-                  </a:ext>
-                  <a:ext uri="{C183D7F6-B498-43B3-948B-1728B52AA6E4}">
-                    <adec:decorative xmlns:adec="http://schemas.microsoft.com/office/drawing/2017/decorative" val="1"/>
-                  </a:ext>
-                </a:extLst>
-              </p:cNvPr>
-              <p:cNvCxnSpPr/>
-              <p:nvPr>
-                <p:extLst>
-                  <p:ext uri="{386F3935-93C4-4BCD-93E2-E3B085C9AB24}">
-                    <p16:designElem xmlns:p16="http://schemas.microsoft.com/office/powerpoint/2015/main" val="1"/>
-                  </p:ext>
-                </p:extLst>
-              </p:nvPr>
-            </p:nvCxnSpPr>
-            <p:spPr>
-              <a:xfrm rot="2820000" flipH="1">
-                <a:off x="11880859" y="1517931"/>
-                <a:ext cx="3394" cy="182880"/>
-              </a:xfrm>
-              <a:prstGeom prst="line">
-                <a:avLst/>
-              </a:prstGeom>
-              <a:ln>
-                <a:solidFill>
-                  <a:srgbClr val="FFFFFF">
-                    <a:alpha val="30196"/>
-                  </a:srgbClr>
-                </a:solidFill>
-              </a:ln>
-            </p:spPr>
-            <p:style>
-              <a:lnRef idx="1">
-                <a:schemeClr val="accent1"/>
-              </a:lnRef>
-              <a:fillRef idx="0">
-                <a:schemeClr val="accent1"/>
-              </a:fillRef>
-              <a:effectRef idx="0">
-                <a:schemeClr val="accent1"/>
-              </a:effectRef>
-              <a:fontRef idx="minor">
-                <a:schemeClr val="tx1"/>
-              </a:fontRef>
-            </p:style>
-          </p:cxnSp>
-          <p:cxnSp>
-            <p:nvCxnSpPr>
-              <p:cNvPr id="37" name="Straight Connector 36">
-                <a:extLst>
-                  <a:ext uri="{FF2B5EF4-FFF2-40B4-BE49-F238E27FC236}">
-                    <a16:creationId xmlns:a16="http://schemas.microsoft.com/office/drawing/2014/main" id="{14C5E5A5-DA67-4881-88C8-D75582BE1164}"/>
-                  </a:ext>
-                  <a:ext uri="{C183D7F6-B498-43B3-948B-1728B52AA6E4}">
-                    <adec:decorative xmlns:adec="http://schemas.microsoft.com/office/drawing/2017/decorative" val="1"/>
-                  </a:ext>
-                </a:extLst>
-              </p:cNvPr>
-              <p:cNvCxnSpPr/>
-              <p:nvPr>
-                <p:extLst>
-                  <p:ext uri="{386F3935-93C4-4BCD-93E2-E3B085C9AB24}">
-                    <p16:designElem xmlns:p16="http://schemas.microsoft.com/office/powerpoint/2015/main" val="1"/>
-                  </p:ext>
-                </p:extLst>
-              </p:nvPr>
-            </p:nvCxnSpPr>
-            <p:spPr>
-              <a:xfrm rot="2940000" flipH="1">
-                <a:off x="11969252" y="1627437"/>
-                <a:ext cx="3394" cy="182880"/>
-              </a:xfrm>
-              <a:prstGeom prst="line">
-                <a:avLst/>
-              </a:prstGeom>
-              <a:ln>
-                <a:solidFill>
-                  <a:srgbClr val="FFFFFF">
-                    <a:alpha val="30196"/>
-                  </a:srgbClr>
-                </a:solidFill>
-              </a:ln>
-            </p:spPr>
-            <p:style>
-              <a:lnRef idx="1">
-                <a:schemeClr val="accent1"/>
-              </a:lnRef>
-              <a:fillRef idx="0">
-                <a:schemeClr val="accent1"/>
-              </a:fillRef>
-              <a:effectRef idx="0">
-                <a:schemeClr val="accent1"/>
-              </a:effectRef>
-              <a:fontRef idx="minor">
-                <a:schemeClr val="tx1"/>
-              </a:fontRef>
-            </p:style>
-          </p:cxnSp>
-          <p:cxnSp>
-            <p:nvCxnSpPr>
-              <p:cNvPr id="38" name="Straight Connector 37">
-                <a:extLst>
-                  <a:ext uri="{FF2B5EF4-FFF2-40B4-BE49-F238E27FC236}">
-                    <a16:creationId xmlns:a16="http://schemas.microsoft.com/office/drawing/2014/main" id="{12E2B0F9-55EA-4641-9CE3-FCC51904324D}"/>
-                  </a:ext>
-                  <a:ext uri="{C183D7F6-B498-43B3-948B-1728B52AA6E4}">
-                    <adec:decorative xmlns:adec="http://schemas.microsoft.com/office/drawing/2017/decorative" val="1"/>
-                  </a:ext>
-                </a:extLst>
-              </p:cNvPr>
-              <p:cNvCxnSpPr/>
-              <p:nvPr>
-                <p:extLst>
-                  <p:ext uri="{386F3935-93C4-4BCD-93E2-E3B085C9AB24}">
-                    <p16:designElem xmlns:p16="http://schemas.microsoft.com/office/powerpoint/2015/main" val="1"/>
-                  </p:ext>
-                </p:extLst>
-              </p:nvPr>
-            </p:nvCxnSpPr>
-            <p:spPr>
-              <a:xfrm rot="3060000" flipH="1">
-                <a:off x="12062016" y="1736011"/>
-                <a:ext cx="3394" cy="182880"/>
-              </a:xfrm>
-              <a:prstGeom prst="line">
-                <a:avLst/>
-              </a:prstGeom>
-              <a:ln>
-                <a:solidFill>
-                  <a:srgbClr val="FFFFFF">
-                    <a:alpha val="30196"/>
-                  </a:srgbClr>
-                </a:solidFill>
-              </a:ln>
-            </p:spPr>
-            <p:style>
-              <a:lnRef idx="1">
-                <a:schemeClr val="accent1"/>
-              </a:lnRef>
-              <a:fillRef idx="0">
-                <a:schemeClr val="accent1"/>
-              </a:fillRef>
-              <a:effectRef idx="0">
-                <a:schemeClr val="accent1"/>
-              </a:effectRef>
-              <a:fontRef idx="minor">
-                <a:schemeClr val="tx1"/>
-              </a:fontRef>
-            </p:style>
-          </p:cxnSp>
-          <p:cxnSp>
-            <p:nvCxnSpPr>
-              <p:cNvPr id="39" name="Straight Connector 38">
-                <a:extLst>
-                  <a:ext uri="{FF2B5EF4-FFF2-40B4-BE49-F238E27FC236}">
-                    <a16:creationId xmlns:a16="http://schemas.microsoft.com/office/drawing/2014/main" id="{F34F27AA-CF8E-4932-9EC9-F14A918B94FF}"/>
-                  </a:ext>
-                  <a:ext uri="{C183D7F6-B498-43B3-948B-1728B52AA6E4}">
-                    <adec:decorative xmlns:adec="http://schemas.microsoft.com/office/drawing/2017/decorative" val="1"/>
-                  </a:ext>
-                </a:extLst>
-              </p:cNvPr>
-              <p:cNvCxnSpPr/>
-              <p:nvPr>
-                <p:extLst>
-                  <p:ext uri="{386F3935-93C4-4BCD-93E2-E3B085C9AB24}">
-                    <p16:designElem xmlns:p16="http://schemas.microsoft.com/office/powerpoint/2015/main" val="1"/>
-                  </p:ext>
-                </p:extLst>
-              </p:nvPr>
-            </p:nvCxnSpPr>
-            <p:spPr>
-              <a:xfrm flipH="1">
-                <a:off x="12074680" y="1910249"/>
-                <a:ext cx="117320" cy="82912"/>
-              </a:xfrm>
-              <a:prstGeom prst="line">
-                <a:avLst/>
-              </a:prstGeom>
-              <a:ln>
-                <a:solidFill>
-                  <a:srgbClr val="FFFFFF">
-                    <a:alpha val="30196"/>
-                  </a:srgbClr>
-                </a:solidFill>
-              </a:ln>
-            </p:spPr>
-            <p:style>
-              <a:lnRef idx="1">
-                <a:schemeClr val="accent1"/>
-              </a:lnRef>
-              <a:fillRef idx="0">
-                <a:schemeClr val="accent1"/>
-              </a:fillRef>
-              <a:effectRef idx="0">
-                <a:schemeClr val="accent1"/>
-              </a:effectRef>
-              <a:fontRef idx="minor">
-                <a:schemeClr val="tx1"/>
-              </a:fontRef>
-            </p:style>
-          </p:cxnSp>
-          <p:cxnSp>
-            <p:nvCxnSpPr>
-              <p:cNvPr id="40" name="Straight Connector 39">
-                <a:extLst>
-                  <a:ext uri="{FF2B5EF4-FFF2-40B4-BE49-F238E27FC236}">
-                    <a16:creationId xmlns:a16="http://schemas.microsoft.com/office/drawing/2014/main" id="{FF8E811C-1786-4DEB-9E69-6DE9F58A3463}"/>
-                  </a:ext>
-                  <a:ext uri="{C183D7F6-B498-43B3-948B-1728B52AA6E4}">
-                    <adec:decorative xmlns:adec="http://schemas.microsoft.com/office/drawing/2017/decorative" val="1"/>
-                  </a:ext>
-                </a:extLst>
-              </p:cNvPr>
-              <p:cNvCxnSpPr/>
-              <p:nvPr>
-                <p:extLst>
-                  <p:ext uri="{386F3935-93C4-4BCD-93E2-E3B085C9AB24}">
-                    <p16:designElem xmlns:p16="http://schemas.microsoft.com/office/powerpoint/2015/main" val="1"/>
-                  </p:ext>
-                </p:extLst>
-              </p:nvPr>
-            </p:nvCxnSpPr>
-            <p:spPr>
-              <a:xfrm flipH="1">
-                <a:off x="12149943" y="2083594"/>
-                <a:ext cx="39676" cy="21436"/>
-              </a:xfrm>
-              <a:prstGeom prst="line">
-                <a:avLst/>
-              </a:prstGeom>
-              <a:ln>
-                <a:solidFill>
-                  <a:srgbClr val="FFFFFF">
-                    <a:alpha val="30196"/>
-                  </a:srgbClr>
-                </a:solidFill>
-              </a:ln>
-            </p:spPr>
-            <p:style>
-              <a:lnRef idx="1">
-                <a:schemeClr val="accent1"/>
-              </a:lnRef>
-              <a:fillRef idx="0">
-                <a:schemeClr val="accent1"/>
-              </a:fillRef>
-              <a:effectRef idx="0">
-                <a:schemeClr val="accent1"/>
-              </a:effectRef>
-              <a:fontRef idx="minor">
-                <a:schemeClr val="tx1"/>
-              </a:fontRef>
-            </p:style>
-          </p:cxnSp>
-          <p:cxnSp>
-            <p:nvCxnSpPr>
-              <p:cNvPr id="41" name="Straight Connector 40">
-                <a:extLst>
-                  <a:ext uri="{FF2B5EF4-FFF2-40B4-BE49-F238E27FC236}">
-                    <a16:creationId xmlns:a16="http://schemas.microsoft.com/office/drawing/2014/main" id="{6F973AE6-1228-44C3-9539-A52C9B1D12A7}"/>
-                  </a:ext>
-                  <a:ext uri="{C183D7F6-B498-43B3-948B-1728B52AA6E4}">
-                    <adec:decorative xmlns:adec="http://schemas.microsoft.com/office/drawing/2017/decorative" val="1"/>
-                  </a:ext>
-                </a:extLst>
-              </p:cNvPr>
-              <p:cNvCxnSpPr/>
-              <p:nvPr>
-                <p:extLst>
-                  <p:ext uri="{386F3935-93C4-4BCD-93E2-E3B085C9AB24}">
-                    <p16:designElem xmlns:p16="http://schemas.microsoft.com/office/powerpoint/2015/main" val="1"/>
-                  </p:ext>
-                </p:extLst>
-              </p:nvPr>
-            </p:nvCxnSpPr>
-            <p:spPr>
-              <a:xfrm rot="-180000" flipH="1">
-                <a:off x="9127990" y="334251"/>
-                <a:ext cx="3394" cy="182880"/>
-              </a:xfrm>
-              <a:prstGeom prst="line">
-                <a:avLst/>
-              </a:prstGeom>
-              <a:ln>
-                <a:solidFill>
-                  <a:srgbClr val="FFFFFF">
-                    <a:alpha val="30196"/>
-                  </a:srgbClr>
-                </a:solidFill>
-              </a:ln>
-            </p:spPr>
-            <p:style>
-              <a:lnRef idx="1">
-                <a:schemeClr val="accent1"/>
-              </a:lnRef>
-              <a:fillRef idx="0">
-                <a:schemeClr val="accent1"/>
-              </a:fillRef>
-              <a:effectRef idx="0">
-                <a:schemeClr val="accent1"/>
-              </a:effectRef>
-              <a:fontRef idx="minor">
-                <a:schemeClr val="tx1"/>
-              </a:fontRef>
-            </p:style>
-          </p:cxnSp>
-          <p:cxnSp>
-            <p:nvCxnSpPr>
-              <p:cNvPr id="42" name="Straight Connector 41">
-                <a:extLst>
-                  <a:ext uri="{FF2B5EF4-FFF2-40B4-BE49-F238E27FC236}">
-                    <a16:creationId xmlns:a16="http://schemas.microsoft.com/office/drawing/2014/main" id="{40D667F6-8D7D-428B-BF6F-A63BF5FBC137}"/>
-                  </a:ext>
-                  <a:ext uri="{C183D7F6-B498-43B3-948B-1728B52AA6E4}">
-                    <adec:decorative xmlns:adec="http://schemas.microsoft.com/office/drawing/2017/decorative" val="1"/>
-                  </a:ext>
-                </a:extLst>
-              </p:cNvPr>
-              <p:cNvCxnSpPr/>
-              <p:nvPr>
-                <p:extLst>
-                  <p:ext uri="{386F3935-93C4-4BCD-93E2-E3B085C9AB24}">
-                    <p16:designElem xmlns:p16="http://schemas.microsoft.com/office/powerpoint/2015/main" val="1"/>
-                  </p:ext>
-                </p:extLst>
-              </p:nvPr>
-            </p:nvCxnSpPr>
-            <p:spPr>
-              <a:xfrm rot="-300000" flipH="1">
-                <a:off x="8987576" y="336633"/>
-                <a:ext cx="3394" cy="182880"/>
-              </a:xfrm>
-              <a:prstGeom prst="line">
-                <a:avLst/>
-              </a:prstGeom>
-              <a:ln>
-                <a:solidFill>
-                  <a:srgbClr val="FFFFFF">
-                    <a:alpha val="30196"/>
-                  </a:srgbClr>
-                </a:solidFill>
-              </a:ln>
-            </p:spPr>
-            <p:style>
-              <a:lnRef idx="1">
-                <a:schemeClr val="accent1"/>
-              </a:lnRef>
-              <a:fillRef idx="0">
-                <a:schemeClr val="accent1"/>
-              </a:fillRef>
-              <a:effectRef idx="0">
-                <a:schemeClr val="accent1"/>
-              </a:effectRef>
-              <a:fontRef idx="minor">
-                <a:schemeClr val="tx1"/>
-              </a:fontRef>
-            </p:style>
-          </p:cxnSp>
-          <p:cxnSp>
-            <p:nvCxnSpPr>
-              <p:cNvPr id="43" name="Straight Connector 42">
-                <a:extLst>
-                  <a:ext uri="{FF2B5EF4-FFF2-40B4-BE49-F238E27FC236}">
-                    <a16:creationId xmlns:a16="http://schemas.microsoft.com/office/drawing/2014/main" id="{51493161-972F-4035-82D4-1CCC8A40A76E}"/>
-                  </a:ext>
-                  <a:ext uri="{C183D7F6-B498-43B3-948B-1728B52AA6E4}">
-                    <adec:decorative xmlns:adec="http://schemas.microsoft.com/office/drawing/2017/decorative" val="1"/>
-                  </a:ext>
-                </a:extLst>
-              </p:cNvPr>
-              <p:cNvCxnSpPr/>
-              <p:nvPr>
-                <p:extLst>
-                  <p:ext uri="{386F3935-93C4-4BCD-93E2-E3B085C9AB24}">
-                    <p16:designElem xmlns:p16="http://schemas.microsoft.com/office/powerpoint/2015/main" val="1"/>
-                  </p:ext>
-                </p:extLst>
-              </p:nvPr>
-            </p:nvCxnSpPr>
-            <p:spPr>
-              <a:xfrm rot="-420000" flipH="1">
-                <a:off x="8844859" y="351176"/>
-                <a:ext cx="3394" cy="182880"/>
-              </a:xfrm>
-              <a:prstGeom prst="line">
-                <a:avLst/>
-              </a:prstGeom>
-              <a:ln>
-                <a:solidFill>
-                  <a:srgbClr val="FFFFFF">
-                    <a:alpha val="30196"/>
-                  </a:srgbClr>
-                </a:solidFill>
-              </a:ln>
-            </p:spPr>
-            <p:style>
-              <a:lnRef idx="1">
-                <a:schemeClr val="accent1"/>
-              </a:lnRef>
-              <a:fillRef idx="0">
-                <a:schemeClr val="accent1"/>
-              </a:fillRef>
-              <a:effectRef idx="0">
-                <a:schemeClr val="accent1"/>
-              </a:effectRef>
-              <a:fontRef idx="minor">
-                <a:schemeClr val="tx1"/>
-              </a:fontRef>
-            </p:style>
-          </p:cxnSp>
-          <p:cxnSp>
-            <p:nvCxnSpPr>
-              <p:cNvPr id="44" name="Straight Connector 43">
-                <a:extLst>
-                  <a:ext uri="{FF2B5EF4-FFF2-40B4-BE49-F238E27FC236}">
-                    <a16:creationId xmlns:a16="http://schemas.microsoft.com/office/drawing/2014/main" id="{CBF5D3FF-5D5D-4416-B40B-11E70DC71B3D}"/>
-                  </a:ext>
-                  <a:ext uri="{C183D7F6-B498-43B3-948B-1728B52AA6E4}">
-                    <adec:decorative xmlns:adec="http://schemas.microsoft.com/office/drawing/2017/decorative" val="1"/>
-                  </a:ext>
-                </a:extLst>
-              </p:cNvPr>
-              <p:cNvCxnSpPr/>
-              <p:nvPr>
-                <p:extLst>
-                  <p:ext uri="{386F3935-93C4-4BCD-93E2-E3B085C9AB24}">
-                    <p16:designElem xmlns:p16="http://schemas.microsoft.com/office/powerpoint/2015/main" val="1"/>
-                  </p:ext>
-                </p:extLst>
-              </p:nvPr>
-            </p:nvCxnSpPr>
-            <p:spPr>
-              <a:xfrm rot="-540000" flipH="1">
-                <a:off x="8706904" y="365719"/>
-                <a:ext cx="3394" cy="182880"/>
-              </a:xfrm>
-              <a:prstGeom prst="line">
-                <a:avLst/>
-              </a:prstGeom>
-              <a:ln>
-                <a:solidFill>
-                  <a:srgbClr val="FFFFFF">
-                    <a:alpha val="30196"/>
-                  </a:srgbClr>
-                </a:solidFill>
-              </a:ln>
-            </p:spPr>
-            <p:style>
-              <a:lnRef idx="1">
-                <a:schemeClr val="accent1"/>
-              </a:lnRef>
-              <a:fillRef idx="0">
-                <a:schemeClr val="accent1"/>
-              </a:fillRef>
-              <a:effectRef idx="0">
-                <a:schemeClr val="accent1"/>
-              </a:effectRef>
-              <a:fontRef idx="minor">
-                <a:schemeClr val="tx1"/>
-              </a:fontRef>
-            </p:style>
-          </p:cxnSp>
-          <p:cxnSp>
-            <p:nvCxnSpPr>
-              <p:cNvPr id="45" name="Straight Connector 44">
-                <a:extLst>
-                  <a:ext uri="{FF2B5EF4-FFF2-40B4-BE49-F238E27FC236}">
-                    <a16:creationId xmlns:a16="http://schemas.microsoft.com/office/drawing/2014/main" id="{449344B8-784E-418E-A715-E46BE55B6C6D}"/>
-                  </a:ext>
-                  <a:ext uri="{C183D7F6-B498-43B3-948B-1728B52AA6E4}">
-                    <adec:decorative xmlns:adec="http://schemas.microsoft.com/office/drawing/2017/decorative" val="1"/>
-                  </a:ext>
-                </a:extLst>
-              </p:cNvPr>
-              <p:cNvCxnSpPr/>
-              <p:nvPr>
-                <p:extLst>
-                  <p:ext uri="{386F3935-93C4-4BCD-93E2-E3B085C9AB24}">
-                    <p16:designElem xmlns:p16="http://schemas.microsoft.com/office/powerpoint/2015/main" val="1"/>
-                  </p:ext>
-                </p:extLst>
-              </p:nvPr>
-            </p:nvCxnSpPr>
-            <p:spPr>
-              <a:xfrm rot="-720000" flipH="1">
-                <a:off x="8568008" y="387891"/>
-                <a:ext cx="3394" cy="182880"/>
-              </a:xfrm>
-              <a:prstGeom prst="line">
-                <a:avLst/>
-              </a:prstGeom>
-              <a:ln>
-                <a:solidFill>
-                  <a:srgbClr val="FFFFFF">
-                    <a:alpha val="30196"/>
-                  </a:srgbClr>
-                </a:solidFill>
-              </a:ln>
-            </p:spPr>
-            <p:style>
-              <a:lnRef idx="1">
-                <a:schemeClr val="accent1"/>
-              </a:lnRef>
-              <a:fillRef idx="0">
-                <a:schemeClr val="accent1"/>
-              </a:fillRef>
-              <a:effectRef idx="0">
-                <a:schemeClr val="accent1"/>
-              </a:effectRef>
-              <a:fontRef idx="minor">
-                <a:schemeClr val="tx1"/>
-              </a:fontRef>
-            </p:style>
-          </p:cxnSp>
-          <p:cxnSp>
-            <p:nvCxnSpPr>
-              <p:cNvPr id="46" name="Straight Connector 45">
-                <a:extLst>
-                  <a:ext uri="{FF2B5EF4-FFF2-40B4-BE49-F238E27FC236}">
-                    <a16:creationId xmlns:a16="http://schemas.microsoft.com/office/drawing/2014/main" id="{56C1159D-CDB4-473C-A602-4C61F648B06B}"/>
-                  </a:ext>
-                  <a:ext uri="{C183D7F6-B498-43B3-948B-1728B52AA6E4}">
-                    <adec:decorative xmlns:adec="http://schemas.microsoft.com/office/drawing/2017/decorative" val="1"/>
-                  </a:ext>
-                </a:extLst>
-              </p:cNvPr>
-              <p:cNvCxnSpPr/>
-              <p:nvPr>
-                <p:extLst>
-                  <p:ext uri="{386F3935-93C4-4BCD-93E2-E3B085C9AB24}">
-                    <p16:designElem xmlns:p16="http://schemas.microsoft.com/office/powerpoint/2015/main" val="1"/>
-                  </p:ext>
-                </p:extLst>
-              </p:nvPr>
-            </p:nvCxnSpPr>
-            <p:spPr>
-              <a:xfrm rot="-840000" flipH="1">
-                <a:off x="8429112" y="410063"/>
-                <a:ext cx="3394" cy="182880"/>
-              </a:xfrm>
-              <a:prstGeom prst="line">
-                <a:avLst/>
-              </a:prstGeom>
-              <a:ln>
-                <a:solidFill>
-                  <a:srgbClr val="FFFFFF">
-                    <a:alpha val="30196"/>
-                  </a:srgbClr>
-                </a:solidFill>
-              </a:ln>
-            </p:spPr>
-            <p:style>
-              <a:lnRef idx="1">
-                <a:schemeClr val="accent1"/>
-              </a:lnRef>
-              <a:fillRef idx="0">
-                <a:schemeClr val="accent1"/>
-              </a:fillRef>
-              <a:effectRef idx="0">
-                <a:schemeClr val="accent1"/>
-              </a:effectRef>
-              <a:fontRef idx="minor">
-                <a:schemeClr val="tx1"/>
-              </a:fontRef>
-            </p:style>
-          </p:cxnSp>
-          <p:cxnSp>
-            <p:nvCxnSpPr>
-              <p:cNvPr id="47" name="Straight Connector 46">
-                <a:extLst>
-                  <a:ext uri="{FF2B5EF4-FFF2-40B4-BE49-F238E27FC236}">
-                    <a16:creationId xmlns:a16="http://schemas.microsoft.com/office/drawing/2014/main" id="{67CEEC98-B022-4C88-9E3C-5423114E92F9}"/>
-                  </a:ext>
-                  <a:ext uri="{C183D7F6-B498-43B3-948B-1728B52AA6E4}">
-                    <adec:decorative xmlns:adec="http://schemas.microsoft.com/office/drawing/2017/decorative" val="1"/>
-                  </a:ext>
-                </a:extLst>
-              </p:cNvPr>
-              <p:cNvCxnSpPr/>
-              <p:nvPr>
-                <p:extLst>
-                  <p:ext uri="{386F3935-93C4-4BCD-93E2-E3B085C9AB24}">
-                    <p16:designElem xmlns:p16="http://schemas.microsoft.com/office/powerpoint/2015/main" val="1"/>
-                  </p:ext>
-                </p:extLst>
-              </p:nvPr>
-            </p:nvCxnSpPr>
-            <p:spPr>
-              <a:xfrm rot="-960000" flipH="1">
-                <a:off x="8294968" y="446219"/>
-                <a:ext cx="3394" cy="182880"/>
-              </a:xfrm>
-              <a:prstGeom prst="line">
-                <a:avLst/>
-              </a:prstGeom>
-              <a:ln>
-                <a:solidFill>
-                  <a:srgbClr val="FFFFFF">
-                    <a:alpha val="30196"/>
-                  </a:srgbClr>
-                </a:solidFill>
-              </a:ln>
-            </p:spPr>
-            <p:style>
-              <a:lnRef idx="1">
-                <a:schemeClr val="accent1"/>
-              </a:lnRef>
-              <a:fillRef idx="0">
-                <a:schemeClr val="accent1"/>
-              </a:fillRef>
-              <a:effectRef idx="0">
-                <a:schemeClr val="accent1"/>
-              </a:effectRef>
-              <a:fontRef idx="minor">
-                <a:schemeClr val="tx1"/>
-              </a:fontRef>
-            </p:style>
-          </p:cxnSp>
-          <p:cxnSp>
-            <p:nvCxnSpPr>
-              <p:cNvPr id="48" name="Straight Connector 47">
-                <a:extLst>
-                  <a:ext uri="{FF2B5EF4-FFF2-40B4-BE49-F238E27FC236}">
-                    <a16:creationId xmlns:a16="http://schemas.microsoft.com/office/drawing/2014/main" id="{D0E777FD-A0D8-4ADD-9C76-2B0407F721B4}"/>
-                  </a:ext>
-                  <a:ext uri="{C183D7F6-B498-43B3-948B-1728B52AA6E4}">
-                    <adec:decorative xmlns:adec="http://schemas.microsoft.com/office/drawing/2017/decorative" val="1"/>
-                  </a:ext>
-                </a:extLst>
-              </p:cNvPr>
-              <p:cNvCxnSpPr/>
-              <p:nvPr>
-                <p:extLst>
-                  <p:ext uri="{386F3935-93C4-4BCD-93E2-E3B085C9AB24}">
-                    <p16:designElem xmlns:p16="http://schemas.microsoft.com/office/powerpoint/2015/main" val="1"/>
-                  </p:ext>
-                </p:extLst>
-              </p:nvPr>
-            </p:nvCxnSpPr>
-            <p:spPr>
-              <a:xfrm rot="-1080000" flipH="1">
-                <a:off x="8160824" y="482375"/>
-                <a:ext cx="3394" cy="182880"/>
-              </a:xfrm>
-              <a:prstGeom prst="line">
-                <a:avLst/>
-              </a:prstGeom>
-              <a:ln>
-                <a:solidFill>
-                  <a:srgbClr val="FFFFFF">
-                    <a:alpha val="30196"/>
-                  </a:srgbClr>
-                </a:solidFill>
-              </a:ln>
-            </p:spPr>
-            <p:style>
-              <a:lnRef idx="1">
-                <a:schemeClr val="accent1"/>
-              </a:lnRef>
-              <a:fillRef idx="0">
-                <a:schemeClr val="accent1"/>
-              </a:fillRef>
-              <a:effectRef idx="0">
-                <a:schemeClr val="accent1"/>
-              </a:effectRef>
-              <a:fontRef idx="minor">
-                <a:schemeClr val="tx1"/>
-              </a:fontRef>
-            </p:style>
-          </p:cxnSp>
-          <p:cxnSp>
-            <p:nvCxnSpPr>
-              <p:cNvPr id="49" name="Straight Connector 48">
-                <a:extLst>
-                  <a:ext uri="{FF2B5EF4-FFF2-40B4-BE49-F238E27FC236}">
-                    <a16:creationId xmlns:a16="http://schemas.microsoft.com/office/drawing/2014/main" id="{66F04DA7-9CD2-4BC0-8DBE-3846A4A3CFA7}"/>
-                  </a:ext>
-                  <a:ext uri="{C183D7F6-B498-43B3-948B-1728B52AA6E4}">
-                    <adec:decorative xmlns:adec="http://schemas.microsoft.com/office/drawing/2017/decorative" val="1"/>
-                  </a:ext>
-                </a:extLst>
-              </p:cNvPr>
-              <p:cNvCxnSpPr/>
-              <p:nvPr>
-                <p:extLst>
-                  <p:ext uri="{386F3935-93C4-4BCD-93E2-E3B085C9AB24}">
-                    <p16:designElem xmlns:p16="http://schemas.microsoft.com/office/powerpoint/2015/main" val="1"/>
-                  </p:ext>
-                </p:extLst>
-              </p:nvPr>
-            </p:nvCxnSpPr>
-            <p:spPr>
-              <a:xfrm rot="-1260000" flipH="1">
-                <a:off x="8027689" y="531848"/>
-                <a:ext cx="3394" cy="182880"/>
-              </a:xfrm>
-              <a:prstGeom prst="line">
-                <a:avLst/>
-              </a:prstGeom>
-              <a:ln>
-                <a:solidFill>
-                  <a:srgbClr val="FFFFFF">
-                    <a:alpha val="30196"/>
-                  </a:srgbClr>
-                </a:solidFill>
-              </a:ln>
-            </p:spPr>
-            <p:style>
-              <a:lnRef idx="1">
-                <a:schemeClr val="accent1"/>
-              </a:lnRef>
-              <a:fillRef idx="0">
-                <a:schemeClr val="accent1"/>
-              </a:fillRef>
-              <a:effectRef idx="0">
-                <a:schemeClr val="accent1"/>
-              </a:effectRef>
-              <a:fontRef idx="minor">
-                <a:schemeClr val="tx1"/>
-              </a:fontRef>
-            </p:style>
-          </p:cxnSp>
-          <p:cxnSp>
-            <p:nvCxnSpPr>
-              <p:cNvPr id="50" name="Straight Connector 49">
-                <a:extLst>
-                  <a:ext uri="{FF2B5EF4-FFF2-40B4-BE49-F238E27FC236}">
-                    <a16:creationId xmlns:a16="http://schemas.microsoft.com/office/drawing/2014/main" id="{F9780951-740D-4EF7-AA1A-49B29144178F}"/>
-                  </a:ext>
-                  <a:ext uri="{C183D7F6-B498-43B3-948B-1728B52AA6E4}">
-                    <adec:decorative xmlns:adec="http://schemas.microsoft.com/office/drawing/2017/decorative" val="1"/>
-                  </a:ext>
-                </a:extLst>
-              </p:cNvPr>
-              <p:cNvCxnSpPr/>
-              <p:nvPr>
-                <p:extLst>
-                  <p:ext uri="{386F3935-93C4-4BCD-93E2-E3B085C9AB24}">
-                    <p16:designElem xmlns:p16="http://schemas.microsoft.com/office/powerpoint/2015/main" val="1"/>
-                  </p:ext>
-                </p:extLst>
-              </p:nvPr>
-            </p:nvCxnSpPr>
-            <p:spPr>
-              <a:xfrm rot="-1380000" flipH="1">
-                <a:off x="7894554" y="581321"/>
-                <a:ext cx="3394" cy="182880"/>
-              </a:xfrm>
-              <a:prstGeom prst="line">
-                <a:avLst/>
-              </a:prstGeom>
-              <a:ln>
-                <a:solidFill>
-                  <a:srgbClr val="FFFFFF">
-                    <a:alpha val="30196"/>
-                  </a:srgbClr>
-                </a:solidFill>
-              </a:ln>
-            </p:spPr>
-            <p:style>
-              <a:lnRef idx="1">
-                <a:schemeClr val="accent1"/>
-              </a:lnRef>
-              <a:fillRef idx="0">
-                <a:schemeClr val="accent1"/>
-              </a:fillRef>
-              <a:effectRef idx="0">
-                <a:schemeClr val="accent1"/>
-              </a:effectRef>
-              <a:fontRef idx="minor">
-                <a:schemeClr val="tx1"/>
-              </a:fontRef>
-            </p:style>
-          </p:cxnSp>
-          <p:cxnSp>
-            <p:nvCxnSpPr>
-              <p:cNvPr id="51" name="Straight Connector 50">
-                <a:extLst>
-                  <a:ext uri="{FF2B5EF4-FFF2-40B4-BE49-F238E27FC236}">
-                    <a16:creationId xmlns:a16="http://schemas.microsoft.com/office/drawing/2014/main" id="{EE9967E5-6E93-471F-A0CC-A672AE17FA49}"/>
-                  </a:ext>
-                  <a:ext uri="{C183D7F6-B498-43B3-948B-1728B52AA6E4}">
-                    <adec:decorative xmlns:adec="http://schemas.microsoft.com/office/drawing/2017/decorative" val="1"/>
-                  </a:ext>
-                </a:extLst>
-              </p:cNvPr>
-              <p:cNvCxnSpPr/>
-              <p:nvPr>
-                <p:extLst>
-                  <p:ext uri="{386F3935-93C4-4BCD-93E2-E3B085C9AB24}">
-                    <p16:designElem xmlns:p16="http://schemas.microsoft.com/office/powerpoint/2015/main" val="1"/>
-                  </p:ext>
-                </p:extLst>
-              </p:nvPr>
-            </p:nvCxnSpPr>
-            <p:spPr>
-              <a:xfrm rot="-1500000" flipH="1">
-                <a:off x="7761419" y="630794"/>
-                <a:ext cx="3394" cy="182880"/>
-              </a:xfrm>
-              <a:prstGeom prst="line">
-                <a:avLst/>
-              </a:prstGeom>
-              <a:ln>
-                <a:solidFill>
-                  <a:srgbClr val="FFFFFF">
-                    <a:alpha val="30196"/>
-                  </a:srgbClr>
-                </a:solidFill>
-              </a:ln>
-            </p:spPr>
-            <p:style>
-              <a:lnRef idx="1">
-                <a:schemeClr val="accent1"/>
-              </a:lnRef>
-              <a:fillRef idx="0">
-                <a:schemeClr val="accent1"/>
-              </a:fillRef>
-              <a:effectRef idx="0">
-                <a:schemeClr val="accent1"/>
-              </a:effectRef>
-              <a:fontRef idx="minor">
-                <a:schemeClr val="tx1"/>
-              </a:fontRef>
-            </p:style>
-          </p:cxnSp>
-          <p:cxnSp>
-            <p:nvCxnSpPr>
-              <p:cNvPr id="52" name="Straight Connector 51">
-                <a:extLst>
-                  <a:ext uri="{FF2B5EF4-FFF2-40B4-BE49-F238E27FC236}">
-                    <a16:creationId xmlns:a16="http://schemas.microsoft.com/office/drawing/2014/main" id="{EA1BCC38-1F57-4C90-B954-4B53F1E5C5D8}"/>
-                  </a:ext>
-                  <a:ext uri="{C183D7F6-B498-43B3-948B-1728B52AA6E4}">
-                    <adec:decorative xmlns:adec="http://schemas.microsoft.com/office/drawing/2017/decorative" val="1"/>
-                  </a:ext>
-                </a:extLst>
-              </p:cNvPr>
-              <p:cNvCxnSpPr/>
-              <p:nvPr>
-                <p:extLst>
-                  <p:ext uri="{386F3935-93C4-4BCD-93E2-E3B085C9AB24}">
-                    <p16:designElem xmlns:p16="http://schemas.microsoft.com/office/powerpoint/2015/main" val="1"/>
-                  </p:ext>
-                </p:extLst>
-              </p:nvPr>
-            </p:nvCxnSpPr>
-            <p:spPr>
-              <a:xfrm rot="-1620000" flipH="1">
-                <a:off x="7636645" y="689804"/>
-                <a:ext cx="3394" cy="182880"/>
-              </a:xfrm>
-              <a:prstGeom prst="line">
-                <a:avLst/>
-              </a:prstGeom>
-              <a:ln>
-                <a:solidFill>
-                  <a:srgbClr val="FFFFFF">
-                    <a:alpha val="30196"/>
-                  </a:srgbClr>
-                </a:solidFill>
-              </a:ln>
-            </p:spPr>
-            <p:style>
-              <a:lnRef idx="1">
-                <a:schemeClr val="accent1"/>
-              </a:lnRef>
-              <a:fillRef idx="0">
-                <a:schemeClr val="accent1"/>
-              </a:fillRef>
-              <a:effectRef idx="0">
-                <a:schemeClr val="accent1"/>
-              </a:effectRef>
-              <a:fontRef idx="minor">
-                <a:schemeClr val="tx1"/>
-              </a:fontRef>
-            </p:style>
-          </p:cxnSp>
-          <p:cxnSp>
-            <p:nvCxnSpPr>
-              <p:cNvPr id="53" name="Straight Connector 52">
-                <a:extLst>
-                  <a:ext uri="{FF2B5EF4-FFF2-40B4-BE49-F238E27FC236}">
-                    <a16:creationId xmlns:a16="http://schemas.microsoft.com/office/drawing/2014/main" id="{65CF7B5C-1BEC-4D5D-8B95-8633ECF43232}"/>
-                  </a:ext>
-                  <a:ext uri="{C183D7F6-B498-43B3-948B-1728B52AA6E4}">
-                    <adec:decorative xmlns:adec="http://schemas.microsoft.com/office/drawing/2017/decorative" val="1"/>
-                  </a:ext>
-                </a:extLst>
-              </p:cNvPr>
-              <p:cNvCxnSpPr/>
-              <p:nvPr>
-                <p:extLst>
-                  <p:ext uri="{386F3935-93C4-4BCD-93E2-E3B085C9AB24}">
-                    <p16:designElem xmlns:p16="http://schemas.microsoft.com/office/powerpoint/2015/main" val="1"/>
-                  </p:ext>
-                </p:extLst>
-              </p:nvPr>
-            </p:nvCxnSpPr>
-            <p:spPr>
-              <a:xfrm rot="-1800000" flipH="1">
-                <a:off x="7511871" y="751195"/>
-                <a:ext cx="3394" cy="182880"/>
-              </a:xfrm>
-              <a:prstGeom prst="line">
-                <a:avLst/>
-              </a:prstGeom>
-              <a:ln>
-                <a:solidFill>
-                  <a:srgbClr val="FFFFFF">
-                    <a:alpha val="30196"/>
-                  </a:srgbClr>
-                </a:solidFill>
-              </a:ln>
-            </p:spPr>
-            <p:style>
-              <a:lnRef idx="1">
-                <a:schemeClr val="accent1"/>
-              </a:lnRef>
-              <a:fillRef idx="0">
-                <a:schemeClr val="accent1"/>
-              </a:fillRef>
-              <a:effectRef idx="0">
-                <a:schemeClr val="accent1"/>
-              </a:effectRef>
-              <a:fontRef idx="minor">
-                <a:schemeClr val="tx1"/>
-              </a:fontRef>
-            </p:style>
-          </p:cxnSp>
-          <p:cxnSp>
-            <p:nvCxnSpPr>
-              <p:cNvPr id="54" name="Straight Connector 53">
-                <a:extLst>
-                  <a:ext uri="{FF2B5EF4-FFF2-40B4-BE49-F238E27FC236}">
-                    <a16:creationId xmlns:a16="http://schemas.microsoft.com/office/drawing/2014/main" id="{1ED04EA6-5508-427D-8D22-81C59266AD62}"/>
-                  </a:ext>
-                  <a:ext uri="{C183D7F6-B498-43B3-948B-1728B52AA6E4}">
-                    <adec:decorative xmlns:adec="http://schemas.microsoft.com/office/drawing/2017/decorative" val="1"/>
-                  </a:ext>
-                </a:extLst>
-              </p:cNvPr>
-              <p:cNvCxnSpPr/>
-              <p:nvPr>
-                <p:extLst>
-                  <p:ext uri="{386F3935-93C4-4BCD-93E2-E3B085C9AB24}">
-                    <p16:designElem xmlns:p16="http://schemas.microsoft.com/office/powerpoint/2015/main" val="1"/>
-                  </p:ext>
-                </p:extLst>
-              </p:nvPr>
-            </p:nvCxnSpPr>
-            <p:spPr>
-              <a:xfrm rot="-1920000" flipH="1">
-                <a:off x="7387899" y="819771"/>
-                <a:ext cx="3394" cy="182880"/>
-              </a:xfrm>
-              <a:prstGeom prst="line">
-                <a:avLst/>
-              </a:prstGeom>
-              <a:ln>
-                <a:solidFill>
-                  <a:srgbClr val="FFFFFF">
-                    <a:alpha val="30196"/>
-                  </a:srgbClr>
-                </a:solidFill>
-              </a:ln>
-            </p:spPr>
-            <p:style>
-              <a:lnRef idx="1">
-                <a:schemeClr val="accent1"/>
-              </a:lnRef>
-              <a:fillRef idx="0">
-                <a:schemeClr val="accent1"/>
-              </a:fillRef>
-              <a:effectRef idx="0">
-                <a:schemeClr val="accent1"/>
-              </a:effectRef>
-              <a:fontRef idx="minor">
-                <a:schemeClr val="tx1"/>
-              </a:fontRef>
-            </p:style>
-          </p:cxnSp>
-          <p:cxnSp>
-            <p:nvCxnSpPr>
-              <p:cNvPr id="55" name="Straight Connector 54">
-                <a:extLst>
-                  <a:ext uri="{FF2B5EF4-FFF2-40B4-BE49-F238E27FC236}">
-                    <a16:creationId xmlns:a16="http://schemas.microsoft.com/office/drawing/2014/main" id="{1B9004AD-3371-4FFC-A5A4-BE80CB57BE5F}"/>
-                  </a:ext>
-                  <a:ext uri="{C183D7F6-B498-43B3-948B-1728B52AA6E4}">
-                    <adec:decorative xmlns:adec="http://schemas.microsoft.com/office/drawing/2017/decorative" val="1"/>
-                  </a:ext>
-                </a:extLst>
-              </p:cNvPr>
-              <p:cNvCxnSpPr/>
-              <p:nvPr>
-                <p:extLst>
-                  <p:ext uri="{386F3935-93C4-4BCD-93E2-E3B085C9AB24}">
-                    <p16:designElem xmlns:p16="http://schemas.microsoft.com/office/powerpoint/2015/main" val="1"/>
-                  </p:ext>
-                </p:extLst>
-              </p:nvPr>
-            </p:nvCxnSpPr>
-            <p:spPr>
-              <a:xfrm rot="-2040000" flipH="1">
-                <a:off x="7268530" y="893163"/>
-                <a:ext cx="3394" cy="182880"/>
-              </a:xfrm>
-              <a:prstGeom prst="line">
-                <a:avLst/>
-              </a:prstGeom>
-              <a:ln>
-                <a:solidFill>
-                  <a:srgbClr val="FFFFFF">
-                    <a:alpha val="30196"/>
-                  </a:srgbClr>
-                </a:solidFill>
-              </a:ln>
-            </p:spPr>
-            <p:style>
-              <a:lnRef idx="1">
-                <a:schemeClr val="accent1"/>
-              </a:lnRef>
-              <a:fillRef idx="0">
-                <a:schemeClr val="accent1"/>
-              </a:fillRef>
-              <a:effectRef idx="0">
-                <a:schemeClr val="accent1"/>
-              </a:effectRef>
-              <a:fontRef idx="minor">
-                <a:schemeClr val="tx1"/>
-              </a:fontRef>
-            </p:style>
-          </p:cxnSp>
-          <p:cxnSp>
-            <p:nvCxnSpPr>
-              <p:cNvPr id="56" name="Straight Connector 55">
-                <a:extLst>
-                  <a:ext uri="{FF2B5EF4-FFF2-40B4-BE49-F238E27FC236}">
-                    <a16:creationId xmlns:a16="http://schemas.microsoft.com/office/drawing/2014/main" id="{0782535D-5285-44E5-B0C5-FC0BDC8E0FEE}"/>
-                  </a:ext>
-                  <a:ext uri="{C183D7F6-B498-43B3-948B-1728B52AA6E4}">
-                    <adec:decorative xmlns:adec="http://schemas.microsoft.com/office/drawing/2017/decorative" val="1"/>
-                  </a:ext>
-                </a:extLst>
-              </p:cNvPr>
-              <p:cNvCxnSpPr/>
-              <p:nvPr>
-                <p:extLst>
-                  <p:ext uri="{386F3935-93C4-4BCD-93E2-E3B085C9AB24}">
-                    <p16:designElem xmlns:p16="http://schemas.microsoft.com/office/powerpoint/2015/main" val="1"/>
-                  </p:ext>
-                </p:extLst>
-              </p:nvPr>
-            </p:nvCxnSpPr>
-            <p:spPr>
-              <a:xfrm rot="-2160000" flipH="1">
-                <a:off x="7152030" y="976584"/>
-                <a:ext cx="3394" cy="182880"/>
-              </a:xfrm>
-              <a:prstGeom prst="line">
-                <a:avLst/>
-              </a:prstGeom>
-              <a:ln>
-                <a:solidFill>
-                  <a:srgbClr val="FFFFFF">
-                    <a:alpha val="30196"/>
-                  </a:srgbClr>
-                </a:solidFill>
-              </a:ln>
-            </p:spPr>
-            <p:style>
-              <a:lnRef idx="1">
-                <a:schemeClr val="accent1"/>
-              </a:lnRef>
-              <a:fillRef idx="0">
-                <a:schemeClr val="accent1"/>
-              </a:fillRef>
-              <a:effectRef idx="0">
-                <a:schemeClr val="accent1"/>
-              </a:effectRef>
-              <a:fontRef idx="minor">
-                <a:schemeClr val="tx1"/>
-              </a:fontRef>
-            </p:style>
-          </p:cxnSp>
-          <p:cxnSp>
-            <p:nvCxnSpPr>
-              <p:cNvPr id="57" name="Straight Connector 56">
-                <a:extLst>
-                  <a:ext uri="{FF2B5EF4-FFF2-40B4-BE49-F238E27FC236}">
-                    <a16:creationId xmlns:a16="http://schemas.microsoft.com/office/drawing/2014/main" id="{6EC38B95-A7C9-403B-9F93-74C1A18BEC2B}"/>
-                  </a:ext>
-                  <a:ext uri="{C183D7F6-B498-43B3-948B-1728B52AA6E4}">
-                    <adec:decorative xmlns:adec="http://schemas.microsoft.com/office/drawing/2017/decorative" val="1"/>
-                  </a:ext>
-                </a:extLst>
-              </p:cNvPr>
-              <p:cNvCxnSpPr/>
-              <p:nvPr>
-                <p:extLst>
-                  <p:ext uri="{386F3935-93C4-4BCD-93E2-E3B085C9AB24}">
-                    <p16:designElem xmlns:p16="http://schemas.microsoft.com/office/powerpoint/2015/main" val="1"/>
-                  </p:ext>
-                </p:extLst>
-              </p:nvPr>
-            </p:nvCxnSpPr>
-            <p:spPr>
-              <a:xfrm rot="-2340000" flipH="1">
-                <a:off x="7041695" y="1060025"/>
-                <a:ext cx="3394" cy="182880"/>
-              </a:xfrm>
-              <a:prstGeom prst="line">
-                <a:avLst/>
-              </a:prstGeom>
-              <a:ln>
-                <a:solidFill>
-                  <a:srgbClr val="FFFFFF">
-                    <a:alpha val="30196"/>
-                  </a:srgbClr>
-                </a:solidFill>
-              </a:ln>
-            </p:spPr>
-            <p:style>
-              <a:lnRef idx="1">
-                <a:schemeClr val="accent1"/>
-              </a:lnRef>
-              <a:fillRef idx="0">
-                <a:schemeClr val="accent1"/>
-              </a:fillRef>
-              <a:effectRef idx="0">
-                <a:schemeClr val="accent1"/>
-              </a:effectRef>
-              <a:fontRef idx="minor">
-                <a:schemeClr val="tx1"/>
-              </a:fontRef>
-            </p:style>
-          </p:cxnSp>
-          <p:cxnSp>
-            <p:nvCxnSpPr>
-              <p:cNvPr id="58" name="Straight Connector 57">
-                <a:extLst>
-                  <a:ext uri="{FF2B5EF4-FFF2-40B4-BE49-F238E27FC236}">
-                    <a16:creationId xmlns:a16="http://schemas.microsoft.com/office/drawing/2014/main" id="{210C6357-BE69-4A3B-87BA-0181125931CF}"/>
-                  </a:ext>
-                  <a:ext uri="{C183D7F6-B498-43B3-948B-1728B52AA6E4}">
-                    <adec:decorative xmlns:adec="http://schemas.microsoft.com/office/drawing/2017/decorative" val="1"/>
-                  </a:ext>
-                </a:extLst>
-              </p:cNvPr>
-              <p:cNvCxnSpPr/>
-              <p:nvPr>
-                <p:extLst>
-                  <p:ext uri="{386F3935-93C4-4BCD-93E2-E3B085C9AB24}">
-                    <p16:designElem xmlns:p16="http://schemas.microsoft.com/office/powerpoint/2015/main" val="1"/>
-                  </p:ext>
-                </p:extLst>
-              </p:nvPr>
-            </p:nvCxnSpPr>
-            <p:spPr>
-              <a:xfrm rot="-2460000" flipH="1">
-                <a:off x="6931360" y="1143466"/>
-                <a:ext cx="3394" cy="182880"/>
-              </a:xfrm>
-              <a:prstGeom prst="line">
-                <a:avLst/>
-              </a:prstGeom>
-              <a:ln>
-                <a:solidFill>
-                  <a:srgbClr val="FFFFFF">
-                    <a:alpha val="30196"/>
-                  </a:srgbClr>
-                </a:solidFill>
-              </a:ln>
-            </p:spPr>
-            <p:style>
-              <a:lnRef idx="1">
-                <a:schemeClr val="accent1"/>
-              </a:lnRef>
-              <a:fillRef idx="0">
-                <a:schemeClr val="accent1"/>
-              </a:fillRef>
-              <a:effectRef idx="0">
-                <a:schemeClr val="accent1"/>
-              </a:effectRef>
-              <a:fontRef idx="minor">
-                <a:schemeClr val="tx1"/>
-              </a:fontRef>
-            </p:style>
-          </p:cxnSp>
-          <p:cxnSp>
-            <p:nvCxnSpPr>
-              <p:cNvPr id="59" name="Straight Connector 58">
-                <a:extLst>
-                  <a:ext uri="{FF2B5EF4-FFF2-40B4-BE49-F238E27FC236}">
-                    <a16:creationId xmlns:a16="http://schemas.microsoft.com/office/drawing/2014/main" id="{CC41DA3D-A7F6-4FB5-9A14-9E93E449A790}"/>
-                  </a:ext>
-                  <a:ext uri="{C183D7F6-B498-43B3-948B-1728B52AA6E4}">
-                    <adec:decorative xmlns:adec="http://schemas.microsoft.com/office/drawing/2017/decorative" val="1"/>
-                  </a:ext>
-                </a:extLst>
-              </p:cNvPr>
-              <p:cNvCxnSpPr/>
-              <p:nvPr>
-                <p:extLst>
-                  <p:ext uri="{386F3935-93C4-4BCD-93E2-E3B085C9AB24}">
-                    <p16:designElem xmlns:p16="http://schemas.microsoft.com/office/powerpoint/2015/main" val="1"/>
-                  </p:ext>
-                </p:extLst>
-              </p:nvPr>
-            </p:nvCxnSpPr>
-            <p:spPr>
-              <a:xfrm rot="-2580000" flipH="1">
-                <a:off x="6819070" y="1235864"/>
-                <a:ext cx="3394" cy="182880"/>
-              </a:xfrm>
-              <a:prstGeom prst="line">
-                <a:avLst/>
-              </a:prstGeom>
-              <a:ln>
-                <a:solidFill>
-                  <a:srgbClr val="FFFFFF">
-                    <a:alpha val="30196"/>
-                  </a:srgbClr>
-                </a:solidFill>
-              </a:ln>
-            </p:spPr>
-            <p:style>
-              <a:lnRef idx="1">
-                <a:schemeClr val="accent1"/>
-              </a:lnRef>
-              <a:fillRef idx="0">
-                <a:schemeClr val="accent1"/>
-              </a:fillRef>
-              <a:effectRef idx="0">
-                <a:schemeClr val="accent1"/>
-              </a:effectRef>
-              <a:fontRef idx="minor">
-                <a:schemeClr val="tx1"/>
-              </a:fontRef>
-            </p:style>
-          </p:cxnSp>
-          <p:cxnSp>
-            <p:nvCxnSpPr>
-              <p:cNvPr id="60" name="Straight Connector 59">
-                <a:extLst>
-                  <a:ext uri="{FF2B5EF4-FFF2-40B4-BE49-F238E27FC236}">
-                    <a16:creationId xmlns:a16="http://schemas.microsoft.com/office/drawing/2014/main" id="{AD8DEF88-B68B-4C40-8729-91C1626B9589}"/>
-                  </a:ext>
-                  <a:ext uri="{C183D7F6-B498-43B3-948B-1728B52AA6E4}">
-                    <adec:decorative xmlns:adec="http://schemas.microsoft.com/office/drawing/2017/decorative" val="1"/>
-                  </a:ext>
-                </a:extLst>
-              </p:cNvPr>
-              <p:cNvCxnSpPr/>
-              <p:nvPr>
-                <p:extLst>
-                  <p:ext uri="{386F3935-93C4-4BCD-93E2-E3B085C9AB24}">
-                    <p16:designElem xmlns:p16="http://schemas.microsoft.com/office/powerpoint/2015/main" val="1"/>
-                  </p:ext>
-                </p:extLst>
-              </p:nvPr>
-            </p:nvCxnSpPr>
-            <p:spPr>
-              <a:xfrm rot="-2700000" flipH="1">
-                <a:off x="6721359" y="1332746"/>
-                <a:ext cx="3394" cy="182880"/>
-              </a:xfrm>
-              <a:prstGeom prst="line">
-                <a:avLst/>
-              </a:prstGeom>
-              <a:ln>
-                <a:solidFill>
-                  <a:srgbClr val="FFFFFF">
-                    <a:alpha val="30196"/>
-                  </a:srgbClr>
-                </a:solidFill>
-              </a:ln>
-            </p:spPr>
-            <p:style>
-              <a:lnRef idx="1">
-                <a:schemeClr val="accent1"/>
-              </a:lnRef>
-              <a:fillRef idx="0">
-                <a:schemeClr val="accent1"/>
-              </a:fillRef>
-              <a:effectRef idx="0">
-                <a:schemeClr val="accent1"/>
-              </a:effectRef>
-              <a:fontRef idx="minor">
-                <a:schemeClr val="tx1"/>
-              </a:fontRef>
-            </p:style>
-          </p:cxnSp>
-          <p:cxnSp>
-            <p:nvCxnSpPr>
-              <p:cNvPr id="61" name="Straight Connector 60">
-                <a:extLst>
-                  <a:ext uri="{FF2B5EF4-FFF2-40B4-BE49-F238E27FC236}">
-                    <a16:creationId xmlns:a16="http://schemas.microsoft.com/office/drawing/2014/main" id="{5C9971C2-04A2-4FD6-98D0-B7073996A398}"/>
-                  </a:ext>
-                  <a:ext uri="{C183D7F6-B498-43B3-948B-1728B52AA6E4}">
-                    <adec:decorative xmlns:adec="http://schemas.microsoft.com/office/drawing/2017/decorative" val="1"/>
-                  </a:ext>
-                </a:extLst>
-              </p:cNvPr>
-              <p:cNvCxnSpPr/>
-              <p:nvPr>
-                <p:extLst>
-                  <p:ext uri="{386F3935-93C4-4BCD-93E2-E3B085C9AB24}">
-                    <p16:designElem xmlns:p16="http://schemas.microsoft.com/office/powerpoint/2015/main" val="1"/>
-                  </p:ext>
-                </p:extLst>
-              </p:nvPr>
-            </p:nvCxnSpPr>
-            <p:spPr>
-              <a:xfrm rot="-2880000" flipH="1">
-                <a:off x="6617467" y="1429423"/>
-                <a:ext cx="3394" cy="182880"/>
-              </a:xfrm>
-              <a:prstGeom prst="line">
-                <a:avLst/>
-              </a:prstGeom>
-              <a:ln>
-                <a:solidFill>
-                  <a:srgbClr val="FFFFFF">
-                    <a:alpha val="30196"/>
-                  </a:srgbClr>
-                </a:solidFill>
-              </a:ln>
-            </p:spPr>
-            <p:style>
-              <a:lnRef idx="1">
-                <a:schemeClr val="accent1"/>
-              </a:lnRef>
-              <a:fillRef idx="0">
-                <a:schemeClr val="accent1"/>
-              </a:fillRef>
-              <a:effectRef idx="0">
-                <a:schemeClr val="accent1"/>
-              </a:effectRef>
-              <a:fontRef idx="minor">
-                <a:schemeClr val="tx1"/>
-              </a:fontRef>
-            </p:style>
-          </p:cxnSp>
-          <p:cxnSp>
-            <p:nvCxnSpPr>
-              <p:cNvPr id="62" name="Straight Connector 61">
-                <a:extLst>
-                  <a:ext uri="{FF2B5EF4-FFF2-40B4-BE49-F238E27FC236}">
-                    <a16:creationId xmlns:a16="http://schemas.microsoft.com/office/drawing/2014/main" id="{62C046FF-0BD4-41DD-94DF-29CEE8F889D6}"/>
-                  </a:ext>
-                  <a:ext uri="{C183D7F6-B498-43B3-948B-1728B52AA6E4}">
-                    <adec:decorative xmlns:adec="http://schemas.microsoft.com/office/drawing/2017/decorative" val="1"/>
-                  </a:ext>
-                </a:extLst>
-              </p:cNvPr>
-              <p:cNvCxnSpPr/>
-              <p:nvPr>
-                <p:extLst>
-                  <p:ext uri="{386F3935-93C4-4BCD-93E2-E3B085C9AB24}">
-                    <p16:designElem xmlns:p16="http://schemas.microsoft.com/office/powerpoint/2015/main" val="1"/>
-                  </p:ext>
-                </p:extLst>
-              </p:nvPr>
-            </p:nvCxnSpPr>
-            <p:spPr>
-              <a:xfrm rot="-3000000" flipH="1">
-                <a:off x="6520032" y="1527285"/>
-                <a:ext cx="3394" cy="182880"/>
-              </a:xfrm>
-              <a:prstGeom prst="line">
-                <a:avLst/>
-              </a:prstGeom>
-              <a:ln>
-                <a:solidFill>
-                  <a:srgbClr val="FFFFFF">
-                    <a:alpha val="30196"/>
-                  </a:srgbClr>
-                </a:solidFill>
-              </a:ln>
-            </p:spPr>
-            <p:style>
-              <a:lnRef idx="1">
-                <a:schemeClr val="accent1"/>
-              </a:lnRef>
-              <a:fillRef idx="0">
-                <a:schemeClr val="accent1"/>
-              </a:fillRef>
-              <a:effectRef idx="0">
-                <a:schemeClr val="accent1"/>
-              </a:effectRef>
-              <a:fontRef idx="minor">
-                <a:schemeClr val="tx1"/>
-              </a:fontRef>
-            </p:style>
-          </p:cxnSp>
-          <p:cxnSp>
-            <p:nvCxnSpPr>
-              <p:cNvPr id="63" name="Straight Connector 62">
-                <a:extLst>
-                  <a:ext uri="{FF2B5EF4-FFF2-40B4-BE49-F238E27FC236}">
-                    <a16:creationId xmlns:a16="http://schemas.microsoft.com/office/drawing/2014/main" id="{CEE25D21-6A38-45D8-B01C-E31EF664E5DF}"/>
-                  </a:ext>
-                  <a:ext uri="{C183D7F6-B498-43B3-948B-1728B52AA6E4}">
-                    <adec:decorative xmlns:adec="http://schemas.microsoft.com/office/drawing/2017/decorative" val="1"/>
-                  </a:ext>
-                </a:extLst>
-              </p:cNvPr>
-              <p:cNvCxnSpPr/>
-              <p:nvPr>
-                <p:extLst>
-                  <p:ext uri="{386F3935-93C4-4BCD-93E2-E3B085C9AB24}">
-                    <p16:designElem xmlns:p16="http://schemas.microsoft.com/office/powerpoint/2015/main" val="1"/>
-                  </p:ext>
-                </p:extLst>
-              </p:nvPr>
-            </p:nvCxnSpPr>
-            <p:spPr>
-              <a:xfrm rot="-3120000" flipH="1">
-                <a:off x="6429579" y="1641610"/>
-                <a:ext cx="3394" cy="182880"/>
-              </a:xfrm>
-              <a:prstGeom prst="line">
-                <a:avLst/>
-              </a:prstGeom>
-              <a:ln>
-                <a:solidFill>
-                  <a:srgbClr val="FFFFFF">
-                    <a:alpha val="30196"/>
-                  </a:srgbClr>
-                </a:solidFill>
-              </a:ln>
-            </p:spPr>
-            <p:style>
-              <a:lnRef idx="1">
-                <a:schemeClr val="accent1"/>
-              </a:lnRef>
-              <a:fillRef idx="0">
-                <a:schemeClr val="accent1"/>
-              </a:fillRef>
-              <a:effectRef idx="0">
-                <a:schemeClr val="accent1"/>
-              </a:effectRef>
-              <a:fontRef idx="minor">
-                <a:schemeClr val="tx1"/>
-              </a:fontRef>
-            </p:style>
-          </p:cxnSp>
-          <p:cxnSp>
-            <p:nvCxnSpPr>
-              <p:cNvPr id="64" name="Straight Connector 63">
-                <a:extLst>
-                  <a:ext uri="{FF2B5EF4-FFF2-40B4-BE49-F238E27FC236}">
-                    <a16:creationId xmlns:a16="http://schemas.microsoft.com/office/drawing/2014/main" id="{F622EE14-7B3C-448B-A043-BC43658EC216}"/>
-                  </a:ext>
-                  <a:ext uri="{C183D7F6-B498-43B3-948B-1728B52AA6E4}">
-                    <adec:decorative xmlns:adec="http://schemas.microsoft.com/office/drawing/2017/decorative" val="1"/>
-                  </a:ext>
-                </a:extLst>
-              </p:cNvPr>
-              <p:cNvCxnSpPr/>
-              <p:nvPr>
-                <p:extLst>
-                  <p:ext uri="{386F3935-93C4-4BCD-93E2-E3B085C9AB24}">
-                    <p16:designElem xmlns:p16="http://schemas.microsoft.com/office/powerpoint/2015/main" val="1"/>
-                  </p:ext>
-                </p:extLst>
-              </p:nvPr>
-            </p:nvCxnSpPr>
-            <p:spPr>
-              <a:xfrm rot="-3240000" flipH="1">
-                <a:off x="6340532" y="1750423"/>
-                <a:ext cx="3394" cy="182880"/>
-              </a:xfrm>
-              <a:prstGeom prst="line">
-                <a:avLst/>
-              </a:prstGeom>
-              <a:ln>
-                <a:solidFill>
-                  <a:srgbClr val="FFFFFF">
-                    <a:alpha val="30196"/>
-                  </a:srgbClr>
-                </a:solidFill>
-              </a:ln>
-            </p:spPr>
-            <p:style>
-              <a:lnRef idx="1">
-                <a:schemeClr val="accent1"/>
-              </a:lnRef>
-              <a:fillRef idx="0">
-                <a:schemeClr val="accent1"/>
-              </a:fillRef>
-              <a:effectRef idx="0">
-                <a:schemeClr val="accent1"/>
-              </a:effectRef>
-              <a:fontRef idx="minor">
-                <a:schemeClr val="tx1"/>
-              </a:fontRef>
-            </p:style>
-          </p:cxnSp>
-          <p:cxnSp>
-            <p:nvCxnSpPr>
-              <p:cNvPr id="65" name="Straight Connector 64">
-                <a:extLst>
-                  <a:ext uri="{FF2B5EF4-FFF2-40B4-BE49-F238E27FC236}">
-                    <a16:creationId xmlns:a16="http://schemas.microsoft.com/office/drawing/2014/main" id="{5BEE20CD-3E74-4C3F-AA60-C563417D212E}"/>
-                  </a:ext>
-                  <a:ext uri="{C183D7F6-B498-43B3-948B-1728B52AA6E4}">
-                    <adec:decorative xmlns:adec="http://schemas.microsoft.com/office/drawing/2017/decorative" val="1"/>
-                  </a:ext>
-                </a:extLst>
-              </p:cNvPr>
-              <p:cNvCxnSpPr/>
-              <p:nvPr>
-                <p:extLst>
-                  <p:ext uri="{386F3935-93C4-4BCD-93E2-E3B085C9AB24}">
-                    <p16:designElem xmlns:p16="http://schemas.microsoft.com/office/powerpoint/2015/main" val="1"/>
-                  </p:ext>
-                </p:extLst>
-              </p:nvPr>
-            </p:nvCxnSpPr>
-            <p:spPr>
-              <a:xfrm rot="-3420000" flipH="1">
-                <a:off x="6261757" y="1860178"/>
-                <a:ext cx="3394" cy="182880"/>
-              </a:xfrm>
-              <a:prstGeom prst="line">
-                <a:avLst/>
-              </a:prstGeom>
-              <a:ln>
-                <a:solidFill>
-                  <a:srgbClr val="FFFFFF">
-                    <a:alpha val="30196"/>
-                  </a:srgbClr>
-                </a:solidFill>
-              </a:ln>
-            </p:spPr>
-            <p:style>
-              <a:lnRef idx="1">
-                <a:schemeClr val="accent1"/>
-              </a:lnRef>
-              <a:fillRef idx="0">
-                <a:schemeClr val="accent1"/>
-              </a:fillRef>
-              <a:effectRef idx="0">
-                <a:schemeClr val="accent1"/>
-              </a:effectRef>
-              <a:fontRef idx="minor">
-                <a:schemeClr val="tx1"/>
-              </a:fontRef>
-            </p:style>
-          </p:cxnSp>
-          <p:cxnSp>
-            <p:nvCxnSpPr>
-              <p:cNvPr id="66" name="Straight Connector 65">
-                <a:extLst>
-                  <a:ext uri="{FF2B5EF4-FFF2-40B4-BE49-F238E27FC236}">
-                    <a16:creationId xmlns:a16="http://schemas.microsoft.com/office/drawing/2014/main" id="{BC4BDE27-36BB-412B-BC30-B29F24D4663C}"/>
-                  </a:ext>
-                  <a:ext uri="{C183D7F6-B498-43B3-948B-1728B52AA6E4}">
-                    <adec:decorative xmlns:adec="http://schemas.microsoft.com/office/drawing/2017/decorative" val="1"/>
-                  </a:ext>
-                </a:extLst>
-              </p:cNvPr>
-              <p:cNvCxnSpPr/>
-              <p:nvPr>
-                <p:extLst>
-                  <p:ext uri="{386F3935-93C4-4BCD-93E2-E3B085C9AB24}">
-                    <p16:designElem xmlns:p16="http://schemas.microsoft.com/office/powerpoint/2015/main" val="1"/>
-                  </p:ext>
-                </p:extLst>
-              </p:nvPr>
-            </p:nvCxnSpPr>
-            <p:spPr>
-              <a:xfrm rot="-3540000" flipH="1">
-                <a:off x="6184144" y="1979619"/>
-                <a:ext cx="3394" cy="182880"/>
-              </a:xfrm>
-              <a:prstGeom prst="line">
-                <a:avLst/>
-              </a:prstGeom>
-              <a:ln>
-                <a:solidFill>
-                  <a:srgbClr val="FFFFFF">
-                    <a:alpha val="30196"/>
-                  </a:srgbClr>
-                </a:solidFill>
-              </a:ln>
-            </p:spPr>
-            <p:style>
-              <a:lnRef idx="1">
-                <a:schemeClr val="accent1"/>
-              </a:lnRef>
-              <a:fillRef idx="0">
-                <a:schemeClr val="accent1"/>
-              </a:fillRef>
-              <a:effectRef idx="0">
-                <a:schemeClr val="accent1"/>
-              </a:effectRef>
-              <a:fontRef idx="minor">
-                <a:schemeClr val="tx1"/>
-              </a:fontRef>
-            </p:style>
-          </p:cxnSp>
-          <p:cxnSp>
-            <p:nvCxnSpPr>
-              <p:cNvPr id="67" name="Straight Connector 66">
-                <a:extLst>
-                  <a:ext uri="{FF2B5EF4-FFF2-40B4-BE49-F238E27FC236}">
-                    <a16:creationId xmlns:a16="http://schemas.microsoft.com/office/drawing/2014/main" id="{A21127E0-675A-4618-9A07-FE8C1E626824}"/>
-                  </a:ext>
-                  <a:ext uri="{C183D7F6-B498-43B3-948B-1728B52AA6E4}">
-                    <adec:decorative xmlns:adec="http://schemas.microsoft.com/office/drawing/2017/decorative" val="1"/>
-                  </a:ext>
-                </a:extLst>
-              </p:cNvPr>
-              <p:cNvCxnSpPr/>
-              <p:nvPr>
-                <p:extLst>
-                  <p:ext uri="{386F3935-93C4-4BCD-93E2-E3B085C9AB24}">
-                    <p16:designElem xmlns:p16="http://schemas.microsoft.com/office/powerpoint/2015/main" val="1"/>
-                  </p:ext>
-                </p:extLst>
-              </p:nvPr>
-            </p:nvCxnSpPr>
-            <p:spPr>
-              <a:xfrm rot="-3660000" flipH="1">
-                <a:off x="6106531" y="2099060"/>
-                <a:ext cx="3394" cy="182880"/>
-              </a:xfrm>
-              <a:prstGeom prst="line">
-                <a:avLst/>
-              </a:prstGeom>
-              <a:ln>
-                <a:solidFill>
-                  <a:srgbClr val="FFFFFF">
-                    <a:alpha val="30196"/>
-                  </a:srgbClr>
-                </a:solidFill>
-              </a:ln>
-            </p:spPr>
-            <p:style>
-              <a:lnRef idx="1">
-                <a:schemeClr val="accent1"/>
-              </a:lnRef>
-              <a:fillRef idx="0">
-                <a:schemeClr val="accent1"/>
-              </a:fillRef>
-              <a:effectRef idx="0">
-                <a:schemeClr val="accent1"/>
-              </a:effectRef>
-              <a:fontRef idx="minor">
-                <a:schemeClr val="tx1"/>
-              </a:fontRef>
-            </p:style>
-          </p:cxnSp>
-          <p:cxnSp>
-            <p:nvCxnSpPr>
-              <p:cNvPr id="68" name="Straight Connector 67">
-                <a:extLst>
-                  <a:ext uri="{FF2B5EF4-FFF2-40B4-BE49-F238E27FC236}">
-                    <a16:creationId xmlns:a16="http://schemas.microsoft.com/office/drawing/2014/main" id="{2AAA0CF5-A5AD-4480-A771-6DC7CEFAE73B}"/>
-                  </a:ext>
-                  <a:ext uri="{C183D7F6-B498-43B3-948B-1728B52AA6E4}">
-                    <adec:decorative xmlns:adec="http://schemas.microsoft.com/office/drawing/2017/decorative" val="1"/>
-                  </a:ext>
-                </a:extLst>
-              </p:cNvPr>
-              <p:cNvCxnSpPr/>
-              <p:nvPr>
-                <p:extLst>
-                  <p:ext uri="{386F3935-93C4-4BCD-93E2-E3B085C9AB24}">
-                    <p16:designElem xmlns:p16="http://schemas.microsoft.com/office/powerpoint/2015/main" val="1"/>
-                  </p:ext>
-                </p:extLst>
-              </p:nvPr>
-            </p:nvCxnSpPr>
-            <p:spPr>
-              <a:xfrm rot="-3780000" flipH="1">
-                <a:off x="6043206" y="2222556"/>
-                <a:ext cx="3394" cy="182880"/>
-              </a:xfrm>
-              <a:prstGeom prst="line">
-                <a:avLst/>
-              </a:prstGeom>
-              <a:ln>
-                <a:solidFill>
-                  <a:srgbClr val="FFFFFF">
-                    <a:alpha val="30196"/>
-                  </a:srgbClr>
-                </a:solidFill>
-              </a:ln>
-            </p:spPr>
-            <p:style>
-              <a:lnRef idx="1">
-                <a:schemeClr val="accent1"/>
-              </a:lnRef>
-              <a:fillRef idx="0">
-                <a:schemeClr val="accent1"/>
-              </a:fillRef>
-              <a:effectRef idx="0">
-                <a:schemeClr val="accent1"/>
-              </a:effectRef>
-              <a:fontRef idx="minor">
-                <a:schemeClr val="tx1"/>
-              </a:fontRef>
-            </p:style>
-          </p:cxnSp>
-          <p:cxnSp>
-            <p:nvCxnSpPr>
-              <p:cNvPr id="69" name="Straight Connector 68">
-                <a:extLst>
-                  <a:ext uri="{FF2B5EF4-FFF2-40B4-BE49-F238E27FC236}">
-                    <a16:creationId xmlns:a16="http://schemas.microsoft.com/office/drawing/2014/main" id="{D9445CFB-F018-4FD9-9326-F900B781B2ED}"/>
-                  </a:ext>
-                  <a:ext uri="{C183D7F6-B498-43B3-948B-1728B52AA6E4}">
-                    <adec:decorative xmlns:adec="http://schemas.microsoft.com/office/drawing/2017/decorative" val="1"/>
-                  </a:ext>
-                </a:extLst>
-              </p:cNvPr>
-              <p:cNvCxnSpPr/>
-              <p:nvPr>
-                <p:extLst>
-                  <p:ext uri="{386F3935-93C4-4BCD-93E2-E3B085C9AB24}">
-                    <p16:designElem xmlns:p16="http://schemas.microsoft.com/office/powerpoint/2015/main" val="1"/>
-                  </p:ext>
-                </p:extLst>
-              </p:nvPr>
-            </p:nvCxnSpPr>
-            <p:spPr>
-              <a:xfrm rot="-3960000" flipH="1">
-                <a:off x="5978913" y="2344301"/>
-                <a:ext cx="3394" cy="182880"/>
-              </a:xfrm>
-              <a:prstGeom prst="line">
-                <a:avLst/>
-              </a:prstGeom>
-              <a:ln>
-                <a:solidFill>
-                  <a:srgbClr val="FFFFFF">
-                    <a:alpha val="30196"/>
-                  </a:srgbClr>
-                </a:solidFill>
-              </a:ln>
-            </p:spPr>
-            <p:style>
-              <a:lnRef idx="1">
-                <a:schemeClr val="accent1"/>
-              </a:lnRef>
-              <a:fillRef idx="0">
-                <a:schemeClr val="accent1"/>
-              </a:fillRef>
-              <a:effectRef idx="0">
-                <a:schemeClr val="accent1"/>
-              </a:effectRef>
-              <a:fontRef idx="minor">
-                <a:schemeClr val="tx1"/>
-              </a:fontRef>
-            </p:style>
-          </p:cxnSp>
-          <p:cxnSp>
-            <p:nvCxnSpPr>
-              <p:cNvPr id="70" name="Straight Connector 69">
-                <a:extLst>
-                  <a:ext uri="{FF2B5EF4-FFF2-40B4-BE49-F238E27FC236}">
-                    <a16:creationId xmlns:a16="http://schemas.microsoft.com/office/drawing/2014/main" id="{4B273038-DE20-491F-9939-BC0CD44053F0}"/>
-                  </a:ext>
-                  <a:ext uri="{C183D7F6-B498-43B3-948B-1728B52AA6E4}">
-                    <adec:decorative xmlns:adec="http://schemas.microsoft.com/office/drawing/2017/decorative" val="1"/>
-                  </a:ext>
-                </a:extLst>
-              </p:cNvPr>
-              <p:cNvCxnSpPr/>
-              <p:nvPr>
-                <p:extLst>
-                  <p:ext uri="{386F3935-93C4-4BCD-93E2-E3B085C9AB24}">
-                    <p16:designElem xmlns:p16="http://schemas.microsoft.com/office/powerpoint/2015/main" val="1"/>
-                  </p:ext>
-                </p:extLst>
-              </p:nvPr>
-            </p:nvCxnSpPr>
-            <p:spPr>
-              <a:xfrm rot="-4080000" flipH="1">
-                <a:off x="5912438" y="2470678"/>
-                <a:ext cx="3394" cy="182880"/>
-              </a:xfrm>
-              <a:prstGeom prst="line">
-                <a:avLst/>
-              </a:prstGeom>
-              <a:ln>
-                <a:solidFill>
-                  <a:srgbClr val="FFFFFF">
-                    <a:alpha val="30196"/>
-                  </a:srgbClr>
-                </a:solidFill>
-              </a:ln>
-            </p:spPr>
-            <p:style>
-              <a:lnRef idx="1">
-                <a:schemeClr val="accent1"/>
-              </a:lnRef>
-              <a:fillRef idx="0">
-                <a:schemeClr val="accent1"/>
-              </a:fillRef>
-              <a:effectRef idx="0">
-                <a:schemeClr val="accent1"/>
-              </a:effectRef>
-              <a:fontRef idx="minor">
-                <a:schemeClr val="tx1"/>
-              </a:fontRef>
-            </p:style>
-          </p:cxnSp>
-          <p:cxnSp>
-            <p:nvCxnSpPr>
-              <p:cNvPr id="71" name="Straight Connector 70">
-                <a:extLst>
-                  <a:ext uri="{FF2B5EF4-FFF2-40B4-BE49-F238E27FC236}">
-                    <a16:creationId xmlns:a16="http://schemas.microsoft.com/office/drawing/2014/main" id="{A0D9CBA9-FF19-4776-AC11-BAE91D68E375}"/>
-                  </a:ext>
-                  <a:ext uri="{C183D7F6-B498-43B3-948B-1728B52AA6E4}">
-                    <adec:decorative xmlns:adec="http://schemas.microsoft.com/office/drawing/2017/decorative" val="1"/>
-                  </a:ext>
-                </a:extLst>
-              </p:cNvPr>
-              <p:cNvCxnSpPr/>
-              <p:nvPr>
-                <p:extLst>
-                  <p:ext uri="{386F3935-93C4-4BCD-93E2-E3B085C9AB24}">
-                    <p16:designElem xmlns:p16="http://schemas.microsoft.com/office/powerpoint/2015/main" val="1"/>
-                  </p:ext>
-                </p:extLst>
-              </p:nvPr>
-            </p:nvCxnSpPr>
-            <p:spPr>
-              <a:xfrm rot="-4200000" flipH="1">
-                <a:off x="5858875" y="2600922"/>
-                <a:ext cx="3394" cy="182880"/>
-              </a:xfrm>
-              <a:prstGeom prst="line">
-                <a:avLst/>
-              </a:prstGeom>
-              <a:ln>
-                <a:solidFill>
-                  <a:srgbClr val="FFFFFF">
-                    <a:alpha val="30196"/>
-                  </a:srgbClr>
-                </a:solidFill>
-              </a:ln>
-            </p:spPr>
-            <p:style>
-              <a:lnRef idx="1">
-                <a:schemeClr val="accent1"/>
-              </a:lnRef>
-              <a:fillRef idx="0">
-                <a:schemeClr val="accent1"/>
-              </a:fillRef>
-              <a:effectRef idx="0">
-                <a:schemeClr val="accent1"/>
-              </a:effectRef>
-              <a:fontRef idx="minor">
-                <a:schemeClr val="tx1"/>
-              </a:fontRef>
-            </p:style>
-          </p:cxnSp>
-          <p:cxnSp>
-            <p:nvCxnSpPr>
-              <p:cNvPr id="72" name="Straight Connector 71">
-                <a:extLst>
-                  <a:ext uri="{FF2B5EF4-FFF2-40B4-BE49-F238E27FC236}">
-                    <a16:creationId xmlns:a16="http://schemas.microsoft.com/office/drawing/2014/main" id="{C3644A66-F98B-47AA-8254-41D0259C373B}"/>
-                  </a:ext>
-                  <a:ext uri="{C183D7F6-B498-43B3-948B-1728B52AA6E4}">
-                    <adec:decorative xmlns:adec="http://schemas.microsoft.com/office/drawing/2017/decorative" val="1"/>
-                  </a:ext>
-                </a:extLst>
-              </p:cNvPr>
-              <p:cNvCxnSpPr/>
-              <p:nvPr>
-                <p:extLst>
-                  <p:ext uri="{386F3935-93C4-4BCD-93E2-E3B085C9AB24}">
-                    <p16:designElem xmlns:p16="http://schemas.microsoft.com/office/powerpoint/2015/main" val="1"/>
-                  </p:ext>
-                </p:extLst>
-              </p:nvPr>
-            </p:nvCxnSpPr>
-            <p:spPr>
-              <a:xfrm rot="-4320000" flipH="1">
-                <a:off x="5808182" y="2734040"/>
-                <a:ext cx="3394" cy="182880"/>
-              </a:xfrm>
-              <a:prstGeom prst="line">
-                <a:avLst/>
-              </a:prstGeom>
-              <a:ln>
-                <a:solidFill>
-                  <a:srgbClr val="FFFFFF">
-                    <a:alpha val="30196"/>
-                  </a:srgbClr>
-                </a:solidFill>
-              </a:ln>
-            </p:spPr>
-            <p:style>
-              <a:lnRef idx="1">
-                <a:schemeClr val="accent1"/>
-              </a:lnRef>
-              <a:fillRef idx="0">
-                <a:schemeClr val="accent1"/>
-              </a:fillRef>
-              <a:effectRef idx="0">
-                <a:schemeClr val="accent1"/>
-              </a:effectRef>
-              <a:fontRef idx="minor">
-                <a:schemeClr val="tx1"/>
-              </a:fontRef>
-            </p:style>
-          </p:cxnSp>
-          <p:cxnSp>
-            <p:nvCxnSpPr>
-              <p:cNvPr id="73" name="Straight Connector 72">
-                <a:extLst>
-                  <a:ext uri="{FF2B5EF4-FFF2-40B4-BE49-F238E27FC236}">
-                    <a16:creationId xmlns:a16="http://schemas.microsoft.com/office/drawing/2014/main" id="{5A71F829-705B-4DEF-8017-30AA98B2F90A}"/>
-                  </a:ext>
-                  <a:ext uri="{C183D7F6-B498-43B3-948B-1728B52AA6E4}">
-                    <adec:decorative xmlns:adec="http://schemas.microsoft.com/office/drawing/2017/decorative" val="1"/>
-                  </a:ext>
-                </a:extLst>
-              </p:cNvPr>
-              <p:cNvCxnSpPr/>
-              <p:nvPr>
-                <p:extLst>
-                  <p:ext uri="{386F3935-93C4-4BCD-93E2-E3B085C9AB24}">
-                    <p16:designElem xmlns:p16="http://schemas.microsoft.com/office/powerpoint/2015/main" val="1"/>
-                  </p:ext>
-                </p:extLst>
-              </p:nvPr>
-            </p:nvCxnSpPr>
-            <p:spPr>
-              <a:xfrm rot="-4500000" flipH="1">
-                <a:off x="5773263" y="2866860"/>
-                <a:ext cx="3394" cy="182880"/>
-              </a:xfrm>
-              <a:prstGeom prst="line">
-                <a:avLst/>
-              </a:prstGeom>
-              <a:ln>
-                <a:solidFill>
-                  <a:srgbClr val="FFFFFF">
-                    <a:alpha val="30196"/>
-                  </a:srgbClr>
-                </a:solidFill>
-              </a:ln>
-            </p:spPr>
-            <p:style>
-              <a:lnRef idx="1">
-                <a:schemeClr val="accent1"/>
-              </a:lnRef>
-              <a:fillRef idx="0">
-                <a:schemeClr val="accent1"/>
-              </a:fillRef>
-              <a:effectRef idx="0">
-                <a:schemeClr val="accent1"/>
-              </a:effectRef>
-              <a:fontRef idx="minor">
-                <a:schemeClr val="tx1"/>
-              </a:fontRef>
-            </p:style>
-          </p:cxnSp>
-          <p:cxnSp>
-            <p:nvCxnSpPr>
-              <p:cNvPr id="74" name="Straight Connector 73">
-                <a:extLst>
-                  <a:ext uri="{FF2B5EF4-FFF2-40B4-BE49-F238E27FC236}">
-                    <a16:creationId xmlns:a16="http://schemas.microsoft.com/office/drawing/2014/main" id="{9ADB28A1-8EE2-4ACB-BD6A-613AE6B667E8}"/>
-                  </a:ext>
-                  <a:ext uri="{C183D7F6-B498-43B3-948B-1728B52AA6E4}">
-                    <adec:decorative xmlns:adec="http://schemas.microsoft.com/office/drawing/2017/decorative" val="1"/>
-                  </a:ext>
-                </a:extLst>
-              </p:cNvPr>
-              <p:cNvCxnSpPr/>
-              <p:nvPr>
-                <p:extLst>
-                  <p:ext uri="{386F3935-93C4-4BCD-93E2-E3B085C9AB24}">
-                    <p16:designElem xmlns:p16="http://schemas.microsoft.com/office/powerpoint/2015/main" val="1"/>
-                  </p:ext>
-                </p:extLst>
-              </p:nvPr>
-            </p:nvCxnSpPr>
-            <p:spPr>
-              <a:xfrm rot="-4620000" flipH="1">
-                <a:off x="5735963" y="3002061"/>
-                <a:ext cx="3394" cy="182880"/>
-              </a:xfrm>
-              <a:prstGeom prst="line">
-                <a:avLst/>
-              </a:prstGeom>
-              <a:ln>
-                <a:solidFill>
-                  <a:srgbClr val="FFFFFF">
-                    <a:alpha val="30196"/>
-                  </a:srgbClr>
-                </a:solidFill>
-              </a:ln>
-            </p:spPr>
-            <p:style>
-              <a:lnRef idx="1">
-                <a:schemeClr val="accent1"/>
-              </a:lnRef>
-              <a:fillRef idx="0">
-                <a:schemeClr val="accent1"/>
-              </a:fillRef>
-              <a:effectRef idx="0">
-                <a:schemeClr val="accent1"/>
-              </a:effectRef>
-              <a:fontRef idx="minor">
-                <a:schemeClr val="tx1"/>
-              </a:fontRef>
-            </p:style>
-          </p:cxnSp>
-          <p:cxnSp>
-            <p:nvCxnSpPr>
-              <p:cNvPr id="75" name="Straight Connector 74">
-                <a:extLst>
-                  <a:ext uri="{FF2B5EF4-FFF2-40B4-BE49-F238E27FC236}">
-                    <a16:creationId xmlns:a16="http://schemas.microsoft.com/office/drawing/2014/main" id="{5B03F8C3-1989-4AF2-8B5A-E4F826CDC0E1}"/>
-                  </a:ext>
-                  <a:ext uri="{C183D7F6-B498-43B3-948B-1728B52AA6E4}">
-                    <adec:decorative xmlns:adec="http://schemas.microsoft.com/office/drawing/2017/decorative" val="1"/>
-                  </a:ext>
-                </a:extLst>
-              </p:cNvPr>
-              <p:cNvCxnSpPr/>
-              <p:nvPr>
-                <p:extLst>
-                  <p:ext uri="{386F3935-93C4-4BCD-93E2-E3B085C9AB24}">
-                    <p16:designElem xmlns:p16="http://schemas.microsoft.com/office/powerpoint/2015/main" val="1"/>
-                  </p:ext>
-                </p:extLst>
-              </p:nvPr>
-            </p:nvCxnSpPr>
-            <p:spPr>
-              <a:xfrm rot="-4740000" flipH="1">
-                <a:off x="5700105" y="3138910"/>
-                <a:ext cx="3394" cy="182880"/>
-              </a:xfrm>
-              <a:prstGeom prst="line">
-                <a:avLst/>
-              </a:prstGeom>
-              <a:ln>
-                <a:solidFill>
-                  <a:srgbClr val="FFFFFF">
-                    <a:alpha val="30196"/>
-                  </a:srgbClr>
-                </a:solidFill>
-              </a:ln>
-            </p:spPr>
-            <p:style>
-              <a:lnRef idx="1">
-                <a:schemeClr val="accent1"/>
-              </a:lnRef>
-              <a:fillRef idx="0">
-                <a:schemeClr val="accent1"/>
-              </a:fillRef>
-              <a:effectRef idx="0">
-                <a:schemeClr val="accent1"/>
-              </a:effectRef>
-              <a:fontRef idx="minor">
-                <a:schemeClr val="tx1"/>
-              </a:fontRef>
-            </p:style>
-          </p:cxnSp>
-          <p:cxnSp>
-            <p:nvCxnSpPr>
-              <p:cNvPr id="76" name="Straight Connector 75">
-                <a:extLst>
-                  <a:ext uri="{FF2B5EF4-FFF2-40B4-BE49-F238E27FC236}">
-                    <a16:creationId xmlns:a16="http://schemas.microsoft.com/office/drawing/2014/main" id="{48911BCB-1DB5-47AB-81D0-8ECC55AD4ADF}"/>
-                  </a:ext>
-                  <a:ext uri="{C183D7F6-B498-43B3-948B-1728B52AA6E4}">
-                    <adec:decorative xmlns:adec="http://schemas.microsoft.com/office/drawing/2017/decorative" val="1"/>
-                  </a:ext>
-                </a:extLst>
-              </p:cNvPr>
-              <p:cNvCxnSpPr/>
-              <p:nvPr>
-                <p:extLst>
-                  <p:ext uri="{386F3935-93C4-4BCD-93E2-E3B085C9AB24}">
-                    <p16:designElem xmlns:p16="http://schemas.microsoft.com/office/powerpoint/2015/main" val="1"/>
-                  </p:ext>
-                </p:extLst>
-              </p:nvPr>
-            </p:nvCxnSpPr>
-            <p:spPr>
-              <a:xfrm rot="-4860000" flipH="1">
-                <a:off x="5665939" y="3275489"/>
-                <a:ext cx="3394" cy="182880"/>
-              </a:xfrm>
-              <a:prstGeom prst="line">
-                <a:avLst/>
-              </a:prstGeom>
-              <a:ln>
-                <a:solidFill>
-                  <a:srgbClr val="FFFFFF">
-                    <a:alpha val="30196"/>
-                  </a:srgbClr>
-                </a:solidFill>
-              </a:ln>
-            </p:spPr>
-            <p:style>
-              <a:lnRef idx="1">
-                <a:schemeClr val="accent1"/>
-              </a:lnRef>
-              <a:fillRef idx="0">
-                <a:schemeClr val="accent1"/>
-              </a:fillRef>
-              <a:effectRef idx="0">
-                <a:schemeClr val="accent1"/>
-              </a:effectRef>
-              <a:fontRef idx="minor">
-                <a:schemeClr val="tx1"/>
-              </a:fontRef>
-            </p:style>
-          </p:cxnSp>
-          <p:cxnSp>
-            <p:nvCxnSpPr>
-              <p:cNvPr id="77" name="Straight Connector 76">
-                <a:extLst>
-                  <a:ext uri="{FF2B5EF4-FFF2-40B4-BE49-F238E27FC236}">
-                    <a16:creationId xmlns:a16="http://schemas.microsoft.com/office/drawing/2014/main" id="{7C953592-A4AB-4B66-B56C-E7E55375F04B}"/>
-                  </a:ext>
-                  <a:ext uri="{C183D7F6-B498-43B3-948B-1728B52AA6E4}">
-                    <adec:decorative xmlns:adec="http://schemas.microsoft.com/office/drawing/2017/decorative" val="1"/>
-                  </a:ext>
-                </a:extLst>
-              </p:cNvPr>
-              <p:cNvCxnSpPr/>
-              <p:nvPr>
-                <p:extLst>
-                  <p:ext uri="{386F3935-93C4-4BCD-93E2-E3B085C9AB24}">
-                    <p16:designElem xmlns:p16="http://schemas.microsoft.com/office/powerpoint/2015/main" val="1"/>
-                  </p:ext>
-                </p:extLst>
-              </p:nvPr>
-            </p:nvCxnSpPr>
-            <p:spPr>
-              <a:xfrm rot="-5040000" flipH="1">
-                <a:off x="5644476" y="3414251"/>
-                <a:ext cx="3394" cy="182880"/>
-              </a:xfrm>
-              <a:prstGeom prst="line">
-                <a:avLst/>
-              </a:prstGeom>
-              <a:ln>
-                <a:solidFill>
-                  <a:srgbClr val="FFFFFF">
-                    <a:alpha val="30196"/>
-                  </a:srgbClr>
-                </a:solidFill>
-              </a:ln>
-            </p:spPr>
-            <p:style>
-              <a:lnRef idx="1">
-                <a:schemeClr val="accent1"/>
-              </a:lnRef>
-              <a:fillRef idx="0">
-                <a:schemeClr val="accent1"/>
-              </a:fillRef>
-              <a:effectRef idx="0">
-                <a:schemeClr val="accent1"/>
-              </a:effectRef>
-              <a:fontRef idx="minor">
-                <a:schemeClr val="tx1"/>
-              </a:fontRef>
-            </p:style>
-          </p:cxnSp>
-          <p:cxnSp>
-            <p:nvCxnSpPr>
-              <p:cNvPr id="78" name="Straight Connector 77">
-                <a:extLst>
-                  <a:ext uri="{FF2B5EF4-FFF2-40B4-BE49-F238E27FC236}">
-                    <a16:creationId xmlns:a16="http://schemas.microsoft.com/office/drawing/2014/main" id="{E06B32BB-10C9-47F7-942B-E68D388ACF78}"/>
-                  </a:ext>
-                  <a:ext uri="{C183D7F6-B498-43B3-948B-1728B52AA6E4}">
-                    <adec:decorative xmlns:adec="http://schemas.microsoft.com/office/drawing/2017/decorative" val="1"/>
-                  </a:ext>
-                </a:extLst>
-              </p:cNvPr>
-              <p:cNvCxnSpPr/>
-              <p:nvPr>
-                <p:extLst>
-                  <p:ext uri="{386F3935-93C4-4BCD-93E2-E3B085C9AB24}">
-                    <p16:designElem xmlns:p16="http://schemas.microsoft.com/office/powerpoint/2015/main" val="1"/>
-                  </p:ext>
-                </p:extLst>
-              </p:nvPr>
-            </p:nvCxnSpPr>
-            <p:spPr>
-              <a:xfrm rot="-5160000" flipH="1">
-                <a:off x="5626530" y="3554628"/>
-                <a:ext cx="3394" cy="182880"/>
-              </a:xfrm>
-              <a:prstGeom prst="line">
-                <a:avLst/>
-              </a:prstGeom>
-              <a:ln>
-                <a:solidFill>
-                  <a:srgbClr val="FFFFFF">
-                    <a:alpha val="30196"/>
-                  </a:srgbClr>
-                </a:solidFill>
-              </a:ln>
-            </p:spPr>
-            <p:style>
-              <a:lnRef idx="1">
-                <a:schemeClr val="accent1"/>
-              </a:lnRef>
-              <a:fillRef idx="0">
-                <a:schemeClr val="accent1"/>
-              </a:fillRef>
-              <a:effectRef idx="0">
-                <a:schemeClr val="accent1"/>
-              </a:effectRef>
-              <a:fontRef idx="minor">
-                <a:schemeClr val="tx1"/>
-              </a:fontRef>
-            </p:style>
-          </p:cxnSp>
-          <p:cxnSp>
-            <p:nvCxnSpPr>
-              <p:cNvPr id="79" name="Straight Connector 78">
-                <a:extLst>
-                  <a:ext uri="{FF2B5EF4-FFF2-40B4-BE49-F238E27FC236}">
-                    <a16:creationId xmlns:a16="http://schemas.microsoft.com/office/drawing/2014/main" id="{2A419952-02EB-45AF-844C-84FD5B3DEFA3}"/>
-                  </a:ext>
-                  <a:ext uri="{C183D7F6-B498-43B3-948B-1728B52AA6E4}">
-                    <adec:decorative xmlns:adec="http://schemas.microsoft.com/office/drawing/2017/decorative" val="1"/>
-                  </a:ext>
-                </a:extLst>
-              </p:cNvPr>
-              <p:cNvCxnSpPr/>
-              <p:nvPr>
-                <p:extLst>
-                  <p:ext uri="{386F3935-93C4-4BCD-93E2-E3B085C9AB24}">
-                    <p16:designElem xmlns:p16="http://schemas.microsoft.com/office/powerpoint/2015/main" val="1"/>
-                  </p:ext>
-                </p:extLst>
-              </p:nvPr>
-            </p:nvCxnSpPr>
-            <p:spPr>
-              <a:xfrm rot="-5280000" flipH="1">
-                <a:off x="5616429" y="3691831"/>
-                <a:ext cx="3394" cy="182880"/>
-              </a:xfrm>
-              <a:prstGeom prst="line">
-                <a:avLst/>
-              </a:prstGeom>
-              <a:ln>
-                <a:solidFill>
-                  <a:srgbClr val="FFFFFF">
-                    <a:alpha val="30196"/>
-                  </a:srgbClr>
-                </a:solidFill>
-              </a:ln>
-            </p:spPr>
-            <p:style>
-              <a:lnRef idx="1">
-                <a:schemeClr val="accent1"/>
-              </a:lnRef>
-              <a:fillRef idx="0">
-                <a:schemeClr val="accent1"/>
-              </a:fillRef>
-              <a:effectRef idx="0">
-                <a:schemeClr val="accent1"/>
-              </a:effectRef>
-              <a:fontRef idx="minor">
-                <a:schemeClr val="tx1"/>
-              </a:fontRef>
-            </p:style>
-          </p:cxnSp>
-          <p:cxnSp>
-            <p:nvCxnSpPr>
-              <p:cNvPr id="80" name="Straight Connector 79">
-                <a:extLst>
-                  <a:ext uri="{FF2B5EF4-FFF2-40B4-BE49-F238E27FC236}">
-                    <a16:creationId xmlns:a16="http://schemas.microsoft.com/office/drawing/2014/main" id="{765667A9-017B-4F63-B4C5-D34CE478FE0C}"/>
-                  </a:ext>
-                  <a:ext uri="{C183D7F6-B498-43B3-948B-1728B52AA6E4}">
-                    <adec:decorative xmlns:adec="http://schemas.microsoft.com/office/drawing/2017/decorative" val="1"/>
-                  </a:ext>
-                </a:extLst>
-              </p:cNvPr>
-              <p:cNvCxnSpPr/>
-              <p:nvPr>
-                <p:extLst>
-                  <p:ext uri="{386F3935-93C4-4BCD-93E2-E3B085C9AB24}">
-                    <p16:designElem xmlns:p16="http://schemas.microsoft.com/office/powerpoint/2015/main" val="1"/>
-                  </p:ext>
-                </p:extLst>
-              </p:nvPr>
-            </p:nvCxnSpPr>
-            <p:spPr>
-              <a:xfrm rot="-5400000" flipH="1">
-                <a:off x="5611319" y="3835374"/>
-                <a:ext cx="3394" cy="182880"/>
-              </a:xfrm>
-              <a:prstGeom prst="line">
-                <a:avLst/>
-              </a:prstGeom>
-              <a:ln>
-                <a:solidFill>
-                  <a:srgbClr val="FFFFFF">
-                    <a:alpha val="30196"/>
-                  </a:srgbClr>
-                </a:solidFill>
-              </a:ln>
-            </p:spPr>
-            <p:style>
-              <a:lnRef idx="1">
-                <a:schemeClr val="accent1"/>
-              </a:lnRef>
-              <a:fillRef idx="0">
-                <a:schemeClr val="accent1"/>
-              </a:fillRef>
-              <a:effectRef idx="0">
-                <a:schemeClr val="accent1"/>
-              </a:effectRef>
-              <a:fontRef idx="minor">
-                <a:schemeClr val="tx1"/>
-              </a:fontRef>
-            </p:style>
-          </p:cxnSp>
-          <p:cxnSp>
-            <p:nvCxnSpPr>
-              <p:cNvPr id="81" name="Straight Connector 80">
-                <a:extLst>
-                  <a:ext uri="{FF2B5EF4-FFF2-40B4-BE49-F238E27FC236}">
-                    <a16:creationId xmlns:a16="http://schemas.microsoft.com/office/drawing/2014/main" id="{7C992FC9-E7E7-428D-B82E-439AAF7C532D}"/>
-                  </a:ext>
-                  <a:ext uri="{C183D7F6-B498-43B3-948B-1728B52AA6E4}">
-                    <adec:decorative xmlns:adec="http://schemas.microsoft.com/office/drawing/2017/decorative" val="1"/>
-                  </a:ext>
-                </a:extLst>
-              </p:cNvPr>
-              <p:cNvCxnSpPr/>
-              <p:nvPr>
-                <p:extLst>
-                  <p:ext uri="{386F3935-93C4-4BCD-93E2-E3B085C9AB24}">
-                    <p16:designElem xmlns:p16="http://schemas.microsoft.com/office/powerpoint/2015/main" val="1"/>
-                  </p:ext>
-                </p:extLst>
-              </p:nvPr>
-            </p:nvCxnSpPr>
-            <p:spPr>
-              <a:xfrm rot="-5580000" flipH="1">
-                <a:off x="5608540" y="3975726"/>
-                <a:ext cx="3394" cy="182880"/>
-              </a:xfrm>
-              <a:prstGeom prst="line">
-                <a:avLst/>
-              </a:prstGeom>
-              <a:ln>
-                <a:solidFill>
-                  <a:srgbClr val="FFFFFF">
-                    <a:alpha val="30196"/>
-                  </a:srgbClr>
-                </a:solidFill>
-              </a:ln>
-            </p:spPr>
-            <p:style>
-              <a:lnRef idx="1">
-                <a:schemeClr val="accent1"/>
-              </a:lnRef>
-              <a:fillRef idx="0">
-                <a:schemeClr val="accent1"/>
-              </a:fillRef>
-              <a:effectRef idx="0">
-                <a:schemeClr val="accent1"/>
-              </a:effectRef>
-              <a:fontRef idx="minor">
-                <a:schemeClr val="tx1"/>
-              </a:fontRef>
-            </p:style>
-          </p:cxnSp>
-          <p:cxnSp>
-            <p:nvCxnSpPr>
-              <p:cNvPr id="82" name="Straight Connector 81">
-                <a:extLst>
-                  <a:ext uri="{FF2B5EF4-FFF2-40B4-BE49-F238E27FC236}">
-                    <a16:creationId xmlns:a16="http://schemas.microsoft.com/office/drawing/2014/main" id="{6608CED2-F16E-48F3-A14B-21D5E39FC319}"/>
-                  </a:ext>
-                  <a:ext uri="{C183D7F6-B498-43B3-948B-1728B52AA6E4}">
-                    <adec:decorative xmlns:adec="http://schemas.microsoft.com/office/drawing/2017/decorative" val="1"/>
-                  </a:ext>
-                </a:extLst>
-              </p:cNvPr>
-              <p:cNvCxnSpPr/>
-              <p:nvPr>
-                <p:extLst>
-                  <p:ext uri="{386F3935-93C4-4BCD-93E2-E3B085C9AB24}">
-                    <p16:designElem xmlns:p16="http://schemas.microsoft.com/office/powerpoint/2015/main" val="1"/>
-                  </p:ext>
-                </p:extLst>
-              </p:nvPr>
-            </p:nvCxnSpPr>
-            <p:spPr>
-              <a:xfrm rot="-5700000" flipH="1">
-                <a:off x="5605761" y="4116078"/>
-                <a:ext cx="3394" cy="182880"/>
-              </a:xfrm>
-              <a:prstGeom prst="line">
-                <a:avLst/>
-              </a:prstGeom>
-              <a:ln>
-                <a:solidFill>
-                  <a:srgbClr val="FFFFFF">
-                    <a:alpha val="30196"/>
-                  </a:srgbClr>
-                </a:solidFill>
-              </a:ln>
-            </p:spPr>
-            <p:style>
-              <a:lnRef idx="1">
-                <a:schemeClr val="accent1"/>
-              </a:lnRef>
-              <a:fillRef idx="0">
-                <a:schemeClr val="accent1"/>
-              </a:fillRef>
-              <a:effectRef idx="0">
-                <a:schemeClr val="accent1"/>
-              </a:effectRef>
-              <a:fontRef idx="minor">
-                <a:schemeClr val="tx1"/>
-              </a:fontRef>
-            </p:style>
-          </p:cxnSp>
-          <p:cxnSp>
-            <p:nvCxnSpPr>
-              <p:cNvPr id="83" name="Straight Connector 82">
-                <a:extLst>
-                  <a:ext uri="{FF2B5EF4-FFF2-40B4-BE49-F238E27FC236}">
-                    <a16:creationId xmlns:a16="http://schemas.microsoft.com/office/drawing/2014/main" id="{43D76777-7C4B-42B4-AED8-A5539FB167EB}"/>
-                  </a:ext>
-                  <a:ext uri="{C183D7F6-B498-43B3-948B-1728B52AA6E4}">
-                    <adec:decorative xmlns:adec="http://schemas.microsoft.com/office/drawing/2017/decorative" val="1"/>
-                  </a:ext>
-                </a:extLst>
-              </p:cNvPr>
-              <p:cNvCxnSpPr/>
-              <p:nvPr>
-                <p:extLst>
-                  <p:ext uri="{386F3935-93C4-4BCD-93E2-E3B085C9AB24}">
-                    <p16:designElem xmlns:p16="http://schemas.microsoft.com/office/powerpoint/2015/main" val="1"/>
-                  </p:ext>
-                </p:extLst>
-              </p:nvPr>
-            </p:nvCxnSpPr>
-            <p:spPr>
-              <a:xfrm rot="-5820000" flipH="1">
-                <a:off x="5624195" y="4254218"/>
-                <a:ext cx="3394" cy="182880"/>
-              </a:xfrm>
-              <a:prstGeom prst="line">
-                <a:avLst/>
-              </a:prstGeom>
-              <a:ln>
-                <a:solidFill>
-                  <a:srgbClr val="FFFFFF">
-                    <a:alpha val="30196"/>
-                  </a:srgbClr>
-                </a:solidFill>
-              </a:ln>
-            </p:spPr>
-            <p:style>
-              <a:lnRef idx="1">
-                <a:schemeClr val="accent1"/>
-              </a:lnRef>
-              <a:fillRef idx="0">
-                <a:schemeClr val="accent1"/>
-              </a:fillRef>
-              <a:effectRef idx="0">
-                <a:schemeClr val="accent1"/>
-              </a:effectRef>
-              <a:fontRef idx="minor">
-                <a:schemeClr val="tx1"/>
-              </a:fontRef>
-            </p:style>
-          </p:cxnSp>
-          <p:cxnSp>
-            <p:nvCxnSpPr>
-              <p:cNvPr id="84" name="Straight Connector 83">
-                <a:extLst>
-                  <a:ext uri="{FF2B5EF4-FFF2-40B4-BE49-F238E27FC236}">
-                    <a16:creationId xmlns:a16="http://schemas.microsoft.com/office/drawing/2014/main" id="{1F42983A-E263-4138-BF3C-3BAC377B0979}"/>
-                  </a:ext>
-                  <a:ext uri="{C183D7F6-B498-43B3-948B-1728B52AA6E4}">
-                    <adec:decorative xmlns:adec="http://schemas.microsoft.com/office/drawing/2017/decorative" val="1"/>
-                  </a:ext>
-                </a:extLst>
-              </p:cNvPr>
-              <p:cNvCxnSpPr/>
-              <p:nvPr>
-                <p:extLst>
-                  <p:ext uri="{386F3935-93C4-4BCD-93E2-E3B085C9AB24}">
-                    <p16:designElem xmlns:p16="http://schemas.microsoft.com/office/powerpoint/2015/main" val="1"/>
-                  </p:ext>
-                </p:extLst>
-              </p:nvPr>
-            </p:nvCxnSpPr>
-            <p:spPr>
-              <a:xfrm rot="-5940000" flipH="1">
-                <a:off x="5642629" y="4392358"/>
-                <a:ext cx="3394" cy="182880"/>
-              </a:xfrm>
-              <a:prstGeom prst="line">
-                <a:avLst/>
-              </a:prstGeom>
-              <a:ln>
-                <a:solidFill>
-                  <a:srgbClr val="FFFFFF">
-                    <a:alpha val="30196"/>
-                  </a:srgbClr>
-                </a:solidFill>
-              </a:ln>
-            </p:spPr>
-            <p:style>
-              <a:lnRef idx="1">
-                <a:schemeClr val="accent1"/>
-              </a:lnRef>
-              <a:fillRef idx="0">
-                <a:schemeClr val="accent1"/>
-              </a:fillRef>
-              <a:effectRef idx="0">
-                <a:schemeClr val="accent1"/>
-              </a:effectRef>
-              <a:fontRef idx="minor">
-                <a:schemeClr val="tx1"/>
-              </a:fontRef>
-            </p:style>
-          </p:cxnSp>
-          <p:cxnSp>
-            <p:nvCxnSpPr>
-              <p:cNvPr id="85" name="Straight Connector 84">
-                <a:extLst>
-                  <a:ext uri="{FF2B5EF4-FFF2-40B4-BE49-F238E27FC236}">
-                    <a16:creationId xmlns:a16="http://schemas.microsoft.com/office/drawing/2014/main" id="{BB7E20FA-2DE7-4277-87F8-1D82DB6406BA}"/>
-                  </a:ext>
-                  <a:ext uri="{C183D7F6-B498-43B3-948B-1728B52AA6E4}">
-                    <adec:decorative xmlns:adec="http://schemas.microsoft.com/office/drawing/2017/decorative" val="1"/>
-                  </a:ext>
-                </a:extLst>
-              </p:cNvPr>
-              <p:cNvCxnSpPr/>
-              <p:nvPr>
-                <p:extLst>
-                  <p:ext uri="{386F3935-93C4-4BCD-93E2-E3B085C9AB24}">
-                    <p16:designElem xmlns:p16="http://schemas.microsoft.com/office/powerpoint/2015/main" val="1"/>
-                  </p:ext>
-                </p:extLst>
-              </p:nvPr>
-            </p:nvCxnSpPr>
-            <p:spPr>
-              <a:xfrm rot="-6120000" flipH="1">
-                <a:off x="5654818" y="4536385"/>
-                <a:ext cx="3394" cy="182880"/>
-              </a:xfrm>
-              <a:prstGeom prst="line">
-                <a:avLst/>
-              </a:prstGeom>
-              <a:ln>
-                <a:solidFill>
-                  <a:srgbClr val="FFFFFF">
-                    <a:alpha val="30196"/>
-                  </a:srgbClr>
-                </a:solidFill>
-              </a:ln>
-            </p:spPr>
-            <p:style>
-              <a:lnRef idx="1">
-                <a:schemeClr val="accent1"/>
-              </a:lnRef>
-              <a:fillRef idx="0">
-                <a:schemeClr val="accent1"/>
-              </a:fillRef>
-              <a:effectRef idx="0">
-                <a:schemeClr val="accent1"/>
-              </a:effectRef>
-              <a:fontRef idx="minor">
-                <a:schemeClr val="tx1"/>
-              </a:fontRef>
-            </p:style>
-          </p:cxnSp>
-          <p:cxnSp>
-            <p:nvCxnSpPr>
-              <p:cNvPr id="86" name="Straight Connector 85">
-                <a:extLst>
-                  <a:ext uri="{FF2B5EF4-FFF2-40B4-BE49-F238E27FC236}">
-                    <a16:creationId xmlns:a16="http://schemas.microsoft.com/office/drawing/2014/main" id="{0A715BAF-7C88-4BB5-B7AC-268F56E0D5C2}"/>
-                  </a:ext>
-                  <a:ext uri="{C183D7F6-B498-43B3-948B-1728B52AA6E4}">
-                    <adec:decorative xmlns:adec="http://schemas.microsoft.com/office/drawing/2017/decorative" val="1"/>
-                  </a:ext>
-                </a:extLst>
-              </p:cNvPr>
-              <p:cNvCxnSpPr/>
-              <p:nvPr>
-                <p:extLst>
-                  <p:ext uri="{386F3935-93C4-4BCD-93E2-E3B085C9AB24}">
-                    <p16:designElem xmlns:p16="http://schemas.microsoft.com/office/powerpoint/2015/main" val="1"/>
-                  </p:ext>
-                </p:extLst>
-              </p:nvPr>
-            </p:nvCxnSpPr>
-            <p:spPr>
-              <a:xfrm rot="-6240000" flipH="1">
-                <a:off x="5684446" y="4671367"/>
-                <a:ext cx="3394" cy="182880"/>
-              </a:xfrm>
-              <a:prstGeom prst="line">
-                <a:avLst/>
-              </a:prstGeom>
-              <a:ln>
-                <a:solidFill>
-                  <a:srgbClr val="FFFFFF">
-                    <a:alpha val="30196"/>
-                  </a:srgbClr>
-                </a:solidFill>
-              </a:ln>
-            </p:spPr>
-            <p:style>
-              <a:lnRef idx="1">
-                <a:schemeClr val="accent1"/>
-              </a:lnRef>
-              <a:fillRef idx="0">
-                <a:schemeClr val="accent1"/>
-              </a:fillRef>
-              <a:effectRef idx="0">
-                <a:schemeClr val="accent1"/>
-              </a:effectRef>
-              <a:fontRef idx="minor">
-                <a:schemeClr val="tx1"/>
-              </a:fontRef>
-            </p:style>
-          </p:cxnSp>
-          <p:cxnSp>
-            <p:nvCxnSpPr>
-              <p:cNvPr id="87" name="Straight Connector 86">
-                <a:extLst>
-                  <a:ext uri="{FF2B5EF4-FFF2-40B4-BE49-F238E27FC236}">
-                    <a16:creationId xmlns:a16="http://schemas.microsoft.com/office/drawing/2014/main" id="{819D3BD0-A78B-47B1-A75E-F52EF605DE56}"/>
-                  </a:ext>
-                  <a:ext uri="{C183D7F6-B498-43B3-948B-1728B52AA6E4}">
-                    <adec:decorative xmlns:adec="http://schemas.microsoft.com/office/drawing/2017/decorative" val="1"/>
-                  </a:ext>
-                </a:extLst>
-              </p:cNvPr>
-              <p:cNvCxnSpPr/>
-              <p:nvPr>
-                <p:extLst>
-                  <p:ext uri="{386F3935-93C4-4BCD-93E2-E3B085C9AB24}">
-                    <p16:designElem xmlns:p16="http://schemas.microsoft.com/office/powerpoint/2015/main" val="1"/>
-                  </p:ext>
-                </p:extLst>
-              </p:nvPr>
-            </p:nvCxnSpPr>
-            <p:spPr>
-              <a:xfrm rot="-6360000" flipH="1">
-                <a:off x="5714074" y="4808730"/>
-                <a:ext cx="3394" cy="182880"/>
-              </a:xfrm>
-              <a:prstGeom prst="line">
-                <a:avLst/>
-              </a:prstGeom>
-              <a:ln>
-                <a:solidFill>
-                  <a:srgbClr val="FFFFFF">
-                    <a:alpha val="30196"/>
-                  </a:srgbClr>
-                </a:solidFill>
-              </a:ln>
-            </p:spPr>
-            <p:style>
-              <a:lnRef idx="1">
-                <a:schemeClr val="accent1"/>
-              </a:lnRef>
-              <a:fillRef idx="0">
-                <a:schemeClr val="accent1"/>
-              </a:fillRef>
-              <a:effectRef idx="0">
-                <a:schemeClr val="accent1"/>
-              </a:effectRef>
-              <a:fontRef idx="minor">
-                <a:schemeClr val="tx1"/>
-              </a:fontRef>
-            </p:style>
-          </p:cxnSp>
-          <p:cxnSp>
-            <p:nvCxnSpPr>
-              <p:cNvPr id="88" name="Straight Connector 87">
-                <a:extLst>
-                  <a:ext uri="{FF2B5EF4-FFF2-40B4-BE49-F238E27FC236}">
-                    <a16:creationId xmlns:a16="http://schemas.microsoft.com/office/drawing/2014/main" id="{0FF948B3-F575-4AC3-B5CB-61DD5FA76342}"/>
-                  </a:ext>
-                  <a:ext uri="{C183D7F6-B498-43B3-948B-1728B52AA6E4}">
-                    <adec:decorative xmlns:adec="http://schemas.microsoft.com/office/drawing/2017/decorative" val="1"/>
-                  </a:ext>
-                </a:extLst>
-              </p:cNvPr>
-              <p:cNvCxnSpPr/>
-              <p:nvPr>
-                <p:extLst>
-                  <p:ext uri="{386F3935-93C4-4BCD-93E2-E3B085C9AB24}">
-                    <p16:designElem xmlns:p16="http://schemas.microsoft.com/office/powerpoint/2015/main" val="1"/>
-                  </p:ext>
-                </p:extLst>
-              </p:nvPr>
-            </p:nvCxnSpPr>
-            <p:spPr>
-              <a:xfrm rot="-6480000" flipH="1">
-                <a:off x="5748464" y="4948474"/>
-                <a:ext cx="3394" cy="182880"/>
-              </a:xfrm>
-              <a:prstGeom prst="line">
-                <a:avLst/>
-              </a:prstGeom>
-              <a:ln>
-                <a:solidFill>
-                  <a:srgbClr val="FFFFFF">
-                    <a:alpha val="30196"/>
-                  </a:srgbClr>
-                </a:solidFill>
-              </a:ln>
-            </p:spPr>
-            <p:style>
-              <a:lnRef idx="1">
-                <a:schemeClr val="accent1"/>
-              </a:lnRef>
-              <a:fillRef idx="0">
-                <a:schemeClr val="accent1"/>
-              </a:fillRef>
-              <a:effectRef idx="0">
-                <a:schemeClr val="accent1"/>
-              </a:effectRef>
-              <a:fontRef idx="minor">
-                <a:schemeClr val="tx1"/>
-              </a:fontRef>
-            </p:style>
-          </p:cxnSp>
-          <p:cxnSp>
-            <p:nvCxnSpPr>
-              <p:cNvPr id="89" name="Straight Connector 88">
-                <a:extLst>
-                  <a:ext uri="{FF2B5EF4-FFF2-40B4-BE49-F238E27FC236}">
-                    <a16:creationId xmlns:a16="http://schemas.microsoft.com/office/drawing/2014/main" id="{A87C7265-9EC1-44BF-8C52-3AA87BD0967D}"/>
-                  </a:ext>
-                  <a:ext uri="{C183D7F6-B498-43B3-948B-1728B52AA6E4}">
-                    <adec:decorative xmlns:adec="http://schemas.microsoft.com/office/drawing/2017/decorative" val="1"/>
-                  </a:ext>
-                </a:extLst>
-              </p:cNvPr>
-              <p:cNvCxnSpPr/>
-              <p:nvPr>
-                <p:extLst>
-                  <p:ext uri="{386F3935-93C4-4BCD-93E2-E3B085C9AB24}">
-                    <p16:designElem xmlns:p16="http://schemas.microsoft.com/office/powerpoint/2015/main" val="1"/>
-                  </p:ext>
-                </p:extLst>
-              </p:nvPr>
-            </p:nvCxnSpPr>
-            <p:spPr>
-              <a:xfrm rot="-6660000" flipH="1">
-                <a:off x="5792091" y="5077607"/>
-                <a:ext cx="3394" cy="182880"/>
-              </a:xfrm>
-              <a:prstGeom prst="line">
-                <a:avLst/>
-              </a:prstGeom>
-              <a:ln>
-                <a:solidFill>
-                  <a:srgbClr val="FFFFFF">
-                    <a:alpha val="30196"/>
-                  </a:srgbClr>
-                </a:solidFill>
-              </a:ln>
-            </p:spPr>
-            <p:style>
-              <a:lnRef idx="1">
-                <a:schemeClr val="accent1"/>
-              </a:lnRef>
-              <a:fillRef idx="0">
-                <a:schemeClr val="accent1"/>
-              </a:fillRef>
-              <a:effectRef idx="0">
-                <a:schemeClr val="accent1"/>
-              </a:effectRef>
-              <a:fontRef idx="minor">
-                <a:schemeClr val="tx1"/>
-              </a:fontRef>
-            </p:style>
-          </p:cxnSp>
-          <p:cxnSp>
-            <p:nvCxnSpPr>
-              <p:cNvPr id="90" name="Straight Connector 89">
-                <a:extLst>
-                  <a:ext uri="{FF2B5EF4-FFF2-40B4-BE49-F238E27FC236}">
-                    <a16:creationId xmlns:a16="http://schemas.microsoft.com/office/drawing/2014/main" id="{E04A47CC-202F-4AA2-AB3E-C54FE35A8BFA}"/>
-                  </a:ext>
-                  <a:ext uri="{C183D7F6-B498-43B3-948B-1728B52AA6E4}">
-                    <adec:decorative xmlns:adec="http://schemas.microsoft.com/office/drawing/2017/decorative" val="1"/>
-                  </a:ext>
-                </a:extLst>
-              </p:cNvPr>
-              <p:cNvCxnSpPr/>
-              <p:nvPr>
-                <p:extLst>
-                  <p:ext uri="{386F3935-93C4-4BCD-93E2-E3B085C9AB24}">
-                    <p16:designElem xmlns:p16="http://schemas.microsoft.com/office/powerpoint/2015/main" val="1"/>
-                  </p:ext>
-                </p:extLst>
-              </p:nvPr>
-            </p:nvCxnSpPr>
-            <p:spPr>
-              <a:xfrm rot="-6780000" flipH="1">
-                <a:off x="5847441" y="5211223"/>
-                <a:ext cx="3394" cy="182880"/>
-              </a:xfrm>
-              <a:prstGeom prst="line">
-                <a:avLst/>
-              </a:prstGeom>
-              <a:ln>
-                <a:solidFill>
-                  <a:srgbClr val="FFFFFF">
-                    <a:alpha val="30196"/>
-                  </a:srgbClr>
-                </a:solidFill>
-              </a:ln>
-            </p:spPr>
-            <p:style>
-              <a:lnRef idx="1">
-                <a:schemeClr val="accent1"/>
-              </a:lnRef>
-              <a:fillRef idx="0">
-                <a:schemeClr val="accent1"/>
-              </a:fillRef>
-              <a:effectRef idx="0">
-                <a:schemeClr val="accent1"/>
-              </a:effectRef>
-              <a:fontRef idx="minor">
-                <a:schemeClr val="tx1"/>
-              </a:fontRef>
-            </p:style>
-          </p:cxnSp>
-          <p:cxnSp>
-            <p:nvCxnSpPr>
-              <p:cNvPr id="91" name="Straight Connector 90">
-                <a:extLst>
-                  <a:ext uri="{FF2B5EF4-FFF2-40B4-BE49-F238E27FC236}">
-                    <a16:creationId xmlns:a16="http://schemas.microsoft.com/office/drawing/2014/main" id="{92FC81F2-9316-46C1-A8D8-7DDA27F8AFEB}"/>
-                  </a:ext>
-                  <a:ext uri="{C183D7F6-B498-43B3-948B-1728B52AA6E4}">
-                    <adec:decorative xmlns:adec="http://schemas.microsoft.com/office/drawing/2017/decorative" val="1"/>
-                  </a:ext>
-                </a:extLst>
-              </p:cNvPr>
-              <p:cNvCxnSpPr/>
-              <p:nvPr>
-                <p:extLst>
-                  <p:ext uri="{386F3935-93C4-4BCD-93E2-E3B085C9AB24}">
-                    <p16:designElem xmlns:p16="http://schemas.microsoft.com/office/powerpoint/2015/main" val="1"/>
-                  </p:ext>
-                </p:extLst>
-              </p:nvPr>
-            </p:nvCxnSpPr>
-            <p:spPr>
-              <a:xfrm rot="-6900000" flipH="1">
-                <a:off x="5900410" y="5342458"/>
-                <a:ext cx="3394" cy="182880"/>
-              </a:xfrm>
-              <a:prstGeom prst="line">
-                <a:avLst/>
-              </a:prstGeom>
-              <a:ln>
-                <a:solidFill>
-                  <a:srgbClr val="FFFFFF">
-                    <a:alpha val="30196"/>
-                  </a:srgbClr>
-                </a:solidFill>
-              </a:ln>
-            </p:spPr>
-            <p:style>
-              <a:lnRef idx="1">
-                <a:schemeClr val="accent1"/>
-              </a:lnRef>
-              <a:fillRef idx="0">
-                <a:schemeClr val="accent1"/>
-              </a:fillRef>
-              <a:effectRef idx="0">
-                <a:schemeClr val="accent1"/>
-              </a:effectRef>
-              <a:fontRef idx="minor">
-                <a:schemeClr val="tx1"/>
-              </a:fontRef>
-            </p:style>
-          </p:cxnSp>
-          <p:cxnSp>
-            <p:nvCxnSpPr>
-              <p:cNvPr id="92" name="Straight Connector 91">
-                <a:extLst>
-                  <a:ext uri="{FF2B5EF4-FFF2-40B4-BE49-F238E27FC236}">
-                    <a16:creationId xmlns:a16="http://schemas.microsoft.com/office/drawing/2014/main" id="{CBD9A078-5764-467B-9FC0-DFC64F676F10}"/>
-                  </a:ext>
-                  <a:ext uri="{C183D7F6-B498-43B3-948B-1728B52AA6E4}">
-                    <adec:decorative xmlns:adec="http://schemas.microsoft.com/office/drawing/2017/decorative" val="1"/>
-                  </a:ext>
-                </a:extLst>
-              </p:cNvPr>
-              <p:cNvCxnSpPr/>
-              <p:nvPr>
-                <p:extLst>
-                  <p:ext uri="{386F3935-93C4-4BCD-93E2-E3B085C9AB24}">
-                    <p16:designElem xmlns:p16="http://schemas.microsoft.com/office/powerpoint/2015/main" val="1"/>
-                  </p:ext>
-                </p:extLst>
-              </p:nvPr>
-            </p:nvCxnSpPr>
-            <p:spPr>
-              <a:xfrm rot="-7020000" flipH="1">
-                <a:off x="5955760" y="5473693"/>
-                <a:ext cx="3394" cy="182880"/>
-              </a:xfrm>
-              <a:prstGeom prst="line">
-                <a:avLst/>
-              </a:prstGeom>
-              <a:ln>
-                <a:solidFill>
-                  <a:srgbClr val="FFFFFF">
-                    <a:alpha val="30196"/>
-                  </a:srgbClr>
-                </a:solidFill>
-              </a:ln>
-            </p:spPr>
-            <p:style>
-              <a:lnRef idx="1">
-                <a:schemeClr val="accent1"/>
-              </a:lnRef>
-              <a:fillRef idx="0">
-                <a:schemeClr val="accent1"/>
-              </a:fillRef>
-              <a:effectRef idx="0">
-                <a:schemeClr val="accent1"/>
-              </a:effectRef>
-              <a:fontRef idx="minor">
-                <a:schemeClr val="tx1"/>
-              </a:fontRef>
-            </p:style>
-          </p:cxnSp>
-        </p:grpSp>
-      </p:grpSp>
-      <p:grpSp>
-        <p:nvGrpSpPr>
-          <p:cNvPr id="94" name="Group 93">
-            <a:extLst>
-              <a:ext uri="{FF2B5EF4-FFF2-40B4-BE49-F238E27FC236}">
-                <a16:creationId xmlns:a16="http://schemas.microsoft.com/office/drawing/2014/main" id="{27B2EBE5-458B-4D53-9B88-ED83CFF1A20D}"/>
-              </a:ext>
-              <a:ext uri="{C183D7F6-B498-43B3-948B-1728B52AA6E4}">
-                <adec:decorative xmlns:adec="http://schemas.microsoft.com/office/drawing/2017/decorative" val="1"/>
-              </a:ext>
-            </a:extLst>
-          </p:cNvPr>
-          <p:cNvGrpSpPr>
-            <a:grpSpLocks noGrp="1" noUngrp="1" noRot="1" noChangeAspect="1" noMove="1" noResize="1"/>
-          </p:cNvGrpSpPr>
-          <p:nvPr>
-            <p:extLst>
-              <p:ext uri="{386F3935-93C4-4BCD-93E2-E3B085C9AB24}">
-                <p16:designElem xmlns:p16="http://schemas.microsoft.com/office/powerpoint/2015/main" val="1"/>
-              </p:ext>
-            </p:extLst>
-          </p:nvPr>
-        </p:nvGrpSpPr>
-        <p:grpSpPr>
-          <a:xfrm rot="15392608">
-            <a:off x="7397406" y="-618857"/>
-            <a:ext cx="4915057" cy="4271437"/>
-            <a:chOff x="5281603" y="104899"/>
-            <a:chExt cx="6910397" cy="6005491"/>
-          </a:xfrm>
-        </p:grpSpPr>
-        <p:sp>
-          <p:nvSpPr>
-            <p:cNvPr id="95" name="Freeform 17">
-              <a:extLst>
-                <a:ext uri="{FF2B5EF4-FFF2-40B4-BE49-F238E27FC236}">
-                  <a16:creationId xmlns:a16="http://schemas.microsoft.com/office/drawing/2014/main" id="{4F3107B1-873C-4EFA-808F-2BA7686C8986}"/>
-                </a:ext>
-                <a:ext uri="{C183D7F6-B498-43B3-948B-1728B52AA6E4}">
-                  <adec:decorative xmlns:adec="http://schemas.microsoft.com/office/drawing/2017/decorative" val="1"/>
-                </a:ext>
-              </a:extLst>
-            </p:cNvPr>
-            <p:cNvSpPr/>
-            <p:nvPr>
-              <p:extLst>
-                <p:ext uri="{386F3935-93C4-4BCD-93E2-E3B085C9AB24}">
-                  <p16:designElem xmlns:p16="http://schemas.microsoft.com/office/powerpoint/2015/main" val="1"/>
-                </p:ext>
-              </p:extLst>
-            </p:nvPr>
-          </p:nvSpPr>
-          <p:spPr>
-            <a:xfrm>
-              <a:off x="5281603" y="104899"/>
-              <a:ext cx="6896713" cy="6005491"/>
-            </a:xfrm>
-            <a:custGeom>
-              <a:avLst/>
-              <a:gdLst>
-                <a:gd name="connsiteX0" fmla="*/ 3912717 w 6896713"/>
-                <a:gd name="connsiteY0" fmla="*/ 0 h 6005491"/>
-                <a:gd name="connsiteX1" fmla="*/ 6679426 w 6896713"/>
-                <a:gd name="connsiteY1" fmla="*/ 1146008 h 6005491"/>
-                <a:gd name="connsiteX2" fmla="*/ 6896713 w 6896713"/>
-                <a:gd name="connsiteY2" fmla="*/ 1385085 h 6005491"/>
-                <a:gd name="connsiteX3" fmla="*/ 6896713 w 6896713"/>
-                <a:gd name="connsiteY3" fmla="*/ 1431256 h 6005491"/>
-                <a:gd name="connsiteX4" fmla="*/ 6657442 w 6896713"/>
-                <a:gd name="connsiteY4" fmla="*/ 1167992 h 6005491"/>
-                <a:gd name="connsiteX5" fmla="*/ 3912717 w 6896713"/>
-                <a:gd name="connsiteY5" fmla="*/ 31089 h 6005491"/>
-                <a:gd name="connsiteX6" fmla="*/ 31089 w 6896713"/>
-                <a:gd name="connsiteY6" fmla="*/ 3912717 h 6005491"/>
-                <a:gd name="connsiteX7" fmla="*/ 593046 w 6896713"/>
-                <a:gd name="connsiteY7" fmla="*/ 5925483 h 6005491"/>
-                <a:gd name="connsiteX8" fmla="*/ 633874 w 6896713"/>
-                <a:gd name="connsiteY8" fmla="*/ 5989169 h 6005491"/>
-                <a:gd name="connsiteX9" fmla="*/ 607415 w 6896713"/>
-                <a:gd name="connsiteY9" fmla="*/ 6005491 h 6005491"/>
-                <a:gd name="connsiteX10" fmla="*/ 566458 w 6896713"/>
-                <a:gd name="connsiteY10" fmla="*/ 5941603 h 6005491"/>
-                <a:gd name="connsiteX11" fmla="*/ 0 w 6896713"/>
-                <a:gd name="connsiteY11" fmla="*/ 3912717 h 6005491"/>
-                <a:gd name="connsiteX12" fmla="*/ 3912717 w 6896713"/>
-                <a:gd name="connsiteY12" fmla="*/ 0 h 6005491"/>
-              </a:gdLst>
-              <a:ahLst/>
-              <a:cxnLst>
-                <a:cxn ang="0">
-                  <a:pos x="connsiteX0" y="connsiteY0"/>
-                </a:cxn>
-                <a:cxn ang="0">
-                  <a:pos x="connsiteX1" y="connsiteY1"/>
-                </a:cxn>
-                <a:cxn ang="0">
-                  <a:pos x="connsiteX2" y="connsiteY2"/>
-                </a:cxn>
-                <a:cxn ang="0">
-                  <a:pos x="connsiteX3" y="connsiteY3"/>
-                </a:cxn>
-                <a:cxn ang="0">
-                  <a:pos x="connsiteX4" y="connsiteY4"/>
-                </a:cxn>
-                <a:cxn ang="0">
-                  <a:pos x="connsiteX5" y="connsiteY5"/>
-                </a:cxn>
-                <a:cxn ang="0">
-                  <a:pos x="connsiteX6" y="connsiteY6"/>
-                </a:cxn>
-                <a:cxn ang="0">
-                  <a:pos x="connsiteX7" y="connsiteY7"/>
-                </a:cxn>
-                <a:cxn ang="0">
-                  <a:pos x="connsiteX8" y="connsiteY8"/>
-                </a:cxn>
-                <a:cxn ang="0">
-                  <a:pos x="connsiteX9" y="connsiteY9"/>
-                </a:cxn>
-                <a:cxn ang="0">
-                  <a:pos x="connsiteX10" y="connsiteY10"/>
-                </a:cxn>
-                <a:cxn ang="0">
-                  <a:pos x="connsiteX11" y="connsiteY11"/>
-                </a:cxn>
-                <a:cxn ang="0">
-                  <a:pos x="connsiteX12" y="connsiteY12"/>
-                </a:cxn>
-              </a:cxnLst>
-              <a:rect l="l" t="t" r="r" b="b"/>
-              <a:pathLst>
-                <a:path w="6896713" h="6005491">
-                  <a:moveTo>
-                    <a:pt x="3912717" y="0"/>
-                  </a:moveTo>
-                  <a:cubicBezTo>
-                    <a:pt x="4993184" y="0"/>
-                    <a:pt x="5971363" y="437946"/>
-                    <a:pt x="6679426" y="1146008"/>
-                  </a:cubicBezTo>
-                  <a:lnTo>
-                    <a:pt x="6896713" y="1385085"/>
-                  </a:lnTo>
-                  <a:lnTo>
-                    <a:pt x="6896713" y="1431256"/>
-                  </a:lnTo>
-                  <a:lnTo>
-                    <a:pt x="6657442" y="1167992"/>
-                  </a:lnTo>
-                  <a:cubicBezTo>
-                    <a:pt x="5955006" y="465555"/>
-                    <a:pt x="4984599" y="31089"/>
-                    <a:pt x="3912717" y="31089"/>
-                  </a:cubicBezTo>
-                  <a:cubicBezTo>
-                    <a:pt x="1768953" y="31089"/>
-                    <a:pt x="31089" y="1768953"/>
-                    <a:pt x="31089" y="3912717"/>
-                  </a:cubicBezTo>
-                  <a:cubicBezTo>
-                    <a:pt x="31089" y="4649636"/>
-                    <a:pt x="236442" y="5338592"/>
-                    <a:pt x="593046" y="5925483"/>
-                  </a:cubicBezTo>
-                  <a:lnTo>
-                    <a:pt x="633874" y="5989169"/>
-                  </a:lnTo>
-                  <a:lnTo>
-                    <a:pt x="607415" y="6005491"/>
-                  </a:lnTo>
-                  <a:lnTo>
-                    <a:pt x="566458" y="5941603"/>
-                  </a:lnTo>
-                  <a:cubicBezTo>
-                    <a:pt x="206998" y="5350013"/>
-                    <a:pt x="0" y="4655538"/>
-                    <a:pt x="0" y="3912717"/>
-                  </a:cubicBezTo>
-                  <a:cubicBezTo>
-                    <a:pt x="0" y="1751783"/>
-                    <a:pt x="1751783" y="0"/>
-                    <a:pt x="3912717" y="0"/>
-                  </a:cubicBezTo>
-                  <a:close/>
-                </a:path>
-              </a:pathLst>
-            </a:custGeom>
-            <a:solidFill>
-              <a:srgbClr val="FFFFFF">
-                <a:alpha val="25000"/>
-              </a:srgbClr>
-            </a:solidFill>
-            <a:ln>
-              <a:noFill/>
-            </a:ln>
-          </p:spPr>
-          <p:style>
-            <a:lnRef idx="2">
-              <a:schemeClr val="accent1">
-                <a:shade val="50000"/>
-              </a:schemeClr>
-            </a:lnRef>
-            <a:fillRef idx="1">
-              <a:schemeClr val="accent1"/>
-            </a:fillRef>
-            <a:effectRef idx="0">
-              <a:schemeClr val="accent1"/>
-            </a:effectRef>
-            <a:fontRef idx="minor">
-              <a:schemeClr val="lt1"/>
-            </a:fontRef>
-          </p:style>
-          <p:txBody>
-            <a:bodyPr rtlCol="0" anchor="ctr"/>
-            <a:lstStyle/>
-            <a:p>
-              <a:pPr algn="ctr"/>
-              <a:endParaRPr lang="en-US"/>
-            </a:p>
-          </p:txBody>
-        </p:sp>
-        <p:grpSp>
-          <p:nvGrpSpPr>
-            <p:cNvPr id="96" name="Group 95">
-              <a:extLst>
-                <a:ext uri="{FF2B5EF4-FFF2-40B4-BE49-F238E27FC236}">
-                  <a16:creationId xmlns:a16="http://schemas.microsoft.com/office/drawing/2014/main" id="{9C36E72E-D186-4E07-B0AC-CA9B880F9520}"/>
-                </a:ext>
-                <a:ext uri="{C183D7F6-B498-43B3-948B-1728B52AA6E4}">
-                  <adec:decorative xmlns:adec="http://schemas.microsoft.com/office/drawing/2017/decorative" val="1"/>
-                </a:ext>
-              </a:extLst>
-            </p:cNvPr>
-            <p:cNvGrpSpPr/>
-            <p:nvPr>
-              <p:extLst>
-                <p:ext uri="{386F3935-93C4-4BCD-93E2-E3B085C9AB24}">
-                  <p16:designElem xmlns:p16="http://schemas.microsoft.com/office/powerpoint/2015/main" val="1"/>
-                </p:ext>
-              </p:extLst>
-            </p:nvPr>
-          </p:nvGrpSpPr>
-          <p:grpSpPr>
-            <a:xfrm>
-              <a:off x="5516018" y="331504"/>
-              <a:ext cx="6675982" cy="5235326"/>
-              <a:chOff x="5516018" y="331504"/>
-              <a:chExt cx="6675982" cy="5235326"/>
-            </a:xfrm>
-          </p:grpSpPr>
-          <p:cxnSp>
-            <p:nvCxnSpPr>
-              <p:cNvPr id="97" name="Straight Connector 96">
-                <a:extLst>
-                  <a:ext uri="{FF2B5EF4-FFF2-40B4-BE49-F238E27FC236}">
-                    <a16:creationId xmlns:a16="http://schemas.microsoft.com/office/drawing/2014/main" id="{820267E3-AB30-4642-A034-71F86FCF6EC6}"/>
-                  </a:ext>
-                  <a:ext uri="{C183D7F6-B498-43B3-948B-1728B52AA6E4}">
-                    <adec:decorative xmlns:adec="http://schemas.microsoft.com/office/drawing/2017/decorative" val="1"/>
-                  </a:ext>
-                </a:extLst>
-              </p:cNvPr>
-              <p:cNvCxnSpPr/>
-              <p:nvPr>
-                <p:extLst>
-                  <p:ext uri="{386F3935-93C4-4BCD-93E2-E3B085C9AB24}">
-                    <p16:designElem xmlns:p16="http://schemas.microsoft.com/office/powerpoint/2015/main" val="1"/>
-                  </p:ext>
-                </p:extLst>
-              </p:nvPr>
-            </p:nvCxnSpPr>
-            <p:spPr>
-              <a:xfrm flipH="1">
-                <a:off x="9266830" y="331504"/>
-                <a:ext cx="3394" cy="182880"/>
-              </a:xfrm>
-              <a:prstGeom prst="line">
-                <a:avLst/>
-              </a:prstGeom>
-              <a:ln>
-                <a:solidFill>
-                  <a:srgbClr val="FFFFFF">
-                    <a:alpha val="30196"/>
-                  </a:srgbClr>
-                </a:solidFill>
-              </a:ln>
-            </p:spPr>
-            <p:style>
-              <a:lnRef idx="1">
-                <a:schemeClr val="accent1"/>
-              </a:lnRef>
-              <a:fillRef idx="0">
-                <a:schemeClr val="accent1"/>
-              </a:fillRef>
-              <a:effectRef idx="0">
-                <a:schemeClr val="accent1"/>
-              </a:effectRef>
-              <a:fontRef idx="minor">
-                <a:schemeClr val="tx1"/>
-              </a:fontRef>
-            </p:style>
-          </p:cxnSp>
-          <p:cxnSp>
-            <p:nvCxnSpPr>
-              <p:cNvPr id="98" name="Straight Connector 97">
-                <a:extLst>
-                  <a:ext uri="{FF2B5EF4-FFF2-40B4-BE49-F238E27FC236}">
-                    <a16:creationId xmlns:a16="http://schemas.microsoft.com/office/drawing/2014/main" id="{EFD2D1EF-CFA4-4FBC-A160-9A6E66140D43}"/>
-                  </a:ext>
-                  <a:ext uri="{C183D7F6-B498-43B3-948B-1728B52AA6E4}">
-                    <adec:decorative xmlns:adec="http://schemas.microsoft.com/office/drawing/2017/decorative" val="1"/>
-                  </a:ext>
-                </a:extLst>
-              </p:cNvPr>
-              <p:cNvCxnSpPr/>
-              <p:nvPr>
-                <p:extLst>
-                  <p:ext uri="{386F3935-93C4-4BCD-93E2-E3B085C9AB24}">
-                    <p16:designElem xmlns:p16="http://schemas.microsoft.com/office/powerpoint/2015/main" val="1"/>
-                  </p:ext>
-                </p:extLst>
-              </p:nvPr>
-            </p:nvCxnSpPr>
-            <p:spPr>
-              <a:xfrm rot="120000" flipH="1">
-                <a:off x="9408861" y="338328"/>
-                <a:ext cx="3394" cy="182880"/>
-              </a:xfrm>
-              <a:prstGeom prst="line">
-                <a:avLst/>
-              </a:prstGeom>
-              <a:ln>
-                <a:solidFill>
-                  <a:srgbClr val="FFFFFF">
-                    <a:alpha val="30196"/>
-                  </a:srgbClr>
-                </a:solidFill>
-              </a:ln>
-            </p:spPr>
-            <p:style>
-              <a:lnRef idx="1">
-                <a:schemeClr val="accent1"/>
-              </a:lnRef>
-              <a:fillRef idx="0">
-                <a:schemeClr val="accent1"/>
-              </a:fillRef>
-              <a:effectRef idx="0">
-                <a:schemeClr val="accent1"/>
-              </a:effectRef>
-              <a:fontRef idx="minor">
-                <a:schemeClr val="tx1"/>
-              </a:fontRef>
-            </p:style>
-          </p:cxnSp>
-          <p:cxnSp>
-            <p:nvCxnSpPr>
-              <p:cNvPr id="99" name="Straight Connector 98">
-                <a:extLst>
-                  <a:ext uri="{FF2B5EF4-FFF2-40B4-BE49-F238E27FC236}">
-                    <a16:creationId xmlns:a16="http://schemas.microsoft.com/office/drawing/2014/main" id="{C7EB9FF9-E1B5-435B-B204-2EB6EA1921FE}"/>
-                  </a:ext>
-                  <a:ext uri="{C183D7F6-B498-43B3-948B-1728B52AA6E4}">
-                    <adec:decorative xmlns:adec="http://schemas.microsoft.com/office/drawing/2017/decorative" val="1"/>
-                  </a:ext>
-                </a:extLst>
-              </p:cNvPr>
-              <p:cNvCxnSpPr/>
-              <p:nvPr>
-                <p:extLst>
-                  <p:ext uri="{386F3935-93C4-4BCD-93E2-E3B085C9AB24}">
-                    <p16:designElem xmlns:p16="http://schemas.microsoft.com/office/powerpoint/2015/main" val="1"/>
-                  </p:ext>
-                </p:extLst>
-              </p:nvPr>
-            </p:nvCxnSpPr>
-            <p:spPr>
-              <a:xfrm rot="240000" flipH="1">
-                <a:off x="9551700" y="347636"/>
-                <a:ext cx="3394" cy="182880"/>
-              </a:xfrm>
-              <a:prstGeom prst="line">
-                <a:avLst/>
-              </a:prstGeom>
-              <a:ln>
-                <a:solidFill>
-                  <a:srgbClr val="FFFFFF">
-                    <a:alpha val="30196"/>
-                  </a:srgbClr>
-                </a:solidFill>
-              </a:ln>
-            </p:spPr>
-            <p:style>
-              <a:lnRef idx="1">
-                <a:schemeClr val="accent1"/>
-              </a:lnRef>
-              <a:fillRef idx="0">
-                <a:schemeClr val="accent1"/>
-              </a:fillRef>
-              <a:effectRef idx="0">
-                <a:schemeClr val="accent1"/>
-              </a:effectRef>
-              <a:fontRef idx="minor">
-                <a:schemeClr val="tx1"/>
-              </a:fontRef>
-            </p:style>
-          </p:cxnSp>
-          <p:cxnSp>
-            <p:nvCxnSpPr>
-              <p:cNvPr id="100" name="Straight Connector 99">
-                <a:extLst>
-                  <a:ext uri="{FF2B5EF4-FFF2-40B4-BE49-F238E27FC236}">
-                    <a16:creationId xmlns:a16="http://schemas.microsoft.com/office/drawing/2014/main" id="{78BE4B63-95E8-4E3A-9039-4A6567F85AEB}"/>
-                  </a:ext>
-                  <a:ext uri="{C183D7F6-B498-43B3-948B-1728B52AA6E4}">
-                    <adec:decorative xmlns:adec="http://schemas.microsoft.com/office/drawing/2017/decorative" val="1"/>
-                  </a:ext>
-                </a:extLst>
-              </p:cNvPr>
-              <p:cNvCxnSpPr/>
-              <p:nvPr>
-                <p:extLst>
-                  <p:ext uri="{386F3935-93C4-4BCD-93E2-E3B085C9AB24}">
-                    <p16:designElem xmlns:p16="http://schemas.microsoft.com/office/powerpoint/2015/main" val="1"/>
-                  </p:ext>
-                </p:extLst>
-              </p:nvPr>
-            </p:nvCxnSpPr>
-            <p:spPr>
-              <a:xfrm rot="360000" flipH="1">
-                <a:off x="9688748" y="368088"/>
-                <a:ext cx="3394" cy="182880"/>
-              </a:xfrm>
-              <a:prstGeom prst="line">
-                <a:avLst/>
-              </a:prstGeom>
-              <a:ln>
-                <a:solidFill>
-                  <a:srgbClr val="FFFFFF">
-                    <a:alpha val="30196"/>
-                  </a:srgbClr>
-                </a:solidFill>
-              </a:ln>
-            </p:spPr>
-            <p:style>
-              <a:lnRef idx="1">
-                <a:schemeClr val="accent1"/>
-              </a:lnRef>
-              <a:fillRef idx="0">
-                <a:schemeClr val="accent1"/>
-              </a:fillRef>
-              <a:effectRef idx="0">
-                <a:schemeClr val="accent1"/>
-              </a:effectRef>
-              <a:fontRef idx="minor">
-                <a:schemeClr val="tx1"/>
-              </a:fontRef>
-            </p:style>
-          </p:cxnSp>
-          <p:cxnSp>
-            <p:nvCxnSpPr>
-              <p:cNvPr id="101" name="Straight Connector 100">
-                <a:extLst>
-                  <a:ext uri="{FF2B5EF4-FFF2-40B4-BE49-F238E27FC236}">
-                    <a16:creationId xmlns:a16="http://schemas.microsoft.com/office/drawing/2014/main" id="{71004DE9-B326-4AE0-A43A-06D38E085A0B}"/>
-                  </a:ext>
-                  <a:ext uri="{C183D7F6-B498-43B3-948B-1728B52AA6E4}">
-                    <adec:decorative xmlns:adec="http://schemas.microsoft.com/office/drawing/2017/decorative" val="1"/>
-                  </a:ext>
-                </a:extLst>
-              </p:cNvPr>
-              <p:cNvCxnSpPr/>
-              <p:nvPr>
-                <p:extLst>
-                  <p:ext uri="{386F3935-93C4-4BCD-93E2-E3B085C9AB24}">
-                    <p16:designElem xmlns:p16="http://schemas.microsoft.com/office/powerpoint/2015/main" val="1"/>
-                  </p:ext>
-                </p:extLst>
-              </p:nvPr>
-            </p:nvCxnSpPr>
-            <p:spPr>
-              <a:xfrm rot="540000" flipH="1">
-                <a:off x="9824866" y="389224"/>
-                <a:ext cx="3394" cy="182880"/>
-              </a:xfrm>
-              <a:prstGeom prst="line">
-                <a:avLst/>
-              </a:prstGeom>
-              <a:ln>
-                <a:solidFill>
-                  <a:srgbClr val="FFFFFF">
-                    <a:alpha val="30196"/>
-                  </a:srgbClr>
-                </a:solidFill>
-              </a:ln>
-            </p:spPr>
-            <p:style>
-              <a:lnRef idx="1">
-                <a:schemeClr val="accent1"/>
-              </a:lnRef>
-              <a:fillRef idx="0">
-                <a:schemeClr val="accent1"/>
-              </a:fillRef>
-              <a:effectRef idx="0">
-                <a:schemeClr val="accent1"/>
-              </a:effectRef>
-              <a:fontRef idx="minor">
-                <a:schemeClr val="tx1"/>
-              </a:fontRef>
-            </p:style>
-          </p:cxnSp>
-          <p:cxnSp>
-            <p:nvCxnSpPr>
-              <p:cNvPr id="102" name="Straight Connector 101">
-                <a:extLst>
-                  <a:ext uri="{FF2B5EF4-FFF2-40B4-BE49-F238E27FC236}">
-                    <a16:creationId xmlns:a16="http://schemas.microsoft.com/office/drawing/2014/main" id="{54894533-9533-42BB-B981-ECBC8136C762}"/>
-                  </a:ext>
-                  <a:ext uri="{C183D7F6-B498-43B3-948B-1728B52AA6E4}">
-                    <adec:decorative xmlns:adec="http://schemas.microsoft.com/office/drawing/2017/decorative" val="1"/>
-                  </a:ext>
-                </a:extLst>
-              </p:cNvPr>
-              <p:cNvCxnSpPr/>
-              <p:nvPr>
-                <p:extLst>
-                  <p:ext uri="{386F3935-93C4-4BCD-93E2-E3B085C9AB24}">
-                    <p16:designElem xmlns:p16="http://schemas.microsoft.com/office/powerpoint/2015/main" val="1"/>
-                  </p:ext>
-                </p:extLst>
-              </p:nvPr>
-            </p:nvCxnSpPr>
-            <p:spPr>
-              <a:xfrm rot="660000" flipH="1">
-                <a:off x="9966867" y="417549"/>
-                <a:ext cx="3394" cy="182880"/>
-              </a:xfrm>
-              <a:prstGeom prst="line">
-                <a:avLst/>
-              </a:prstGeom>
-              <a:ln>
-                <a:solidFill>
-                  <a:srgbClr val="FFFFFF">
-                    <a:alpha val="30196"/>
-                  </a:srgbClr>
-                </a:solidFill>
-              </a:ln>
-            </p:spPr>
-            <p:style>
-              <a:lnRef idx="1">
-                <a:schemeClr val="accent1"/>
-              </a:lnRef>
-              <a:fillRef idx="0">
-                <a:schemeClr val="accent1"/>
-              </a:fillRef>
-              <a:effectRef idx="0">
-                <a:schemeClr val="accent1"/>
-              </a:effectRef>
-              <a:fontRef idx="minor">
-                <a:schemeClr val="tx1"/>
-              </a:fontRef>
-            </p:style>
-          </p:cxnSp>
-          <p:cxnSp>
-            <p:nvCxnSpPr>
-              <p:cNvPr id="103" name="Straight Connector 102">
-                <a:extLst>
-                  <a:ext uri="{FF2B5EF4-FFF2-40B4-BE49-F238E27FC236}">
-                    <a16:creationId xmlns:a16="http://schemas.microsoft.com/office/drawing/2014/main" id="{D0B2DBFC-7360-4F73-A8A3-FC6651233B53}"/>
-                  </a:ext>
-                  <a:ext uri="{C183D7F6-B498-43B3-948B-1728B52AA6E4}">
-                    <adec:decorative xmlns:adec="http://schemas.microsoft.com/office/drawing/2017/decorative" val="1"/>
-                  </a:ext>
-                </a:extLst>
-              </p:cNvPr>
-              <p:cNvCxnSpPr/>
-              <p:nvPr>
-                <p:extLst>
-                  <p:ext uri="{386F3935-93C4-4BCD-93E2-E3B085C9AB24}">
-                    <p16:designElem xmlns:p16="http://schemas.microsoft.com/office/powerpoint/2015/main" val="1"/>
-                  </p:ext>
-                </p:extLst>
-              </p:nvPr>
-            </p:nvCxnSpPr>
-            <p:spPr>
-              <a:xfrm rot="780000" flipH="1">
-                <a:off x="10104425" y="445874"/>
-                <a:ext cx="3394" cy="182880"/>
-              </a:xfrm>
-              <a:prstGeom prst="line">
-                <a:avLst/>
-              </a:prstGeom>
-              <a:ln>
-                <a:solidFill>
-                  <a:srgbClr val="FFFFFF">
-                    <a:alpha val="30196"/>
-                  </a:srgbClr>
-                </a:solidFill>
-              </a:ln>
-            </p:spPr>
-            <p:style>
-              <a:lnRef idx="1">
-                <a:schemeClr val="accent1"/>
-              </a:lnRef>
-              <a:fillRef idx="0">
-                <a:schemeClr val="accent1"/>
-              </a:fillRef>
-              <a:effectRef idx="0">
-                <a:schemeClr val="accent1"/>
-              </a:effectRef>
-              <a:fontRef idx="minor">
-                <a:schemeClr val="tx1"/>
-              </a:fontRef>
-            </p:style>
-          </p:cxnSp>
-          <p:cxnSp>
-            <p:nvCxnSpPr>
-              <p:cNvPr id="104" name="Straight Connector 103">
-                <a:extLst>
-                  <a:ext uri="{FF2B5EF4-FFF2-40B4-BE49-F238E27FC236}">
-                    <a16:creationId xmlns:a16="http://schemas.microsoft.com/office/drawing/2014/main" id="{AAF954A4-4509-4E0B-8A7E-C5ED65BA9DCF}"/>
-                  </a:ext>
-                  <a:ext uri="{C183D7F6-B498-43B3-948B-1728B52AA6E4}">
-                    <adec:decorative xmlns:adec="http://schemas.microsoft.com/office/drawing/2017/decorative" val="1"/>
-                  </a:ext>
-                </a:extLst>
-              </p:cNvPr>
-              <p:cNvCxnSpPr/>
-              <p:nvPr>
-                <p:extLst>
-                  <p:ext uri="{386F3935-93C4-4BCD-93E2-E3B085C9AB24}">
-                    <p16:designElem xmlns:p16="http://schemas.microsoft.com/office/powerpoint/2015/main" val="1"/>
-                  </p:ext>
-                </p:extLst>
-              </p:nvPr>
-            </p:nvCxnSpPr>
-            <p:spPr>
-              <a:xfrm rot="900000" flipH="1">
-                <a:off x="10240513" y="479483"/>
-                <a:ext cx="3394" cy="182880"/>
-              </a:xfrm>
-              <a:prstGeom prst="line">
-                <a:avLst/>
-              </a:prstGeom>
-              <a:ln>
-                <a:solidFill>
-                  <a:srgbClr val="FFFFFF">
-                    <a:alpha val="30196"/>
-                  </a:srgbClr>
-                </a:solidFill>
-              </a:ln>
-            </p:spPr>
-            <p:style>
-              <a:lnRef idx="1">
-                <a:schemeClr val="accent1"/>
-              </a:lnRef>
-              <a:fillRef idx="0">
-                <a:schemeClr val="accent1"/>
-              </a:fillRef>
-              <a:effectRef idx="0">
-                <a:schemeClr val="accent1"/>
-              </a:effectRef>
-              <a:fontRef idx="minor">
-                <a:schemeClr val="tx1"/>
-              </a:fontRef>
-            </p:style>
-          </p:cxnSp>
-          <p:cxnSp>
-            <p:nvCxnSpPr>
-              <p:cNvPr id="105" name="Straight Connector 104">
-                <a:extLst>
-                  <a:ext uri="{FF2B5EF4-FFF2-40B4-BE49-F238E27FC236}">
-                    <a16:creationId xmlns:a16="http://schemas.microsoft.com/office/drawing/2014/main" id="{30DE8D61-F7C6-4611-9655-0556F2E8C10F}"/>
-                  </a:ext>
-                  <a:ext uri="{C183D7F6-B498-43B3-948B-1728B52AA6E4}">
-                    <adec:decorative xmlns:adec="http://schemas.microsoft.com/office/drawing/2017/decorative" val="1"/>
-                  </a:ext>
-                </a:extLst>
-              </p:cNvPr>
-              <p:cNvCxnSpPr/>
-              <p:nvPr>
-                <p:extLst>
-                  <p:ext uri="{386F3935-93C4-4BCD-93E2-E3B085C9AB24}">
-                    <p16:designElem xmlns:p16="http://schemas.microsoft.com/office/powerpoint/2015/main" val="1"/>
-                  </p:ext>
-                </p:extLst>
-              </p:nvPr>
-            </p:nvCxnSpPr>
-            <p:spPr>
-              <a:xfrm rot="1080000" flipH="1">
-                <a:off x="10373882" y="524355"/>
-                <a:ext cx="3394" cy="182880"/>
-              </a:xfrm>
-              <a:prstGeom prst="line">
-                <a:avLst/>
-              </a:prstGeom>
-              <a:ln>
-                <a:solidFill>
-                  <a:srgbClr val="FFFFFF">
-                    <a:alpha val="30196"/>
-                  </a:srgbClr>
-                </a:solidFill>
-              </a:ln>
-            </p:spPr>
-            <p:style>
-              <a:lnRef idx="1">
-                <a:schemeClr val="accent1"/>
-              </a:lnRef>
-              <a:fillRef idx="0">
-                <a:schemeClr val="accent1"/>
-              </a:fillRef>
-              <a:effectRef idx="0">
-                <a:schemeClr val="accent1"/>
-              </a:effectRef>
-              <a:fontRef idx="minor">
-                <a:schemeClr val="tx1"/>
-              </a:fontRef>
-            </p:style>
-          </p:cxnSp>
-          <p:cxnSp>
-            <p:nvCxnSpPr>
-              <p:cNvPr id="106" name="Straight Connector 105">
-                <a:extLst>
-                  <a:ext uri="{FF2B5EF4-FFF2-40B4-BE49-F238E27FC236}">
-                    <a16:creationId xmlns:a16="http://schemas.microsoft.com/office/drawing/2014/main" id="{9AB6CBE5-E043-42BB-AFB8-4A4894C4B14F}"/>
-                  </a:ext>
-                  <a:ext uri="{C183D7F6-B498-43B3-948B-1728B52AA6E4}">
-                    <adec:decorative xmlns:adec="http://schemas.microsoft.com/office/drawing/2017/decorative" val="1"/>
-                  </a:ext>
-                </a:extLst>
-              </p:cNvPr>
-              <p:cNvCxnSpPr/>
-              <p:nvPr>
-                <p:extLst>
-                  <p:ext uri="{386F3935-93C4-4BCD-93E2-E3B085C9AB24}">
-                    <p16:designElem xmlns:p16="http://schemas.microsoft.com/office/powerpoint/2015/main" val="1"/>
-                  </p:ext>
-                </p:extLst>
-              </p:nvPr>
-            </p:nvCxnSpPr>
-            <p:spPr>
-              <a:xfrm rot="1200000" flipH="1">
-                <a:off x="10505632" y="570628"/>
-                <a:ext cx="3394" cy="182880"/>
-              </a:xfrm>
-              <a:prstGeom prst="line">
-                <a:avLst/>
-              </a:prstGeom>
-              <a:ln>
-                <a:solidFill>
-                  <a:srgbClr val="FFFFFF">
-                    <a:alpha val="30196"/>
-                  </a:srgbClr>
-                </a:solidFill>
-              </a:ln>
-            </p:spPr>
-            <p:style>
-              <a:lnRef idx="1">
-                <a:schemeClr val="accent1"/>
-              </a:lnRef>
-              <a:fillRef idx="0">
-                <a:schemeClr val="accent1"/>
-              </a:fillRef>
-              <a:effectRef idx="0">
-                <a:schemeClr val="accent1"/>
-              </a:effectRef>
-              <a:fontRef idx="minor">
-                <a:schemeClr val="tx1"/>
-              </a:fontRef>
-            </p:style>
-          </p:cxnSp>
-          <p:cxnSp>
-            <p:nvCxnSpPr>
-              <p:cNvPr id="107" name="Straight Connector 106">
-                <a:extLst>
-                  <a:ext uri="{FF2B5EF4-FFF2-40B4-BE49-F238E27FC236}">
-                    <a16:creationId xmlns:a16="http://schemas.microsoft.com/office/drawing/2014/main" id="{2FEDDC7F-06BE-4638-AF08-9173232944FA}"/>
-                  </a:ext>
-                  <a:ext uri="{C183D7F6-B498-43B3-948B-1728B52AA6E4}">
-                    <adec:decorative xmlns:adec="http://schemas.microsoft.com/office/drawing/2017/decorative" val="1"/>
-                  </a:ext>
-                </a:extLst>
-              </p:cNvPr>
-              <p:cNvCxnSpPr/>
-              <p:nvPr>
-                <p:extLst>
-                  <p:ext uri="{386F3935-93C4-4BCD-93E2-E3B085C9AB24}">
-                    <p16:designElem xmlns:p16="http://schemas.microsoft.com/office/powerpoint/2015/main" val="1"/>
-                  </p:ext>
-                </p:extLst>
-              </p:nvPr>
-            </p:nvCxnSpPr>
-            <p:spPr>
-              <a:xfrm rot="1320000" flipH="1">
-                <a:off x="10637382" y="621344"/>
-                <a:ext cx="3394" cy="182880"/>
-              </a:xfrm>
-              <a:prstGeom prst="line">
-                <a:avLst/>
-              </a:prstGeom>
-              <a:ln>
-                <a:solidFill>
-                  <a:srgbClr val="FFFFFF">
-                    <a:alpha val="30196"/>
-                  </a:srgbClr>
-                </a:solidFill>
-              </a:ln>
-            </p:spPr>
-            <p:style>
-              <a:lnRef idx="1">
-                <a:schemeClr val="accent1"/>
-              </a:lnRef>
-              <a:fillRef idx="0">
-                <a:schemeClr val="accent1"/>
-              </a:fillRef>
-              <a:effectRef idx="0">
-                <a:schemeClr val="accent1"/>
-              </a:effectRef>
-              <a:fontRef idx="minor">
-                <a:schemeClr val="tx1"/>
-              </a:fontRef>
-            </p:style>
-          </p:cxnSp>
-          <p:cxnSp>
-            <p:nvCxnSpPr>
-              <p:cNvPr id="108" name="Straight Connector 107">
-                <a:extLst>
-                  <a:ext uri="{FF2B5EF4-FFF2-40B4-BE49-F238E27FC236}">
-                    <a16:creationId xmlns:a16="http://schemas.microsoft.com/office/drawing/2014/main" id="{DACCD129-C3C4-4157-BEDE-7611E829EC07}"/>
-                  </a:ext>
-                  <a:ext uri="{C183D7F6-B498-43B3-948B-1728B52AA6E4}">
-                    <adec:decorative xmlns:adec="http://schemas.microsoft.com/office/drawing/2017/decorative" val="1"/>
-                  </a:ext>
-                </a:extLst>
-              </p:cNvPr>
-              <p:cNvCxnSpPr/>
-              <p:nvPr>
-                <p:extLst>
-                  <p:ext uri="{386F3935-93C4-4BCD-93E2-E3B085C9AB24}">
-                    <p16:designElem xmlns:p16="http://schemas.microsoft.com/office/powerpoint/2015/main" val="1"/>
-                  </p:ext>
-                </p:extLst>
-              </p:nvPr>
-            </p:nvCxnSpPr>
-            <p:spPr>
-              <a:xfrm rot="1440000" flipH="1">
-                <a:off x="10760965" y="690439"/>
-                <a:ext cx="3394" cy="182880"/>
-              </a:xfrm>
-              <a:prstGeom prst="line">
-                <a:avLst/>
-              </a:prstGeom>
-              <a:ln>
-                <a:solidFill>
-                  <a:srgbClr val="FFFFFF">
-                    <a:alpha val="30196"/>
-                  </a:srgbClr>
-                </a:solidFill>
-              </a:ln>
-            </p:spPr>
-            <p:style>
-              <a:lnRef idx="1">
-                <a:schemeClr val="accent1"/>
-              </a:lnRef>
-              <a:fillRef idx="0">
-                <a:schemeClr val="accent1"/>
-              </a:fillRef>
-              <a:effectRef idx="0">
-                <a:schemeClr val="accent1"/>
-              </a:effectRef>
-              <a:fontRef idx="minor">
-                <a:schemeClr val="tx1"/>
-              </a:fontRef>
-            </p:style>
-          </p:cxnSp>
-          <p:cxnSp>
-            <p:nvCxnSpPr>
-              <p:cNvPr id="109" name="Straight Connector 108">
-                <a:extLst>
-                  <a:ext uri="{FF2B5EF4-FFF2-40B4-BE49-F238E27FC236}">
-                    <a16:creationId xmlns:a16="http://schemas.microsoft.com/office/drawing/2014/main" id="{DF817751-8ED5-487E-9976-216EEE1311E0}"/>
-                  </a:ext>
-                  <a:ext uri="{C183D7F6-B498-43B3-948B-1728B52AA6E4}">
-                    <adec:decorative xmlns:adec="http://schemas.microsoft.com/office/drawing/2017/decorative" val="1"/>
-                  </a:ext>
-                </a:extLst>
-              </p:cNvPr>
-              <p:cNvCxnSpPr/>
-              <p:nvPr>
-                <p:extLst>
-                  <p:ext uri="{386F3935-93C4-4BCD-93E2-E3B085C9AB24}">
-                    <p16:designElem xmlns:p16="http://schemas.microsoft.com/office/powerpoint/2015/main" val="1"/>
-                  </p:ext>
-                </p:extLst>
-              </p:nvPr>
-            </p:nvCxnSpPr>
-            <p:spPr>
-              <a:xfrm rot="1620000" flipH="1">
-                <a:off x="10888991" y="755091"/>
-                <a:ext cx="3394" cy="182880"/>
-              </a:xfrm>
-              <a:prstGeom prst="line">
-                <a:avLst/>
-              </a:prstGeom>
-              <a:ln>
-                <a:solidFill>
-                  <a:srgbClr val="FFFFFF">
-                    <a:alpha val="30196"/>
-                  </a:srgbClr>
-                </a:solidFill>
-              </a:ln>
-            </p:spPr>
-            <p:style>
-              <a:lnRef idx="1">
-                <a:schemeClr val="accent1"/>
-              </a:lnRef>
-              <a:fillRef idx="0">
-                <a:schemeClr val="accent1"/>
-              </a:fillRef>
-              <a:effectRef idx="0">
-                <a:schemeClr val="accent1"/>
-              </a:effectRef>
-              <a:fontRef idx="minor">
-                <a:schemeClr val="tx1"/>
-              </a:fontRef>
-            </p:style>
-          </p:cxnSp>
-          <p:cxnSp>
-            <p:nvCxnSpPr>
-              <p:cNvPr id="110" name="Straight Connector 109">
-                <a:extLst>
-                  <a:ext uri="{FF2B5EF4-FFF2-40B4-BE49-F238E27FC236}">
-                    <a16:creationId xmlns:a16="http://schemas.microsoft.com/office/drawing/2014/main" id="{887B65EB-E838-4CF7-9F73-5B117BA2F852}"/>
-                  </a:ext>
-                  <a:ext uri="{C183D7F6-B498-43B3-948B-1728B52AA6E4}">
-                    <adec:decorative xmlns:adec="http://schemas.microsoft.com/office/drawing/2017/decorative" val="1"/>
-                  </a:ext>
-                </a:extLst>
-              </p:cNvPr>
-              <p:cNvCxnSpPr/>
-              <p:nvPr>
-                <p:extLst>
-                  <p:ext uri="{386F3935-93C4-4BCD-93E2-E3B085C9AB24}">
-                    <p16:designElem xmlns:p16="http://schemas.microsoft.com/office/powerpoint/2015/main" val="1"/>
-                  </p:ext>
-                </p:extLst>
-              </p:nvPr>
-            </p:nvCxnSpPr>
-            <p:spPr>
-              <a:xfrm rot="1740000" flipH="1">
-                <a:off x="11010193" y="819743"/>
-                <a:ext cx="3394" cy="182880"/>
-              </a:xfrm>
-              <a:prstGeom prst="line">
-                <a:avLst/>
-              </a:prstGeom>
-              <a:ln>
-                <a:solidFill>
-                  <a:srgbClr val="FFFFFF">
-                    <a:alpha val="30196"/>
-                  </a:srgbClr>
-                </a:solidFill>
-              </a:ln>
-            </p:spPr>
-            <p:style>
-              <a:lnRef idx="1">
-                <a:schemeClr val="accent1"/>
-              </a:lnRef>
-              <a:fillRef idx="0">
-                <a:schemeClr val="accent1"/>
-              </a:fillRef>
-              <a:effectRef idx="0">
-                <a:schemeClr val="accent1"/>
-              </a:effectRef>
-              <a:fontRef idx="minor">
-                <a:schemeClr val="tx1"/>
-              </a:fontRef>
-            </p:style>
-          </p:cxnSp>
-          <p:cxnSp>
-            <p:nvCxnSpPr>
-              <p:cNvPr id="111" name="Straight Connector 110">
-                <a:extLst>
-                  <a:ext uri="{FF2B5EF4-FFF2-40B4-BE49-F238E27FC236}">
-                    <a16:creationId xmlns:a16="http://schemas.microsoft.com/office/drawing/2014/main" id="{C7218803-BDF0-4296-BD4D-2F6D341C5717}"/>
-                  </a:ext>
-                  <a:ext uri="{C183D7F6-B498-43B3-948B-1728B52AA6E4}">
-                    <adec:decorative xmlns:adec="http://schemas.microsoft.com/office/drawing/2017/decorative" val="1"/>
-                  </a:ext>
-                </a:extLst>
-              </p:cNvPr>
-              <p:cNvCxnSpPr/>
-              <p:nvPr>
-                <p:extLst>
-                  <p:ext uri="{386F3935-93C4-4BCD-93E2-E3B085C9AB24}">
-                    <p16:designElem xmlns:p16="http://schemas.microsoft.com/office/powerpoint/2015/main" val="1"/>
-                  </p:ext>
-                </p:extLst>
-              </p:nvPr>
-            </p:nvCxnSpPr>
-            <p:spPr>
-              <a:xfrm rot="1860000" flipH="1">
-                <a:off x="11129014" y="895662"/>
-                <a:ext cx="3394" cy="182880"/>
-              </a:xfrm>
-              <a:prstGeom prst="line">
-                <a:avLst/>
-              </a:prstGeom>
-              <a:ln>
-                <a:solidFill>
-                  <a:srgbClr val="FFFFFF">
-                    <a:alpha val="30196"/>
-                  </a:srgbClr>
-                </a:solidFill>
-              </a:ln>
-            </p:spPr>
-            <p:style>
-              <a:lnRef idx="1">
-                <a:schemeClr val="accent1"/>
-              </a:lnRef>
-              <a:fillRef idx="0">
-                <a:schemeClr val="accent1"/>
-              </a:fillRef>
-              <a:effectRef idx="0">
-                <a:schemeClr val="accent1"/>
-              </a:effectRef>
-              <a:fontRef idx="minor">
-                <a:schemeClr val="tx1"/>
-              </a:fontRef>
-            </p:style>
-          </p:cxnSp>
-          <p:cxnSp>
-            <p:nvCxnSpPr>
-              <p:cNvPr id="112" name="Straight Connector 111">
-                <a:extLst>
-                  <a:ext uri="{FF2B5EF4-FFF2-40B4-BE49-F238E27FC236}">
-                    <a16:creationId xmlns:a16="http://schemas.microsoft.com/office/drawing/2014/main" id="{C64C08D4-4A3C-4644-9A6B-A3E44F8C49A7}"/>
-                  </a:ext>
-                  <a:ext uri="{C183D7F6-B498-43B3-948B-1728B52AA6E4}">
-                    <adec:decorative xmlns:adec="http://schemas.microsoft.com/office/drawing/2017/decorative" val="1"/>
-                  </a:ext>
-                </a:extLst>
-              </p:cNvPr>
-              <p:cNvCxnSpPr/>
-              <p:nvPr>
-                <p:extLst>
-                  <p:ext uri="{386F3935-93C4-4BCD-93E2-E3B085C9AB24}">
-                    <p16:designElem xmlns:p16="http://schemas.microsoft.com/office/powerpoint/2015/main" val="1"/>
-                  </p:ext>
-                </p:extLst>
-              </p:nvPr>
-            </p:nvCxnSpPr>
-            <p:spPr>
-              <a:xfrm rot="1980000" flipH="1">
-                <a:off x="11249872" y="968091"/>
-                <a:ext cx="3394" cy="182880"/>
-              </a:xfrm>
-              <a:prstGeom prst="line">
-                <a:avLst/>
-              </a:prstGeom>
-              <a:ln>
-                <a:solidFill>
-                  <a:srgbClr val="FFFFFF">
-                    <a:alpha val="30196"/>
-                  </a:srgbClr>
-                </a:solidFill>
-              </a:ln>
-            </p:spPr>
-            <p:style>
-              <a:lnRef idx="1">
-                <a:schemeClr val="accent1"/>
-              </a:lnRef>
-              <a:fillRef idx="0">
-                <a:schemeClr val="accent1"/>
-              </a:fillRef>
-              <a:effectRef idx="0">
-                <a:schemeClr val="accent1"/>
-              </a:effectRef>
-              <a:fontRef idx="minor">
-                <a:schemeClr val="tx1"/>
-              </a:fontRef>
-            </p:style>
-          </p:cxnSp>
-          <p:cxnSp>
-            <p:nvCxnSpPr>
-              <p:cNvPr id="113" name="Straight Connector 112">
-                <a:extLst>
-                  <a:ext uri="{FF2B5EF4-FFF2-40B4-BE49-F238E27FC236}">
-                    <a16:creationId xmlns:a16="http://schemas.microsoft.com/office/drawing/2014/main" id="{7448942A-BFE6-4A74-8AC2-D0A3D09D8E01}"/>
-                  </a:ext>
-                  <a:ext uri="{C183D7F6-B498-43B3-948B-1728B52AA6E4}">
-                    <adec:decorative xmlns:adec="http://schemas.microsoft.com/office/drawing/2017/decorative" val="1"/>
-                  </a:ext>
-                </a:extLst>
-              </p:cNvPr>
-              <p:cNvCxnSpPr/>
-              <p:nvPr>
-                <p:extLst>
-                  <p:ext uri="{386F3935-93C4-4BCD-93E2-E3B085C9AB24}">
-                    <p16:designElem xmlns:p16="http://schemas.microsoft.com/office/powerpoint/2015/main" val="1"/>
-                  </p:ext>
-                </p:extLst>
-              </p:nvPr>
-            </p:nvCxnSpPr>
-            <p:spPr>
-              <a:xfrm rot="2160000" flipH="1">
-                <a:off x="11366875" y="1048084"/>
-                <a:ext cx="3394" cy="182880"/>
-              </a:xfrm>
-              <a:prstGeom prst="line">
-                <a:avLst/>
-              </a:prstGeom>
-              <a:ln>
-                <a:solidFill>
-                  <a:srgbClr val="FFFFFF">
-                    <a:alpha val="30196"/>
-                  </a:srgbClr>
-                </a:solidFill>
-              </a:ln>
-            </p:spPr>
-            <p:style>
-              <a:lnRef idx="1">
-                <a:schemeClr val="accent1"/>
-              </a:lnRef>
-              <a:fillRef idx="0">
-                <a:schemeClr val="accent1"/>
-              </a:fillRef>
-              <a:effectRef idx="0">
-                <a:schemeClr val="accent1"/>
-              </a:effectRef>
-              <a:fontRef idx="minor">
-                <a:schemeClr val="tx1"/>
-              </a:fontRef>
-            </p:style>
-          </p:cxnSp>
-          <p:cxnSp>
-            <p:nvCxnSpPr>
-              <p:cNvPr id="114" name="Straight Connector 113">
-                <a:extLst>
-                  <a:ext uri="{FF2B5EF4-FFF2-40B4-BE49-F238E27FC236}">
-                    <a16:creationId xmlns:a16="http://schemas.microsoft.com/office/drawing/2014/main" id="{5FE588F5-37CB-4EDE-90D5-20DE068E863C}"/>
-                  </a:ext>
-                  <a:ext uri="{C183D7F6-B498-43B3-948B-1728B52AA6E4}">
-                    <adec:decorative xmlns:adec="http://schemas.microsoft.com/office/drawing/2017/decorative" val="1"/>
-                  </a:ext>
-                </a:extLst>
-              </p:cNvPr>
-              <p:cNvCxnSpPr/>
-              <p:nvPr>
-                <p:extLst>
-                  <p:ext uri="{386F3935-93C4-4BCD-93E2-E3B085C9AB24}">
-                    <p16:designElem xmlns:p16="http://schemas.microsoft.com/office/powerpoint/2015/main" val="1"/>
-                  </p:ext>
-                </p:extLst>
-              </p:nvPr>
-            </p:nvCxnSpPr>
-            <p:spPr>
-              <a:xfrm rot="2280000" flipH="1">
-                <a:off x="11474058" y="1131525"/>
-                <a:ext cx="3394" cy="182880"/>
-              </a:xfrm>
-              <a:prstGeom prst="line">
-                <a:avLst/>
-              </a:prstGeom>
-              <a:ln>
-                <a:solidFill>
-                  <a:srgbClr val="FFFFFF">
-                    <a:alpha val="30196"/>
-                  </a:srgbClr>
-                </a:solidFill>
-              </a:ln>
-            </p:spPr>
-            <p:style>
-              <a:lnRef idx="1">
-                <a:schemeClr val="accent1"/>
-              </a:lnRef>
-              <a:fillRef idx="0">
-                <a:schemeClr val="accent1"/>
-              </a:fillRef>
-              <a:effectRef idx="0">
-                <a:schemeClr val="accent1"/>
-              </a:effectRef>
-              <a:fontRef idx="minor">
-                <a:schemeClr val="tx1"/>
-              </a:fontRef>
-            </p:style>
-          </p:cxnSp>
-          <p:cxnSp>
-            <p:nvCxnSpPr>
-              <p:cNvPr id="115" name="Straight Connector 114">
-                <a:extLst>
-                  <a:ext uri="{FF2B5EF4-FFF2-40B4-BE49-F238E27FC236}">
-                    <a16:creationId xmlns:a16="http://schemas.microsoft.com/office/drawing/2014/main" id="{3E34BBD7-4CCF-4691-952A-C2E662DF8B25}"/>
-                  </a:ext>
-                  <a:ext uri="{C183D7F6-B498-43B3-948B-1728B52AA6E4}">
-                    <adec:decorative xmlns:adec="http://schemas.microsoft.com/office/drawing/2017/decorative" val="1"/>
-                  </a:ext>
-                </a:extLst>
-              </p:cNvPr>
-              <p:cNvCxnSpPr/>
-              <p:nvPr>
-                <p:extLst>
-                  <p:ext uri="{386F3935-93C4-4BCD-93E2-E3B085C9AB24}">
-                    <p16:designElem xmlns:p16="http://schemas.microsoft.com/office/powerpoint/2015/main" val="1"/>
-                  </p:ext>
-                </p:extLst>
-              </p:nvPr>
-            </p:nvCxnSpPr>
-            <p:spPr>
-              <a:xfrm rot="2400000" flipH="1">
-                <a:off x="11583303" y="1221790"/>
-                <a:ext cx="3394" cy="182880"/>
-              </a:xfrm>
-              <a:prstGeom prst="line">
-                <a:avLst/>
-              </a:prstGeom>
-              <a:ln>
-                <a:solidFill>
-                  <a:srgbClr val="FFFFFF">
-                    <a:alpha val="30196"/>
-                  </a:srgbClr>
-                </a:solidFill>
-              </a:ln>
-            </p:spPr>
-            <p:style>
-              <a:lnRef idx="1">
-                <a:schemeClr val="accent1"/>
-              </a:lnRef>
-              <a:fillRef idx="0">
-                <a:schemeClr val="accent1"/>
-              </a:fillRef>
-              <a:effectRef idx="0">
-                <a:schemeClr val="accent1"/>
-              </a:effectRef>
-              <a:fontRef idx="minor">
-                <a:schemeClr val="tx1"/>
-              </a:fontRef>
-            </p:style>
-          </p:cxnSp>
-          <p:cxnSp>
-            <p:nvCxnSpPr>
-              <p:cNvPr id="116" name="Straight Connector 115">
-                <a:extLst>
-                  <a:ext uri="{FF2B5EF4-FFF2-40B4-BE49-F238E27FC236}">
-                    <a16:creationId xmlns:a16="http://schemas.microsoft.com/office/drawing/2014/main" id="{457B31F6-4799-4A8D-A7D8-261DCAE1C412}"/>
-                  </a:ext>
-                  <a:ext uri="{C183D7F6-B498-43B3-948B-1728B52AA6E4}">
-                    <adec:decorative xmlns:adec="http://schemas.microsoft.com/office/drawing/2017/decorative" val="1"/>
-                  </a:ext>
-                </a:extLst>
-              </p:cNvPr>
-              <p:cNvCxnSpPr/>
-              <p:nvPr>
-                <p:extLst>
-                  <p:ext uri="{386F3935-93C4-4BCD-93E2-E3B085C9AB24}">
-                    <p16:designElem xmlns:p16="http://schemas.microsoft.com/office/powerpoint/2015/main" val="1"/>
-                  </p:ext>
-                </p:extLst>
-              </p:nvPr>
-            </p:nvCxnSpPr>
-            <p:spPr>
-              <a:xfrm rot="2520000" flipH="1">
-                <a:off x="11685344" y="1321772"/>
-                <a:ext cx="3394" cy="182880"/>
-              </a:xfrm>
-              <a:prstGeom prst="line">
-                <a:avLst/>
-              </a:prstGeom>
-              <a:ln>
-                <a:solidFill>
-                  <a:srgbClr val="FFFFFF">
-                    <a:alpha val="30196"/>
-                  </a:srgbClr>
-                </a:solidFill>
-              </a:ln>
-            </p:spPr>
-            <p:style>
-              <a:lnRef idx="1">
-                <a:schemeClr val="accent1"/>
-              </a:lnRef>
-              <a:fillRef idx="0">
-                <a:schemeClr val="accent1"/>
-              </a:fillRef>
-              <a:effectRef idx="0">
-                <a:schemeClr val="accent1"/>
-              </a:effectRef>
-              <a:fontRef idx="minor">
-                <a:schemeClr val="tx1"/>
-              </a:fontRef>
-            </p:style>
-          </p:cxnSp>
-          <p:cxnSp>
-            <p:nvCxnSpPr>
-              <p:cNvPr id="117" name="Straight Connector 116">
-                <a:extLst>
-                  <a:ext uri="{FF2B5EF4-FFF2-40B4-BE49-F238E27FC236}">
-                    <a16:creationId xmlns:a16="http://schemas.microsoft.com/office/drawing/2014/main" id="{00424E31-1D0B-4E13-9D73-4DC0DB7B8348}"/>
-                  </a:ext>
-                  <a:ext uri="{C183D7F6-B498-43B3-948B-1728B52AA6E4}">
-                    <adec:decorative xmlns:adec="http://schemas.microsoft.com/office/drawing/2017/decorative" val="1"/>
-                  </a:ext>
-                </a:extLst>
-              </p:cNvPr>
-              <p:cNvCxnSpPr/>
-              <p:nvPr>
-                <p:extLst>
-                  <p:ext uri="{386F3935-93C4-4BCD-93E2-E3B085C9AB24}">
-                    <p16:designElem xmlns:p16="http://schemas.microsoft.com/office/powerpoint/2015/main" val="1"/>
-                  </p:ext>
-                </p:extLst>
-              </p:nvPr>
-            </p:nvCxnSpPr>
-            <p:spPr>
-              <a:xfrm rot="2700000" flipH="1">
-                <a:off x="11787704" y="1417630"/>
-                <a:ext cx="3394" cy="182880"/>
-              </a:xfrm>
-              <a:prstGeom prst="line">
-                <a:avLst/>
-              </a:prstGeom>
-              <a:ln>
-                <a:solidFill>
-                  <a:srgbClr val="FFFFFF">
-                    <a:alpha val="30196"/>
-                  </a:srgbClr>
-                </a:solidFill>
-              </a:ln>
-            </p:spPr>
-            <p:style>
-              <a:lnRef idx="1">
-                <a:schemeClr val="accent1"/>
-              </a:lnRef>
-              <a:fillRef idx="0">
-                <a:schemeClr val="accent1"/>
-              </a:fillRef>
-              <a:effectRef idx="0">
-                <a:schemeClr val="accent1"/>
-              </a:effectRef>
-              <a:fontRef idx="minor">
-                <a:schemeClr val="tx1"/>
-              </a:fontRef>
-            </p:style>
-          </p:cxnSp>
-          <p:cxnSp>
-            <p:nvCxnSpPr>
-              <p:cNvPr id="118" name="Straight Connector 117">
-                <a:extLst>
-                  <a:ext uri="{FF2B5EF4-FFF2-40B4-BE49-F238E27FC236}">
-                    <a16:creationId xmlns:a16="http://schemas.microsoft.com/office/drawing/2014/main" id="{A4379BE6-2A1F-4CF3-971D-B23BF4AF863D}"/>
-                  </a:ext>
-                  <a:ext uri="{C183D7F6-B498-43B3-948B-1728B52AA6E4}">
-                    <adec:decorative xmlns:adec="http://schemas.microsoft.com/office/drawing/2017/decorative" val="1"/>
-                  </a:ext>
-                </a:extLst>
-              </p:cNvPr>
-              <p:cNvCxnSpPr/>
-              <p:nvPr>
-                <p:extLst>
-                  <p:ext uri="{386F3935-93C4-4BCD-93E2-E3B085C9AB24}">
-                    <p16:designElem xmlns:p16="http://schemas.microsoft.com/office/powerpoint/2015/main" val="1"/>
-                  </p:ext>
-                </p:extLst>
-              </p:nvPr>
-            </p:nvCxnSpPr>
-            <p:spPr>
-              <a:xfrm rot="2820000" flipH="1">
-                <a:off x="11880859" y="1517931"/>
-                <a:ext cx="3394" cy="182880"/>
-              </a:xfrm>
-              <a:prstGeom prst="line">
-                <a:avLst/>
-              </a:prstGeom>
-              <a:ln>
-                <a:solidFill>
-                  <a:srgbClr val="FFFFFF">
-                    <a:alpha val="30196"/>
-                  </a:srgbClr>
-                </a:solidFill>
-              </a:ln>
-            </p:spPr>
-            <p:style>
-              <a:lnRef idx="1">
-                <a:schemeClr val="accent1"/>
-              </a:lnRef>
-              <a:fillRef idx="0">
-                <a:schemeClr val="accent1"/>
-              </a:fillRef>
-              <a:effectRef idx="0">
-                <a:schemeClr val="accent1"/>
-              </a:effectRef>
-              <a:fontRef idx="minor">
-                <a:schemeClr val="tx1"/>
-              </a:fontRef>
-            </p:style>
-          </p:cxnSp>
-          <p:cxnSp>
-            <p:nvCxnSpPr>
-              <p:cNvPr id="119" name="Straight Connector 118">
-                <a:extLst>
-                  <a:ext uri="{FF2B5EF4-FFF2-40B4-BE49-F238E27FC236}">
-                    <a16:creationId xmlns:a16="http://schemas.microsoft.com/office/drawing/2014/main" id="{8EB3993A-1002-4C8D-8F50-CAEF0F18357F}"/>
-                  </a:ext>
-                  <a:ext uri="{C183D7F6-B498-43B3-948B-1728B52AA6E4}">
-                    <adec:decorative xmlns:adec="http://schemas.microsoft.com/office/drawing/2017/decorative" val="1"/>
-                  </a:ext>
-                </a:extLst>
-              </p:cNvPr>
-              <p:cNvCxnSpPr/>
-              <p:nvPr>
-                <p:extLst>
-                  <p:ext uri="{386F3935-93C4-4BCD-93E2-E3B085C9AB24}">
-                    <p16:designElem xmlns:p16="http://schemas.microsoft.com/office/powerpoint/2015/main" val="1"/>
-                  </p:ext>
-                </p:extLst>
-              </p:nvPr>
-            </p:nvCxnSpPr>
-            <p:spPr>
-              <a:xfrm rot="2940000" flipH="1">
-                <a:off x="11969252" y="1627437"/>
-                <a:ext cx="3394" cy="182880"/>
-              </a:xfrm>
-              <a:prstGeom prst="line">
-                <a:avLst/>
-              </a:prstGeom>
-              <a:ln>
-                <a:solidFill>
-                  <a:srgbClr val="FFFFFF">
-                    <a:alpha val="30196"/>
-                  </a:srgbClr>
-                </a:solidFill>
-              </a:ln>
-            </p:spPr>
-            <p:style>
-              <a:lnRef idx="1">
-                <a:schemeClr val="accent1"/>
-              </a:lnRef>
-              <a:fillRef idx="0">
-                <a:schemeClr val="accent1"/>
-              </a:fillRef>
-              <a:effectRef idx="0">
-                <a:schemeClr val="accent1"/>
-              </a:effectRef>
-              <a:fontRef idx="minor">
-                <a:schemeClr val="tx1"/>
-              </a:fontRef>
-            </p:style>
-          </p:cxnSp>
-          <p:cxnSp>
-            <p:nvCxnSpPr>
-              <p:cNvPr id="120" name="Straight Connector 119">
-                <a:extLst>
-                  <a:ext uri="{FF2B5EF4-FFF2-40B4-BE49-F238E27FC236}">
-                    <a16:creationId xmlns:a16="http://schemas.microsoft.com/office/drawing/2014/main" id="{01D2DBC3-0B30-4312-91E1-6FA2C187058F}"/>
-                  </a:ext>
-                  <a:ext uri="{C183D7F6-B498-43B3-948B-1728B52AA6E4}">
-                    <adec:decorative xmlns:adec="http://schemas.microsoft.com/office/drawing/2017/decorative" val="1"/>
-                  </a:ext>
-                </a:extLst>
-              </p:cNvPr>
-              <p:cNvCxnSpPr/>
-              <p:nvPr>
-                <p:extLst>
-                  <p:ext uri="{386F3935-93C4-4BCD-93E2-E3B085C9AB24}">
-                    <p16:designElem xmlns:p16="http://schemas.microsoft.com/office/powerpoint/2015/main" val="1"/>
-                  </p:ext>
-                </p:extLst>
-              </p:nvPr>
-            </p:nvCxnSpPr>
-            <p:spPr>
-              <a:xfrm rot="3060000" flipH="1">
-                <a:off x="12062016" y="1736011"/>
-                <a:ext cx="3394" cy="182880"/>
-              </a:xfrm>
-              <a:prstGeom prst="line">
-                <a:avLst/>
-              </a:prstGeom>
-              <a:ln>
-                <a:solidFill>
-                  <a:srgbClr val="FFFFFF">
-                    <a:alpha val="30196"/>
-                  </a:srgbClr>
-                </a:solidFill>
-              </a:ln>
-            </p:spPr>
-            <p:style>
-              <a:lnRef idx="1">
-                <a:schemeClr val="accent1"/>
-              </a:lnRef>
-              <a:fillRef idx="0">
-                <a:schemeClr val="accent1"/>
-              </a:fillRef>
-              <a:effectRef idx="0">
-                <a:schemeClr val="accent1"/>
-              </a:effectRef>
-              <a:fontRef idx="minor">
-                <a:schemeClr val="tx1"/>
-              </a:fontRef>
-            </p:style>
-          </p:cxnSp>
-          <p:cxnSp>
-            <p:nvCxnSpPr>
-              <p:cNvPr id="121" name="Straight Connector 120">
-                <a:extLst>
-                  <a:ext uri="{FF2B5EF4-FFF2-40B4-BE49-F238E27FC236}">
-                    <a16:creationId xmlns:a16="http://schemas.microsoft.com/office/drawing/2014/main" id="{696B6005-D67A-4006-844E-C561284F7929}"/>
-                  </a:ext>
-                  <a:ext uri="{C183D7F6-B498-43B3-948B-1728B52AA6E4}">
-                    <adec:decorative xmlns:adec="http://schemas.microsoft.com/office/drawing/2017/decorative" val="1"/>
-                  </a:ext>
-                </a:extLst>
-              </p:cNvPr>
-              <p:cNvCxnSpPr/>
-              <p:nvPr>
-                <p:extLst>
-                  <p:ext uri="{386F3935-93C4-4BCD-93E2-E3B085C9AB24}">
-                    <p16:designElem xmlns:p16="http://schemas.microsoft.com/office/powerpoint/2015/main" val="1"/>
-                  </p:ext>
-                </p:extLst>
-              </p:nvPr>
-            </p:nvCxnSpPr>
-            <p:spPr>
-              <a:xfrm flipH="1">
-                <a:off x="12074680" y="1910249"/>
-                <a:ext cx="117320" cy="82912"/>
-              </a:xfrm>
-              <a:prstGeom prst="line">
-                <a:avLst/>
-              </a:prstGeom>
-              <a:ln>
-                <a:solidFill>
-                  <a:srgbClr val="FFFFFF">
-                    <a:alpha val="30196"/>
-                  </a:srgbClr>
-                </a:solidFill>
-              </a:ln>
-            </p:spPr>
-            <p:style>
-              <a:lnRef idx="1">
-                <a:schemeClr val="accent1"/>
-              </a:lnRef>
-              <a:fillRef idx="0">
-                <a:schemeClr val="accent1"/>
-              </a:fillRef>
-              <a:effectRef idx="0">
-                <a:schemeClr val="accent1"/>
-              </a:effectRef>
-              <a:fontRef idx="minor">
-                <a:schemeClr val="tx1"/>
-              </a:fontRef>
-            </p:style>
-          </p:cxnSp>
-          <p:cxnSp>
-            <p:nvCxnSpPr>
-              <p:cNvPr id="122" name="Straight Connector 121">
-                <a:extLst>
-                  <a:ext uri="{FF2B5EF4-FFF2-40B4-BE49-F238E27FC236}">
-                    <a16:creationId xmlns:a16="http://schemas.microsoft.com/office/drawing/2014/main" id="{4F119E0F-FB34-440B-8C52-AC64584F0E07}"/>
-                  </a:ext>
-                  <a:ext uri="{C183D7F6-B498-43B3-948B-1728B52AA6E4}">
-                    <adec:decorative xmlns:adec="http://schemas.microsoft.com/office/drawing/2017/decorative" val="1"/>
-                  </a:ext>
-                </a:extLst>
-              </p:cNvPr>
-              <p:cNvCxnSpPr/>
-              <p:nvPr>
-                <p:extLst>
-                  <p:ext uri="{386F3935-93C4-4BCD-93E2-E3B085C9AB24}">
-                    <p16:designElem xmlns:p16="http://schemas.microsoft.com/office/powerpoint/2015/main" val="1"/>
-                  </p:ext>
-                </p:extLst>
-              </p:nvPr>
-            </p:nvCxnSpPr>
-            <p:spPr>
-              <a:xfrm flipH="1">
-                <a:off x="12149943" y="2083594"/>
-                <a:ext cx="39676" cy="21436"/>
-              </a:xfrm>
-              <a:prstGeom prst="line">
-                <a:avLst/>
-              </a:prstGeom>
-              <a:ln>
-                <a:solidFill>
-                  <a:srgbClr val="FFFFFF">
-                    <a:alpha val="30196"/>
-                  </a:srgbClr>
-                </a:solidFill>
-              </a:ln>
-            </p:spPr>
-            <p:style>
-              <a:lnRef idx="1">
-                <a:schemeClr val="accent1"/>
-              </a:lnRef>
-              <a:fillRef idx="0">
-                <a:schemeClr val="accent1"/>
-              </a:fillRef>
-              <a:effectRef idx="0">
-                <a:schemeClr val="accent1"/>
-              </a:effectRef>
-              <a:fontRef idx="minor">
-                <a:schemeClr val="tx1"/>
-              </a:fontRef>
-            </p:style>
-          </p:cxnSp>
-          <p:cxnSp>
-            <p:nvCxnSpPr>
-              <p:cNvPr id="123" name="Straight Connector 122">
-                <a:extLst>
-                  <a:ext uri="{FF2B5EF4-FFF2-40B4-BE49-F238E27FC236}">
-                    <a16:creationId xmlns:a16="http://schemas.microsoft.com/office/drawing/2014/main" id="{2C8E579E-53EA-4DAB-BB89-49243AE851DD}"/>
-                  </a:ext>
-                  <a:ext uri="{C183D7F6-B498-43B3-948B-1728B52AA6E4}">
-                    <adec:decorative xmlns:adec="http://schemas.microsoft.com/office/drawing/2017/decorative" val="1"/>
-                  </a:ext>
-                </a:extLst>
-              </p:cNvPr>
-              <p:cNvCxnSpPr/>
-              <p:nvPr>
-                <p:extLst>
-                  <p:ext uri="{386F3935-93C4-4BCD-93E2-E3B085C9AB24}">
-                    <p16:designElem xmlns:p16="http://schemas.microsoft.com/office/powerpoint/2015/main" val="1"/>
-                  </p:ext>
-                </p:extLst>
-              </p:nvPr>
-            </p:nvCxnSpPr>
-            <p:spPr>
-              <a:xfrm rot="-180000" flipH="1">
-                <a:off x="9127990" y="334251"/>
-                <a:ext cx="3394" cy="182880"/>
-              </a:xfrm>
-              <a:prstGeom prst="line">
-                <a:avLst/>
-              </a:prstGeom>
-              <a:ln>
-                <a:solidFill>
-                  <a:srgbClr val="FFFFFF">
-                    <a:alpha val="30196"/>
-                  </a:srgbClr>
-                </a:solidFill>
-              </a:ln>
-            </p:spPr>
-            <p:style>
-              <a:lnRef idx="1">
-                <a:schemeClr val="accent1"/>
-              </a:lnRef>
-              <a:fillRef idx="0">
-                <a:schemeClr val="accent1"/>
-              </a:fillRef>
-              <a:effectRef idx="0">
-                <a:schemeClr val="accent1"/>
-              </a:effectRef>
-              <a:fontRef idx="minor">
-                <a:schemeClr val="tx1"/>
-              </a:fontRef>
-            </p:style>
-          </p:cxnSp>
-          <p:cxnSp>
-            <p:nvCxnSpPr>
-              <p:cNvPr id="124" name="Straight Connector 123">
-                <a:extLst>
-                  <a:ext uri="{FF2B5EF4-FFF2-40B4-BE49-F238E27FC236}">
-                    <a16:creationId xmlns:a16="http://schemas.microsoft.com/office/drawing/2014/main" id="{5D603BD5-619E-44A4-BA18-61B4501FC25B}"/>
-                  </a:ext>
-                  <a:ext uri="{C183D7F6-B498-43B3-948B-1728B52AA6E4}">
-                    <adec:decorative xmlns:adec="http://schemas.microsoft.com/office/drawing/2017/decorative" val="1"/>
-                  </a:ext>
-                </a:extLst>
-              </p:cNvPr>
-              <p:cNvCxnSpPr/>
-              <p:nvPr>
-                <p:extLst>
-                  <p:ext uri="{386F3935-93C4-4BCD-93E2-E3B085C9AB24}">
-                    <p16:designElem xmlns:p16="http://schemas.microsoft.com/office/powerpoint/2015/main" val="1"/>
-                  </p:ext>
-                </p:extLst>
-              </p:nvPr>
-            </p:nvCxnSpPr>
-            <p:spPr>
-              <a:xfrm rot="-300000" flipH="1">
-                <a:off x="8987576" y="336633"/>
-                <a:ext cx="3394" cy="182880"/>
-              </a:xfrm>
-              <a:prstGeom prst="line">
-                <a:avLst/>
-              </a:prstGeom>
-              <a:ln>
-                <a:solidFill>
-                  <a:srgbClr val="FFFFFF">
-                    <a:alpha val="30196"/>
-                  </a:srgbClr>
-                </a:solidFill>
-              </a:ln>
-            </p:spPr>
-            <p:style>
-              <a:lnRef idx="1">
-                <a:schemeClr val="accent1"/>
-              </a:lnRef>
-              <a:fillRef idx="0">
-                <a:schemeClr val="accent1"/>
-              </a:fillRef>
-              <a:effectRef idx="0">
-                <a:schemeClr val="accent1"/>
-              </a:effectRef>
-              <a:fontRef idx="minor">
-                <a:schemeClr val="tx1"/>
-              </a:fontRef>
-            </p:style>
-          </p:cxnSp>
-          <p:cxnSp>
-            <p:nvCxnSpPr>
-              <p:cNvPr id="125" name="Straight Connector 124">
-                <a:extLst>
-                  <a:ext uri="{FF2B5EF4-FFF2-40B4-BE49-F238E27FC236}">
-                    <a16:creationId xmlns:a16="http://schemas.microsoft.com/office/drawing/2014/main" id="{8743652E-C89F-4433-A122-83CA187F9728}"/>
-                  </a:ext>
-                  <a:ext uri="{C183D7F6-B498-43B3-948B-1728B52AA6E4}">
-                    <adec:decorative xmlns:adec="http://schemas.microsoft.com/office/drawing/2017/decorative" val="1"/>
-                  </a:ext>
-                </a:extLst>
-              </p:cNvPr>
-              <p:cNvCxnSpPr/>
-              <p:nvPr>
-                <p:extLst>
-                  <p:ext uri="{386F3935-93C4-4BCD-93E2-E3B085C9AB24}">
-                    <p16:designElem xmlns:p16="http://schemas.microsoft.com/office/powerpoint/2015/main" val="1"/>
-                  </p:ext>
-                </p:extLst>
-              </p:nvPr>
-            </p:nvCxnSpPr>
-            <p:spPr>
-              <a:xfrm rot="-420000" flipH="1">
-                <a:off x="8844859" y="351176"/>
-                <a:ext cx="3394" cy="182880"/>
-              </a:xfrm>
-              <a:prstGeom prst="line">
-                <a:avLst/>
-              </a:prstGeom>
-              <a:ln>
-                <a:solidFill>
-                  <a:srgbClr val="FFFFFF">
-                    <a:alpha val="30196"/>
-                  </a:srgbClr>
-                </a:solidFill>
-              </a:ln>
-            </p:spPr>
-            <p:style>
-              <a:lnRef idx="1">
-                <a:schemeClr val="accent1"/>
-              </a:lnRef>
-              <a:fillRef idx="0">
-                <a:schemeClr val="accent1"/>
-              </a:fillRef>
-              <a:effectRef idx="0">
-                <a:schemeClr val="accent1"/>
-              </a:effectRef>
-              <a:fontRef idx="minor">
-                <a:schemeClr val="tx1"/>
-              </a:fontRef>
-            </p:style>
-          </p:cxnSp>
-          <p:cxnSp>
-            <p:nvCxnSpPr>
-              <p:cNvPr id="126" name="Straight Connector 125">
-                <a:extLst>
-                  <a:ext uri="{FF2B5EF4-FFF2-40B4-BE49-F238E27FC236}">
-                    <a16:creationId xmlns:a16="http://schemas.microsoft.com/office/drawing/2014/main" id="{3F45C8D9-C3D7-4DE6-A151-4FC02FD565B4}"/>
-                  </a:ext>
-                  <a:ext uri="{C183D7F6-B498-43B3-948B-1728B52AA6E4}">
-                    <adec:decorative xmlns:adec="http://schemas.microsoft.com/office/drawing/2017/decorative" val="1"/>
-                  </a:ext>
-                </a:extLst>
-              </p:cNvPr>
-              <p:cNvCxnSpPr/>
-              <p:nvPr>
-                <p:extLst>
-                  <p:ext uri="{386F3935-93C4-4BCD-93E2-E3B085C9AB24}">
-                    <p16:designElem xmlns:p16="http://schemas.microsoft.com/office/powerpoint/2015/main" val="1"/>
-                  </p:ext>
-                </p:extLst>
-              </p:nvPr>
-            </p:nvCxnSpPr>
-            <p:spPr>
-              <a:xfrm rot="-540000" flipH="1">
-                <a:off x="8706904" y="365719"/>
-                <a:ext cx="3394" cy="182880"/>
-              </a:xfrm>
-              <a:prstGeom prst="line">
-                <a:avLst/>
-              </a:prstGeom>
-              <a:ln>
-                <a:solidFill>
-                  <a:srgbClr val="FFFFFF">
-                    <a:alpha val="30196"/>
-                  </a:srgbClr>
-                </a:solidFill>
-              </a:ln>
-            </p:spPr>
-            <p:style>
-              <a:lnRef idx="1">
-                <a:schemeClr val="accent1"/>
-              </a:lnRef>
-              <a:fillRef idx="0">
-                <a:schemeClr val="accent1"/>
-              </a:fillRef>
-              <a:effectRef idx="0">
-                <a:schemeClr val="accent1"/>
-              </a:effectRef>
-              <a:fontRef idx="minor">
-                <a:schemeClr val="tx1"/>
-              </a:fontRef>
-            </p:style>
-          </p:cxnSp>
-          <p:cxnSp>
-            <p:nvCxnSpPr>
-              <p:cNvPr id="127" name="Straight Connector 126">
-                <a:extLst>
-                  <a:ext uri="{FF2B5EF4-FFF2-40B4-BE49-F238E27FC236}">
-                    <a16:creationId xmlns:a16="http://schemas.microsoft.com/office/drawing/2014/main" id="{88F4DE1F-74D6-4B7E-A864-A7354F287FB1}"/>
-                  </a:ext>
-                  <a:ext uri="{C183D7F6-B498-43B3-948B-1728B52AA6E4}">
-                    <adec:decorative xmlns:adec="http://schemas.microsoft.com/office/drawing/2017/decorative" val="1"/>
-                  </a:ext>
-                </a:extLst>
-              </p:cNvPr>
-              <p:cNvCxnSpPr/>
-              <p:nvPr>
-                <p:extLst>
-                  <p:ext uri="{386F3935-93C4-4BCD-93E2-E3B085C9AB24}">
-                    <p16:designElem xmlns:p16="http://schemas.microsoft.com/office/powerpoint/2015/main" val="1"/>
-                  </p:ext>
-                </p:extLst>
-              </p:nvPr>
-            </p:nvCxnSpPr>
-            <p:spPr>
-              <a:xfrm rot="-720000" flipH="1">
-                <a:off x="8568008" y="387891"/>
-                <a:ext cx="3394" cy="182880"/>
-              </a:xfrm>
-              <a:prstGeom prst="line">
-                <a:avLst/>
-              </a:prstGeom>
-              <a:ln>
-                <a:solidFill>
-                  <a:srgbClr val="FFFFFF">
-                    <a:alpha val="30196"/>
-                  </a:srgbClr>
-                </a:solidFill>
-              </a:ln>
-            </p:spPr>
-            <p:style>
-              <a:lnRef idx="1">
-                <a:schemeClr val="accent1"/>
-              </a:lnRef>
-              <a:fillRef idx="0">
-                <a:schemeClr val="accent1"/>
-              </a:fillRef>
-              <a:effectRef idx="0">
-                <a:schemeClr val="accent1"/>
-              </a:effectRef>
-              <a:fontRef idx="minor">
-                <a:schemeClr val="tx1"/>
-              </a:fontRef>
-            </p:style>
-          </p:cxnSp>
-          <p:cxnSp>
-            <p:nvCxnSpPr>
-              <p:cNvPr id="128" name="Straight Connector 127">
-                <a:extLst>
-                  <a:ext uri="{FF2B5EF4-FFF2-40B4-BE49-F238E27FC236}">
-                    <a16:creationId xmlns:a16="http://schemas.microsoft.com/office/drawing/2014/main" id="{B8EBD3EA-DB69-4954-88BD-1218B340EB19}"/>
-                  </a:ext>
-                  <a:ext uri="{C183D7F6-B498-43B3-948B-1728B52AA6E4}">
-                    <adec:decorative xmlns:adec="http://schemas.microsoft.com/office/drawing/2017/decorative" val="1"/>
-                  </a:ext>
-                </a:extLst>
-              </p:cNvPr>
-              <p:cNvCxnSpPr/>
-              <p:nvPr>
-                <p:extLst>
-                  <p:ext uri="{386F3935-93C4-4BCD-93E2-E3B085C9AB24}">
-                    <p16:designElem xmlns:p16="http://schemas.microsoft.com/office/powerpoint/2015/main" val="1"/>
-                  </p:ext>
-                </p:extLst>
-              </p:nvPr>
-            </p:nvCxnSpPr>
-            <p:spPr>
-              <a:xfrm rot="-840000" flipH="1">
-                <a:off x="8429112" y="410063"/>
-                <a:ext cx="3394" cy="182880"/>
-              </a:xfrm>
-              <a:prstGeom prst="line">
-                <a:avLst/>
-              </a:prstGeom>
-              <a:ln>
-                <a:solidFill>
-                  <a:srgbClr val="FFFFFF">
-                    <a:alpha val="30196"/>
-                  </a:srgbClr>
-                </a:solidFill>
-              </a:ln>
-            </p:spPr>
-            <p:style>
-              <a:lnRef idx="1">
-                <a:schemeClr val="accent1"/>
-              </a:lnRef>
-              <a:fillRef idx="0">
-                <a:schemeClr val="accent1"/>
-              </a:fillRef>
-              <a:effectRef idx="0">
-                <a:schemeClr val="accent1"/>
-              </a:effectRef>
-              <a:fontRef idx="minor">
-                <a:schemeClr val="tx1"/>
-              </a:fontRef>
-            </p:style>
-          </p:cxnSp>
-          <p:cxnSp>
-            <p:nvCxnSpPr>
-              <p:cNvPr id="129" name="Straight Connector 128">
-                <a:extLst>
-                  <a:ext uri="{FF2B5EF4-FFF2-40B4-BE49-F238E27FC236}">
-                    <a16:creationId xmlns:a16="http://schemas.microsoft.com/office/drawing/2014/main" id="{20F8B685-F78E-4261-B345-F5E4238CA924}"/>
-                  </a:ext>
-                  <a:ext uri="{C183D7F6-B498-43B3-948B-1728B52AA6E4}">
-                    <adec:decorative xmlns:adec="http://schemas.microsoft.com/office/drawing/2017/decorative" val="1"/>
-                  </a:ext>
-                </a:extLst>
-              </p:cNvPr>
-              <p:cNvCxnSpPr/>
-              <p:nvPr>
-                <p:extLst>
-                  <p:ext uri="{386F3935-93C4-4BCD-93E2-E3B085C9AB24}">
-                    <p16:designElem xmlns:p16="http://schemas.microsoft.com/office/powerpoint/2015/main" val="1"/>
-                  </p:ext>
-                </p:extLst>
-              </p:nvPr>
-            </p:nvCxnSpPr>
-            <p:spPr>
-              <a:xfrm rot="-960000" flipH="1">
-                <a:off x="8294968" y="446219"/>
-                <a:ext cx="3394" cy="182880"/>
-              </a:xfrm>
-              <a:prstGeom prst="line">
-                <a:avLst/>
-              </a:prstGeom>
-              <a:ln>
-                <a:solidFill>
-                  <a:srgbClr val="FFFFFF">
-                    <a:alpha val="30196"/>
-                  </a:srgbClr>
-                </a:solidFill>
-              </a:ln>
-            </p:spPr>
-            <p:style>
-              <a:lnRef idx="1">
-                <a:schemeClr val="accent1"/>
-              </a:lnRef>
-              <a:fillRef idx="0">
-                <a:schemeClr val="accent1"/>
-              </a:fillRef>
-              <a:effectRef idx="0">
-                <a:schemeClr val="accent1"/>
-              </a:effectRef>
-              <a:fontRef idx="minor">
-                <a:schemeClr val="tx1"/>
-              </a:fontRef>
-            </p:style>
-          </p:cxnSp>
-          <p:cxnSp>
-            <p:nvCxnSpPr>
-              <p:cNvPr id="130" name="Straight Connector 129">
-                <a:extLst>
-                  <a:ext uri="{FF2B5EF4-FFF2-40B4-BE49-F238E27FC236}">
-                    <a16:creationId xmlns:a16="http://schemas.microsoft.com/office/drawing/2014/main" id="{4F587EF1-D784-4D0C-85F1-84D9896205C3}"/>
-                  </a:ext>
-                  <a:ext uri="{C183D7F6-B498-43B3-948B-1728B52AA6E4}">
-                    <adec:decorative xmlns:adec="http://schemas.microsoft.com/office/drawing/2017/decorative" val="1"/>
-                  </a:ext>
-                </a:extLst>
-              </p:cNvPr>
-              <p:cNvCxnSpPr/>
-              <p:nvPr>
-                <p:extLst>
-                  <p:ext uri="{386F3935-93C4-4BCD-93E2-E3B085C9AB24}">
-                    <p16:designElem xmlns:p16="http://schemas.microsoft.com/office/powerpoint/2015/main" val="1"/>
-                  </p:ext>
-                </p:extLst>
-              </p:nvPr>
-            </p:nvCxnSpPr>
-            <p:spPr>
-              <a:xfrm rot="-1080000" flipH="1">
-                <a:off x="8160824" y="482375"/>
-                <a:ext cx="3394" cy="182880"/>
-              </a:xfrm>
-              <a:prstGeom prst="line">
-                <a:avLst/>
-              </a:prstGeom>
-              <a:ln>
-                <a:solidFill>
-                  <a:srgbClr val="FFFFFF">
-                    <a:alpha val="30196"/>
-                  </a:srgbClr>
-                </a:solidFill>
-              </a:ln>
-            </p:spPr>
-            <p:style>
-              <a:lnRef idx="1">
-                <a:schemeClr val="accent1"/>
-              </a:lnRef>
-              <a:fillRef idx="0">
-                <a:schemeClr val="accent1"/>
-              </a:fillRef>
-              <a:effectRef idx="0">
-                <a:schemeClr val="accent1"/>
-              </a:effectRef>
-              <a:fontRef idx="minor">
-                <a:schemeClr val="tx1"/>
-              </a:fontRef>
-            </p:style>
-          </p:cxnSp>
-          <p:cxnSp>
-            <p:nvCxnSpPr>
-              <p:cNvPr id="131" name="Straight Connector 130">
-                <a:extLst>
-                  <a:ext uri="{FF2B5EF4-FFF2-40B4-BE49-F238E27FC236}">
-                    <a16:creationId xmlns:a16="http://schemas.microsoft.com/office/drawing/2014/main" id="{EAFC9F26-DE9C-44ED-BFDA-B53D4373F556}"/>
-                  </a:ext>
-                  <a:ext uri="{C183D7F6-B498-43B3-948B-1728B52AA6E4}">
-                    <adec:decorative xmlns:adec="http://schemas.microsoft.com/office/drawing/2017/decorative" val="1"/>
-                  </a:ext>
-                </a:extLst>
-              </p:cNvPr>
-              <p:cNvCxnSpPr/>
-              <p:nvPr>
-                <p:extLst>
-                  <p:ext uri="{386F3935-93C4-4BCD-93E2-E3B085C9AB24}">
-                    <p16:designElem xmlns:p16="http://schemas.microsoft.com/office/powerpoint/2015/main" val="1"/>
-                  </p:ext>
-                </p:extLst>
-              </p:nvPr>
-            </p:nvCxnSpPr>
-            <p:spPr>
-              <a:xfrm rot="-1260000" flipH="1">
-                <a:off x="8027689" y="531848"/>
-                <a:ext cx="3394" cy="182880"/>
-              </a:xfrm>
-              <a:prstGeom prst="line">
-                <a:avLst/>
-              </a:prstGeom>
-              <a:ln>
-                <a:solidFill>
-                  <a:srgbClr val="FFFFFF">
-                    <a:alpha val="30196"/>
-                  </a:srgbClr>
-                </a:solidFill>
-              </a:ln>
-            </p:spPr>
-            <p:style>
-              <a:lnRef idx="1">
-                <a:schemeClr val="accent1"/>
-              </a:lnRef>
-              <a:fillRef idx="0">
-                <a:schemeClr val="accent1"/>
-              </a:fillRef>
-              <a:effectRef idx="0">
-                <a:schemeClr val="accent1"/>
-              </a:effectRef>
-              <a:fontRef idx="minor">
-                <a:schemeClr val="tx1"/>
-              </a:fontRef>
-            </p:style>
-          </p:cxnSp>
-          <p:cxnSp>
-            <p:nvCxnSpPr>
-              <p:cNvPr id="132" name="Straight Connector 131">
-                <a:extLst>
-                  <a:ext uri="{FF2B5EF4-FFF2-40B4-BE49-F238E27FC236}">
-                    <a16:creationId xmlns:a16="http://schemas.microsoft.com/office/drawing/2014/main" id="{6C5C5B20-2957-4913-974F-6C643B14AC03}"/>
-                  </a:ext>
-                  <a:ext uri="{C183D7F6-B498-43B3-948B-1728B52AA6E4}">
-                    <adec:decorative xmlns:adec="http://schemas.microsoft.com/office/drawing/2017/decorative" val="1"/>
-                  </a:ext>
-                </a:extLst>
-              </p:cNvPr>
-              <p:cNvCxnSpPr/>
-              <p:nvPr>
-                <p:extLst>
-                  <p:ext uri="{386F3935-93C4-4BCD-93E2-E3B085C9AB24}">
-                    <p16:designElem xmlns:p16="http://schemas.microsoft.com/office/powerpoint/2015/main" val="1"/>
-                  </p:ext>
-                </p:extLst>
-              </p:nvPr>
-            </p:nvCxnSpPr>
-            <p:spPr>
-              <a:xfrm rot="-1380000" flipH="1">
-                <a:off x="7894554" y="581321"/>
-                <a:ext cx="3394" cy="182880"/>
-              </a:xfrm>
-              <a:prstGeom prst="line">
-                <a:avLst/>
-              </a:prstGeom>
-              <a:ln>
-                <a:solidFill>
-                  <a:srgbClr val="FFFFFF">
-                    <a:alpha val="30196"/>
-                  </a:srgbClr>
-                </a:solidFill>
-              </a:ln>
-            </p:spPr>
-            <p:style>
-              <a:lnRef idx="1">
-                <a:schemeClr val="accent1"/>
-              </a:lnRef>
-              <a:fillRef idx="0">
-                <a:schemeClr val="accent1"/>
-              </a:fillRef>
-              <a:effectRef idx="0">
-                <a:schemeClr val="accent1"/>
-              </a:effectRef>
-              <a:fontRef idx="minor">
-                <a:schemeClr val="tx1"/>
-              </a:fontRef>
-            </p:style>
-          </p:cxnSp>
-          <p:cxnSp>
-            <p:nvCxnSpPr>
-              <p:cNvPr id="133" name="Straight Connector 132">
-                <a:extLst>
-                  <a:ext uri="{FF2B5EF4-FFF2-40B4-BE49-F238E27FC236}">
-                    <a16:creationId xmlns:a16="http://schemas.microsoft.com/office/drawing/2014/main" id="{4FF2B521-7E20-4B95-8B57-723DDEA0DFB1}"/>
-                  </a:ext>
-                  <a:ext uri="{C183D7F6-B498-43B3-948B-1728B52AA6E4}">
-                    <adec:decorative xmlns:adec="http://schemas.microsoft.com/office/drawing/2017/decorative" val="1"/>
-                  </a:ext>
-                </a:extLst>
-              </p:cNvPr>
-              <p:cNvCxnSpPr/>
-              <p:nvPr>
-                <p:extLst>
-                  <p:ext uri="{386F3935-93C4-4BCD-93E2-E3B085C9AB24}">
-                    <p16:designElem xmlns:p16="http://schemas.microsoft.com/office/powerpoint/2015/main" val="1"/>
-                  </p:ext>
-                </p:extLst>
-              </p:nvPr>
-            </p:nvCxnSpPr>
-            <p:spPr>
-              <a:xfrm rot="-1500000" flipH="1">
-                <a:off x="7761419" y="630794"/>
-                <a:ext cx="3394" cy="182880"/>
-              </a:xfrm>
-              <a:prstGeom prst="line">
-                <a:avLst/>
-              </a:prstGeom>
-              <a:ln>
-                <a:solidFill>
-                  <a:srgbClr val="FFFFFF">
-                    <a:alpha val="30196"/>
-                  </a:srgbClr>
-                </a:solidFill>
-              </a:ln>
-            </p:spPr>
-            <p:style>
-              <a:lnRef idx="1">
-                <a:schemeClr val="accent1"/>
-              </a:lnRef>
-              <a:fillRef idx="0">
-                <a:schemeClr val="accent1"/>
-              </a:fillRef>
-              <a:effectRef idx="0">
-                <a:schemeClr val="accent1"/>
-              </a:effectRef>
-              <a:fontRef idx="minor">
-                <a:schemeClr val="tx1"/>
-              </a:fontRef>
-            </p:style>
-          </p:cxnSp>
-          <p:cxnSp>
-            <p:nvCxnSpPr>
-              <p:cNvPr id="134" name="Straight Connector 133">
-                <a:extLst>
-                  <a:ext uri="{FF2B5EF4-FFF2-40B4-BE49-F238E27FC236}">
-                    <a16:creationId xmlns:a16="http://schemas.microsoft.com/office/drawing/2014/main" id="{B099D084-404A-48EA-8AA4-3DE23D0A70C5}"/>
-                  </a:ext>
-                  <a:ext uri="{C183D7F6-B498-43B3-948B-1728B52AA6E4}">
-                    <adec:decorative xmlns:adec="http://schemas.microsoft.com/office/drawing/2017/decorative" val="1"/>
-                  </a:ext>
-                </a:extLst>
-              </p:cNvPr>
-              <p:cNvCxnSpPr/>
-              <p:nvPr>
-                <p:extLst>
-                  <p:ext uri="{386F3935-93C4-4BCD-93E2-E3B085C9AB24}">
-                    <p16:designElem xmlns:p16="http://schemas.microsoft.com/office/powerpoint/2015/main" val="1"/>
-                  </p:ext>
-                </p:extLst>
-              </p:nvPr>
-            </p:nvCxnSpPr>
-            <p:spPr>
-              <a:xfrm rot="-1620000" flipH="1">
-                <a:off x="7636645" y="689804"/>
-                <a:ext cx="3394" cy="182880"/>
-              </a:xfrm>
-              <a:prstGeom prst="line">
-                <a:avLst/>
-              </a:prstGeom>
-              <a:ln>
-                <a:solidFill>
-                  <a:srgbClr val="FFFFFF">
-                    <a:alpha val="30196"/>
-                  </a:srgbClr>
-                </a:solidFill>
-              </a:ln>
-            </p:spPr>
-            <p:style>
-              <a:lnRef idx="1">
-                <a:schemeClr val="accent1"/>
-              </a:lnRef>
-              <a:fillRef idx="0">
-                <a:schemeClr val="accent1"/>
-              </a:fillRef>
-              <a:effectRef idx="0">
-                <a:schemeClr val="accent1"/>
-              </a:effectRef>
-              <a:fontRef idx="minor">
-                <a:schemeClr val="tx1"/>
-              </a:fontRef>
-            </p:style>
-          </p:cxnSp>
-          <p:cxnSp>
-            <p:nvCxnSpPr>
-              <p:cNvPr id="135" name="Straight Connector 134">
-                <a:extLst>
-                  <a:ext uri="{FF2B5EF4-FFF2-40B4-BE49-F238E27FC236}">
-                    <a16:creationId xmlns:a16="http://schemas.microsoft.com/office/drawing/2014/main" id="{BFBCBDE4-1CF7-47CF-A3AC-40A225657D92}"/>
-                  </a:ext>
-                  <a:ext uri="{C183D7F6-B498-43B3-948B-1728B52AA6E4}">
-                    <adec:decorative xmlns:adec="http://schemas.microsoft.com/office/drawing/2017/decorative" val="1"/>
-                  </a:ext>
-                </a:extLst>
-              </p:cNvPr>
-              <p:cNvCxnSpPr/>
-              <p:nvPr>
-                <p:extLst>
-                  <p:ext uri="{386F3935-93C4-4BCD-93E2-E3B085C9AB24}">
-                    <p16:designElem xmlns:p16="http://schemas.microsoft.com/office/powerpoint/2015/main" val="1"/>
-                  </p:ext>
-                </p:extLst>
-              </p:nvPr>
-            </p:nvCxnSpPr>
-            <p:spPr>
-              <a:xfrm rot="-1800000" flipH="1">
-                <a:off x="7511871" y="751195"/>
-                <a:ext cx="3394" cy="182880"/>
-              </a:xfrm>
-              <a:prstGeom prst="line">
-                <a:avLst/>
-              </a:prstGeom>
-              <a:ln>
-                <a:solidFill>
-                  <a:srgbClr val="FFFFFF">
-                    <a:alpha val="30196"/>
-                  </a:srgbClr>
-                </a:solidFill>
-              </a:ln>
-            </p:spPr>
-            <p:style>
-              <a:lnRef idx="1">
-                <a:schemeClr val="accent1"/>
-              </a:lnRef>
-              <a:fillRef idx="0">
-                <a:schemeClr val="accent1"/>
-              </a:fillRef>
-              <a:effectRef idx="0">
-                <a:schemeClr val="accent1"/>
-              </a:effectRef>
-              <a:fontRef idx="minor">
-                <a:schemeClr val="tx1"/>
-              </a:fontRef>
-            </p:style>
-          </p:cxnSp>
-          <p:cxnSp>
-            <p:nvCxnSpPr>
-              <p:cNvPr id="136" name="Straight Connector 135">
-                <a:extLst>
-                  <a:ext uri="{FF2B5EF4-FFF2-40B4-BE49-F238E27FC236}">
-                    <a16:creationId xmlns:a16="http://schemas.microsoft.com/office/drawing/2014/main" id="{BB04CE69-D714-4B45-AA45-C18988347BFE}"/>
-                  </a:ext>
-                  <a:ext uri="{C183D7F6-B498-43B3-948B-1728B52AA6E4}">
-                    <adec:decorative xmlns:adec="http://schemas.microsoft.com/office/drawing/2017/decorative" val="1"/>
-                  </a:ext>
-                </a:extLst>
-              </p:cNvPr>
-              <p:cNvCxnSpPr/>
-              <p:nvPr>
-                <p:extLst>
-                  <p:ext uri="{386F3935-93C4-4BCD-93E2-E3B085C9AB24}">
-                    <p16:designElem xmlns:p16="http://schemas.microsoft.com/office/powerpoint/2015/main" val="1"/>
-                  </p:ext>
-                </p:extLst>
-              </p:nvPr>
-            </p:nvCxnSpPr>
-            <p:spPr>
-              <a:xfrm rot="-1920000" flipH="1">
-                <a:off x="7387899" y="819771"/>
-                <a:ext cx="3394" cy="182880"/>
-              </a:xfrm>
-              <a:prstGeom prst="line">
-                <a:avLst/>
-              </a:prstGeom>
-              <a:ln>
-                <a:solidFill>
-                  <a:srgbClr val="FFFFFF">
-                    <a:alpha val="30196"/>
-                  </a:srgbClr>
-                </a:solidFill>
-              </a:ln>
-            </p:spPr>
-            <p:style>
-              <a:lnRef idx="1">
-                <a:schemeClr val="accent1"/>
-              </a:lnRef>
-              <a:fillRef idx="0">
-                <a:schemeClr val="accent1"/>
-              </a:fillRef>
-              <a:effectRef idx="0">
-                <a:schemeClr val="accent1"/>
-              </a:effectRef>
-              <a:fontRef idx="minor">
-                <a:schemeClr val="tx1"/>
-              </a:fontRef>
-            </p:style>
-          </p:cxnSp>
-          <p:cxnSp>
-            <p:nvCxnSpPr>
-              <p:cNvPr id="137" name="Straight Connector 136">
-                <a:extLst>
-                  <a:ext uri="{FF2B5EF4-FFF2-40B4-BE49-F238E27FC236}">
-                    <a16:creationId xmlns:a16="http://schemas.microsoft.com/office/drawing/2014/main" id="{FACDC249-F5DC-498A-B86E-B98736F391B8}"/>
-                  </a:ext>
-                  <a:ext uri="{C183D7F6-B498-43B3-948B-1728B52AA6E4}">
-                    <adec:decorative xmlns:adec="http://schemas.microsoft.com/office/drawing/2017/decorative" val="1"/>
-                  </a:ext>
-                </a:extLst>
-              </p:cNvPr>
-              <p:cNvCxnSpPr/>
-              <p:nvPr>
-                <p:extLst>
-                  <p:ext uri="{386F3935-93C4-4BCD-93E2-E3B085C9AB24}">
-                    <p16:designElem xmlns:p16="http://schemas.microsoft.com/office/powerpoint/2015/main" val="1"/>
-                  </p:ext>
-                </p:extLst>
-              </p:nvPr>
-            </p:nvCxnSpPr>
-            <p:spPr>
-              <a:xfrm rot="-2040000" flipH="1">
-                <a:off x="7268530" y="893163"/>
-                <a:ext cx="3394" cy="182880"/>
-              </a:xfrm>
-              <a:prstGeom prst="line">
-                <a:avLst/>
-              </a:prstGeom>
-              <a:ln>
-                <a:solidFill>
-                  <a:srgbClr val="FFFFFF">
-                    <a:alpha val="30196"/>
-                  </a:srgbClr>
-                </a:solidFill>
-              </a:ln>
-            </p:spPr>
-            <p:style>
-              <a:lnRef idx="1">
-                <a:schemeClr val="accent1"/>
-              </a:lnRef>
-              <a:fillRef idx="0">
-                <a:schemeClr val="accent1"/>
-              </a:fillRef>
-              <a:effectRef idx="0">
-                <a:schemeClr val="accent1"/>
-              </a:effectRef>
-              <a:fontRef idx="minor">
-                <a:schemeClr val="tx1"/>
-              </a:fontRef>
-            </p:style>
-          </p:cxnSp>
-          <p:cxnSp>
-            <p:nvCxnSpPr>
-              <p:cNvPr id="138" name="Straight Connector 137">
-                <a:extLst>
-                  <a:ext uri="{FF2B5EF4-FFF2-40B4-BE49-F238E27FC236}">
-                    <a16:creationId xmlns:a16="http://schemas.microsoft.com/office/drawing/2014/main" id="{66F9CACB-3D25-4CD3-BACC-6CAF8C92372E}"/>
-                  </a:ext>
-                  <a:ext uri="{C183D7F6-B498-43B3-948B-1728B52AA6E4}">
-                    <adec:decorative xmlns:adec="http://schemas.microsoft.com/office/drawing/2017/decorative" val="1"/>
-                  </a:ext>
-                </a:extLst>
-              </p:cNvPr>
-              <p:cNvCxnSpPr/>
-              <p:nvPr>
-                <p:extLst>
-                  <p:ext uri="{386F3935-93C4-4BCD-93E2-E3B085C9AB24}">
-                    <p16:designElem xmlns:p16="http://schemas.microsoft.com/office/powerpoint/2015/main" val="1"/>
-                  </p:ext>
-                </p:extLst>
-              </p:nvPr>
-            </p:nvCxnSpPr>
-            <p:spPr>
-              <a:xfrm rot="-2160000" flipH="1">
-                <a:off x="7152030" y="976584"/>
-                <a:ext cx="3394" cy="182880"/>
-              </a:xfrm>
-              <a:prstGeom prst="line">
-                <a:avLst/>
-              </a:prstGeom>
-              <a:ln>
-                <a:solidFill>
-                  <a:srgbClr val="FFFFFF">
-                    <a:alpha val="30196"/>
-                  </a:srgbClr>
-                </a:solidFill>
-              </a:ln>
-            </p:spPr>
-            <p:style>
-              <a:lnRef idx="1">
-                <a:schemeClr val="accent1"/>
-              </a:lnRef>
-              <a:fillRef idx="0">
-                <a:schemeClr val="accent1"/>
-              </a:fillRef>
-              <a:effectRef idx="0">
-                <a:schemeClr val="accent1"/>
-              </a:effectRef>
-              <a:fontRef idx="minor">
-                <a:schemeClr val="tx1"/>
-              </a:fontRef>
-            </p:style>
-          </p:cxnSp>
-          <p:cxnSp>
-            <p:nvCxnSpPr>
-              <p:cNvPr id="139" name="Straight Connector 138">
-                <a:extLst>
-                  <a:ext uri="{FF2B5EF4-FFF2-40B4-BE49-F238E27FC236}">
-                    <a16:creationId xmlns:a16="http://schemas.microsoft.com/office/drawing/2014/main" id="{CE0A759E-B512-4C6B-A2AC-CB59E1068F0D}"/>
-                  </a:ext>
-                  <a:ext uri="{C183D7F6-B498-43B3-948B-1728B52AA6E4}">
-                    <adec:decorative xmlns:adec="http://schemas.microsoft.com/office/drawing/2017/decorative" val="1"/>
-                  </a:ext>
-                </a:extLst>
-              </p:cNvPr>
-              <p:cNvCxnSpPr/>
-              <p:nvPr>
-                <p:extLst>
-                  <p:ext uri="{386F3935-93C4-4BCD-93E2-E3B085C9AB24}">
-                    <p16:designElem xmlns:p16="http://schemas.microsoft.com/office/powerpoint/2015/main" val="1"/>
-                  </p:ext>
-                </p:extLst>
-              </p:nvPr>
-            </p:nvCxnSpPr>
-            <p:spPr>
-              <a:xfrm rot="-2340000" flipH="1">
-                <a:off x="7041695" y="1060025"/>
-                <a:ext cx="3394" cy="182880"/>
-              </a:xfrm>
-              <a:prstGeom prst="line">
-                <a:avLst/>
-              </a:prstGeom>
-              <a:ln>
-                <a:solidFill>
-                  <a:srgbClr val="FFFFFF">
-                    <a:alpha val="30196"/>
-                  </a:srgbClr>
-                </a:solidFill>
-              </a:ln>
-            </p:spPr>
-            <p:style>
-              <a:lnRef idx="1">
-                <a:schemeClr val="accent1"/>
-              </a:lnRef>
-              <a:fillRef idx="0">
-                <a:schemeClr val="accent1"/>
-              </a:fillRef>
-              <a:effectRef idx="0">
-                <a:schemeClr val="accent1"/>
-              </a:effectRef>
-              <a:fontRef idx="minor">
-                <a:schemeClr val="tx1"/>
-              </a:fontRef>
-            </p:style>
-          </p:cxnSp>
-          <p:cxnSp>
-            <p:nvCxnSpPr>
-              <p:cNvPr id="140" name="Straight Connector 139">
-                <a:extLst>
-                  <a:ext uri="{FF2B5EF4-FFF2-40B4-BE49-F238E27FC236}">
-                    <a16:creationId xmlns:a16="http://schemas.microsoft.com/office/drawing/2014/main" id="{48FDDBB3-375D-438E-AB85-DEE34D6B469A}"/>
-                  </a:ext>
-                  <a:ext uri="{C183D7F6-B498-43B3-948B-1728B52AA6E4}">
-                    <adec:decorative xmlns:adec="http://schemas.microsoft.com/office/drawing/2017/decorative" val="1"/>
-                  </a:ext>
-                </a:extLst>
-              </p:cNvPr>
-              <p:cNvCxnSpPr/>
-              <p:nvPr>
-                <p:extLst>
-                  <p:ext uri="{386F3935-93C4-4BCD-93E2-E3B085C9AB24}">
-                    <p16:designElem xmlns:p16="http://schemas.microsoft.com/office/powerpoint/2015/main" val="1"/>
-                  </p:ext>
-                </p:extLst>
-              </p:nvPr>
-            </p:nvCxnSpPr>
-            <p:spPr>
-              <a:xfrm rot="-2460000" flipH="1">
-                <a:off x="6931360" y="1143466"/>
-                <a:ext cx="3394" cy="182880"/>
-              </a:xfrm>
-              <a:prstGeom prst="line">
-                <a:avLst/>
-              </a:prstGeom>
-              <a:ln>
-                <a:solidFill>
-                  <a:srgbClr val="FFFFFF">
-                    <a:alpha val="30196"/>
-                  </a:srgbClr>
-                </a:solidFill>
-              </a:ln>
-            </p:spPr>
-            <p:style>
-              <a:lnRef idx="1">
-                <a:schemeClr val="accent1"/>
-              </a:lnRef>
-              <a:fillRef idx="0">
-                <a:schemeClr val="accent1"/>
-              </a:fillRef>
-              <a:effectRef idx="0">
-                <a:schemeClr val="accent1"/>
-              </a:effectRef>
-              <a:fontRef idx="minor">
-                <a:schemeClr val="tx1"/>
-              </a:fontRef>
-            </p:style>
-          </p:cxnSp>
-          <p:cxnSp>
-            <p:nvCxnSpPr>
-              <p:cNvPr id="141" name="Straight Connector 140">
-                <a:extLst>
-                  <a:ext uri="{FF2B5EF4-FFF2-40B4-BE49-F238E27FC236}">
-                    <a16:creationId xmlns:a16="http://schemas.microsoft.com/office/drawing/2014/main" id="{6571AE7B-9324-4652-BA2F-50550D60EDAA}"/>
-                  </a:ext>
-                  <a:ext uri="{C183D7F6-B498-43B3-948B-1728B52AA6E4}">
-                    <adec:decorative xmlns:adec="http://schemas.microsoft.com/office/drawing/2017/decorative" val="1"/>
-                  </a:ext>
-                </a:extLst>
-              </p:cNvPr>
-              <p:cNvCxnSpPr/>
-              <p:nvPr>
-                <p:extLst>
-                  <p:ext uri="{386F3935-93C4-4BCD-93E2-E3B085C9AB24}">
-                    <p16:designElem xmlns:p16="http://schemas.microsoft.com/office/powerpoint/2015/main" val="1"/>
-                  </p:ext>
-                </p:extLst>
-              </p:nvPr>
-            </p:nvCxnSpPr>
-            <p:spPr>
-              <a:xfrm rot="-2580000" flipH="1">
-                <a:off x="6819070" y="1235864"/>
-                <a:ext cx="3394" cy="182880"/>
-              </a:xfrm>
-              <a:prstGeom prst="line">
-                <a:avLst/>
-              </a:prstGeom>
-              <a:ln>
-                <a:solidFill>
-                  <a:srgbClr val="FFFFFF">
-                    <a:alpha val="30196"/>
-                  </a:srgbClr>
-                </a:solidFill>
-              </a:ln>
-            </p:spPr>
-            <p:style>
-              <a:lnRef idx="1">
-                <a:schemeClr val="accent1"/>
-              </a:lnRef>
-              <a:fillRef idx="0">
-                <a:schemeClr val="accent1"/>
-              </a:fillRef>
-              <a:effectRef idx="0">
-                <a:schemeClr val="accent1"/>
-              </a:effectRef>
-              <a:fontRef idx="minor">
-                <a:schemeClr val="tx1"/>
-              </a:fontRef>
-            </p:style>
-          </p:cxnSp>
-          <p:cxnSp>
-            <p:nvCxnSpPr>
-              <p:cNvPr id="142" name="Straight Connector 141">
-                <a:extLst>
-                  <a:ext uri="{FF2B5EF4-FFF2-40B4-BE49-F238E27FC236}">
-                    <a16:creationId xmlns:a16="http://schemas.microsoft.com/office/drawing/2014/main" id="{AD8EC0F0-66AE-4542-B774-FE12EDC1645A}"/>
-                  </a:ext>
-                  <a:ext uri="{C183D7F6-B498-43B3-948B-1728B52AA6E4}">
-                    <adec:decorative xmlns:adec="http://schemas.microsoft.com/office/drawing/2017/decorative" val="1"/>
-                  </a:ext>
-                </a:extLst>
-              </p:cNvPr>
-              <p:cNvCxnSpPr/>
-              <p:nvPr>
-                <p:extLst>
-                  <p:ext uri="{386F3935-93C4-4BCD-93E2-E3B085C9AB24}">
-                    <p16:designElem xmlns:p16="http://schemas.microsoft.com/office/powerpoint/2015/main" val="1"/>
-                  </p:ext>
-                </p:extLst>
-              </p:nvPr>
-            </p:nvCxnSpPr>
-            <p:spPr>
-              <a:xfrm rot="-2700000" flipH="1">
-                <a:off x="6721359" y="1332746"/>
-                <a:ext cx="3394" cy="182880"/>
-              </a:xfrm>
-              <a:prstGeom prst="line">
-                <a:avLst/>
-              </a:prstGeom>
-              <a:ln>
-                <a:solidFill>
-                  <a:srgbClr val="FFFFFF">
-                    <a:alpha val="30196"/>
-                  </a:srgbClr>
-                </a:solidFill>
-              </a:ln>
-            </p:spPr>
-            <p:style>
-              <a:lnRef idx="1">
-                <a:schemeClr val="accent1"/>
-              </a:lnRef>
-              <a:fillRef idx="0">
-                <a:schemeClr val="accent1"/>
-              </a:fillRef>
-              <a:effectRef idx="0">
-                <a:schemeClr val="accent1"/>
-              </a:effectRef>
-              <a:fontRef idx="minor">
-                <a:schemeClr val="tx1"/>
-              </a:fontRef>
-            </p:style>
-          </p:cxnSp>
-          <p:cxnSp>
-            <p:nvCxnSpPr>
-              <p:cNvPr id="143" name="Straight Connector 142">
-                <a:extLst>
-                  <a:ext uri="{FF2B5EF4-FFF2-40B4-BE49-F238E27FC236}">
-                    <a16:creationId xmlns:a16="http://schemas.microsoft.com/office/drawing/2014/main" id="{9FE28852-1AE5-4C7D-8A5A-FE72DA5321C6}"/>
-                  </a:ext>
-                  <a:ext uri="{C183D7F6-B498-43B3-948B-1728B52AA6E4}">
-                    <adec:decorative xmlns:adec="http://schemas.microsoft.com/office/drawing/2017/decorative" val="1"/>
-                  </a:ext>
-                </a:extLst>
-              </p:cNvPr>
-              <p:cNvCxnSpPr/>
-              <p:nvPr>
-                <p:extLst>
-                  <p:ext uri="{386F3935-93C4-4BCD-93E2-E3B085C9AB24}">
-                    <p16:designElem xmlns:p16="http://schemas.microsoft.com/office/powerpoint/2015/main" val="1"/>
-                  </p:ext>
-                </p:extLst>
-              </p:nvPr>
-            </p:nvCxnSpPr>
-            <p:spPr>
-              <a:xfrm rot="-2880000" flipH="1">
-                <a:off x="6617467" y="1429423"/>
-                <a:ext cx="3394" cy="182880"/>
-              </a:xfrm>
-              <a:prstGeom prst="line">
-                <a:avLst/>
-              </a:prstGeom>
-              <a:ln>
-                <a:solidFill>
-                  <a:srgbClr val="FFFFFF">
-                    <a:alpha val="30196"/>
-                  </a:srgbClr>
-                </a:solidFill>
-              </a:ln>
-            </p:spPr>
-            <p:style>
-              <a:lnRef idx="1">
-                <a:schemeClr val="accent1"/>
-              </a:lnRef>
-              <a:fillRef idx="0">
-                <a:schemeClr val="accent1"/>
-              </a:fillRef>
-              <a:effectRef idx="0">
-                <a:schemeClr val="accent1"/>
-              </a:effectRef>
-              <a:fontRef idx="minor">
-                <a:schemeClr val="tx1"/>
-              </a:fontRef>
-            </p:style>
-          </p:cxnSp>
-          <p:cxnSp>
-            <p:nvCxnSpPr>
-              <p:cNvPr id="144" name="Straight Connector 143">
-                <a:extLst>
-                  <a:ext uri="{FF2B5EF4-FFF2-40B4-BE49-F238E27FC236}">
-                    <a16:creationId xmlns:a16="http://schemas.microsoft.com/office/drawing/2014/main" id="{504E5358-618D-4DE9-85BF-84AFB4BEB155}"/>
-                  </a:ext>
-                  <a:ext uri="{C183D7F6-B498-43B3-948B-1728B52AA6E4}">
-                    <adec:decorative xmlns:adec="http://schemas.microsoft.com/office/drawing/2017/decorative" val="1"/>
-                  </a:ext>
-                </a:extLst>
-              </p:cNvPr>
-              <p:cNvCxnSpPr/>
-              <p:nvPr>
-                <p:extLst>
-                  <p:ext uri="{386F3935-93C4-4BCD-93E2-E3B085C9AB24}">
-                    <p16:designElem xmlns:p16="http://schemas.microsoft.com/office/powerpoint/2015/main" val="1"/>
-                  </p:ext>
-                </p:extLst>
-              </p:nvPr>
-            </p:nvCxnSpPr>
-            <p:spPr>
-              <a:xfrm rot="-3000000" flipH="1">
-                <a:off x="6520032" y="1527285"/>
-                <a:ext cx="3394" cy="182880"/>
-              </a:xfrm>
-              <a:prstGeom prst="line">
-                <a:avLst/>
-              </a:prstGeom>
-              <a:ln>
-                <a:solidFill>
-                  <a:srgbClr val="FFFFFF">
-                    <a:alpha val="30196"/>
-                  </a:srgbClr>
-                </a:solidFill>
-              </a:ln>
-            </p:spPr>
-            <p:style>
-              <a:lnRef idx="1">
-                <a:schemeClr val="accent1"/>
-              </a:lnRef>
-              <a:fillRef idx="0">
-                <a:schemeClr val="accent1"/>
-              </a:fillRef>
-              <a:effectRef idx="0">
-                <a:schemeClr val="accent1"/>
-              </a:effectRef>
-              <a:fontRef idx="minor">
-                <a:schemeClr val="tx1"/>
-              </a:fontRef>
-            </p:style>
-          </p:cxnSp>
-          <p:cxnSp>
-            <p:nvCxnSpPr>
-              <p:cNvPr id="145" name="Straight Connector 144">
-                <a:extLst>
-                  <a:ext uri="{FF2B5EF4-FFF2-40B4-BE49-F238E27FC236}">
-                    <a16:creationId xmlns:a16="http://schemas.microsoft.com/office/drawing/2014/main" id="{1286D725-FCF5-44D0-B5FF-4001A5A31C78}"/>
-                  </a:ext>
-                  <a:ext uri="{C183D7F6-B498-43B3-948B-1728B52AA6E4}">
-                    <adec:decorative xmlns:adec="http://schemas.microsoft.com/office/drawing/2017/decorative" val="1"/>
-                  </a:ext>
-                </a:extLst>
-              </p:cNvPr>
-              <p:cNvCxnSpPr/>
-              <p:nvPr>
-                <p:extLst>
-                  <p:ext uri="{386F3935-93C4-4BCD-93E2-E3B085C9AB24}">
-                    <p16:designElem xmlns:p16="http://schemas.microsoft.com/office/powerpoint/2015/main" val="1"/>
-                  </p:ext>
-                </p:extLst>
-              </p:nvPr>
-            </p:nvCxnSpPr>
-            <p:spPr>
-              <a:xfrm rot="-3120000" flipH="1">
-                <a:off x="6429579" y="1641610"/>
-                <a:ext cx="3394" cy="182880"/>
-              </a:xfrm>
-              <a:prstGeom prst="line">
-                <a:avLst/>
-              </a:prstGeom>
-              <a:ln>
-                <a:solidFill>
-                  <a:srgbClr val="FFFFFF">
-                    <a:alpha val="30196"/>
-                  </a:srgbClr>
-                </a:solidFill>
-              </a:ln>
-            </p:spPr>
-            <p:style>
-              <a:lnRef idx="1">
-                <a:schemeClr val="accent1"/>
-              </a:lnRef>
-              <a:fillRef idx="0">
-                <a:schemeClr val="accent1"/>
-              </a:fillRef>
-              <a:effectRef idx="0">
-                <a:schemeClr val="accent1"/>
-              </a:effectRef>
-              <a:fontRef idx="minor">
-                <a:schemeClr val="tx1"/>
-              </a:fontRef>
-            </p:style>
-          </p:cxnSp>
-          <p:cxnSp>
-            <p:nvCxnSpPr>
-              <p:cNvPr id="146" name="Straight Connector 145">
-                <a:extLst>
-                  <a:ext uri="{FF2B5EF4-FFF2-40B4-BE49-F238E27FC236}">
-                    <a16:creationId xmlns:a16="http://schemas.microsoft.com/office/drawing/2014/main" id="{9BD6607D-EE36-4270-BE75-B5D58808B7AE}"/>
-                  </a:ext>
-                  <a:ext uri="{C183D7F6-B498-43B3-948B-1728B52AA6E4}">
-                    <adec:decorative xmlns:adec="http://schemas.microsoft.com/office/drawing/2017/decorative" val="1"/>
-                  </a:ext>
-                </a:extLst>
-              </p:cNvPr>
-              <p:cNvCxnSpPr/>
-              <p:nvPr>
-                <p:extLst>
-                  <p:ext uri="{386F3935-93C4-4BCD-93E2-E3B085C9AB24}">
-                    <p16:designElem xmlns:p16="http://schemas.microsoft.com/office/powerpoint/2015/main" val="1"/>
-                  </p:ext>
-                </p:extLst>
-              </p:nvPr>
-            </p:nvCxnSpPr>
-            <p:spPr>
-              <a:xfrm rot="-3240000" flipH="1">
-                <a:off x="6340532" y="1750423"/>
-                <a:ext cx="3394" cy="182880"/>
-              </a:xfrm>
-              <a:prstGeom prst="line">
-                <a:avLst/>
-              </a:prstGeom>
-              <a:ln>
-                <a:solidFill>
-                  <a:srgbClr val="FFFFFF">
-                    <a:alpha val="30196"/>
-                  </a:srgbClr>
-                </a:solidFill>
-              </a:ln>
-            </p:spPr>
-            <p:style>
-              <a:lnRef idx="1">
-                <a:schemeClr val="accent1"/>
-              </a:lnRef>
-              <a:fillRef idx="0">
-                <a:schemeClr val="accent1"/>
-              </a:fillRef>
-              <a:effectRef idx="0">
-                <a:schemeClr val="accent1"/>
-              </a:effectRef>
-              <a:fontRef idx="minor">
-                <a:schemeClr val="tx1"/>
-              </a:fontRef>
-            </p:style>
-          </p:cxnSp>
-          <p:cxnSp>
-            <p:nvCxnSpPr>
-              <p:cNvPr id="147" name="Straight Connector 146">
-                <a:extLst>
-                  <a:ext uri="{FF2B5EF4-FFF2-40B4-BE49-F238E27FC236}">
-                    <a16:creationId xmlns:a16="http://schemas.microsoft.com/office/drawing/2014/main" id="{47CB98F5-FB6F-4EA1-BE45-73A75DFC966D}"/>
-                  </a:ext>
-                  <a:ext uri="{C183D7F6-B498-43B3-948B-1728B52AA6E4}">
-                    <adec:decorative xmlns:adec="http://schemas.microsoft.com/office/drawing/2017/decorative" val="1"/>
-                  </a:ext>
-                </a:extLst>
-              </p:cNvPr>
-              <p:cNvCxnSpPr/>
-              <p:nvPr>
-                <p:extLst>
-                  <p:ext uri="{386F3935-93C4-4BCD-93E2-E3B085C9AB24}">
-                    <p16:designElem xmlns:p16="http://schemas.microsoft.com/office/powerpoint/2015/main" val="1"/>
-                  </p:ext>
-                </p:extLst>
-              </p:nvPr>
-            </p:nvCxnSpPr>
-            <p:spPr>
-              <a:xfrm rot="-3420000" flipH="1">
-                <a:off x="6261757" y="1860178"/>
-                <a:ext cx="3394" cy="182880"/>
-              </a:xfrm>
-              <a:prstGeom prst="line">
-                <a:avLst/>
-              </a:prstGeom>
-              <a:ln>
-                <a:solidFill>
-                  <a:srgbClr val="FFFFFF">
-                    <a:alpha val="30196"/>
-                  </a:srgbClr>
-                </a:solidFill>
-              </a:ln>
-            </p:spPr>
-            <p:style>
-              <a:lnRef idx="1">
-                <a:schemeClr val="accent1"/>
-              </a:lnRef>
-              <a:fillRef idx="0">
-                <a:schemeClr val="accent1"/>
-              </a:fillRef>
-              <a:effectRef idx="0">
-                <a:schemeClr val="accent1"/>
-              </a:effectRef>
-              <a:fontRef idx="minor">
-                <a:schemeClr val="tx1"/>
-              </a:fontRef>
-            </p:style>
-          </p:cxnSp>
-          <p:cxnSp>
-            <p:nvCxnSpPr>
-              <p:cNvPr id="148" name="Straight Connector 147">
-                <a:extLst>
-                  <a:ext uri="{FF2B5EF4-FFF2-40B4-BE49-F238E27FC236}">
-                    <a16:creationId xmlns:a16="http://schemas.microsoft.com/office/drawing/2014/main" id="{6C48DEF1-B84B-4C6B-BC15-5C9CF3DAAF55}"/>
-                  </a:ext>
-                  <a:ext uri="{C183D7F6-B498-43B3-948B-1728B52AA6E4}">
-                    <adec:decorative xmlns:adec="http://schemas.microsoft.com/office/drawing/2017/decorative" val="1"/>
-                  </a:ext>
-                </a:extLst>
-              </p:cNvPr>
-              <p:cNvCxnSpPr/>
-              <p:nvPr>
-                <p:extLst>
-                  <p:ext uri="{386F3935-93C4-4BCD-93E2-E3B085C9AB24}">
-                    <p16:designElem xmlns:p16="http://schemas.microsoft.com/office/powerpoint/2015/main" val="1"/>
-                  </p:ext>
-                </p:extLst>
-              </p:nvPr>
-            </p:nvCxnSpPr>
-            <p:spPr>
-              <a:xfrm rot="-3540000" flipH="1">
-                <a:off x="6184144" y="1979619"/>
-                <a:ext cx="3394" cy="182880"/>
-              </a:xfrm>
-              <a:prstGeom prst="line">
-                <a:avLst/>
-              </a:prstGeom>
-              <a:ln>
-                <a:solidFill>
-                  <a:srgbClr val="FFFFFF">
-                    <a:alpha val="30196"/>
-                  </a:srgbClr>
-                </a:solidFill>
-              </a:ln>
-            </p:spPr>
-            <p:style>
-              <a:lnRef idx="1">
-                <a:schemeClr val="accent1"/>
-              </a:lnRef>
-              <a:fillRef idx="0">
-                <a:schemeClr val="accent1"/>
-              </a:fillRef>
-              <a:effectRef idx="0">
-                <a:schemeClr val="accent1"/>
-              </a:effectRef>
-              <a:fontRef idx="minor">
-                <a:schemeClr val="tx1"/>
-              </a:fontRef>
-            </p:style>
-          </p:cxnSp>
-          <p:cxnSp>
-            <p:nvCxnSpPr>
-              <p:cNvPr id="149" name="Straight Connector 148">
-                <a:extLst>
-                  <a:ext uri="{FF2B5EF4-FFF2-40B4-BE49-F238E27FC236}">
-                    <a16:creationId xmlns:a16="http://schemas.microsoft.com/office/drawing/2014/main" id="{81A1657A-7197-4559-8DAD-640280FF936F}"/>
-                  </a:ext>
-                  <a:ext uri="{C183D7F6-B498-43B3-948B-1728B52AA6E4}">
-                    <adec:decorative xmlns:adec="http://schemas.microsoft.com/office/drawing/2017/decorative" val="1"/>
-                  </a:ext>
-                </a:extLst>
-              </p:cNvPr>
-              <p:cNvCxnSpPr/>
-              <p:nvPr>
-                <p:extLst>
-                  <p:ext uri="{386F3935-93C4-4BCD-93E2-E3B085C9AB24}">
-                    <p16:designElem xmlns:p16="http://schemas.microsoft.com/office/powerpoint/2015/main" val="1"/>
-                  </p:ext>
-                </p:extLst>
-              </p:nvPr>
-            </p:nvCxnSpPr>
-            <p:spPr>
-              <a:xfrm rot="-3660000" flipH="1">
-                <a:off x="6106531" y="2099060"/>
-                <a:ext cx="3394" cy="182880"/>
-              </a:xfrm>
-              <a:prstGeom prst="line">
-                <a:avLst/>
-              </a:prstGeom>
-              <a:ln>
-                <a:solidFill>
-                  <a:srgbClr val="FFFFFF">
-                    <a:alpha val="30196"/>
-                  </a:srgbClr>
-                </a:solidFill>
-              </a:ln>
-            </p:spPr>
-            <p:style>
-              <a:lnRef idx="1">
-                <a:schemeClr val="accent1"/>
-              </a:lnRef>
-              <a:fillRef idx="0">
-                <a:schemeClr val="accent1"/>
-              </a:fillRef>
-              <a:effectRef idx="0">
-                <a:schemeClr val="accent1"/>
-              </a:effectRef>
-              <a:fontRef idx="minor">
-                <a:schemeClr val="tx1"/>
-              </a:fontRef>
-            </p:style>
-          </p:cxnSp>
-          <p:cxnSp>
-            <p:nvCxnSpPr>
-              <p:cNvPr id="150" name="Straight Connector 149">
-                <a:extLst>
-                  <a:ext uri="{FF2B5EF4-FFF2-40B4-BE49-F238E27FC236}">
-                    <a16:creationId xmlns:a16="http://schemas.microsoft.com/office/drawing/2014/main" id="{F30DEEEE-6BC2-4F12-AC26-EA02BB27FA2A}"/>
-                  </a:ext>
-                  <a:ext uri="{C183D7F6-B498-43B3-948B-1728B52AA6E4}">
-                    <adec:decorative xmlns:adec="http://schemas.microsoft.com/office/drawing/2017/decorative" val="1"/>
-                  </a:ext>
-                </a:extLst>
-              </p:cNvPr>
-              <p:cNvCxnSpPr/>
-              <p:nvPr>
-                <p:extLst>
-                  <p:ext uri="{386F3935-93C4-4BCD-93E2-E3B085C9AB24}">
-                    <p16:designElem xmlns:p16="http://schemas.microsoft.com/office/powerpoint/2015/main" val="1"/>
-                  </p:ext>
-                </p:extLst>
-              </p:nvPr>
-            </p:nvCxnSpPr>
-            <p:spPr>
-              <a:xfrm rot="-3780000" flipH="1">
-                <a:off x="6043206" y="2222556"/>
-                <a:ext cx="3394" cy="182880"/>
-              </a:xfrm>
-              <a:prstGeom prst="line">
-                <a:avLst/>
-              </a:prstGeom>
-              <a:ln>
-                <a:solidFill>
-                  <a:srgbClr val="FFFFFF">
-                    <a:alpha val="30196"/>
-                  </a:srgbClr>
-                </a:solidFill>
-              </a:ln>
-            </p:spPr>
-            <p:style>
-              <a:lnRef idx="1">
-                <a:schemeClr val="accent1"/>
-              </a:lnRef>
-              <a:fillRef idx="0">
-                <a:schemeClr val="accent1"/>
-              </a:fillRef>
-              <a:effectRef idx="0">
-                <a:schemeClr val="accent1"/>
-              </a:effectRef>
-              <a:fontRef idx="minor">
-                <a:schemeClr val="tx1"/>
-              </a:fontRef>
-            </p:style>
-          </p:cxnSp>
-          <p:cxnSp>
-            <p:nvCxnSpPr>
-              <p:cNvPr id="151" name="Straight Connector 150">
-                <a:extLst>
-                  <a:ext uri="{FF2B5EF4-FFF2-40B4-BE49-F238E27FC236}">
-                    <a16:creationId xmlns:a16="http://schemas.microsoft.com/office/drawing/2014/main" id="{4F70A519-7171-4594-B492-974B23F18F2B}"/>
-                  </a:ext>
-                  <a:ext uri="{C183D7F6-B498-43B3-948B-1728B52AA6E4}">
-                    <adec:decorative xmlns:adec="http://schemas.microsoft.com/office/drawing/2017/decorative" val="1"/>
-                  </a:ext>
-                </a:extLst>
-              </p:cNvPr>
-              <p:cNvCxnSpPr/>
-              <p:nvPr>
-                <p:extLst>
-                  <p:ext uri="{386F3935-93C4-4BCD-93E2-E3B085C9AB24}">
-                    <p16:designElem xmlns:p16="http://schemas.microsoft.com/office/powerpoint/2015/main" val="1"/>
-                  </p:ext>
-                </p:extLst>
-              </p:nvPr>
-            </p:nvCxnSpPr>
-            <p:spPr>
-              <a:xfrm rot="-3960000" flipH="1">
-                <a:off x="5978913" y="2344301"/>
-                <a:ext cx="3394" cy="182880"/>
-              </a:xfrm>
-              <a:prstGeom prst="line">
-                <a:avLst/>
-              </a:prstGeom>
-              <a:ln>
-                <a:solidFill>
-                  <a:srgbClr val="FFFFFF">
-                    <a:alpha val="30196"/>
-                  </a:srgbClr>
-                </a:solidFill>
-              </a:ln>
-            </p:spPr>
-            <p:style>
-              <a:lnRef idx="1">
-                <a:schemeClr val="accent1"/>
-              </a:lnRef>
-              <a:fillRef idx="0">
-                <a:schemeClr val="accent1"/>
-              </a:fillRef>
-              <a:effectRef idx="0">
-                <a:schemeClr val="accent1"/>
-              </a:effectRef>
-              <a:fontRef idx="minor">
-                <a:schemeClr val="tx1"/>
-              </a:fontRef>
-            </p:style>
-          </p:cxnSp>
-          <p:cxnSp>
-            <p:nvCxnSpPr>
-              <p:cNvPr id="152" name="Straight Connector 151">
-                <a:extLst>
-                  <a:ext uri="{FF2B5EF4-FFF2-40B4-BE49-F238E27FC236}">
-                    <a16:creationId xmlns:a16="http://schemas.microsoft.com/office/drawing/2014/main" id="{390583A9-FCC7-474E-B10D-8F6DD7B74DAD}"/>
-                  </a:ext>
-                  <a:ext uri="{C183D7F6-B498-43B3-948B-1728B52AA6E4}">
-                    <adec:decorative xmlns:adec="http://schemas.microsoft.com/office/drawing/2017/decorative" val="1"/>
-                  </a:ext>
-                </a:extLst>
-              </p:cNvPr>
-              <p:cNvCxnSpPr/>
-              <p:nvPr>
-                <p:extLst>
-                  <p:ext uri="{386F3935-93C4-4BCD-93E2-E3B085C9AB24}">
-                    <p16:designElem xmlns:p16="http://schemas.microsoft.com/office/powerpoint/2015/main" val="1"/>
-                  </p:ext>
-                </p:extLst>
-              </p:nvPr>
-            </p:nvCxnSpPr>
-            <p:spPr>
-              <a:xfrm rot="-4080000" flipH="1">
-                <a:off x="5912438" y="2470678"/>
-                <a:ext cx="3394" cy="182880"/>
-              </a:xfrm>
-              <a:prstGeom prst="line">
-                <a:avLst/>
-              </a:prstGeom>
-              <a:ln>
-                <a:solidFill>
-                  <a:srgbClr val="FFFFFF">
-                    <a:alpha val="30196"/>
-                  </a:srgbClr>
-                </a:solidFill>
-              </a:ln>
-            </p:spPr>
-            <p:style>
-              <a:lnRef idx="1">
-                <a:schemeClr val="accent1"/>
-              </a:lnRef>
-              <a:fillRef idx="0">
-                <a:schemeClr val="accent1"/>
-              </a:fillRef>
-              <a:effectRef idx="0">
-                <a:schemeClr val="accent1"/>
-              </a:effectRef>
-              <a:fontRef idx="minor">
-                <a:schemeClr val="tx1"/>
-              </a:fontRef>
-            </p:style>
-          </p:cxnSp>
-          <p:cxnSp>
-            <p:nvCxnSpPr>
-              <p:cNvPr id="153" name="Straight Connector 152">
-                <a:extLst>
-                  <a:ext uri="{FF2B5EF4-FFF2-40B4-BE49-F238E27FC236}">
-                    <a16:creationId xmlns:a16="http://schemas.microsoft.com/office/drawing/2014/main" id="{A04E1E01-2468-4ED6-932B-DFE74F180350}"/>
-                  </a:ext>
-                  <a:ext uri="{C183D7F6-B498-43B3-948B-1728B52AA6E4}">
-                    <adec:decorative xmlns:adec="http://schemas.microsoft.com/office/drawing/2017/decorative" val="1"/>
-                  </a:ext>
-                </a:extLst>
-              </p:cNvPr>
-              <p:cNvCxnSpPr/>
-              <p:nvPr>
-                <p:extLst>
-                  <p:ext uri="{386F3935-93C4-4BCD-93E2-E3B085C9AB24}">
-                    <p16:designElem xmlns:p16="http://schemas.microsoft.com/office/powerpoint/2015/main" val="1"/>
-                  </p:ext>
-                </p:extLst>
-              </p:nvPr>
-            </p:nvCxnSpPr>
-            <p:spPr>
-              <a:xfrm rot="-4200000" flipH="1">
-                <a:off x="5858875" y="2600922"/>
-                <a:ext cx="3394" cy="182880"/>
-              </a:xfrm>
-              <a:prstGeom prst="line">
-                <a:avLst/>
-              </a:prstGeom>
-              <a:ln>
-                <a:solidFill>
-                  <a:srgbClr val="FFFFFF">
-                    <a:alpha val="30196"/>
-                  </a:srgbClr>
-                </a:solidFill>
-              </a:ln>
-            </p:spPr>
-            <p:style>
-              <a:lnRef idx="1">
-                <a:schemeClr val="accent1"/>
-              </a:lnRef>
-              <a:fillRef idx="0">
-                <a:schemeClr val="accent1"/>
-              </a:fillRef>
-              <a:effectRef idx="0">
-                <a:schemeClr val="accent1"/>
-              </a:effectRef>
-              <a:fontRef idx="minor">
-                <a:schemeClr val="tx1"/>
-              </a:fontRef>
-            </p:style>
-          </p:cxnSp>
-          <p:cxnSp>
-            <p:nvCxnSpPr>
-              <p:cNvPr id="154" name="Straight Connector 153">
-                <a:extLst>
-                  <a:ext uri="{FF2B5EF4-FFF2-40B4-BE49-F238E27FC236}">
-                    <a16:creationId xmlns:a16="http://schemas.microsoft.com/office/drawing/2014/main" id="{45DE2855-EBF3-46B5-B5AB-37F33DAECD55}"/>
-                  </a:ext>
-                  <a:ext uri="{C183D7F6-B498-43B3-948B-1728B52AA6E4}">
-                    <adec:decorative xmlns:adec="http://schemas.microsoft.com/office/drawing/2017/decorative" val="1"/>
-                  </a:ext>
-                </a:extLst>
-              </p:cNvPr>
-              <p:cNvCxnSpPr/>
-              <p:nvPr>
-                <p:extLst>
-                  <p:ext uri="{386F3935-93C4-4BCD-93E2-E3B085C9AB24}">
-                    <p16:designElem xmlns:p16="http://schemas.microsoft.com/office/powerpoint/2015/main" val="1"/>
-                  </p:ext>
-                </p:extLst>
-              </p:nvPr>
-            </p:nvCxnSpPr>
-            <p:spPr>
-              <a:xfrm rot="-4320000" flipH="1">
-                <a:off x="5808182" y="2734040"/>
-                <a:ext cx="3394" cy="182880"/>
-              </a:xfrm>
-              <a:prstGeom prst="line">
-                <a:avLst/>
-              </a:prstGeom>
-              <a:ln>
-                <a:solidFill>
-                  <a:srgbClr val="FFFFFF">
-                    <a:alpha val="30196"/>
-                  </a:srgbClr>
-                </a:solidFill>
-              </a:ln>
-            </p:spPr>
-            <p:style>
-              <a:lnRef idx="1">
-                <a:schemeClr val="accent1"/>
-              </a:lnRef>
-              <a:fillRef idx="0">
-                <a:schemeClr val="accent1"/>
-              </a:fillRef>
-              <a:effectRef idx="0">
-                <a:schemeClr val="accent1"/>
-              </a:effectRef>
-              <a:fontRef idx="minor">
-                <a:schemeClr val="tx1"/>
-              </a:fontRef>
-            </p:style>
-          </p:cxnSp>
-          <p:cxnSp>
-            <p:nvCxnSpPr>
-              <p:cNvPr id="155" name="Straight Connector 154">
-                <a:extLst>
-                  <a:ext uri="{FF2B5EF4-FFF2-40B4-BE49-F238E27FC236}">
-                    <a16:creationId xmlns:a16="http://schemas.microsoft.com/office/drawing/2014/main" id="{AAB63BD3-DF06-4DC8-8B81-A4A093073181}"/>
-                  </a:ext>
-                  <a:ext uri="{C183D7F6-B498-43B3-948B-1728B52AA6E4}">
-                    <adec:decorative xmlns:adec="http://schemas.microsoft.com/office/drawing/2017/decorative" val="1"/>
-                  </a:ext>
-                </a:extLst>
-              </p:cNvPr>
-              <p:cNvCxnSpPr/>
-              <p:nvPr>
-                <p:extLst>
-                  <p:ext uri="{386F3935-93C4-4BCD-93E2-E3B085C9AB24}">
-                    <p16:designElem xmlns:p16="http://schemas.microsoft.com/office/powerpoint/2015/main" val="1"/>
-                  </p:ext>
-                </p:extLst>
-              </p:nvPr>
-            </p:nvCxnSpPr>
-            <p:spPr>
-              <a:xfrm rot="-4500000" flipH="1">
-                <a:off x="5773263" y="2866860"/>
-                <a:ext cx="3394" cy="182880"/>
-              </a:xfrm>
-              <a:prstGeom prst="line">
-                <a:avLst/>
-              </a:prstGeom>
-              <a:ln>
-                <a:solidFill>
-                  <a:srgbClr val="FFFFFF">
-                    <a:alpha val="30196"/>
-                  </a:srgbClr>
-                </a:solidFill>
-              </a:ln>
-            </p:spPr>
-            <p:style>
-              <a:lnRef idx="1">
-                <a:schemeClr val="accent1"/>
-              </a:lnRef>
-              <a:fillRef idx="0">
-                <a:schemeClr val="accent1"/>
-              </a:fillRef>
-              <a:effectRef idx="0">
-                <a:schemeClr val="accent1"/>
-              </a:effectRef>
-              <a:fontRef idx="minor">
-                <a:schemeClr val="tx1"/>
-              </a:fontRef>
-            </p:style>
-          </p:cxnSp>
-          <p:cxnSp>
-            <p:nvCxnSpPr>
-              <p:cNvPr id="156" name="Straight Connector 155">
-                <a:extLst>
-                  <a:ext uri="{FF2B5EF4-FFF2-40B4-BE49-F238E27FC236}">
-                    <a16:creationId xmlns:a16="http://schemas.microsoft.com/office/drawing/2014/main" id="{CA8FEC80-A785-4B83-A1F5-AA524E2D4FE9}"/>
-                  </a:ext>
-                  <a:ext uri="{C183D7F6-B498-43B3-948B-1728B52AA6E4}">
-                    <adec:decorative xmlns:adec="http://schemas.microsoft.com/office/drawing/2017/decorative" val="1"/>
-                  </a:ext>
-                </a:extLst>
-              </p:cNvPr>
-              <p:cNvCxnSpPr/>
-              <p:nvPr>
-                <p:extLst>
-                  <p:ext uri="{386F3935-93C4-4BCD-93E2-E3B085C9AB24}">
-                    <p16:designElem xmlns:p16="http://schemas.microsoft.com/office/powerpoint/2015/main" val="1"/>
-                  </p:ext>
-                </p:extLst>
-              </p:nvPr>
-            </p:nvCxnSpPr>
-            <p:spPr>
-              <a:xfrm rot="-4620000" flipH="1">
-                <a:off x="5735963" y="3002061"/>
-                <a:ext cx="3394" cy="182880"/>
-              </a:xfrm>
-              <a:prstGeom prst="line">
-                <a:avLst/>
-              </a:prstGeom>
-              <a:ln>
-                <a:solidFill>
-                  <a:srgbClr val="FFFFFF">
-                    <a:alpha val="30196"/>
-                  </a:srgbClr>
-                </a:solidFill>
-              </a:ln>
-            </p:spPr>
-            <p:style>
-              <a:lnRef idx="1">
-                <a:schemeClr val="accent1"/>
-              </a:lnRef>
-              <a:fillRef idx="0">
-                <a:schemeClr val="accent1"/>
-              </a:fillRef>
-              <a:effectRef idx="0">
-                <a:schemeClr val="accent1"/>
-              </a:effectRef>
-              <a:fontRef idx="minor">
-                <a:schemeClr val="tx1"/>
-              </a:fontRef>
-            </p:style>
-          </p:cxnSp>
-          <p:cxnSp>
-            <p:nvCxnSpPr>
-              <p:cNvPr id="157" name="Straight Connector 156">
-                <a:extLst>
-                  <a:ext uri="{FF2B5EF4-FFF2-40B4-BE49-F238E27FC236}">
-                    <a16:creationId xmlns:a16="http://schemas.microsoft.com/office/drawing/2014/main" id="{E56E08B4-7863-4447-ADE5-AAC63C8EBD74}"/>
-                  </a:ext>
-                  <a:ext uri="{C183D7F6-B498-43B3-948B-1728B52AA6E4}">
-                    <adec:decorative xmlns:adec="http://schemas.microsoft.com/office/drawing/2017/decorative" val="1"/>
-                  </a:ext>
-                </a:extLst>
-              </p:cNvPr>
-              <p:cNvCxnSpPr/>
-              <p:nvPr>
-                <p:extLst>
-                  <p:ext uri="{386F3935-93C4-4BCD-93E2-E3B085C9AB24}">
-                    <p16:designElem xmlns:p16="http://schemas.microsoft.com/office/powerpoint/2015/main" val="1"/>
-                  </p:ext>
-                </p:extLst>
-              </p:nvPr>
-            </p:nvCxnSpPr>
-            <p:spPr>
-              <a:xfrm rot="-4740000" flipH="1">
-                <a:off x="5700105" y="3138910"/>
-                <a:ext cx="3394" cy="182880"/>
-              </a:xfrm>
-              <a:prstGeom prst="line">
-                <a:avLst/>
-              </a:prstGeom>
-              <a:ln>
-                <a:solidFill>
-                  <a:srgbClr val="FFFFFF">
-                    <a:alpha val="30196"/>
-                  </a:srgbClr>
-                </a:solidFill>
-              </a:ln>
-            </p:spPr>
-            <p:style>
-              <a:lnRef idx="1">
-                <a:schemeClr val="accent1"/>
-              </a:lnRef>
-              <a:fillRef idx="0">
-                <a:schemeClr val="accent1"/>
-              </a:fillRef>
-              <a:effectRef idx="0">
-                <a:schemeClr val="accent1"/>
-              </a:effectRef>
-              <a:fontRef idx="minor">
-                <a:schemeClr val="tx1"/>
-              </a:fontRef>
-            </p:style>
-          </p:cxnSp>
-          <p:cxnSp>
-            <p:nvCxnSpPr>
-              <p:cNvPr id="158" name="Straight Connector 157">
-                <a:extLst>
-                  <a:ext uri="{FF2B5EF4-FFF2-40B4-BE49-F238E27FC236}">
-                    <a16:creationId xmlns:a16="http://schemas.microsoft.com/office/drawing/2014/main" id="{A48D39C2-1010-4240-9865-B0EBD7E040B7}"/>
-                  </a:ext>
-                  <a:ext uri="{C183D7F6-B498-43B3-948B-1728B52AA6E4}">
-                    <adec:decorative xmlns:adec="http://schemas.microsoft.com/office/drawing/2017/decorative" val="1"/>
-                  </a:ext>
-                </a:extLst>
-              </p:cNvPr>
-              <p:cNvCxnSpPr/>
-              <p:nvPr>
-                <p:extLst>
-                  <p:ext uri="{386F3935-93C4-4BCD-93E2-E3B085C9AB24}">
-                    <p16:designElem xmlns:p16="http://schemas.microsoft.com/office/powerpoint/2015/main" val="1"/>
-                  </p:ext>
-                </p:extLst>
-              </p:nvPr>
-            </p:nvCxnSpPr>
-            <p:spPr>
-              <a:xfrm rot="-4860000" flipH="1">
-                <a:off x="5665939" y="3275489"/>
-                <a:ext cx="3394" cy="182880"/>
-              </a:xfrm>
-              <a:prstGeom prst="line">
-                <a:avLst/>
-              </a:prstGeom>
-              <a:ln>
-                <a:solidFill>
-                  <a:srgbClr val="FFFFFF">
-                    <a:alpha val="30196"/>
-                  </a:srgbClr>
-                </a:solidFill>
-              </a:ln>
-            </p:spPr>
-            <p:style>
-              <a:lnRef idx="1">
-                <a:schemeClr val="accent1"/>
-              </a:lnRef>
-              <a:fillRef idx="0">
-                <a:schemeClr val="accent1"/>
-              </a:fillRef>
-              <a:effectRef idx="0">
-                <a:schemeClr val="accent1"/>
-              </a:effectRef>
-              <a:fontRef idx="minor">
-                <a:schemeClr val="tx1"/>
-              </a:fontRef>
-            </p:style>
-          </p:cxnSp>
-          <p:cxnSp>
-            <p:nvCxnSpPr>
-              <p:cNvPr id="159" name="Straight Connector 158">
-                <a:extLst>
-                  <a:ext uri="{FF2B5EF4-FFF2-40B4-BE49-F238E27FC236}">
-                    <a16:creationId xmlns:a16="http://schemas.microsoft.com/office/drawing/2014/main" id="{53FD354F-81D1-4345-8C40-E58D5C27B6D3}"/>
-                  </a:ext>
-                  <a:ext uri="{C183D7F6-B498-43B3-948B-1728B52AA6E4}">
-                    <adec:decorative xmlns:adec="http://schemas.microsoft.com/office/drawing/2017/decorative" val="1"/>
-                  </a:ext>
-                </a:extLst>
-              </p:cNvPr>
-              <p:cNvCxnSpPr/>
-              <p:nvPr>
-                <p:extLst>
-                  <p:ext uri="{386F3935-93C4-4BCD-93E2-E3B085C9AB24}">
-                    <p16:designElem xmlns:p16="http://schemas.microsoft.com/office/powerpoint/2015/main" val="1"/>
-                  </p:ext>
-                </p:extLst>
-              </p:nvPr>
-            </p:nvCxnSpPr>
-            <p:spPr>
-              <a:xfrm rot="-5040000" flipH="1">
-                <a:off x="5644476" y="3414251"/>
-                <a:ext cx="3394" cy="182880"/>
-              </a:xfrm>
-              <a:prstGeom prst="line">
-                <a:avLst/>
-              </a:prstGeom>
-              <a:ln>
-                <a:solidFill>
-                  <a:srgbClr val="FFFFFF">
-                    <a:alpha val="30196"/>
-                  </a:srgbClr>
-                </a:solidFill>
-              </a:ln>
-            </p:spPr>
-            <p:style>
-              <a:lnRef idx="1">
-                <a:schemeClr val="accent1"/>
-              </a:lnRef>
-              <a:fillRef idx="0">
-                <a:schemeClr val="accent1"/>
-              </a:fillRef>
-              <a:effectRef idx="0">
-                <a:schemeClr val="accent1"/>
-              </a:effectRef>
-              <a:fontRef idx="minor">
-                <a:schemeClr val="tx1"/>
-              </a:fontRef>
-            </p:style>
-          </p:cxnSp>
-          <p:cxnSp>
-            <p:nvCxnSpPr>
-              <p:cNvPr id="160" name="Straight Connector 159">
-                <a:extLst>
-                  <a:ext uri="{FF2B5EF4-FFF2-40B4-BE49-F238E27FC236}">
-                    <a16:creationId xmlns:a16="http://schemas.microsoft.com/office/drawing/2014/main" id="{5A343148-BCCD-4618-8B23-EB728235BA3F}"/>
-                  </a:ext>
-                  <a:ext uri="{C183D7F6-B498-43B3-948B-1728B52AA6E4}">
-                    <adec:decorative xmlns:adec="http://schemas.microsoft.com/office/drawing/2017/decorative" val="1"/>
-                  </a:ext>
-                </a:extLst>
-              </p:cNvPr>
-              <p:cNvCxnSpPr/>
-              <p:nvPr>
-                <p:extLst>
-                  <p:ext uri="{386F3935-93C4-4BCD-93E2-E3B085C9AB24}">
-                    <p16:designElem xmlns:p16="http://schemas.microsoft.com/office/powerpoint/2015/main" val="1"/>
-                  </p:ext>
-                </p:extLst>
-              </p:nvPr>
-            </p:nvCxnSpPr>
-            <p:spPr>
-              <a:xfrm rot="-5160000" flipH="1">
-                <a:off x="5626530" y="3554628"/>
-                <a:ext cx="3394" cy="182880"/>
-              </a:xfrm>
-              <a:prstGeom prst="line">
-                <a:avLst/>
-              </a:prstGeom>
-              <a:ln>
-                <a:solidFill>
-                  <a:srgbClr val="FFFFFF">
-                    <a:alpha val="30196"/>
-                  </a:srgbClr>
-                </a:solidFill>
-              </a:ln>
-            </p:spPr>
-            <p:style>
-              <a:lnRef idx="1">
-                <a:schemeClr val="accent1"/>
-              </a:lnRef>
-              <a:fillRef idx="0">
-                <a:schemeClr val="accent1"/>
-              </a:fillRef>
-              <a:effectRef idx="0">
-                <a:schemeClr val="accent1"/>
-              </a:effectRef>
-              <a:fontRef idx="minor">
-                <a:schemeClr val="tx1"/>
-              </a:fontRef>
-            </p:style>
-          </p:cxnSp>
-          <p:cxnSp>
-            <p:nvCxnSpPr>
-              <p:cNvPr id="161" name="Straight Connector 160">
-                <a:extLst>
-                  <a:ext uri="{FF2B5EF4-FFF2-40B4-BE49-F238E27FC236}">
-                    <a16:creationId xmlns:a16="http://schemas.microsoft.com/office/drawing/2014/main" id="{732D1A89-C062-4D40-A079-980BAD59123D}"/>
-                  </a:ext>
-                  <a:ext uri="{C183D7F6-B498-43B3-948B-1728B52AA6E4}">
-                    <adec:decorative xmlns:adec="http://schemas.microsoft.com/office/drawing/2017/decorative" val="1"/>
-                  </a:ext>
-                </a:extLst>
-              </p:cNvPr>
-              <p:cNvCxnSpPr/>
-              <p:nvPr>
-                <p:extLst>
-                  <p:ext uri="{386F3935-93C4-4BCD-93E2-E3B085C9AB24}">
-                    <p16:designElem xmlns:p16="http://schemas.microsoft.com/office/powerpoint/2015/main" val="1"/>
-                  </p:ext>
-                </p:extLst>
-              </p:nvPr>
-            </p:nvCxnSpPr>
-            <p:spPr>
-              <a:xfrm rot="-5280000" flipH="1">
-                <a:off x="5616429" y="3691831"/>
-                <a:ext cx="3394" cy="182880"/>
-              </a:xfrm>
-              <a:prstGeom prst="line">
-                <a:avLst/>
-              </a:prstGeom>
-              <a:ln>
-                <a:solidFill>
-                  <a:srgbClr val="FFFFFF">
-                    <a:alpha val="30196"/>
-                  </a:srgbClr>
-                </a:solidFill>
-              </a:ln>
-            </p:spPr>
-            <p:style>
-              <a:lnRef idx="1">
-                <a:schemeClr val="accent1"/>
-              </a:lnRef>
-              <a:fillRef idx="0">
-                <a:schemeClr val="accent1"/>
-              </a:fillRef>
-              <a:effectRef idx="0">
-                <a:schemeClr val="accent1"/>
-              </a:effectRef>
-              <a:fontRef idx="minor">
-                <a:schemeClr val="tx1"/>
-              </a:fontRef>
-            </p:style>
-          </p:cxnSp>
-          <p:cxnSp>
-            <p:nvCxnSpPr>
-              <p:cNvPr id="162" name="Straight Connector 161">
-                <a:extLst>
-                  <a:ext uri="{FF2B5EF4-FFF2-40B4-BE49-F238E27FC236}">
-                    <a16:creationId xmlns:a16="http://schemas.microsoft.com/office/drawing/2014/main" id="{1319DEE0-4918-468D-8B5A-A4759D5C843F}"/>
-                  </a:ext>
-                  <a:ext uri="{C183D7F6-B498-43B3-948B-1728B52AA6E4}">
-                    <adec:decorative xmlns:adec="http://schemas.microsoft.com/office/drawing/2017/decorative" val="1"/>
-                  </a:ext>
-                </a:extLst>
-              </p:cNvPr>
-              <p:cNvCxnSpPr/>
-              <p:nvPr>
-                <p:extLst>
-                  <p:ext uri="{386F3935-93C4-4BCD-93E2-E3B085C9AB24}">
-                    <p16:designElem xmlns:p16="http://schemas.microsoft.com/office/powerpoint/2015/main" val="1"/>
-                  </p:ext>
-                </p:extLst>
-              </p:nvPr>
-            </p:nvCxnSpPr>
-            <p:spPr>
-              <a:xfrm rot="-5400000" flipH="1">
-                <a:off x="5611319" y="3835374"/>
-                <a:ext cx="3394" cy="182880"/>
-              </a:xfrm>
-              <a:prstGeom prst="line">
-                <a:avLst/>
-              </a:prstGeom>
-              <a:ln>
-                <a:solidFill>
-                  <a:srgbClr val="FFFFFF">
-                    <a:alpha val="30196"/>
-                  </a:srgbClr>
-                </a:solidFill>
-              </a:ln>
-            </p:spPr>
-            <p:style>
-              <a:lnRef idx="1">
-                <a:schemeClr val="accent1"/>
-              </a:lnRef>
-              <a:fillRef idx="0">
-                <a:schemeClr val="accent1"/>
-              </a:fillRef>
-              <a:effectRef idx="0">
-                <a:schemeClr val="accent1"/>
-              </a:effectRef>
-              <a:fontRef idx="minor">
-                <a:schemeClr val="tx1"/>
-              </a:fontRef>
-            </p:style>
-          </p:cxnSp>
-          <p:cxnSp>
-            <p:nvCxnSpPr>
-              <p:cNvPr id="163" name="Straight Connector 162">
-                <a:extLst>
-                  <a:ext uri="{FF2B5EF4-FFF2-40B4-BE49-F238E27FC236}">
-                    <a16:creationId xmlns:a16="http://schemas.microsoft.com/office/drawing/2014/main" id="{5BB6155A-8B2E-4CCD-B852-26927EF9EA30}"/>
-                  </a:ext>
-                  <a:ext uri="{C183D7F6-B498-43B3-948B-1728B52AA6E4}">
-                    <adec:decorative xmlns:adec="http://schemas.microsoft.com/office/drawing/2017/decorative" val="1"/>
-                  </a:ext>
-                </a:extLst>
-              </p:cNvPr>
-              <p:cNvCxnSpPr/>
-              <p:nvPr>
-                <p:extLst>
-                  <p:ext uri="{386F3935-93C4-4BCD-93E2-E3B085C9AB24}">
-                    <p16:designElem xmlns:p16="http://schemas.microsoft.com/office/powerpoint/2015/main" val="1"/>
-                  </p:ext>
-                </p:extLst>
-              </p:nvPr>
-            </p:nvCxnSpPr>
-            <p:spPr>
-              <a:xfrm rot="-5580000" flipH="1">
-                <a:off x="5608540" y="3975726"/>
-                <a:ext cx="3394" cy="182880"/>
-              </a:xfrm>
-              <a:prstGeom prst="line">
-                <a:avLst/>
-              </a:prstGeom>
-              <a:ln>
-                <a:solidFill>
-                  <a:srgbClr val="FFFFFF">
-                    <a:alpha val="30196"/>
-                  </a:srgbClr>
-                </a:solidFill>
-              </a:ln>
-            </p:spPr>
-            <p:style>
-              <a:lnRef idx="1">
-                <a:schemeClr val="accent1"/>
-              </a:lnRef>
-              <a:fillRef idx="0">
-                <a:schemeClr val="accent1"/>
-              </a:fillRef>
-              <a:effectRef idx="0">
-                <a:schemeClr val="accent1"/>
-              </a:effectRef>
-              <a:fontRef idx="minor">
-                <a:schemeClr val="tx1"/>
-              </a:fontRef>
-            </p:style>
-          </p:cxnSp>
-          <p:cxnSp>
-            <p:nvCxnSpPr>
-              <p:cNvPr id="164" name="Straight Connector 163">
-                <a:extLst>
-                  <a:ext uri="{FF2B5EF4-FFF2-40B4-BE49-F238E27FC236}">
-                    <a16:creationId xmlns:a16="http://schemas.microsoft.com/office/drawing/2014/main" id="{357B2E68-E4C5-47DD-988F-125E7C2F80A5}"/>
-                  </a:ext>
-                  <a:ext uri="{C183D7F6-B498-43B3-948B-1728B52AA6E4}">
-                    <adec:decorative xmlns:adec="http://schemas.microsoft.com/office/drawing/2017/decorative" val="1"/>
-                  </a:ext>
-                </a:extLst>
-              </p:cNvPr>
-              <p:cNvCxnSpPr/>
-              <p:nvPr>
-                <p:extLst>
-                  <p:ext uri="{386F3935-93C4-4BCD-93E2-E3B085C9AB24}">
-                    <p16:designElem xmlns:p16="http://schemas.microsoft.com/office/powerpoint/2015/main" val="1"/>
-                  </p:ext>
-                </p:extLst>
-              </p:nvPr>
-            </p:nvCxnSpPr>
-            <p:spPr>
-              <a:xfrm rot="-5700000" flipH="1">
-                <a:off x="5605761" y="4116078"/>
-                <a:ext cx="3394" cy="182880"/>
-              </a:xfrm>
-              <a:prstGeom prst="line">
-                <a:avLst/>
-              </a:prstGeom>
-              <a:ln>
-                <a:solidFill>
-                  <a:srgbClr val="FFFFFF">
-                    <a:alpha val="30196"/>
-                  </a:srgbClr>
-                </a:solidFill>
-              </a:ln>
-            </p:spPr>
-            <p:style>
-              <a:lnRef idx="1">
-                <a:schemeClr val="accent1"/>
-              </a:lnRef>
-              <a:fillRef idx="0">
-                <a:schemeClr val="accent1"/>
-              </a:fillRef>
-              <a:effectRef idx="0">
-                <a:schemeClr val="accent1"/>
-              </a:effectRef>
-              <a:fontRef idx="minor">
-                <a:schemeClr val="tx1"/>
-              </a:fontRef>
-            </p:style>
-          </p:cxnSp>
-          <p:cxnSp>
-            <p:nvCxnSpPr>
-              <p:cNvPr id="165" name="Straight Connector 164">
-                <a:extLst>
-                  <a:ext uri="{FF2B5EF4-FFF2-40B4-BE49-F238E27FC236}">
-                    <a16:creationId xmlns:a16="http://schemas.microsoft.com/office/drawing/2014/main" id="{A549DE4B-B602-48AF-AC61-05F694A3475B}"/>
-                  </a:ext>
-                  <a:ext uri="{C183D7F6-B498-43B3-948B-1728B52AA6E4}">
-                    <adec:decorative xmlns:adec="http://schemas.microsoft.com/office/drawing/2017/decorative" val="1"/>
-                  </a:ext>
-                </a:extLst>
-              </p:cNvPr>
-              <p:cNvCxnSpPr/>
-              <p:nvPr>
-                <p:extLst>
-                  <p:ext uri="{386F3935-93C4-4BCD-93E2-E3B085C9AB24}">
-                    <p16:designElem xmlns:p16="http://schemas.microsoft.com/office/powerpoint/2015/main" val="1"/>
-                  </p:ext>
-                </p:extLst>
-              </p:nvPr>
-            </p:nvCxnSpPr>
-            <p:spPr>
-              <a:xfrm rot="-5820000" flipH="1">
-                <a:off x="5624195" y="4254218"/>
-                <a:ext cx="3394" cy="182880"/>
-              </a:xfrm>
-              <a:prstGeom prst="line">
-                <a:avLst/>
-              </a:prstGeom>
-              <a:ln>
-                <a:solidFill>
-                  <a:srgbClr val="FFFFFF">
-                    <a:alpha val="30196"/>
-                  </a:srgbClr>
-                </a:solidFill>
-              </a:ln>
-            </p:spPr>
-            <p:style>
-              <a:lnRef idx="1">
-                <a:schemeClr val="accent1"/>
-              </a:lnRef>
-              <a:fillRef idx="0">
-                <a:schemeClr val="accent1"/>
-              </a:fillRef>
-              <a:effectRef idx="0">
-                <a:schemeClr val="accent1"/>
-              </a:effectRef>
-              <a:fontRef idx="minor">
-                <a:schemeClr val="tx1"/>
-              </a:fontRef>
-            </p:style>
-          </p:cxnSp>
-          <p:cxnSp>
-            <p:nvCxnSpPr>
-              <p:cNvPr id="166" name="Straight Connector 165">
-                <a:extLst>
-                  <a:ext uri="{FF2B5EF4-FFF2-40B4-BE49-F238E27FC236}">
-                    <a16:creationId xmlns:a16="http://schemas.microsoft.com/office/drawing/2014/main" id="{5E8CA150-1FC4-4A4D-9DB2-1AA3A3466998}"/>
-                  </a:ext>
-                  <a:ext uri="{C183D7F6-B498-43B3-948B-1728B52AA6E4}">
-                    <adec:decorative xmlns:adec="http://schemas.microsoft.com/office/drawing/2017/decorative" val="1"/>
-                  </a:ext>
-                </a:extLst>
-              </p:cNvPr>
-              <p:cNvCxnSpPr/>
-              <p:nvPr>
-                <p:extLst>
-                  <p:ext uri="{386F3935-93C4-4BCD-93E2-E3B085C9AB24}">
-                    <p16:designElem xmlns:p16="http://schemas.microsoft.com/office/powerpoint/2015/main" val="1"/>
-                  </p:ext>
-                </p:extLst>
-              </p:nvPr>
-            </p:nvCxnSpPr>
-            <p:spPr>
-              <a:xfrm rot="-5940000" flipH="1">
-                <a:off x="5642629" y="4392358"/>
-                <a:ext cx="3394" cy="182880"/>
-              </a:xfrm>
-              <a:prstGeom prst="line">
-                <a:avLst/>
-              </a:prstGeom>
-              <a:ln>
-                <a:solidFill>
-                  <a:srgbClr val="FFFFFF">
-                    <a:alpha val="30196"/>
-                  </a:srgbClr>
-                </a:solidFill>
-              </a:ln>
-            </p:spPr>
-            <p:style>
-              <a:lnRef idx="1">
-                <a:schemeClr val="accent1"/>
-              </a:lnRef>
-              <a:fillRef idx="0">
-                <a:schemeClr val="accent1"/>
-              </a:fillRef>
-              <a:effectRef idx="0">
-                <a:schemeClr val="accent1"/>
-              </a:effectRef>
-              <a:fontRef idx="minor">
-                <a:schemeClr val="tx1"/>
-              </a:fontRef>
-            </p:style>
-          </p:cxnSp>
-          <p:cxnSp>
-            <p:nvCxnSpPr>
-              <p:cNvPr id="167" name="Straight Connector 166">
-                <a:extLst>
-                  <a:ext uri="{FF2B5EF4-FFF2-40B4-BE49-F238E27FC236}">
-                    <a16:creationId xmlns:a16="http://schemas.microsoft.com/office/drawing/2014/main" id="{1BEB0DDA-B2FE-427A-A2F0-9FC06C33D09E}"/>
-                  </a:ext>
-                  <a:ext uri="{C183D7F6-B498-43B3-948B-1728B52AA6E4}">
-                    <adec:decorative xmlns:adec="http://schemas.microsoft.com/office/drawing/2017/decorative" val="1"/>
-                  </a:ext>
-                </a:extLst>
-              </p:cNvPr>
-              <p:cNvCxnSpPr/>
-              <p:nvPr>
-                <p:extLst>
-                  <p:ext uri="{386F3935-93C4-4BCD-93E2-E3B085C9AB24}">
-                    <p16:designElem xmlns:p16="http://schemas.microsoft.com/office/powerpoint/2015/main" val="1"/>
-                  </p:ext>
-                </p:extLst>
-              </p:nvPr>
-            </p:nvCxnSpPr>
-            <p:spPr>
-              <a:xfrm rot="-6120000" flipH="1">
-                <a:off x="5654818" y="4536385"/>
-                <a:ext cx="3394" cy="182880"/>
-              </a:xfrm>
-              <a:prstGeom prst="line">
-                <a:avLst/>
-              </a:prstGeom>
-              <a:ln>
-                <a:solidFill>
-                  <a:srgbClr val="FFFFFF">
-                    <a:alpha val="30196"/>
-                  </a:srgbClr>
-                </a:solidFill>
-              </a:ln>
-            </p:spPr>
-            <p:style>
-              <a:lnRef idx="1">
-                <a:schemeClr val="accent1"/>
-              </a:lnRef>
-              <a:fillRef idx="0">
-                <a:schemeClr val="accent1"/>
-              </a:fillRef>
-              <a:effectRef idx="0">
-                <a:schemeClr val="accent1"/>
-              </a:effectRef>
-              <a:fontRef idx="minor">
-                <a:schemeClr val="tx1"/>
-              </a:fontRef>
-            </p:style>
-          </p:cxnSp>
-          <p:cxnSp>
-            <p:nvCxnSpPr>
-              <p:cNvPr id="168" name="Straight Connector 167">
-                <a:extLst>
-                  <a:ext uri="{FF2B5EF4-FFF2-40B4-BE49-F238E27FC236}">
-                    <a16:creationId xmlns:a16="http://schemas.microsoft.com/office/drawing/2014/main" id="{63C95539-7E29-4577-ACE2-8642D81C72E7}"/>
-                  </a:ext>
-                  <a:ext uri="{C183D7F6-B498-43B3-948B-1728B52AA6E4}">
-                    <adec:decorative xmlns:adec="http://schemas.microsoft.com/office/drawing/2017/decorative" val="1"/>
-                  </a:ext>
-                </a:extLst>
-              </p:cNvPr>
-              <p:cNvCxnSpPr/>
-              <p:nvPr>
-                <p:extLst>
-                  <p:ext uri="{386F3935-93C4-4BCD-93E2-E3B085C9AB24}">
-                    <p16:designElem xmlns:p16="http://schemas.microsoft.com/office/powerpoint/2015/main" val="1"/>
-                  </p:ext>
-                </p:extLst>
-              </p:nvPr>
-            </p:nvCxnSpPr>
-            <p:spPr>
-              <a:xfrm rot="-6240000" flipH="1">
-                <a:off x="5684446" y="4671367"/>
-                <a:ext cx="3394" cy="182880"/>
-              </a:xfrm>
-              <a:prstGeom prst="line">
-                <a:avLst/>
-              </a:prstGeom>
-              <a:ln>
-                <a:solidFill>
-                  <a:srgbClr val="FFFFFF">
-                    <a:alpha val="30196"/>
-                  </a:srgbClr>
-                </a:solidFill>
-              </a:ln>
-            </p:spPr>
-            <p:style>
-              <a:lnRef idx="1">
-                <a:schemeClr val="accent1"/>
-              </a:lnRef>
-              <a:fillRef idx="0">
-                <a:schemeClr val="accent1"/>
-              </a:fillRef>
-              <a:effectRef idx="0">
-                <a:schemeClr val="accent1"/>
-              </a:effectRef>
-              <a:fontRef idx="minor">
-                <a:schemeClr val="tx1"/>
-              </a:fontRef>
-            </p:style>
-          </p:cxnSp>
-          <p:cxnSp>
-            <p:nvCxnSpPr>
-              <p:cNvPr id="169" name="Straight Connector 168">
-                <a:extLst>
-                  <a:ext uri="{FF2B5EF4-FFF2-40B4-BE49-F238E27FC236}">
-                    <a16:creationId xmlns:a16="http://schemas.microsoft.com/office/drawing/2014/main" id="{2FF50C42-6433-4328-B5CA-389C28317ED8}"/>
-                  </a:ext>
-                  <a:ext uri="{C183D7F6-B498-43B3-948B-1728B52AA6E4}">
-                    <adec:decorative xmlns:adec="http://schemas.microsoft.com/office/drawing/2017/decorative" val="1"/>
-                  </a:ext>
-                </a:extLst>
-              </p:cNvPr>
-              <p:cNvCxnSpPr/>
-              <p:nvPr>
-                <p:extLst>
-                  <p:ext uri="{386F3935-93C4-4BCD-93E2-E3B085C9AB24}">
-                    <p16:designElem xmlns:p16="http://schemas.microsoft.com/office/powerpoint/2015/main" val="1"/>
-                  </p:ext>
-                </p:extLst>
-              </p:nvPr>
-            </p:nvCxnSpPr>
-            <p:spPr>
-              <a:xfrm rot="-6360000" flipH="1">
-                <a:off x="5714074" y="4808730"/>
-                <a:ext cx="3394" cy="182880"/>
-              </a:xfrm>
-              <a:prstGeom prst="line">
-                <a:avLst/>
-              </a:prstGeom>
-              <a:ln>
-                <a:solidFill>
-                  <a:srgbClr val="FFFFFF">
-                    <a:alpha val="30196"/>
-                  </a:srgbClr>
-                </a:solidFill>
-              </a:ln>
-            </p:spPr>
-            <p:style>
-              <a:lnRef idx="1">
-                <a:schemeClr val="accent1"/>
-              </a:lnRef>
-              <a:fillRef idx="0">
-                <a:schemeClr val="accent1"/>
-              </a:fillRef>
-              <a:effectRef idx="0">
-                <a:schemeClr val="accent1"/>
-              </a:effectRef>
-              <a:fontRef idx="minor">
-                <a:schemeClr val="tx1"/>
-              </a:fontRef>
-            </p:style>
-          </p:cxnSp>
-          <p:cxnSp>
-            <p:nvCxnSpPr>
-              <p:cNvPr id="170" name="Straight Connector 169">
-                <a:extLst>
-                  <a:ext uri="{FF2B5EF4-FFF2-40B4-BE49-F238E27FC236}">
-                    <a16:creationId xmlns:a16="http://schemas.microsoft.com/office/drawing/2014/main" id="{74A59028-6EE1-4E53-959E-067DF80BE7B1}"/>
-                  </a:ext>
-                  <a:ext uri="{C183D7F6-B498-43B3-948B-1728B52AA6E4}">
-                    <adec:decorative xmlns:adec="http://schemas.microsoft.com/office/drawing/2017/decorative" val="1"/>
-                  </a:ext>
-                </a:extLst>
-              </p:cNvPr>
-              <p:cNvCxnSpPr/>
-              <p:nvPr>
-                <p:extLst>
-                  <p:ext uri="{386F3935-93C4-4BCD-93E2-E3B085C9AB24}">
-                    <p16:designElem xmlns:p16="http://schemas.microsoft.com/office/powerpoint/2015/main" val="1"/>
-                  </p:ext>
-                </p:extLst>
-              </p:nvPr>
-            </p:nvCxnSpPr>
-            <p:spPr>
-              <a:xfrm rot="-6480000" flipH="1">
-                <a:off x="5748464" y="4948474"/>
-                <a:ext cx="3394" cy="182880"/>
-              </a:xfrm>
-              <a:prstGeom prst="line">
-                <a:avLst/>
-              </a:prstGeom>
-              <a:ln>
-                <a:solidFill>
-                  <a:srgbClr val="FFFFFF">
-                    <a:alpha val="30196"/>
-                  </a:srgbClr>
-                </a:solidFill>
-              </a:ln>
-            </p:spPr>
-            <p:style>
-              <a:lnRef idx="1">
-                <a:schemeClr val="accent1"/>
-              </a:lnRef>
-              <a:fillRef idx="0">
-                <a:schemeClr val="accent1"/>
-              </a:fillRef>
-              <a:effectRef idx="0">
-                <a:schemeClr val="accent1"/>
-              </a:effectRef>
-              <a:fontRef idx="minor">
-                <a:schemeClr val="tx1"/>
-              </a:fontRef>
-            </p:style>
-          </p:cxnSp>
-          <p:cxnSp>
-            <p:nvCxnSpPr>
-              <p:cNvPr id="171" name="Straight Connector 170">
-                <a:extLst>
-                  <a:ext uri="{FF2B5EF4-FFF2-40B4-BE49-F238E27FC236}">
-                    <a16:creationId xmlns:a16="http://schemas.microsoft.com/office/drawing/2014/main" id="{2C184BDD-4E87-4C6F-9249-7CA2121B7213}"/>
-                  </a:ext>
-                  <a:ext uri="{C183D7F6-B498-43B3-948B-1728B52AA6E4}">
-                    <adec:decorative xmlns:adec="http://schemas.microsoft.com/office/drawing/2017/decorative" val="1"/>
-                  </a:ext>
-                </a:extLst>
-              </p:cNvPr>
-              <p:cNvCxnSpPr/>
-              <p:nvPr>
-                <p:extLst>
-                  <p:ext uri="{386F3935-93C4-4BCD-93E2-E3B085C9AB24}">
-                    <p16:designElem xmlns:p16="http://schemas.microsoft.com/office/powerpoint/2015/main" val="1"/>
-                  </p:ext>
-                </p:extLst>
-              </p:nvPr>
-            </p:nvCxnSpPr>
-            <p:spPr>
-              <a:xfrm rot="-6660000" flipH="1">
-                <a:off x="5792091" y="5077607"/>
-                <a:ext cx="3394" cy="182880"/>
-              </a:xfrm>
-              <a:prstGeom prst="line">
-                <a:avLst/>
-              </a:prstGeom>
-              <a:ln>
-                <a:solidFill>
-                  <a:srgbClr val="FFFFFF">
-                    <a:alpha val="30196"/>
-                  </a:srgbClr>
-                </a:solidFill>
-              </a:ln>
-            </p:spPr>
-            <p:style>
-              <a:lnRef idx="1">
-                <a:schemeClr val="accent1"/>
-              </a:lnRef>
-              <a:fillRef idx="0">
-                <a:schemeClr val="accent1"/>
-              </a:fillRef>
-              <a:effectRef idx="0">
-                <a:schemeClr val="accent1"/>
-              </a:effectRef>
-              <a:fontRef idx="minor">
-                <a:schemeClr val="tx1"/>
-              </a:fontRef>
-            </p:style>
-          </p:cxnSp>
-          <p:cxnSp>
-            <p:nvCxnSpPr>
-              <p:cNvPr id="172" name="Straight Connector 171">
-                <a:extLst>
-                  <a:ext uri="{FF2B5EF4-FFF2-40B4-BE49-F238E27FC236}">
-                    <a16:creationId xmlns:a16="http://schemas.microsoft.com/office/drawing/2014/main" id="{60AE336B-F4C5-44E8-8E78-382683C04A17}"/>
-                  </a:ext>
-                  <a:ext uri="{C183D7F6-B498-43B3-948B-1728B52AA6E4}">
-                    <adec:decorative xmlns:adec="http://schemas.microsoft.com/office/drawing/2017/decorative" val="1"/>
-                  </a:ext>
-                </a:extLst>
-              </p:cNvPr>
-              <p:cNvCxnSpPr/>
-              <p:nvPr>
-                <p:extLst>
-                  <p:ext uri="{386F3935-93C4-4BCD-93E2-E3B085C9AB24}">
-                    <p16:designElem xmlns:p16="http://schemas.microsoft.com/office/powerpoint/2015/main" val="1"/>
-                  </p:ext>
-                </p:extLst>
-              </p:nvPr>
-            </p:nvCxnSpPr>
-            <p:spPr>
-              <a:xfrm rot="-6780000" flipH="1">
-                <a:off x="5847441" y="5211223"/>
-                <a:ext cx="3394" cy="182880"/>
-              </a:xfrm>
-              <a:prstGeom prst="line">
-                <a:avLst/>
-              </a:prstGeom>
-              <a:ln>
-                <a:solidFill>
-                  <a:srgbClr val="FFFFFF">
-                    <a:alpha val="30196"/>
-                  </a:srgbClr>
-                </a:solidFill>
-              </a:ln>
-            </p:spPr>
-            <p:style>
-              <a:lnRef idx="1">
-                <a:schemeClr val="accent1"/>
-              </a:lnRef>
-              <a:fillRef idx="0">
-                <a:schemeClr val="accent1"/>
-              </a:fillRef>
-              <a:effectRef idx="0">
-                <a:schemeClr val="accent1"/>
-              </a:effectRef>
-              <a:fontRef idx="minor">
-                <a:schemeClr val="tx1"/>
-              </a:fontRef>
-            </p:style>
-          </p:cxnSp>
-          <p:cxnSp>
-            <p:nvCxnSpPr>
-              <p:cNvPr id="173" name="Straight Connector 172">
-                <a:extLst>
-                  <a:ext uri="{FF2B5EF4-FFF2-40B4-BE49-F238E27FC236}">
-                    <a16:creationId xmlns:a16="http://schemas.microsoft.com/office/drawing/2014/main" id="{CDF74550-C0B6-4EDE-81AF-ABAE0AD23B2B}"/>
-                  </a:ext>
-                  <a:ext uri="{C183D7F6-B498-43B3-948B-1728B52AA6E4}">
-                    <adec:decorative xmlns:adec="http://schemas.microsoft.com/office/drawing/2017/decorative" val="1"/>
-                  </a:ext>
-                </a:extLst>
-              </p:cNvPr>
-              <p:cNvCxnSpPr/>
-              <p:nvPr>
-                <p:extLst>
-                  <p:ext uri="{386F3935-93C4-4BCD-93E2-E3B085C9AB24}">
-                    <p16:designElem xmlns:p16="http://schemas.microsoft.com/office/powerpoint/2015/main" val="1"/>
-                  </p:ext>
-                </p:extLst>
-              </p:nvPr>
-            </p:nvCxnSpPr>
-            <p:spPr>
-              <a:xfrm rot="-6900000" flipH="1">
-                <a:off x="5900410" y="5342458"/>
-                <a:ext cx="3394" cy="182880"/>
-              </a:xfrm>
-              <a:prstGeom prst="line">
-                <a:avLst/>
-              </a:prstGeom>
-              <a:ln>
-                <a:solidFill>
-                  <a:srgbClr val="FFFFFF">
-                    <a:alpha val="30196"/>
-                  </a:srgbClr>
-                </a:solidFill>
-              </a:ln>
-            </p:spPr>
-            <p:style>
-              <a:lnRef idx="1">
-                <a:schemeClr val="accent1"/>
-              </a:lnRef>
-              <a:fillRef idx="0">
-                <a:schemeClr val="accent1"/>
-              </a:fillRef>
-              <a:effectRef idx="0">
-                <a:schemeClr val="accent1"/>
-              </a:effectRef>
-              <a:fontRef idx="minor">
-                <a:schemeClr val="tx1"/>
-              </a:fontRef>
-            </p:style>
-          </p:cxnSp>
-          <p:cxnSp>
-            <p:nvCxnSpPr>
-              <p:cNvPr id="174" name="Straight Connector 173">
-                <a:extLst>
-                  <a:ext uri="{FF2B5EF4-FFF2-40B4-BE49-F238E27FC236}">
-                    <a16:creationId xmlns:a16="http://schemas.microsoft.com/office/drawing/2014/main" id="{CC7509FB-3C93-4ADB-B6BF-06A5025F2A29}"/>
-                  </a:ext>
-                  <a:ext uri="{C183D7F6-B498-43B3-948B-1728B52AA6E4}">
-                    <adec:decorative xmlns:adec="http://schemas.microsoft.com/office/drawing/2017/decorative" val="1"/>
-                  </a:ext>
-                </a:extLst>
-              </p:cNvPr>
-              <p:cNvCxnSpPr/>
-              <p:nvPr>
-                <p:extLst>
-                  <p:ext uri="{386F3935-93C4-4BCD-93E2-E3B085C9AB24}">
-                    <p16:designElem xmlns:p16="http://schemas.microsoft.com/office/powerpoint/2015/main" val="1"/>
-                  </p:ext>
-                </p:extLst>
-              </p:nvPr>
-            </p:nvCxnSpPr>
-            <p:spPr>
-              <a:xfrm rot="-7020000" flipH="1">
-                <a:off x="5955760" y="5473693"/>
-                <a:ext cx="3394" cy="182880"/>
-              </a:xfrm>
-              <a:prstGeom prst="line">
-                <a:avLst/>
-              </a:prstGeom>
-              <a:ln>
-                <a:solidFill>
-                  <a:srgbClr val="FFFFFF">
-                    <a:alpha val="30196"/>
-                  </a:srgbClr>
-                </a:solidFill>
-              </a:ln>
-            </p:spPr>
-            <p:style>
-              <a:lnRef idx="1">
-                <a:schemeClr val="accent1"/>
-              </a:lnRef>
-              <a:fillRef idx="0">
-                <a:schemeClr val="accent1"/>
-              </a:fillRef>
-              <a:effectRef idx="0">
-                <a:schemeClr val="accent1"/>
-              </a:effectRef>
-              <a:fontRef idx="minor">
-                <a:schemeClr val="tx1"/>
-              </a:fontRef>
-            </p:style>
-          </p:cxnSp>
-        </p:grpSp>
-      </p:grpSp>
-      <p:pic>
-        <p:nvPicPr>
-          <p:cNvPr id="5" name="Kép 4" descr="A képen szöveg, képernyőkép, szoftver látható&#10;&#10;Előfordulhat, hogy a mesterséges intelligencia által létrehozott tartalom helytelen.">
-            <a:extLst>
-              <a:ext uri="{FF2B5EF4-FFF2-40B4-BE49-F238E27FC236}">
-                <a16:creationId xmlns:a16="http://schemas.microsoft.com/office/drawing/2014/main" id="{9C49E223-FDDD-B772-B2D9-C2019AB374EA}"/>
-              </a:ext>
-            </a:extLst>
-          </p:cNvPr>
-          <p:cNvPicPr>
-            <a:picLocks noChangeAspect="1"/>
-          </p:cNvPicPr>
-          <p:nvPr/>
-        </p:nvPicPr>
-        <p:blipFill>
-          <a:blip r:embed="rId4"/>
-          <a:srcRect r="9449" b="-4"/>
-          <a:stretch/>
-        </p:blipFill>
+        </p:nvCxnSpPr>
         <p:spPr>
           <a:xfrm>
-            <a:off x="8055588" y="-3863"/>
-            <a:ext cx="4132754" cy="3445946"/>
+            <a:off x="4642096" y="0"/>
+            <a:ext cx="680" cy="6858000"/>
           </a:xfrm>
-          <a:custGeom>
+          <a:prstGeom prst="line">
             <a:avLst/>
-            <a:gdLst/>
-            <a:ahLst/>
-            <a:cxnLst/>
-            <a:rect l="l" t="t" r="r" b="b"/>
-            <a:pathLst>
-              <a:path w="4638368" h="3867534">
-                <a:moveTo>
-                  <a:pt x="303228" y="0"/>
-                </a:moveTo>
-                <a:lnTo>
-                  <a:pt x="4638368" y="0"/>
-                </a:lnTo>
-                <a:lnTo>
-                  <a:pt x="4638368" y="2952747"/>
-                </a:lnTo>
-                <a:lnTo>
-                  <a:pt x="4585825" y="3013864"/>
-                </a:lnTo>
-                <a:cubicBezTo>
-                  <a:pt x="4103088" y="3538671"/>
-                  <a:pt x="3410622" y="3867534"/>
-                  <a:pt x="2641346" y="3867534"/>
-                </a:cubicBezTo>
-                <a:cubicBezTo>
-                  <a:pt x="1182571" y="3867534"/>
-                  <a:pt x="0" y="2684963"/>
-                  <a:pt x="0" y="1226188"/>
-                </a:cubicBezTo>
-                <a:cubicBezTo>
-                  <a:pt x="0" y="815907"/>
-                  <a:pt x="93544" y="427475"/>
-                  <a:pt x="260466" y="81056"/>
-                </a:cubicBezTo>
-                <a:close/>
+          </a:prstGeom>
+          <a:noFill/>
+          <a:ln w="50800" cap="sq" cmpd="dbl">
+            <a:gradFill flip="none" rotWithShape="1">
+              <a:gsLst>
+                <a:gs pos="0">
+                  <a:srgbClr val="FFFFFF"/>
+                </a:gs>
+                <a:gs pos="100000">
+                  <a:schemeClr val="tx1">
+                    <a:alpha val="0"/>
+                  </a:schemeClr>
+                </a:gs>
+              </a:gsLst>
+              <a:path path="circle">
+                <a:fillToRect l="50000" t="50000" r="50000" b="50000"/>
               </a:path>
-            </a:pathLst>
-          </a:custGeom>
+              <a:tileRect/>
+            </a:gradFill>
+            <a:miter lim="800000"/>
+          </a:ln>
+          <a:effectLst>
+            <a:outerShdw blurRad="254000" algn="tl" rotWithShape="0">
+              <a:srgbClr val="000000">
+                <a:alpha val="43000"/>
+              </a:srgbClr>
+            </a:outerShdw>
+          </a:effectLst>
         </p:spPr>
-      </p:pic>
+        <p:style>
+          <a:lnRef idx="2">
+            <a:schemeClr val="accent1">
+              <a:shade val="50000"/>
+            </a:schemeClr>
+          </a:lnRef>
+          <a:fillRef idx="1">
+            <a:schemeClr val="accent1"/>
+          </a:fillRef>
+          <a:effectRef idx="0">
+            <a:schemeClr val="accent1"/>
+          </a:effectRef>
+          <a:fontRef idx="minor">
+            <a:schemeClr val="lt1"/>
+          </a:fontRef>
+        </p:style>
+      </p:cxnSp>
     </p:spTree>
     <p:extLst>
       <p:ext uri="{BB962C8B-B14F-4D97-AF65-F5344CB8AC3E}">
@@ -35050,6 +26511,244 @@
   <p:clrMapOvr>
     <a:masterClrMapping/>
   </p:clrMapOvr>
+  <p:timing>
+    <p:tnLst>
+      <p:par>
+        <p:cTn id="1" dur="indefinite" restart="never" nodeType="tmRoot">
+          <p:childTnLst>
+            <p:seq concurrent="1" nextAc="seek">
+              <p:cTn id="2" dur="indefinite" nodeType="mainSeq">
+                <p:childTnLst>
+                  <p:par>
+                    <p:cTn id="3" fill="hold">
+                      <p:stCondLst>
+                        <p:cond delay="indefinite"/>
+                        <p:cond evt="onBegin" delay="0">
+                          <p:tn val="2"/>
+                        </p:cond>
+                      </p:stCondLst>
+                      <p:childTnLst>
+                        <p:par>
+                          <p:cTn id="4" fill="hold">
+                            <p:stCondLst>
+                              <p:cond delay="0"/>
+                            </p:stCondLst>
+                            <p:childTnLst>
+                              <p:par>
+                                <p:cTn id="5" presetID="1" presetClass="entr" presetSubtype="0" fill="hold" grpId="0" nodeType="withEffect">
+                                  <p:stCondLst>
+                                    <p:cond delay="0"/>
+                                  </p:stCondLst>
+                                  <p:childTnLst>
+                                    <p:set>
+                                      <p:cBhvr>
+                                        <p:cTn id="6" dur="1" fill="hold">
+                                          <p:stCondLst>
+                                            <p:cond delay="0"/>
+                                          </p:stCondLst>
+                                        </p:cTn>
+                                        <p:tgtEl>
+                                          <p:spTgt spid="2"/>
+                                        </p:tgtEl>
+                                        <p:attrNameLst>
+                                          <p:attrName>style.visibility</p:attrName>
+                                        </p:attrNameLst>
+                                      </p:cBhvr>
+                                      <p:to>
+                                        <p:strVal val="visible"/>
+                                      </p:to>
+                                    </p:set>
+                                  </p:childTnLst>
+                                </p:cTn>
+                              </p:par>
+                            </p:childTnLst>
+                          </p:cTn>
+                        </p:par>
+                        <p:par>
+                          <p:cTn id="7" fill="hold">
+                            <p:stCondLst>
+                              <p:cond delay="0"/>
+                            </p:stCondLst>
+                            <p:childTnLst>
+                              <p:par>
+                                <p:cTn id="8" presetID="22" presetClass="entr" presetSubtype="1" fill="hold" grpId="0" nodeType="afterEffect">
+                                  <p:stCondLst>
+                                    <p:cond delay="500"/>
+                                  </p:stCondLst>
+                                  <p:childTnLst>
+                                    <p:set>
+                                      <p:cBhvr>
+                                        <p:cTn id="9" dur="1" fill="hold">
+                                          <p:stCondLst>
+                                            <p:cond delay="0"/>
+                                          </p:stCondLst>
+                                        </p:cTn>
+                                        <p:tgtEl>
+                                          <p:spTgt spid="3">
+                                            <p:txEl>
+                                              <p:pRg st="0" end="0"/>
+                                            </p:txEl>
+                                          </p:spTgt>
+                                        </p:tgtEl>
+                                        <p:attrNameLst>
+                                          <p:attrName>style.visibility</p:attrName>
+                                        </p:attrNameLst>
+                                      </p:cBhvr>
+                                      <p:to>
+                                        <p:strVal val="visible"/>
+                                      </p:to>
+                                    </p:set>
+                                    <p:animEffect transition="in" filter="wipe(up)">
+                                      <p:cBhvr>
+                                        <p:cTn id="10" dur="500"/>
+                                        <p:tgtEl>
+                                          <p:spTgt spid="3">
+                                            <p:txEl>
+                                              <p:pRg st="0" end="0"/>
+                                            </p:txEl>
+                                          </p:spTgt>
+                                        </p:tgtEl>
+                                      </p:cBhvr>
+                                    </p:animEffect>
+                                  </p:childTnLst>
+                                </p:cTn>
+                              </p:par>
+                            </p:childTnLst>
+                          </p:cTn>
+                        </p:par>
+                        <p:par>
+                          <p:cTn id="11" fill="hold">
+                            <p:stCondLst>
+                              <p:cond delay="1000"/>
+                            </p:stCondLst>
+                            <p:childTnLst>
+                              <p:par>
+                                <p:cTn id="12" presetID="22" presetClass="entr" presetSubtype="1" fill="hold" grpId="0" nodeType="afterEffect">
+                                  <p:stCondLst>
+                                    <p:cond delay="500"/>
+                                  </p:stCondLst>
+                                  <p:childTnLst>
+                                    <p:set>
+                                      <p:cBhvr>
+                                        <p:cTn id="13" dur="1" fill="hold">
+                                          <p:stCondLst>
+                                            <p:cond delay="0"/>
+                                          </p:stCondLst>
+                                        </p:cTn>
+                                        <p:tgtEl>
+                                          <p:spTgt spid="3">
+                                            <p:txEl>
+                                              <p:pRg st="1" end="1"/>
+                                            </p:txEl>
+                                          </p:spTgt>
+                                        </p:tgtEl>
+                                        <p:attrNameLst>
+                                          <p:attrName>style.visibility</p:attrName>
+                                        </p:attrNameLst>
+                                      </p:cBhvr>
+                                      <p:to>
+                                        <p:strVal val="visible"/>
+                                      </p:to>
+                                    </p:set>
+                                    <p:animEffect transition="in" filter="wipe(up)">
+                                      <p:cBhvr>
+                                        <p:cTn id="14" dur="500"/>
+                                        <p:tgtEl>
+                                          <p:spTgt spid="3">
+                                            <p:txEl>
+                                              <p:pRg st="1" end="1"/>
+                                            </p:txEl>
+                                          </p:spTgt>
+                                        </p:tgtEl>
+                                      </p:cBhvr>
+                                    </p:animEffect>
+                                  </p:childTnLst>
+                                </p:cTn>
+                              </p:par>
+                            </p:childTnLst>
+                          </p:cTn>
+                        </p:par>
+                        <p:par>
+                          <p:cTn id="15" fill="hold">
+                            <p:stCondLst>
+                              <p:cond delay="2000"/>
+                            </p:stCondLst>
+                            <p:childTnLst>
+                              <p:par>
+                                <p:cTn id="16" presetID="22" presetClass="entr" presetSubtype="1" fill="hold" grpId="0" nodeType="afterEffect">
+                                  <p:stCondLst>
+                                    <p:cond delay="500"/>
+                                  </p:stCondLst>
+                                  <p:childTnLst>
+                                    <p:set>
+                                      <p:cBhvr>
+                                        <p:cTn id="17" dur="1" fill="hold">
+                                          <p:stCondLst>
+                                            <p:cond delay="0"/>
+                                          </p:stCondLst>
+                                        </p:cTn>
+                                        <p:tgtEl>
+                                          <p:spTgt spid="3">
+                                            <p:txEl>
+                                              <p:pRg st="2" end="2"/>
+                                            </p:txEl>
+                                          </p:spTgt>
+                                        </p:tgtEl>
+                                        <p:attrNameLst>
+                                          <p:attrName>style.visibility</p:attrName>
+                                        </p:attrNameLst>
+                                      </p:cBhvr>
+                                      <p:to>
+                                        <p:strVal val="visible"/>
+                                      </p:to>
+                                    </p:set>
+                                    <p:animEffect transition="in" filter="wipe(up)">
+                                      <p:cBhvr>
+                                        <p:cTn id="18" dur="500"/>
+                                        <p:tgtEl>
+                                          <p:spTgt spid="3">
+                                            <p:txEl>
+                                              <p:pRg st="2" end="2"/>
+                                            </p:txEl>
+                                          </p:spTgt>
+                                        </p:tgtEl>
+                                      </p:cBhvr>
+                                    </p:animEffect>
+                                  </p:childTnLst>
+                                </p:cTn>
+                              </p:par>
+                            </p:childTnLst>
+                          </p:cTn>
+                        </p:par>
+                      </p:childTnLst>
+                    </p:cTn>
+                  </p:par>
+                </p:childTnLst>
+              </p:cTn>
+              <p:prevCondLst>
+                <p:cond evt="onPrev" delay="0">
+                  <p:tgtEl>
+                    <p:sldTgt/>
+                  </p:tgtEl>
+                </p:cond>
+              </p:prevCondLst>
+              <p:nextCondLst>
+                <p:cond evt="onNext" delay="0">
+                  <p:tgtEl>
+                    <p:sldTgt/>
+                  </p:tgtEl>
+                </p:cond>
+              </p:nextCondLst>
+            </p:seq>
+          </p:childTnLst>
+        </p:cTn>
+      </p:par>
+    </p:tnLst>
+    <p:bldLst>
+      <p:bldP spid="2" grpId="0"/>
+      <p:bldP spid="3" grpId="0" build="p"/>
+    </p:bldLst>
+  </p:timing>
 </p:sld>
 </file>
 
@@ -35462,63 +27161,7 @@
             </a:r>
             <a:r>
               <a:rPr lang="en-US" dirty="0"/>
-              <a:t>. A </a:t>
-            </a:r>
-            <a:r>
-              <a:rPr lang="en-US" dirty="0" err="1"/>
-              <a:t>kód</a:t>
-            </a:r>
-            <a:r>
-              <a:rPr lang="en-US" dirty="0"/>
-              <a:t> a </a:t>
-            </a:r>
-            <a:r>
-              <a:rPr lang="en-US" dirty="0" err="1"/>
-              <a:t>helytakarékosságra</a:t>
-            </a:r>
-            <a:r>
-              <a:rPr lang="en-US" dirty="0"/>
-              <a:t> </a:t>
-            </a:r>
-            <a:r>
-              <a:rPr lang="en-US" dirty="0" err="1"/>
-              <a:t>törekedve</a:t>
-            </a:r>
-            <a:r>
-              <a:rPr lang="en-US" dirty="0"/>
-              <a:t> </a:t>
-            </a:r>
-            <a:r>
-              <a:rPr lang="en-US" dirty="0" err="1"/>
-              <a:t>készült</a:t>
-            </a:r>
-            <a:r>
-              <a:rPr lang="en-US" dirty="0"/>
-              <a:t>, de </a:t>
-            </a:r>
-            <a:r>
-              <a:rPr lang="en-US" dirty="0" err="1"/>
-              <a:t>így</a:t>
-            </a:r>
-            <a:r>
-              <a:rPr lang="en-US" dirty="0"/>
-              <a:t> is 530 </a:t>
-            </a:r>
-            <a:r>
-              <a:rPr lang="en-US" dirty="0" err="1"/>
-              <a:t>sor</a:t>
-            </a:r>
-            <a:r>
-              <a:rPr lang="en-US" dirty="0"/>
-              <a:t>, </a:t>
-            </a:r>
-            <a:r>
-              <a:rPr lang="en-US" dirty="0" err="1"/>
-              <a:t>önmagában</a:t>
-            </a:r>
-            <a:r>
-              <a:rPr lang="en-US" dirty="0"/>
-              <a:t>.</a:t>
+              <a:t>. </a:t>
             </a:r>
             <a:endParaRPr lang="hu-HU" dirty="0"/>
           </a:p>
